--- a/산출물/교재/PPTX/통합반_온라인/통합반_03일차.pptx
+++ b/산출물/교재/PPTX/통합반_온라인/통합반_03일차.pptx
@@ -3365,7 +3365,7 @@
           <a:lstStyle/>
           <a:p>
             <a:r>
-              <a:t>이번 회차의 약어와 핵심 용어를 모았습니다. 위의 넷은 조치 절차와 판단 규칙 쪽의 말이고, 가운데 둘은 결정표를 읽는 말이며, 아래 셋은 성과 평가 쪽의 말입니다. 뜻은 본문에서 풀었으므로 여기서는 정식 명칭과 HYD에서의 실제 예만 확인합니다.</a:t>
+              <a:t>이번 회차의 약어와 핵심 용어를 모았습니다. 위의 넷은 조치 절차와 판단 규칙 쪽의 말이고, 가운데 둘은 결정표를 읽는 말이며, 아래 셋은 성과 평가 쪽의 말입니다. 정식 이름과 뜻을 한 줄씩 확인합니다.</a:t>
             </a:r>
           </a:p>
         </p:txBody>
@@ -7908,7 +7908,7 @@
       </p:sp>
       <p:pic>
         <p:nvPicPr>
-          <p:cNvPr id="6" name="삽화:조치연결_그래프.svg" descr="illust_6836380471217083447_1792037122.png"/>
+          <p:cNvPr id="6" name="삽화:조치연결_그래프.svg" descr="illust_9066030255792409619_1792037122.png"/>
           <p:cNvPicPr>
             <a:picLocks noChangeAspect="1"/>
           </p:cNvPicPr>
@@ -18401,7 +18401,7 @@
       </p:sp>
       <p:pic>
         <p:nvPicPr>
-          <p:cNvPr id="6" name="삽화:수직선_경계.svg" descr="illust_6004464564049881467_1792037122.png"/>
+          <p:cNvPr id="6" name="삽화:수직선_경계.svg" descr="illust_8981641927561827211_1792037122.png"/>
           <p:cNvPicPr>
             <a:picLocks noChangeAspect="1"/>
           </p:cNvPicPr>
@@ -31972,7 +31972,7 @@
       </p:sp>
       <p:pic>
         <p:nvPicPr>
-          <p:cNvPr id="6" name="삽화:결정표_그래프.svg" descr="illust_7592747966425152313_1792037122.png"/>
+          <p:cNvPr id="6" name="삽화:결정표_그래프.svg" descr="illust_5745781531615915392_1792037122.png"/>
           <p:cNvPicPr>
             <a:picLocks noChangeAspect="1"/>
           </p:cNvPicPr>
@@ -38683,7 +38683,7 @@
       </p:sp>
       <p:pic>
         <p:nvPicPr>
-          <p:cNvPr id="6" name="삽화:전략맵_그래프.svg" descr="illust_7480107072030901098_1792037122.png"/>
+          <p:cNvPr id="6" name="삽화:전략맵_그래프.svg" descr="illust_8887131298431774392_1792037122.png"/>
           <p:cNvPicPr>
             <a:picLocks noChangeAspect="1"/>
           </p:cNvPicPr>
@@ -39383,7 +39383,7 @@
       </p:sp>
       <p:pic>
         <p:nvPicPr>
-          <p:cNvPr id="6" name="삽화:선행후행_경로.svg" descr="illust_5540843741545633616_1792037122.png"/>
+          <p:cNvPr id="6" name="삽화:선행후행_경로.svg" descr="illust_1501983707092285_1792037122.png"/>
           <p:cNvPicPr>
             <a:picLocks noChangeAspect="1"/>
           </p:cNvPicPr>
@@ -40083,7 +40083,7 @@
       </p:sp>
       <p:pic>
         <p:nvPicPr>
-          <p:cNvPr id="6" name="삽화:조건부영향.svg" descr="illust_8158477947238275063_1792037122.png"/>
+          <p:cNvPr id="6" name="삽화:조건부영향.svg" descr="illust_4032644308738883276_1792037122.png"/>
           <p:cNvPicPr>
             <a:picLocks noChangeAspect="1"/>
           </p:cNvPicPr>
@@ -42112,7 +42112,7 @@
       </p:sp>
       <p:pic>
         <p:nvPicPr>
-          <p:cNvPr id="6" name="삽화:성과경로_6.svg" descr="illust_7060025254852210016_1792037122.png"/>
+          <p:cNvPr id="6" name="삽화:성과경로_6.svg" descr="illust_3044344754852362175_1792037122.png"/>
           <p:cNvPicPr>
             <a:picLocks noChangeAspect="1"/>
           </p:cNvPicPr>
@@ -47339,7 +47339,7 @@
       </p:sp>
       <p:pic>
         <p:nvPicPr>
-          <p:cNvPr id="6" name="삽화:가정분석_3.svg" descr="illust_3171110772865847038_1792037122.png"/>
+          <p:cNvPr id="6" name="삽화:가정분석_3.svg" descr="illust_4609037223443103948_1792037122.png"/>
           <p:cNvPicPr>
             <a:picLocks noChangeAspect="1"/>
           </p:cNvPicPr>
@@ -53318,7 +53318,7 @@
                 <a:ea typeface="맑은 고딕"/>
                 <a:cs typeface="맑은 고딕"/>
               </a:rPr>
-              <a:t>약어와 핵심 용어의 정식 명칭, 그리고 HYD에서 그 용어가 가리키는 실제 대상을 한곳에 모은다.</a:t>
+              <a:t>약어와 핵심 용어의 정식 명칭과 뜻을 한곳에 모은다.</a:t>
             </a:r>
           </a:p>
         </p:txBody>
@@ -53470,7 +53470,7 @@
         <p:spPr>
           <a:xfrm>
             <a:off x="3200400" y="1627631"/>
-            <a:ext cx="6248095" cy="347472"/>
+            <a:ext cx="8442655" cy="347472"/>
           </a:xfrm>
           <a:prstGeom prst="rect">
             <a:avLst/>
@@ -53495,53 +53495,14 @@
                 <a:ea typeface="맑은 고딕"/>
                 <a:cs typeface="맑은 고딕"/>
               </a:rPr>
-              <a:t>정식 명칭</a:t>
-            </a:r>
-          </a:p>
-        </p:txBody>
-      </p:sp>
-      <p:sp>
-        <p:nvSpPr>
-          <p:cNvPr id="9" name="TextBox 8"/>
-          <p:cNvSpPr txBox="1"/>
-          <p:nvPr/>
-        </p:nvSpPr>
-        <p:spPr>
-          <a:xfrm>
-            <a:off x="9448495" y="1627631"/>
-            <a:ext cx="2194560" cy="347472"/>
-          </a:xfrm>
-          <a:prstGeom prst="rect">
-            <a:avLst/>
-          </a:prstGeom>
-          <a:noFill/>
-        </p:spPr>
-        <p:txBody>
-          <a:bodyPr wrap="square" anchor="ctr"/>
-          <a:lstStyle/>
-          <a:p>
-            <a:pPr algn="l" eaLnBrk="0">
-              <a:lnSpc>
-                <a:spcPct val="110000"/>
-              </a:lnSpc>
-            </a:pPr>
-            <a:r>
-              <a:rPr sz="1300" b="1">
-                <a:solidFill>
-                  <a:srgbClr val="FFFFFF"/>
-                </a:solidFill>
-                <a:latin typeface="맑은 고딕"/>
-                <a:ea typeface="맑은 고딕"/>
-                <a:cs typeface="맑은 고딕"/>
-              </a:rPr>
-              <a:t>HYD에서</a:t>
-            </a:r>
-          </a:p>
-        </p:txBody>
-      </p:sp>
-      <p:sp>
-        <p:nvSpPr>
-          <p:cNvPr id="10" name="Rounded Rectangle 9"/>
+              <a:t>정식 명칭 · 풀이</a:t>
+            </a:r>
+          </a:p>
+        </p:txBody>
+      </p:sp>
+      <p:sp>
+        <p:nvSpPr>
+          <p:cNvPr id="9" name="Rounded Rectangle 8"/>
           <p:cNvSpPr/>
           <p:nvPr/>
         </p:nvSpPr>
@@ -53572,7 +53533,7 @@
       </p:sp>
       <p:sp>
         <p:nvSpPr>
-          <p:cNvPr id="11" name="TextBox 10"/>
+          <p:cNvPr id="10" name="TextBox 9"/>
           <p:cNvSpPr txBox="1"/>
           <p:nvPr/>
         </p:nvSpPr>
@@ -53611,14 +53572,14 @@
       </p:sp>
       <p:sp>
         <p:nvSpPr>
-          <p:cNvPr id="12" name="TextBox 11"/>
+          <p:cNvPr id="11" name="TextBox 10"/>
           <p:cNvSpPr txBox="1"/>
           <p:nvPr/>
         </p:nvSpPr>
         <p:spPr>
           <a:xfrm>
             <a:off x="3200400" y="2029967"/>
-            <a:ext cx="6156655" cy="480568"/>
+            <a:ext cx="8351215" cy="480568"/>
           </a:xfrm>
           <a:prstGeom prst="rect">
             <a:avLst/>
@@ -53646,50 +53607,29 @@
               <a:t>Standard Operating Procedure</a:t>
             </a:r>
           </a:p>
-        </p:txBody>
-      </p:sp>
-      <p:sp>
-        <p:nvSpPr>
-          <p:cNvPr id="13" name="TextBox 12"/>
-          <p:cNvSpPr txBox="1"/>
-          <p:nvPr/>
-        </p:nvSpPr>
-        <p:spPr>
-          <a:xfrm>
-            <a:off x="9448495" y="2029967"/>
-            <a:ext cx="2103120" cy="480568"/>
-          </a:xfrm>
-          <a:prstGeom prst="rect">
-            <a:avLst/>
-          </a:prstGeom>
-          <a:noFill/>
-        </p:spPr>
-        <p:txBody>
-          <a:bodyPr wrap="square" anchor="ctr"/>
-          <a:lstStyle/>
-          <a:p>
-            <a:pPr algn="l" eaLnBrk="0">
-              <a:lnSpc>
-                <a:spcPct val="110000"/>
-              </a:lnSpc>
-            </a:pPr>
-            <a:r>
-              <a:rPr sz="1200" b="1">
-                <a:solidFill>
-                  <a:srgbClr val="556175"/>
-                </a:solidFill>
-                <a:latin typeface="맑은 고딕"/>
-                <a:ea typeface="맑은 고딕"/>
-                <a:cs typeface="맑은 고딕"/>
-              </a:rPr>
-              <a:t>SOP-COOL-11 팬 최대 운전</a:t>
-            </a:r>
-          </a:p>
-        </p:txBody>
-      </p:sp>
-      <p:sp>
-        <p:nvSpPr>
-          <p:cNvPr id="14" name="Rounded Rectangle 13"/>
+          <a:p>
+            <a:pPr algn="l" eaLnBrk="0">
+              <a:lnSpc>
+                <a:spcPct val="110000"/>
+              </a:lnSpc>
+            </a:pPr>
+            <a:r>
+              <a:rPr sz="1250" b="0">
+                <a:solidFill>
+                  <a:srgbClr val="1F2A3A"/>
+                </a:solidFill>
+                <a:latin typeface="맑은 고딕"/>
+                <a:ea typeface="맑은 고딕"/>
+                <a:cs typeface="맑은 고딕"/>
+              </a:rPr>
+              <a:t>작업을 안전하고 같은 방식으로 하도록 정한 표준 작업 절차</a:t>
+            </a:r>
+          </a:p>
+        </p:txBody>
+      </p:sp>
+      <p:sp>
+        <p:nvSpPr>
+          <p:cNvPr id="12" name="Rounded Rectangle 11"/>
           <p:cNvSpPr/>
           <p:nvPr/>
         </p:nvSpPr>
@@ -53720,7 +53660,7 @@
       </p:sp>
       <p:sp>
         <p:nvSpPr>
-          <p:cNvPr id="15" name="TextBox 14"/>
+          <p:cNvPr id="13" name="TextBox 12"/>
           <p:cNvSpPr txBox="1"/>
           <p:nvPr/>
         </p:nvSpPr>
@@ -53759,14 +53699,14 @@
       </p:sp>
       <p:sp>
         <p:nvSpPr>
-          <p:cNvPr id="16" name="TextBox 15"/>
+          <p:cNvPr id="14" name="TextBox 13"/>
           <p:cNvSpPr txBox="1"/>
           <p:nvPr/>
         </p:nvSpPr>
         <p:spPr>
           <a:xfrm>
             <a:off x="3200400" y="2510536"/>
-            <a:ext cx="6156655" cy="480568"/>
+            <a:ext cx="8351215" cy="480568"/>
           </a:xfrm>
           <a:prstGeom prst="rect">
             <a:avLst/>
@@ -53794,50 +53734,29 @@
               <a:t>Lockout/Tagout</a:t>
             </a:r>
           </a:p>
-        </p:txBody>
-      </p:sp>
-      <p:sp>
-        <p:nvSpPr>
-          <p:cNvPr id="17" name="TextBox 16"/>
-          <p:cNvSpPr txBox="1"/>
-          <p:nvPr/>
-        </p:nvSpPr>
-        <p:spPr>
-          <a:xfrm>
-            <a:off x="9448495" y="2510536"/>
-            <a:ext cx="2103120" cy="480568"/>
-          </a:xfrm>
-          <a:prstGeom prst="rect">
-            <a:avLst/>
-          </a:prstGeom>
-          <a:noFill/>
-        </p:spPr>
-        <p:txBody>
-          <a:bodyPr wrap="square" anchor="ctr"/>
-          <a:lstStyle/>
-          <a:p>
-            <a:pPr algn="l" eaLnBrk="0">
-              <a:lnSpc>
-                <a:spcPct val="110000"/>
-              </a:lnSpc>
-            </a:pPr>
-            <a:r>
-              <a:rPr sz="1250" b="1">
-                <a:solidFill>
-                  <a:srgbClr val="556175"/>
-                </a:solidFill>
-                <a:latin typeface="맑은 고딕"/>
-                <a:ea typeface="맑은 고딕"/>
-                <a:cs typeface="맑은 고딕"/>
-              </a:rPr>
-              <a:t>SOP-COOL-14 1단계</a:t>
-            </a:r>
-          </a:p>
-        </p:txBody>
-      </p:sp>
-      <p:sp>
-        <p:nvSpPr>
-          <p:cNvPr id="18" name="Rounded Rectangle 17"/>
+          <a:p>
+            <a:pPr algn="l" eaLnBrk="0">
+              <a:lnSpc>
+                <a:spcPct val="110000"/>
+              </a:lnSpc>
+            </a:pPr>
+            <a:r>
+              <a:rPr sz="1250" b="0">
+                <a:solidFill>
+                  <a:srgbClr val="1F2A3A"/>
+                </a:solidFill>
+                <a:latin typeface="맑은 고딕"/>
+                <a:ea typeface="맑은 고딕"/>
+                <a:cs typeface="맑은 고딕"/>
+              </a:rPr>
+              <a:t>정비 전에 에너지원을 차단해 잠그고 표시하는 안전 절차</a:t>
+            </a:r>
+          </a:p>
+        </p:txBody>
+      </p:sp>
+      <p:sp>
+        <p:nvSpPr>
+          <p:cNvPr id="15" name="Rounded Rectangle 14"/>
           <p:cNvSpPr/>
           <p:nvPr/>
         </p:nvSpPr>
@@ -53868,7 +53787,7 @@
       </p:sp>
       <p:sp>
         <p:nvSpPr>
-          <p:cNvPr id="19" name="TextBox 18"/>
+          <p:cNvPr id="16" name="TextBox 15"/>
           <p:cNvSpPr txBox="1"/>
           <p:nvPr/>
         </p:nvSpPr>
@@ -53907,14 +53826,14 @@
       </p:sp>
       <p:sp>
         <p:nvSpPr>
-          <p:cNvPr id="20" name="TextBox 19"/>
+          <p:cNvPr id="17" name="TextBox 16"/>
           <p:cNvSpPr txBox="1"/>
           <p:nvPr/>
         </p:nvSpPr>
         <p:spPr>
           <a:xfrm>
             <a:off x="3200400" y="2991104"/>
-            <a:ext cx="6156655" cy="480568"/>
+            <a:ext cx="8351215" cy="480568"/>
           </a:xfrm>
           <a:prstGeom prst="rect">
             <a:avLst/>
@@ -53942,50 +53861,29 @@
               <a:t>Decision Model and Notation</a:t>
             </a:r>
           </a:p>
-        </p:txBody>
-      </p:sp>
-      <p:sp>
-        <p:nvSpPr>
-          <p:cNvPr id="21" name="TextBox 20"/>
-          <p:cNvSpPr txBox="1"/>
-          <p:nvPr/>
-        </p:nvSpPr>
-        <p:spPr>
-          <a:xfrm>
-            <a:off x="9448495" y="2991104"/>
-            <a:ext cx="2103120" cy="480568"/>
-          </a:xfrm>
-          <a:prstGeom prst="rect">
-            <a:avLst/>
-          </a:prstGeom>
-          <a:noFill/>
-        </p:spPr>
-        <p:txBody>
-          <a:bodyPr wrap="square" anchor="ctr"/>
-          <a:lstStyle/>
-          <a:p>
-            <a:pPr algn="l" eaLnBrk="0">
-              <a:lnSpc>
-                <a:spcPct val="110000"/>
-              </a:lnSpc>
-            </a:pPr>
-            <a:r>
-              <a:rPr sz="1250" b="1">
-                <a:solidFill>
-                  <a:srgbClr val="556175"/>
-                </a:solidFill>
-                <a:latin typeface="맑은 고딕"/>
-                <a:ea typeface="맑은 고딕"/>
-                <a:cs typeface="맑은 고딕"/>
-              </a:rPr>
-              <a:t>규정 적합성 결정표</a:t>
-            </a:r>
-          </a:p>
-        </p:txBody>
-      </p:sp>
-      <p:sp>
-        <p:nvSpPr>
-          <p:cNvPr id="22" name="Rounded Rectangle 21"/>
+          <a:p>
+            <a:pPr algn="l" eaLnBrk="0">
+              <a:lnSpc>
+                <a:spcPct val="110000"/>
+              </a:lnSpc>
+            </a:pPr>
+            <a:r>
+              <a:rPr sz="1250" b="0">
+                <a:solidFill>
+                  <a:srgbClr val="1F2A3A"/>
+                </a:solidFill>
+                <a:latin typeface="맑은 고딕"/>
+                <a:ea typeface="맑은 고딕"/>
+                <a:cs typeface="맑은 고딕"/>
+              </a:rPr>
+              <a:t>업무의 의사결정을 표와 모델로 정의하는 표준</a:t>
+            </a:r>
+          </a:p>
+        </p:txBody>
+      </p:sp>
+      <p:sp>
+        <p:nvSpPr>
+          <p:cNvPr id="18" name="Rounded Rectangle 17"/>
           <p:cNvSpPr/>
           <p:nvPr/>
         </p:nvSpPr>
@@ -54016,7 +53914,7 @@
       </p:sp>
       <p:sp>
         <p:nvSpPr>
-          <p:cNvPr id="23" name="TextBox 22"/>
+          <p:cNvPr id="19" name="TextBox 18"/>
           <p:cNvSpPr txBox="1"/>
           <p:nvPr/>
         </p:nvSpPr>
@@ -54055,14 +53953,14 @@
       </p:sp>
       <p:sp>
         <p:nvSpPr>
-          <p:cNvPr id="24" name="TextBox 23"/>
+          <p:cNvPr id="20" name="TextBox 19"/>
           <p:cNvSpPr txBox="1"/>
           <p:nvPr/>
         </p:nvSpPr>
         <p:spPr>
           <a:xfrm>
             <a:off x="3200400" y="3471672"/>
-            <a:ext cx="6156655" cy="480568"/>
+            <a:ext cx="8351215" cy="480568"/>
           </a:xfrm>
           <a:prstGeom prst="rect">
             <a:avLst/>
@@ -54090,50 +53988,29 @@
               <a:t>Object Management Group</a:t>
             </a:r>
           </a:p>
-        </p:txBody>
-      </p:sp>
-      <p:sp>
-        <p:nvSpPr>
-          <p:cNvPr id="25" name="TextBox 24"/>
-          <p:cNvSpPr txBox="1"/>
-          <p:nvPr/>
-        </p:nvSpPr>
-        <p:spPr>
-          <a:xfrm>
-            <a:off x="9448495" y="3471672"/>
-            <a:ext cx="2103120" cy="480568"/>
-          </a:xfrm>
-          <a:prstGeom prst="rect">
-            <a:avLst/>
-          </a:prstGeom>
-          <a:noFill/>
-        </p:spPr>
-        <p:txBody>
-          <a:bodyPr wrap="square" anchor="ctr"/>
-          <a:lstStyle/>
-          <a:p>
-            <a:pPr algn="l" eaLnBrk="0">
-              <a:lnSpc>
-                <a:spcPct val="110000"/>
-              </a:lnSpc>
-            </a:pPr>
-            <a:r>
-              <a:rPr sz="1250" b="1">
-                <a:solidFill>
-                  <a:srgbClr val="556175"/>
-                </a:solidFill>
-                <a:latin typeface="맑은 고딕"/>
-                <a:ea typeface="맑은 고딕"/>
-                <a:cs typeface="맑은 고딕"/>
-              </a:rPr>
-              <a:t>DMN을 정한 표준 단체</a:t>
-            </a:r>
-          </a:p>
-        </p:txBody>
-      </p:sp>
-      <p:sp>
-        <p:nvSpPr>
-          <p:cNvPr id="26" name="Rounded Rectangle 25"/>
+          <a:p>
+            <a:pPr algn="l" eaLnBrk="0">
+              <a:lnSpc>
+                <a:spcPct val="110000"/>
+              </a:lnSpc>
+            </a:pPr>
+            <a:r>
+              <a:rPr sz="1250" b="0">
+                <a:solidFill>
+                  <a:srgbClr val="1F2A3A"/>
+                </a:solidFill>
+                <a:latin typeface="맑은 고딕"/>
+                <a:ea typeface="맑은 고딕"/>
+                <a:cs typeface="맑은 고딕"/>
+              </a:rPr>
+              <a:t>DMN 같은 모델링 표준을 정하는 국제 표준 단체</a:t>
+            </a:r>
+          </a:p>
+        </p:txBody>
+      </p:sp>
+      <p:sp>
+        <p:nvSpPr>
+          <p:cNvPr id="21" name="Rounded Rectangle 20"/>
           <p:cNvSpPr/>
           <p:nvPr/>
         </p:nvSpPr>
@@ -54164,7 +54041,7 @@
       </p:sp>
       <p:sp>
         <p:nvSpPr>
-          <p:cNvPr id="27" name="TextBox 26"/>
+          <p:cNvPr id="22" name="TextBox 21"/>
           <p:cNvSpPr txBox="1"/>
           <p:nvPr/>
         </p:nvSpPr>
@@ -54203,14 +54080,14 @@
       </p:sp>
       <p:sp>
         <p:nvSpPr>
-          <p:cNvPr id="28" name="TextBox 27"/>
+          <p:cNvPr id="23" name="TextBox 22"/>
           <p:cNvSpPr txBox="1"/>
           <p:nvPr/>
         </p:nvSpPr>
         <p:spPr>
           <a:xfrm>
             <a:off x="3200400" y="3952239"/>
-            <a:ext cx="6156655" cy="480568"/>
+            <a:ext cx="8351215" cy="480568"/>
           </a:xfrm>
           <a:prstGeom prst="rect">
             <a:avLst/>
@@ -54238,50 +54115,29 @@
               <a:t>Decision Table</a:t>
             </a:r>
           </a:p>
-        </p:txBody>
-      </p:sp>
-      <p:sp>
-        <p:nvSpPr>
-          <p:cNvPr id="29" name="TextBox 28"/>
-          <p:cNvSpPr txBox="1"/>
-          <p:nvPr/>
-        </p:nvSpPr>
-        <p:spPr>
-          <a:xfrm>
-            <a:off x="9448495" y="3952239"/>
-            <a:ext cx="2103120" cy="480568"/>
-          </a:xfrm>
-          <a:prstGeom prst="rect">
-            <a:avLst/>
-          </a:prstGeom>
-          <a:noFill/>
-        </p:spPr>
-        <p:txBody>
-          <a:bodyPr wrap="square" anchor="ctr"/>
-          <a:lstStyle/>
-          <a:p>
-            <a:pPr algn="l" eaLnBrk="0">
-              <a:lnSpc>
-                <a:spcPct val="110000"/>
-              </a:lnSpc>
-            </a:pPr>
-            <a:r>
-              <a:rPr sz="1250" b="1">
-                <a:solidFill>
-                  <a:srgbClr val="556175"/>
-                </a:solidFill>
-                <a:latin typeface="맑은 고딕"/>
-                <a:ea typeface="맑은 고딕"/>
-                <a:cs typeface="맑은 고딕"/>
-              </a:rPr>
-              <a:t>dt:compliance</a:t>
-            </a:r>
-          </a:p>
-        </p:txBody>
-      </p:sp>
-      <p:sp>
-        <p:nvSpPr>
-          <p:cNvPr id="30" name="Rounded Rectangle 29"/>
+          <a:p>
+            <a:pPr algn="l" eaLnBrk="0">
+              <a:lnSpc>
+                <a:spcPct val="110000"/>
+              </a:lnSpc>
+            </a:pPr>
+            <a:r>
+              <a:rPr sz="1250" b="0">
+                <a:solidFill>
+                  <a:srgbClr val="1F2A3A"/>
+                </a:solidFill>
+                <a:latin typeface="맑은 고딕"/>
+                <a:ea typeface="맑은 고딕"/>
+                <a:cs typeface="맑은 고딕"/>
+              </a:rPr>
+              <a:t>입력 조건의 조합마다 출력을 정한 표</a:t>
+            </a:r>
+          </a:p>
+        </p:txBody>
+      </p:sp>
+      <p:sp>
+        <p:nvSpPr>
+          <p:cNvPr id="24" name="Rounded Rectangle 23"/>
           <p:cNvSpPr/>
           <p:nvPr/>
         </p:nvSpPr>
@@ -54312,7 +54168,7 @@
       </p:sp>
       <p:sp>
         <p:nvSpPr>
-          <p:cNvPr id="31" name="TextBox 30"/>
+          <p:cNvPr id="25" name="TextBox 24"/>
           <p:cNvSpPr txBox="1"/>
           <p:nvPr/>
         </p:nvSpPr>
@@ -54351,14 +54207,14 @@
       </p:sp>
       <p:sp>
         <p:nvSpPr>
-          <p:cNvPr id="32" name="TextBox 31"/>
+          <p:cNvPr id="26" name="TextBox 25"/>
           <p:cNvSpPr txBox="1"/>
           <p:nvPr/>
         </p:nvSpPr>
         <p:spPr>
           <a:xfrm>
             <a:off x="3200400" y="4432807"/>
-            <a:ext cx="6156655" cy="480568"/>
+            <a:ext cx="8351215" cy="480568"/>
           </a:xfrm>
           <a:prstGeom prst="rect">
             <a:avLst/>
@@ -54386,50 +54242,29 @@
               <a:t>Hit Policy</a:t>
             </a:r>
           </a:p>
-        </p:txBody>
-      </p:sp>
-      <p:sp>
-        <p:nvSpPr>
-          <p:cNvPr id="33" name="TextBox 32"/>
-          <p:cNvSpPr txBox="1"/>
-          <p:nvPr/>
-        </p:nvSpPr>
-        <p:spPr>
-          <a:xfrm>
-            <a:off x="9448495" y="4432807"/>
-            <a:ext cx="2103120" cy="480568"/>
-          </a:xfrm>
-          <a:prstGeom prst="rect">
-            <a:avLst/>
-          </a:prstGeom>
-          <a:noFill/>
-        </p:spPr>
-        <p:txBody>
-          <a:bodyPr wrap="square" anchor="ctr"/>
-          <a:lstStyle/>
-          <a:p>
-            <a:pPr algn="l" eaLnBrk="0">
-              <a:lnSpc>
-                <a:spcPct val="110000"/>
-              </a:lnSpc>
-            </a:pPr>
-            <a:r>
-              <a:rPr sz="1250" b="1">
-                <a:solidFill>
-                  <a:srgbClr val="556175"/>
-                </a:solidFill>
-                <a:latin typeface="맑은 고딕"/>
-                <a:ea typeface="맑은 고딕"/>
-                <a:cs typeface="맑은 고딕"/>
-              </a:rPr>
-              <a:t>규정 적합성 표의 COLLECT</a:t>
-            </a:r>
-          </a:p>
-        </p:txBody>
-      </p:sp>
-      <p:sp>
-        <p:nvSpPr>
-          <p:cNvPr id="34" name="Rounded Rectangle 33"/>
+          <a:p>
+            <a:pPr algn="l" eaLnBrk="0">
+              <a:lnSpc>
+                <a:spcPct val="110000"/>
+              </a:lnSpc>
+            </a:pPr>
+            <a:r>
+              <a:rPr sz="1250" b="0">
+                <a:solidFill>
+                  <a:srgbClr val="1F2A3A"/>
+                </a:solidFill>
+                <a:latin typeface="맑은 고딕"/>
+                <a:ea typeface="맑은 고딕"/>
+                <a:cs typeface="맑은 고딕"/>
+              </a:rPr>
+              <a:t>여러 규칙이 함께 맞을 때 결과를 고르는 방식</a:t>
+            </a:r>
+          </a:p>
+        </p:txBody>
+      </p:sp>
+      <p:sp>
+        <p:nvSpPr>
+          <p:cNvPr id="27" name="Rounded Rectangle 26"/>
           <p:cNvSpPr/>
           <p:nvPr/>
         </p:nvSpPr>
@@ -54460,7 +54295,7 @@
       </p:sp>
       <p:sp>
         <p:nvSpPr>
-          <p:cNvPr id="35" name="TextBox 34"/>
+          <p:cNvPr id="28" name="TextBox 27"/>
           <p:cNvSpPr txBox="1"/>
           <p:nvPr/>
         </p:nvSpPr>
@@ -54499,14 +54334,14 @@
       </p:sp>
       <p:sp>
         <p:nvSpPr>
-          <p:cNvPr id="36" name="TextBox 35"/>
+          <p:cNvPr id="29" name="TextBox 28"/>
           <p:cNvSpPr txBox="1"/>
           <p:nvPr/>
         </p:nvSpPr>
         <p:spPr>
           <a:xfrm>
             <a:off x="3200400" y="4913376"/>
-            <a:ext cx="6156655" cy="480568"/>
+            <a:ext cx="8351215" cy="480568"/>
           </a:xfrm>
           <a:prstGeom prst="rect">
             <a:avLst/>
@@ -54534,50 +54369,29 @@
               <a:t>Balanced Scorecard</a:t>
             </a:r>
           </a:p>
-        </p:txBody>
-      </p:sp>
-      <p:sp>
-        <p:nvSpPr>
-          <p:cNvPr id="37" name="TextBox 36"/>
-          <p:cNvSpPr txBox="1"/>
-          <p:nvPr/>
-        </p:nvSpPr>
-        <p:spPr>
-          <a:xfrm>
-            <a:off x="9448495" y="4913376"/>
-            <a:ext cx="2103120" cy="480568"/>
-          </a:xfrm>
-          <a:prstGeom prst="rect">
-            <a:avLst/>
-          </a:prstGeom>
-          <a:noFill/>
-        </p:spPr>
-        <p:txBody>
-          <a:bodyPr wrap="square" anchor="ctr"/>
-          <a:lstStyle/>
-          <a:p>
-            <a:pPr algn="l" eaLnBrk="0">
-              <a:lnSpc>
-                <a:spcPct val="110000"/>
-              </a:lnSpc>
-            </a:pPr>
-            <a:r>
-              <a:rPr sz="1250" b="1">
-                <a:solidFill>
-                  <a:srgbClr val="556175"/>
-                </a:solidFill>
-                <a:latin typeface="맑은 고딕"/>
-                <a:ea typeface="맑은 고딕"/>
-                <a:cs typeface="맑은 고딕"/>
-              </a:rPr>
-              <a:t>네 관점의 전략 목표</a:t>
-            </a:r>
-          </a:p>
-        </p:txBody>
-      </p:sp>
-      <p:sp>
-        <p:nvSpPr>
-          <p:cNvPr id="38" name="Rounded Rectangle 37"/>
+          <a:p>
+            <a:pPr algn="l" eaLnBrk="0">
+              <a:lnSpc>
+                <a:spcPct val="110000"/>
+              </a:lnSpc>
+            </a:pPr>
+            <a:r>
+              <a:rPr sz="1250" b="0">
+                <a:solidFill>
+                  <a:srgbClr val="1F2A3A"/>
+                </a:solidFill>
+                <a:latin typeface="맑은 고딕"/>
+                <a:ea typeface="맑은 고딕"/>
+                <a:cs typeface="맑은 고딕"/>
+              </a:rPr>
+              <a:t>재무 · 고객 · 내부 프로세스 · 학습과 성장의 네 관점으로 성과를 보는 경영 틀</a:t>
+            </a:r>
+          </a:p>
+        </p:txBody>
+      </p:sp>
+      <p:sp>
+        <p:nvSpPr>
+          <p:cNvPr id="30" name="Rounded Rectangle 29"/>
           <p:cNvSpPr/>
           <p:nvPr/>
         </p:nvSpPr>
@@ -54608,7 +54422,7 @@
       </p:sp>
       <p:sp>
         <p:nvSpPr>
-          <p:cNvPr id="39" name="TextBox 38"/>
+          <p:cNvPr id="31" name="TextBox 30"/>
           <p:cNvSpPr txBox="1"/>
           <p:nvPr/>
         </p:nvSpPr>
@@ -54647,14 +54461,14 @@
       </p:sp>
       <p:sp>
         <p:nvSpPr>
-          <p:cNvPr id="40" name="TextBox 39"/>
+          <p:cNvPr id="32" name="TextBox 31"/>
           <p:cNvSpPr txBox="1"/>
           <p:nvPr/>
         </p:nvSpPr>
         <p:spPr>
           <a:xfrm>
             <a:off x="3200400" y="5393944"/>
-            <a:ext cx="6156655" cy="480568"/>
+            <a:ext cx="8351215" cy="480568"/>
           </a:xfrm>
           <a:prstGeom prst="rect">
             <a:avLst/>
@@ -54682,50 +54496,29 @@
               <a:t>Key Performance Indicator</a:t>
             </a:r>
           </a:p>
-        </p:txBody>
-      </p:sp>
-      <p:sp>
-        <p:nvSpPr>
-          <p:cNvPr id="41" name="TextBox 40"/>
-          <p:cNvSpPr txBox="1"/>
-          <p:nvPr/>
-        </p:nvSpPr>
-        <p:spPr>
-          <a:xfrm>
-            <a:off x="9448495" y="5393944"/>
-            <a:ext cx="2103120" cy="480568"/>
-          </a:xfrm>
-          <a:prstGeom prst="rect">
-            <a:avLst/>
-          </a:prstGeom>
-          <a:noFill/>
-        </p:spPr>
-        <p:txBody>
-          <a:bodyPr wrap="square" anchor="ctr"/>
-          <a:lstStyle/>
-          <a:p>
-            <a:pPr algn="l" eaLnBrk="0">
-              <a:lnSpc>
-                <a:spcPct val="110000"/>
-              </a:lnSpc>
-            </a:pPr>
-            <a:r>
-              <a:rPr sz="1250" b="1">
-                <a:solidFill>
-                  <a:srgbClr val="556175"/>
-                </a:solidFill>
-                <a:latin typeface="맑은 고딕"/>
-                <a:ea typeface="맑은 고딕"/>
-                <a:cs typeface="맑은 고딕"/>
-              </a:rPr>
-              <a:t>인터록 여유 2.53 ℃</a:t>
-            </a:r>
-          </a:p>
-        </p:txBody>
-      </p:sp>
-      <p:sp>
-        <p:nvSpPr>
-          <p:cNvPr id="42" name="Rounded Rectangle 41"/>
+          <a:p>
+            <a:pPr algn="l" eaLnBrk="0">
+              <a:lnSpc>
+                <a:spcPct val="110000"/>
+              </a:lnSpc>
+            </a:pPr>
+            <a:r>
+              <a:rPr sz="1250" b="0">
+                <a:solidFill>
+                  <a:srgbClr val="1F2A3A"/>
+                </a:solidFill>
+                <a:latin typeface="맑은 고딕"/>
+                <a:ea typeface="맑은 고딕"/>
+                <a:cs typeface="맑은 고딕"/>
+              </a:rPr>
+              <a:t>목표를 얼마나 이뤘는지 재는 핵심 성과 지표</a:t>
+            </a:r>
+          </a:p>
+        </p:txBody>
+      </p:sp>
+      <p:sp>
+        <p:nvSpPr>
+          <p:cNvPr id="33" name="Rounded Rectangle 32"/>
           <p:cNvSpPr/>
           <p:nvPr/>
         </p:nvSpPr>
@@ -54756,7 +54549,7 @@
       </p:sp>
       <p:sp>
         <p:nvSpPr>
-          <p:cNvPr id="43" name="TextBox 42"/>
+          <p:cNvPr id="34" name="TextBox 33"/>
           <p:cNvSpPr txBox="1"/>
           <p:nvPr/>
         </p:nvSpPr>
@@ -54795,14 +54588,14 @@
       </p:sp>
       <p:sp>
         <p:nvSpPr>
-          <p:cNvPr id="44" name="TextBox 43"/>
+          <p:cNvPr id="35" name="TextBox 34"/>
           <p:cNvSpPr txBox="1"/>
           <p:nvPr/>
         </p:nvSpPr>
         <p:spPr>
           <a:xfrm>
             <a:off x="3200400" y="5874512"/>
-            <a:ext cx="6156655" cy="480568"/>
+            <a:ext cx="8351215" cy="480568"/>
           </a:xfrm>
           <a:prstGeom prst="rect">
             <a:avLst/>
@@ -54830,43 +54623,22 @@
               <a:t>What-if Analysis</a:t>
             </a:r>
           </a:p>
-        </p:txBody>
-      </p:sp>
-      <p:sp>
-        <p:nvSpPr>
-          <p:cNvPr id="45" name="TextBox 44"/>
-          <p:cNvSpPr txBox="1"/>
-          <p:nvPr/>
-        </p:nvSpPr>
-        <p:spPr>
-          <a:xfrm>
-            <a:off x="9448495" y="5874512"/>
-            <a:ext cx="2103120" cy="480568"/>
-          </a:xfrm>
-          <a:prstGeom prst="rect">
-            <a:avLst/>
-          </a:prstGeom>
-          <a:noFill/>
-        </p:spPr>
-        <p:txBody>
-          <a:bodyPr wrap="square" anchor="ctr"/>
-          <a:lstStyle/>
-          <a:p>
-            <a:pPr algn="l" eaLnBrk="0">
-              <a:lnSpc>
-                <a:spcPct val="110000"/>
-              </a:lnSpc>
-            </a:pPr>
-            <a:r>
-              <a:rPr sz="1250" b="1">
-                <a:solidFill>
-                  <a:srgbClr val="556175"/>
-                </a:solidFill>
-                <a:latin typeface="맑은 고딕"/>
-                <a:ea typeface="맑은 고딕"/>
-                <a:cs typeface="맑은 고딕"/>
-              </a:rPr>
-              <a:t>감점 기준 바꿔 보기</a:t>
+          <a:p>
+            <a:pPr algn="l" eaLnBrk="0">
+              <a:lnSpc>
+                <a:spcPct val="110000"/>
+              </a:lnSpc>
+            </a:pPr>
+            <a:r>
+              <a:rPr sz="1250" b="0">
+                <a:solidFill>
+                  <a:srgbClr val="1F2A3A"/>
+                </a:solidFill>
+                <a:latin typeface="맑은 고딕"/>
+                <a:ea typeface="맑은 고딕"/>
+                <a:cs typeface="맑은 고딕"/>
+              </a:rPr>
+              <a:t>가정값을 바꿔 결과가 어떻게 달라지는지 견주는 분석</a:t>
             </a:r>
           </a:p>
         </p:txBody>

--- a/산출물/교재/PPTX/통합반_온라인/통합반_03일차.pptx
+++ b/산출물/교재/PPTX/통합반_온라인/통합반_03일차.pptx
@@ -7620,7 +7620,7 @@
                 <a:ea typeface="맑은 고딕"/>
                 <a:cs typeface="맑은 고딕"/>
               </a:rPr>
-              <a:t>절차를 지식과 실행에 연결하기</a:t>
+              <a:t>SOP를 지식과 실행에 연결하기</a:t>
             </a:r>
           </a:p>
         </p:txBody>
@@ -7908,7 +7908,7 @@
       </p:sp>
       <p:pic>
         <p:nvPicPr>
-          <p:cNvPr id="6" name="삽화:조치연결_그래프.svg" descr="illust_9066030255792409619_1792037122.png"/>
+          <p:cNvPr id="6" name="삽화:조치연결_그래프.svg" descr="illust_4946632651745345333_1792037122.png"/>
           <p:cNvPicPr>
             <a:picLocks noChangeAspect="1"/>
           </p:cNvPicPr>
@@ -12336,7 +12336,7 @@
                 <a:ea typeface="맑은 고딕"/>
                 <a:cs typeface="맑은 고딕"/>
               </a:rPr>
-              <a:t>문장을 결정표로 바꾸기</a:t>
+              <a:t>DMN: 문장을 결정표로 바꾸기</a:t>
             </a:r>
           </a:p>
         </p:txBody>
@@ -18401,7 +18401,7 @@
       </p:sp>
       <p:pic>
         <p:nvPicPr>
-          <p:cNvPr id="6" name="삽화:수직선_경계.svg" descr="illust_8981641927561827211_1792037122.png"/>
+          <p:cNvPr id="6" name="삽화:수직선_경계.svg" descr="illust_7215389799313984222_1792037122.png"/>
           <p:cNvPicPr>
             <a:picLocks noChangeAspect="1"/>
           </p:cNvPicPr>
@@ -21803,7 +21803,7 @@
                 <a:ea typeface="맑은 고딕"/>
                 <a:cs typeface="맑은 고딕"/>
               </a:rPr>
-              <a:t>규칙을 적용하고 근거 남기기</a:t>
+              <a:t>DMN 규칙의 적용과 판단 근거</a:t>
             </a:r>
           </a:p>
         </p:txBody>
@@ -27795,7 +27795,7 @@
                 <a:ea typeface="맑은 고딕"/>
                 <a:cs typeface="맑은 고딕"/>
               </a:rPr>
-              <a:t>작업 절차의 정의와 수행 조건</a:t>
+              <a:t>SOP: 작업 절차와 수행 조건</a:t>
             </a:r>
           </a:p>
         </p:txBody>
@@ -27972,7 +27972,7 @@
                 <a:ea typeface="맑은 고딕"/>
                 <a:cs typeface="맑은 고딕"/>
               </a:rPr>
-              <a:t>절차를 지식과 실행에 연결하기</a:t>
+              <a:t>SOP를 지식과 실행에 연결하기</a:t>
             </a:r>
           </a:p>
         </p:txBody>
@@ -28149,7 +28149,7 @@
                 <a:ea typeface="맑은 고딕"/>
                 <a:cs typeface="맑은 고딕"/>
               </a:rPr>
-              <a:t>문장을 결정표로 바꾸기</a:t>
+              <a:t>DMN: 문장을 결정표로 바꾸기</a:t>
             </a:r>
           </a:p>
         </p:txBody>
@@ -28326,7 +28326,7 @@
                 <a:ea typeface="맑은 고딕"/>
                 <a:cs typeface="맑은 고딕"/>
               </a:rPr>
-              <a:t>규칙을 적용하고 근거 남기기</a:t>
+              <a:t>DMN 규칙의 적용과 판단 근거</a:t>
             </a:r>
           </a:p>
         </p:txBody>
@@ -28503,7 +28503,7 @@
                 <a:ea typeface="맑은 고딕"/>
                 <a:cs typeface="맑은 고딕"/>
               </a:rPr>
-              <a:t>판단 정책과 규칙의 저장 구조</a:t>
+              <a:t>DMN의 처리 정책과 저장 구조</a:t>
             </a:r>
           </a:p>
         </p:txBody>
@@ -28680,7 +28680,7 @@
                 <a:ea typeface="맑은 고딕"/>
                 <a:cs typeface="맑은 고딕"/>
               </a:rPr>
-              <a:t>성과 목표와 지표 읽기</a:t>
+              <a:t>BSC: 성과 목표와 KPI</a:t>
             </a:r>
           </a:p>
         </p:txBody>
@@ -28857,7 +28857,7 @@
                 <a:ea typeface="맑은 고딕"/>
                 <a:cs typeface="맑은 고딕"/>
               </a:rPr>
-              <a:t>목표와 지표의 영향 관계</a:t>
+              <a:t>전략맵과 성과 지표의 영향 관계</a:t>
             </a:r>
           </a:p>
         </p:txBody>
@@ -29034,7 +29034,7 @@
                 <a:ea typeface="맑은 고딕"/>
                 <a:cs typeface="맑은 고딕"/>
               </a:rPr>
-              <a:t>조치의 득실과 가정값 비교</a:t>
+              <a:t>조치의 상충과 What-if 분석</a:t>
             </a:r>
           </a:p>
         </p:txBody>
@@ -29492,7 +29492,7 @@
                 <a:ea typeface="맑은 고딕"/>
                 <a:cs typeface="맑은 고딕"/>
               </a:rPr>
-              <a:t>판단 정책과 규칙의 저장 구조</a:t>
+              <a:t>DMN의 처리 정책과 저장 구조</a:t>
             </a:r>
           </a:p>
         </p:txBody>
@@ -31972,7 +31972,7 @@
       </p:sp>
       <p:pic>
         <p:nvPicPr>
-          <p:cNvPr id="6" name="삽화:결정표_그래프.svg" descr="illust_5745781531615915392_1792037122.png"/>
+          <p:cNvPr id="6" name="삽화:결정표_그래프.svg" descr="illust_8321048188507846080_1792037122.png"/>
           <p:cNvPicPr>
             <a:picLocks noChangeAspect="1"/>
           </p:cNvPicPr>
@@ -32686,7 +32686,7 @@
                 <a:ea typeface="맑은 고딕"/>
                 <a:cs typeface="맑은 고딕"/>
               </a:rPr>
-              <a:t>성과 목표와 지표 읽기</a:t>
+              <a:t>BSC: 성과 목표와 KPI</a:t>
             </a:r>
           </a:p>
         </p:txBody>
@@ -38114,7 +38114,7 @@
                 <a:ea typeface="맑은 고딕"/>
                 <a:cs typeface="맑은 고딕"/>
               </a:rPr>
-              <a:t>작업 절차의 정의와 수행 조건</a:t>
+              <a:t>SOP: 작업 절차와 수행 조건</a:t>
             </a:r>
           </a:p>
         </p:txBody>
@@ -38395,7 +38395,7 @@
                 <a:ea typeface="맑은 고딕"/>
                 <a:cs typeface="맑은 고딕"/>
               </a:rPr>
-              <a:t>목표와 지표의 영향 관계</a:t>
+              <a:t>전략맵과 성과 지표의 영향 관계</a:t>
             </a:r>
           </a:p>
         </p:txBody>
@@ -38683,7 +38683,7 @@
       </p:sp>
       <p:pic>
         <p:nvPicPr>
-          <p:cNvPr id="6" name="삽화:전략맵_그래프.svg" descr="illust_8887131298431774392_1792037122.png"/>
+          <p:cNvPr id="6" name="삽화:전략맵_그래프.svg" descr="illust_3400990672237183569_1792037122.png"/>
           <p:cNvPicPr>
             <a:picLocks noChangeAspect="1"/>
           </p:cNvPicPr>
@@ -39383,7 +39383,7 @@
       </p:sp>
       <p:pic>
         <p:nvPicPr>
-          <p:cNvPr id="6" name="삽화:선행후행_경로.svg" descr="illust_1501983707092285_1792037122.png"/>
+          <p:cNvPr id="6" name="삽화:선행후행_경로.svg" descr="illust_8020200946026340980_1792037122.png"/>
           <p:cNvPicPr>
             <a:picLocks noChangeAspect="1"/>
           </p:cNvPicPr>
@@ -40083,7 +40083,7 @@
       </p:sp>
       <p:pic>
         <p:nvPicPr>
-          <p:cNvPr id="6" name="삽화:조건부영향.svg" descr="illust_4032644308738883276_1792037122.png"/>
+          <p:cNvPr id="6" name="삽화:조건부영향.svg" descr="illust_5963584237385858667_1792037122.png"/>
           <p:cNvPicPr>
             <a:picLocks noChangeAspect="1"/>
           </p:cNvPicPr>
@@ -40986,7 +40986,7 @@
                 <a:ea typeface="맑은 고딕"/>
                 <a:cs typeface="맑은 고딕"/>
               </a:rPr>
-              <a:t>조치의 득실과 가정값 비교</a:t>
+              <a:t>조치의 상충과 What-if 분석</a:t>
             </a:r>
           </a:p>
         </p:txBody>
@@ -42112,7 +42112,7 @@
       </p:sp>
       <p:pic>
         <p:nvPicPr>
-          <p:cNvPr id="6" name="삽화:성과경로_6.svg" descr="illust_3044344754852362175_1792037122.png"/>
+          <p:cNvPr id="6" name="삽화:성과경로_6.svg" descr="illust_8750915628363182019_1792037122.png"/>
           <p:cNvPicPr>
             <a:picLocks noChangeAspect="1"/>
           </p:cNvPicPr>
@@ -47339,7 +47339,7 @@
       </p:sp>
       <p:pic>
         <p:nvPicPr>
-          <p:cNvPr id="6" name="삽화:가정분석_3.svg" descr="illust_4609037223443103948_1792037122.png"/>
+          <p:cNvPr id="6" name="삽화:가정분석_3.svg" descr="illust_572130892467338836_1792037122.png"/>
           <p:cNvPicPr>
             <a:picLocks noChangeAspect="1"/>
           </p:cNvPicPr>

--- a/산출물/교재/PPTX/통합반_온라인/통합반_03일차.pptx
+++ b/산출물/교재/PPTX/통합반_온라인/통합반_03일차.pptx
@@ -3578,7 +3578,7 @@
           <a:lstStyle/>
           <a:p>
             <a:r>
-              <a:t>이번 회차의 약어와 핵심 용어를 모았습니다. 위의 넷은 조치 절차와 판단 규칙 쪽의 말이고, 가운데 둘은 결정표를 읽는 말이며, 아래 셋은 성과 평가 쪽의 말입니다. 정식 이름과 뜻을 한 줄씩 확인합니다.</a:t>
+              <a:t>약어와 핵심 용어의 이름과 뜻을 확인합니다. 영문 정식 명칭은 화면에 두고, 대본에서는 뜻을 짚습니다. 앞의 복습에서 확인한 조치 선택의 흐름과 적용 사례를 여기서 다시 풀지 않습니다.</a:t>
             </a:r>
           </a:p>
         </p:txBody>
@@ -10401,7 +10401,7 @@
       </p:sp>
       <p:pic>
         <p:nvPicPr>
-          <p:cNvPr id="6" name="삽화:조치연결_그래프.svg" descr="illust_5796831104958945834_1792037122.png"/>
+          <p:cNvPr id="6" name="삽화:조치연결_그래프.svg" descr="illust_7061860299310659188_1792037122.png"/>
           <p:cNvPicPr>
             <a:picLocks noChangeAspect="1"/>
           </p:cNvPicPr>
@@ -18890,7 +18890,7 @@
       </p:sp>
       <p:pic>
         <p:nvPicPr>
-          <p:cNvPr id="6" name="삽화:수직선_경계.svg" descr="illust_8083487089820734906_1792037122.png"/>
+          <p:cNvPr id="6" name="삽화:수직선_경계.svg" descr="illust_2276185494946075178_1792037122.png"/>
           <p:cNvPicPr>
             <a:picLocks noChangeAspect="1"/>
           </p:cNvPicPr>
@@ -32494,7 +32494,7 @@
       </p:sp>
       <p:pic>
         <p:nvPicPr>
-          <p:cNvPr id="6" name="삽화:결정표_그래프.svg" descr="illust_8244882729406314568_1792037122.png"/>
+          <p:cNvPr id="6" name="삽화:결정표_그래프.svg" descr="illust_3873825685148864893_1792037122.png"/>
           <p:cNvPicPr>
             <a:picLocks noChangeAspect="1"/>
           </p:cNvPicPr>
@@ -40001,7 +40001,7 @@
       </p:sp>
       <p:pic>
         <p:nvPicPr>
-          <p:cNvPr id="6" name="삽화:전략맵_그래프.svg" descr="illust_7697092032394172210_1792037122.png"/>
+          <p:cNvPr id="6" name="삽화:전략맵_그래프.svg" descr="illust_6240599731728851956_1792037122.png"/>
           <p:cNvPicPr>
             <a:picLocks noChangeAspect="1"/>
           </p:cNvPicPr>
@@ -40701,7 +40701,7 @@
       </p:sp>
       <p:pic>
         <p:nvPicPr>
-          <p:cNvPr id="6" name="삽화:선행후행_경로.svg" descr="illust_5374660509753748978_1792037122.png"/>
+          <p:cNvPr id="6" name="삽화:선행후행_경로.svg" descr="illust_5405931167734474174_1792037122.png"/>
           <p:cNvPicPr>
             <a:picLocks noChangeAspect="1"/>
           </p:cNvPicPr>
@@ -41401,7 +41401,7 @@
       </p:sp>
       <p:pic>
         <p:nvPicPr>
-          <p:cNvPr id="6" name="삽화:조건부영향.svg" descr="illust_7645793235062934864_1792037122.png"/>
+          <p:cNvPr id="6" name="삽화:조건부영향.svg" descr="illust_6397420479421010800_1792037122.png"/>
           <p:cNvPicPr>
             <a:picLocks noChangeAspect="1"/>
           </p:cNvPicPr>
@@ -43430,7 +43430,7 @@
       </p:sp>
       <p:pic>
         <p:nvPicPr>
-          <p:cNvPr id="6" name="삽화:성과경로_6.svg" descr="illust_8469543499004391978_1792037122.png"/>
+          <p:cNvPr id="6" name="삽화:성과경로_6.svg" descr="illust_6207606794825715006_1792037122.png"/>
           <p:cNvPicPr>
             <a:picLocks noChangeAspect="1"/>
           </p:cNvPicPr>
@@ -50790,7 +50790,7 @@
       </p:sp>
       <p:pic>
         <p:nvPicPr>
-          <p:cNvPr id="6" name="삽화:가정분석_3.svg" descr="illust_3793969653685331486_1792037122.png"/>
+          <p:cNvPr id="6" name="삽화:가정분석_3.svg" descr="illust_137817303407899810_1792037122.png"/>
           <p:cNvPicPr>
             <a:picLocks noChangeAspect="1"/>
           </p:cNvPicPr>

--- a/산출물/교재/PPTX/통합반_온라인/통합반_03일차.pptx
+++ b/산출물/교재/PPTX/통합반_온라인/통합반_03일차.pptx
@@ -568,7 +568,7 @@
           <a:lstStyle/>
           <a:p>
             <a:r>
-              <a:t>이번 회차에서 할 일은 네 가지입니다. 먼저 조치를 수행하는 순서와 기준을 정한 절차가 무엇으로 이루어지는지, 설비의 운전 상태가 그 절차를 쓸 수 있는지에 어떻게 관여하는지를 봅니다. 이어서 절차 속 조건을 결정표로 옮겨 값에 대어 판정하고 그 근거를 남기는 방법을 다룹니다. 그다음 성과 목표와 지표로 남은 후보의 득실을 견주고, 가정값을 바꾸어 결과를 다시 계산해 봅니다. 마지막으로 직접 절차 구조와 결정표를 만들고 판정 기능을 시험합니다.</a:t>
+              <a:t>이번 회차에서 할 일은 네 가지입니다. 먼저 조치를 수행하는 순서와 기준을 정한 절차가 무엇으로 이루어지는지, 설비의 운전 상태가 그 절차를 쓸 수 있는지에 어떻게 관여하는지를 봅니다. 이어서 절차 속 조건을 결정표로 옮겨 값에 대어 판정하고 그 근거를 남기는 방법을 다룹니다. 그다음 성과 목표와 지표로 남은 후보의 득실을 견주고, 가정값을 바꾸어 결과를 다시 계산해 봅니다. 마지막으로 직접 절차 구조와 결정표를 만들고 판정 기능을 경계값과 여러 규칙이 맞는 경우까지 시험합니다.</a:t>
             </a:r>
           </a:p>
         </p:txBody>
@@ -638,7 +638,7 @@
           <a:lstStyle/>
           <a:p>
             <a:r>
-              <a:t>팬 최대 운전 뒤 유온은 내려갔지만 냉각 효율은 55 %로 기준에 못 미쳤습니다. 핀 오염을 제거한 것은 아니므로 핀 세척을 작업지시로 따로 등록했습니다. 경보 해제, 매뉴얼의 완화 성공 기준, 정비 완료 기준은 서로 다릅니다. 화면의 그래프와 등록 기록을 보고 세척까지 끝났다고 판단하면 안 됩니다.</a:t>
+              <a:t>원인 Cause는 CAUSES로 고장 유형을 일으키고, 조치 방법 Skill은 그 고장 유형에 MITIGATED_BY나 REMEDIED_BY로 붙으므로 한 고장 유형에 조치가 여럿 모입니다. 핀 세척처럼 특정 원인에만 맞는 조치는 ADDRESSES로 그 원인을 함께 가리켜, 원인이 주변 온도 상승이면 후보에서 빠집니다. 조치 방법에서는 HAS_STEP으로 단계가, 단계에서는 REFERS_TO로 근거 절이 이어지고, APPROVED_BY는 그 조치를 승인할 최소 역할입니다. 승인하는 역할과 실제로 수행하는 주체는 달라서, 팬 최대 운전은 운전원이 승인하고 설비 제어 시스템이 수행하며 핀 세척 작업지시는 정비 관리 시스템이 발행합니다. 아래 띠가 쿨러 사건에서 실제로 따라간 연결입니다.</a:t>
             </a:r>
           </a:p>
         </p:txBody>
@@ -918,7 +918,7 @@
           <a:lstStyle/>
           <a:p>
             <a:r>
-              <a:t>결정표를 만들 때 가장 먼저 정하는 것은 표가 답할 물음 하나이고, 이것을 결정이라고 합니다. 매뉴얼의 조건 문장 하나가 규칙 한 행이 되어 왼쪽의 조건과 오른쪽의 출력으로 나뉘며, 원격 자동이 아니면 세 절차를 뺀다는 문장이 Rule 1, 24시간을 넘겼으면 20만 원을 깎는다는 문장이 Rule 2입니다. 놀이공원의 탑승 기준표에 키와 나이를 대면 누가 판정해도 같은 것과 닮았지만, 결정표는 값의 출처와 규칙의 근거, 여러 행이 맞을 때의 처리까지 정한다는 점이 다릅니다. 지금 원격 자동이고 팬이 30시간째 최대로 돌았다면 Rule 1은 맞지 않고 Rule 2는 맞으므로, 답은 팬을 올리는 두 절차에 감점 20만 원입니다.</a:t>
+              <a:t>입력이 정해졌으면 그 값으로 무엇에 답할지가 표의 물음이 되고, 이 물음 하나를 결정이라고 합니다. 매뉴얼의 조건 문장 하나가 규칙 한 행이 되어 왼쪽의 조건과 오른쪽의 출력으로 나뉘며, 원격 자동이 아니면 세 절차를 뺀다는 문장이 Rule 1, 24시간을 넘겼으면 20만 원을 깎는다는 문장이 Rule 2입니다. 놀이공원의 탑승 기준표에 키와 나이를 대면 누가 판정해도 같은 것과 닮았지만, 결정표는 값의 출처와 규칙의 근거, 여러 행이 맞을 때의 처리까지 정한다는 점이 다릅니다. 지금 원격 자동이고 팬이 30시간째 최대로 돌았다면 Rule 1은 맞지 않고 Rule 2는 맞으므로, 답은 팬을 올리는 두 절차에 감점 20만 원입니다.</a:t>
             </a:r>
           </a:p>
         </p:txBody>
@@ -1128,7 +1128,7 @@
           <a:lstStyle/>
           <a:p>
             <a:r>
-              <a:t>하한과 상한을 함께 두면 범위가 되며, 이 표기에서는 검사 둘을 한 행에 적어 둘 다 맞을 때만 맞게 합니다. 실제 표에서 검사가 둘인 행은 정기 정비의 시행 방안을 고르는 규칙으로, 정기 정비 도래 경보가 났고 마지막 정비 뒤 운전시간이 1,800시간 이상일 때만 네 방안을 후보로 올립니다. 둘 가운데 하나만 맞아도 되는 경우는 한 행에 넣지 않고 같은 출력을 내는 행 둘로 나누므로, 매뉴얼의 문장이 「그리고」인지 「또는」인지를 먼저 가려야 합니다. 위의 55와 65 사이 구간은 범위 표기를 위한 예이며, 실제 쿨러 성능 저하 판정은 냉각 효율이 70 % 아래이고 유온이 계속 오르는지까지 봅니다.</a:t>
+              <a:t>하한과 상한을 함께 두면 범위가 되며, 이 표기에서는 검사 둘을 한 행에 적어 둘 다 맞을 때만 맞게 합니다. 실제 표에서 검사가 둘인 행의 하나는 정기 정비의 시행 방안을 고르는 규칙으로, 정기 정비 도래 경보가 났고 마지막 정비 뒤 운전시간이 1,800시간 이상일 때만 네 방안을 후보로 올립니다. 둘 가운데 하나만 맞아도 되는 경우는 한 행에 넣지 않고 같은 출력을 내는 행 둘로 나누므로, 매뉴얼의 문장이 「그리고」인지 「또는」인지를 먼저 가려야 합니다. 위의 55와 65 사이 구간은 범위 표기를 위한 예이며, 실제 쿨러 성능 저하 판정은 냉각 효율이 70 % 아래이고 유온이 계속 오르는지까지 봅니다.</a:t>
             </a:r>
           </a:p>
         </p:txBody>
@@ -1198,7 +1198,7 @@
           <a:lstStyle/>
           <a:p>
             <a:r>
-              <a:t>규칙이 내는 것은 네 가지입니다. 후보 선택은 고장 유형이 냉각 성능 상실이면 완화 조치 셋을, 원인이 핀 오염이면 핀 세척을 올려 쿨러 사건의 후보 넷을 만듭니다. 제외된 조치는 다른 면에서 아무리 좋아도 고를 수 없고, 감점은 후보에 남기되 팬 수명 손실만큼 깎아서 견주게 하며, 경고는 후보에 남기면서 승인하는 사람이 알아야 할 사항을 붙입니다. 해서는 안 되는 것, 해도 되지만 대가가 있는 것, 해도 되지만 알고 해야 하는 것의 구분이며, 후보에 올랐다고 실행이 허가된 것은 아니고 실행은 사람이 승인한 뒤에 이루어집니다.</a:t>
+              <a:t>규칙이 내는 것은 다섯 가지이고, 출력마다 그 출력을 내는 결정표가 다릅니다. 후보 선택 표는 고장 유형이 냉각 성능 상실이면 완화 조치 셋을, 원인이 핀 오염이면 핀 세척을 올리며, 그 가운데 고장 유형에 관계로 이어진 조치가 쿨러 사건의 후보 넷이 됩니다. 규정 적합성 표에서 제외된 조치는 다른 면에서 아무리 좋아도 고를 수 없고, 감점은 후보에 남기되 팬 수명 손실만큼 깎아서 견주게 하며, 경고는 승인하는 사람이 알아야 할 사항을 붙입니다. 순위 결정표의 행은 남은 후보에 점수를 매길 식, 순위 정책을 담습니다. 후보에 올랐다고 실행이 허가된 것은 아니고 실행은 사람이 승인한 뒤에 이루어집니다.</a:t>
             </a:r>
           </a:p>
         </p:txBody>
@@ -1548,7 +1548,7 @@
           <a:lstStyle/>
           <a:p>
             <a:r>
-              <a:t>운전 모드를 읽지 못했을 때 값이 없으니 조건이 맞지 않았다고 넘어가면, 원격 자동이 아닐 수도 있는 설비에 원격 조치가 남습니다. 그래서 제외나 감점 규칙의 값을 모르면 「확인되지 않은 조건」으로 결과에 올리고 제외 쪽으로 처리합니다. 다만 한 행의 조건은 모두 맞아야 하므로, 같은 행의 다른 조건이 이미 거짓이면 그 규칙은 어차피 맞지 않아 모르는 값은 상관이 없습니다. 경고 규칙의 값을 모를 때는 경고로 남겨 사람이 그 불확실성을 보고 고르게 하며, 모든 후보가 빠지면 억지로 하나를 고르지 않고 추천 없이 제외 사유를 보입니다.</a:t>
+              <a:t>운전 모드를 읽지 못했을 때 값이 없으니 조건이 맞지 않았다고 넘어가면, 원격 자동이 아닐 수도 있는 설비에 원격 조치가 남습니다. 그래서 제외나 감점 규칙의 값을 모르면 「확인되지 않은 조건」으로 결과에 올리고 제외 쪽으로 처리합니다. 다만 한 행의 조건은 모두 맞아야 하므로, 같은 행의 다른 조건이 이미 거짓이면 그 규칙은 어차피 맞지 않아 모르는 값은 상관이 없습니다. 경고 규칙의 값을 모를 때는 경고로 남겨 사람이 그 불확실성을 보고 고르게 하며, 모든 후보가 빠지면 억지로 하나를 고르지 않고 추천 없이 제외 사유를 보입니다. 값을 알아도 모든 후보가 빠질 수 있어서, 설비가 보호 정지 상태이면 리셋 말고는 어떤 후보도 남지 않습니다.</a:t>
             </a:r>
           </a:p>
         </p:txBody>
@@ -1758,7 +1758,7 @@
           <a:lstStyle/>
           <a:p>
             <a:r>
-              <a:t>결정표를 그래프에 적어 두는 것과 그 정의대로 평가하는 일을 연결합니다. HYD는 표준 DMN 파일을 실행하는 엔진이 아니라, DMN의 주요 개념을 그래프로 표현하고 평가 함수가 읽는 구조입니다. 표준의 조건 식 언어는 FEEL이며 여기서는 비교 연산자와 기준값을 가진 TESTS 관계를 씁니다. 원인 진단 표의 PRIORITY 선언은 이 평가기의 실행 대상이 아니고, 원인 순위는 증거로 별도 계산합니다. 실제로 실행하는 세 결정표는 선언된 정책과 평가 방식이 달라지면 거절합니다.</a:t>
+              <a:t>DMN의 개념으로 판단을 설명하는 것과 표준 모델 파일을 그대로 실행하는 것은 다른 일입니다. 표준의 조건 식 언어는 FEEL이지만 여기서는 입력 하나 · 연산자 하나 · 기준값 하나의 TESTS 관계로 조건을 적고, 표준 엔진 대신 평가 함수가 그래프의 규칙을 읽어 판정합니다. 실제로 실행하는 세 결정표는 선언된 Hit Policy와 평가 방식이 다르면 판정하지 않고 거절하며, 원인 진단 표의 PRIORITY 선언은 이 평가 함수의 실행 대상이 아닙니다.</a:t>
             </a:r>
           </a:p>
         </p:txBody>
@@ -2808,7 +2808,7 @@
           <a:lstStyle/>
           <a:p>
             <a:r>
-              <a:t>규칙을 통과한 네 후보에 점수가 매겨진 결과입니다. 설비가 원격 자동이고 팬은 60 %로 돌고 있었으므로 제외된 후보는 없고, 예측 유온은 같은 시점의 설비 상태에 후보마다 조치를 대어 계산한 평형값입니다. 유온을 가장 많이 내리는 팬 최대 운전과 부하 80 %는 공동 2순위였고, 5도 가까이 덜 내리는 팬 최대 운전이 1순위였으니 순위를 가른 기준이 유온 하나가 아닙니다. 원인을 없애는 쿨러 핀 세척은 작업지시를 내는 것만으로는 지금의 유온을 바꾸지 못해 예측이 62.5도에 머물고 경고가 붙어 4순위입니다.</a:t>
+              <a:t>규칙을 통과한 네 후보에 순위 정책의 점수를 매긴 판단 순위이며, 추천안은 이 순위로 정해지고 앞의 손익 항목을 금액으로 더한 순서는 손익 순위로 따로 봅니다. 설비가 원격 자동이고 팬은 60 %로 돌고 있었으므로 제외된 후보는 없고, 예측 유온은 같은 시점의 설비 상태에 후보마다 조치를 대어 계산한 평형값입니다. 유온을 가장 많이 내리는 팬 최대 운전과 부하 80 %는 공동 2순위였고, 5도 가까이 덜 내리는 팬 최대 운전이 1순위였으니 순위를 가른 기준이 유온 하나가 아닙니다. 원인을 없애는 쿨러 핀 세척은 작업지시를 내는 것만으로는 지금의 유온을 바꾸지 못해 예측이 62.5도에 머물고 경고가 붙어 4순위입니다.</a:t>
             </a:r>
           </a:p>
         </p:txBody>
@@ -3088,7 +3088,7 @@
           <a:lstStyle/>
           <a:p>
             <a:r>
-              <a:t>상황이 달랐다면 순위도 달랐을지를 실제로 계산해 보는 방법이 What-if 분석입니다. 먼저 판단 한 건에 쓰인 후보와 규칙과 입력 값을 사본으로 떠 두고, 사본 안에서 납기까지 남은 시간이나 지연 위약금, 전력 단가, 감점 기준 같은 값 하나를 바꾸어 넣으며, 이렇게 실제와 다르게 넣는 값이 가정값입니다. 그 사본으로 판단 순위와 원 단위의 예상 손익 순위를 다시 계산해 지금의 값으로 낸 기준 결과와 나란히 놓습니다. 원본은 읽기만 하므로 가정값을 넣어 보아도 지식 그래프와 업무 데이터는 바뀌지 않고, 결과에 원본 그대로라는 표시가 붙습니다.</a:t>
+              <a:t>상황이 달랐다면 순위도 달랐을지를 실제로 계산해 보는 방법이 What-if 분석입니다. 먼저 판단 한 건에 쓰인 후보와 규칙과 입력 값을 사본으로 떠 두고, 사본 안에서 납기까지 남은 시간이나 지연 위약금, 전력 단가, 감점 기준 같은 값 하나를 바꾸어 넣으며, 이렇게 실제와 다르게 넣는 값이 가정값입니다. 그 사본으로 판단 순위와 원 단위의 예상 손익 순위를 다시 계산해 지금의 값으로 낸 기준 결과와 나란히 놓습니다. BSC 관점마다 중요도 배수를 주는 것도 가정값의 하나여서, 그 비중으로 성과 지표의 득실을 다시 계산합니다. 원본은 읽기만 하므로 가정값을 넣어 보아도 지식 그래프와 업무 데이터는 바뀌지 않고, 결과에 원본 그대로라는 표시가 붙습니다.</a:t>
             </a:r>
           </a:p>
         </p:txBody>
@@ -3508,7 +3508,7 @@
           <a:lstStyle/>
           <a:p>
             <a:r>
-              <a:t>각 상황이 어떤 판단인지 먼저 고릅니다. 완료 기준은 SOP, 원격 조치의 가능 여부는 DMN 규칙, 냉각과 생산의 득실은 BSC 관점, 납기 가정의 전후 비교는 What-if에 연결됩니다. 답 이름을 외우기보다 어떤 근거를 확인해야 하는지 말해 봅니다.</a:t>
+              <a:t>각 상황에 SOP · DMN · BSC · What-if 가운데 어느 개념이 먼저 필요한지 고릅니다. 완료 기준은 SOP, 원격 조치의 가능 여부는 DMN 규칙, 냉각과 생산의 득실은 BSC 관점, 납기 가정의 전후 비교는 What-if에 연결됩니다. 답 이름을 외우기보다 어떤 근거를 확인해야 하는지 말해 봅니다.</a:t>
             </a:r>
           </a:p>
         </p:txBody>
@@ -4138,7 +4138,7 @@
           <a:lstStyle/>
           <a:p>
             <a:r>
-              <a:t>세 종류는 무엇을 겨냥하느냐가 다릅니다. 경보 직후에 쓰는 즉시 완화는 유온을 곧바로 내리지만 핀에 낀 오염은 그대로 남고, 정비 시간에 쓰는 근본 조치는 원인 자체를 없애며 핀 세척은 원인이 핀 오염일 때만 맞습니다. 예방 조치는 생긴 고장을 없애는 것이 아니라 씰과 필터를 2,000시간마다 바꾸어 펌프의 체적 효율 저하를 미리 막는 정기 정비입니다. 고장 유형에 예방 조치 관계가 있어도 경보가 났을 때의 후보로 따라가지는 않고, 정기 정비 도래 알림이 왔을 때만 후보가 됩니다. 시간으로 놓으면 예방은 고장 전, 완화는 경보 직후, 근본 조치는 정비 시간에 쓰입니다.</a:t>
+              <a:t>세 종류는 무엇을 겨냥하느냐가 다릅니다. 경보 직후에 쓰는 즉시 완화는 유온을 곧바로 내리지만 핀에 낀 오염은 그대로 남고, 정비 시간에 쓰는 근본 조치는 원인 자체를 없애며 핀 세척은 원인이 핀 오염일 때만 맞습니다. 예방 조치는 생긴 고장을 없애는 것이 아니라 씰과 필터를 정해진 운전시간마다 바꾸어 펌프의 체적 효율 저하를 미리 막는 정기 정비입니다. 고장 유형에 예방 조치 관계가 있어도 경보가 났을 때의 후보로 따라가지는 않고, 정기 정비 도래 알림이 왔을 때만 후보가 됩니다. 시간으로 놓으면 예방은 고장 전, 완화는 경보 직후, 근본 조치는 정비 시간에 쓰입니다.</a:t>
             </a:r>
           </a:p>
         </p:txBody>
@@ -4208,7 +4208,7 @@
           <a:lstStyle/>
           <a:p>
             <a:r>
-              <a:t>원인 Cause는 CAUSES로 고장 유형을 일으키고, 조치 방법 Skill은 그 고장 유형에 MITIGATED_BY나 REMEDIED_BY로 붙으므로 한 고장 유형에 조치가 여럿 모입니다. 핀 세척처럼 특정 원인에만 맞는 조치는 ADDRESSES로 그 원인을 함께 가리켜, 원인이 주변 온도 상승이면 후보에서 빠집니다. 조치 방법에서는 HAS_STEP으로 단계가, 단계에서는 REFERS_TO로 근거 절이 이어지고, APPROVED_BY는 그 조치를 승인할 최소 역할입니다. 승인하는 역할과 실제로 수행하는 주체는 달라서, 팬 최대 운전은 운전원이 승인하고 설비 제어 시스템이 수행하며 핀 세척 작업지시는 정비 관리 시스템이 발행합니다. 아래 띠가 쿨러 사건에서 실제로 따라간 연결입니다.</a:t>
+              <a:t>앞에서 본 완화와 근본 조치의 차이가 쿨러 사건에서 그대로 나타났습니다. 팬 최대 운전 뒤 유온은 내려가 경보가 해제되었지만 냉각 효율은 경보 기준에도 못 미쳐, 핀 오염을 없애는 핀 세척을 작업지시로 따로 등록했습니다. 재관측 구간에서 유온이 55 ℃ 미만이었던 몫은 58 %여서, 이 기록만으로 매뉴얼의 15분 유지를 채웠다고 하지 않습니다. 경보 해제, 완화 성공, 정비 완료는 서로 다른 완료 기준입니다.</a:t>
             </a:r>
           </a:p>
         </p:txBody>
@@ -9963,7 +9963,7 @@
                 <a:ea typeface="맑은 고딕"/>
                 <a:cs typeface="맑은 고딕"/>
               </a:rPr>
-              <a:t>고장을 일으킨 원인을 없앤다. 원인 한정이면 ADDRESSES를 단다</a:t>
+              <a:t>고장을 일으킨 원인을 없앤다. 원인마다 맞는 조치가 다르다</a:t>
             </a:r>
           </a:p>
           <a:p>
@@ -10287,7 +10287,7 @@
                 <a:ea typeface="맑은 고딕"/>
                 <a:cs typeface="맑은 고딕"/>
               </a:rPr>
-              <a:t>고장 유형 · 조치 방법 · 단계 · 근거의 연결 구조</a:t>
+              <a:t>경보 해제와 근본 조치 완료의 차이</a:t>
             </a:r>
           </a:p>
         </p:txBody>
@@ -10326,7 +10326,7 @@
                 <a:ea typeface="맑은 고딕"/>
                 <a:cs typeface="맑은 고딕"/>
               </a:rPr>
-              <a:t>고장 유형에서 조치 후보를 찾고, 원인 한정 관계와 단계·근거 절·승인 역할을 함께 확인한다.</a:t>
+              <a:t>팬 최대 운전 뒤 경보는 해제되었지만 냉각 효율은 기준에 못 미쳐, 핀 오염을 없애는 정비가 따로 필요하다.</a:t>
             </a:r>
           </a:p>
         </p:txBody>
@@ -10401,7 +10401,7 @@
       </p:sp>
       <p:pic>
         <p:nvPicPr>
-          <p:cNvPr id="6" name="삽화:조치연결_그래프.svg" descr="illust_7061860299310659188_1792037122.png"/>
+          <p:cNvPr id="6" name="Picture 5" descr="그래프_쿨러열화_TS1_CE.png"/>
           <p:cNvPicPr>
             <a:picLocks noChangeAspect="1"/>
           </p:cNvPicPr>
@@ -10415,24 +10415,97 @@
         </p:blipFill>
         <p:spPr>
           <a:xfrm>
-            <a:off x="786223" y="1627632"/>
-            <a:ext cx="10619248" cy="4727448"/>
-          </a:xfrm>
-          <a:prstGeom prst="rect">
-            <a:avLst/>
-          </a:prstGeom>
+            <a:off x="548640" y="1682496"/>
+            <a:ext cx="7223760" cy="4572000"/>
+          </a:xfrm>
+          <a:prstGeom prst="rect">
+            <a:avLst/>
+          </a:prstGeom>
+          <a:ln w="12700">
+            <a:solidFill>
+              <a:srgbClr val="D3D9E1"/>
+            </a:solidFill>
+          </a:ln>
         </p:spPr>
       </p:pic>
       <p:sp>
         <p:nvSpPr>
-          <p:cNvPr id="7" name="TextBox 6"/>
-          <p:cNvSpPr txBox="1"/>
-          <p:nvPr/>
-        </p:nvSpPr>
-        <p:spPr>
-          <a:xfrm>
-            <a:off x="1298071" y="2530574"/>
-            <a:ext cx="902636" cy="337185"/>
+          <p:cNvPr id="7" name="Oval 6"/>
+          <p:cNvSpPr/>
+          <p:nvPr/>
+        </p:nvSpPr>
+        <p:spPr>
+          <a:xfrm>
+            <a:off x="8138160" y="1682496"/>
+            <a:ext cx="347472" cy="347472"/>
+          </a:xfrm>
+          <a:prstGeom prst="ellipse">
+            <a:avLst/>
+          </a:prstGeom>
+          <a:solidFill>
+            <a:srgbClr val="5CB8F2"/>
+          </a:solidFill>
+          <a:ln>
+            <a:noFill/>
+          </a:ln>
+        </p:spPr>
+        <p:txBody>
+          <a:bodyPr rtlCol="0" anchor="ctr"/>
+          <a:lstStyle/>
+          <a:p>
+            <a:pPr algn="ctr"/>
+          </a:p>
+        </p:txBody>
+      </p:sp>
+      <p:sp>
+        <p:nvSpPr>
+          <p:cNvPr id="8" name="TextBox 7"/>
+          <p:cNvSpPr txBox="1"/>
+          <p:nvPr/>
+        </p:nvSpPr>
+        <p:spPr>
+          <a:xfrm>
+            <a:off x="8138160" y="1682496"/>
+            <a:ext cx="347472" cy="347472"/>
+          </a:xfrm>
+          <a:prstGeom prst="rect">
+            <a:avLst/>
+          </a:prstGeom>
+          <a:noFill/>
+        </p:spPr>
+        <p:txBody>
+          <a:bodyPr wrap="square" anchor="ctr"/>
+          <a:lstStyle/>
+          <a:p>
+            <a:pPr algn="ctr" eaLnBrk="0">
+              <a:lnSpc>
+                <a:spcPct val="110000"/>
+              </a:lnSpc>
+            </a:pPr>
+            <a:r>
+              <a:rPr sz="1200" b="1">
+                <a:solidFill>
+                  <a:srgbClr val="13294B"/>
+                </a:solidFill>
+                <a:latin typeface="맑은 고딕"/>
+                <a:ea typeface="맑은 고딕"/>
+                <a:cs typeface="맑은 고딕"/>
+              </a:rPr>
+              <a:t>1</a:t>
+            </a:r>
+          </a:p>
+        </p:txBody>
+      </p:sp>
+      <p:sp>
+        <p:nvSpPr>
+          <p:cNvPr id="9" name="TextBox 8"/>
+          <p:cNvSpPr txBox="1"/>
+          <p:nvPr/>
+        </p:nvSpPr>
+        <p:spPr>
+          <a:xfrm>
+            <a:off x="8549640" y="1627632"/>
+            <a:ext cx="3093415" cy="1170432"/>
           </a:xfrm>
           <a:prstGeom prst="rect">
             <a:avLst/>
@@ -10443,16 +10516,189 @@
           <a:bodyPr wrap="square" anchor="t"/>
           <a:lstStyle/>
           <a:p>
+            <a:pPr algn="l" eaLnBrk="0">
+              <a:lnSpc>
+                <a:spcPct val="110000"/>
+              </a:lnSpc>
+              <a:spcAft>
+                <a:spcPts val="400"/>
+              </a:spcAft>
+            </a:pPr>
+            <a:r>
+              <a:rPr sz="1700" b="1">
+                <a:solidFill>
+                  <a:srgbClr val="13294B"/>
+                </a:solidFill>
+                <a:latin typeface="맑은 고딕"/>
+                <a:ea typeface="맑은 고딕"/>
+                <a:cs typeface="맑은 고딕"/>
+              </a:rPr>
+              <a:t>완화의 결과</a:t>
+            </a:r>
+          </a:p>
+          <a:p>
+            <a:pPr algn="l" eaLnBrk="0">
+              <a:lnSpc>
+                <a:spcPct val="110000"/>
+              </a:lnSpc>
+              <a:spcAft>
+                <a:spcPts val="400"/>
+              </a:spcAft>
+            </a:pPr>
+            <a:r>
+              <a:rPr sz="1400" b="0">
+                <a:solidFill>
+                  <a:srgbClr val="1F2A3A"/>
+                </a:solidFill>
+                <a:latin typeface="맑은 고딕"/>
+                <a:ea typeface="맑은 고딕"/>
+                <a:cs typeface="맑은 고딕"/>
+              </a:rPr>
+              <a:t>승인 11:14:56 뒤 유온이 내려가</a:t>
+            </a:r>
+          </a:p>
+          <a:p>
+            <a:pPr algn="l" eaLnBrk="0">
+              <a:lnSpc>
+                <a:spcPct val="110000"/>
+              </a:lnSpc>
+              <a:spcAft>
+                <a:spcPts val="400"/>
+              </a:spcAft>
+            </a:pPr>
+            <a:r>
+              <a:rPr sz="1400" b="0">
+                <a:solidFill>
+                  <a:srgbClr val="1F2A3A"/>
+                </a:solidFill>
+                <a:latin typeface="맑은 고딕"/>
+                <a:ea typeface="맑은 고딕"/>
+                <a:cs typeface="맑은 고딕"/>
+              </a:rPr>
+              <a:t>경보가 해제되었다.</a:t>
+            </a:r>
+          </a:p>
+          <a:p>
+            <a:pPr algn="l" eaLnBrk="0">
+              <a:lnSpc>
+                <a:spcPct val="110000"/>
+              </a:lnSpc>
+              <a:spcAft>
+                <a:spcPts val="400"/>
+              </a:spcAft>
+            </a:pPr>
+            <a:r>
+              <a:rPr sz="1400" b="0">
+                <a:solidFill>
+                  <a:srgbClr val="1F2A3A"/>
+                </a:solidFill>
+                <a:latin typeface="맑은 고딕"/>
+                <a:ea typeface="맑은 고딕"/>
+                <a:cs typeface="맑은 고딕"/>
+              </a:rPr>
+              <a:t>재관측 구간 중 55 ℃ 미만: 58 %</a:t>
+            </a:r>
+          </a:p>
+        </p:txBody>
+      </p:sp>
+      <p:sp>
+        <p:nvSpPr>
+          <p:cNvPr id="10" name="Oval 9"/>
+          <p:cNvSpPr/>
+          <p:nvPr/>
+        </p:nvSpPr>
+        <p:spPr>
+          <a:xfrm>
+            <a:off x="8138160" y="2852928"/>
+            <a:ext cx="347472" cy="347472"/>
+          </a:xfrm>
+          <a:prstGeom prst="ellipse">
+            <a:avLst/>
+          </a:prstGeom>
+          <a:solidFill>
+            <a:srgbClr val="5CB8F2"/>
+          </a:solidFill>
+          <a:ln>
+            <a:noFill/>
+          </a:ln>
+        </p:spPr>
+        <p:txBody>
+          <a:bodyPr rtlCol="0" anchor="ctr"/>
+          <a:lstStyle/>
+          <a:p>
+            <a:pPr algn="ctr"/>
+          </a:p>
+        </p:txBody>
+      </p:sp>
+      <p:sp>
+        <p:nvSpPr>
+          <p:cNvPr id="11" name="TextBox 10"/>
+          <p:cNvSpPr txBox="1"/>
+          <p:nvPr/>
+        </p:nvSpPr>
+        <p:spPr>
+          <a:xfrm>
+            <a:off x="8138160" y="2852928"/>
+            <a:ext cx="347472" cy="347472"/>
+          </a:xfrm>
+          <a:prstGeom prst="rect">
+            <a:avLst/>
+          </a:prstGeom>
+          <a:noFill/>
+        </p:spPr>
+        <p:txBody>
+          <a:bodyPr wrap="square" anchor="ctr"/>
+          <a:lstStyle/>
+          <a:p>
             <a:pPr algn="ctr" eaLnBrk="0">
               <a:lnSpc>
                 <a:spcPct val="110000"/>
               </a:lnSpc>
+            </a:pPr>
+            <a:r>
+              <a:rPr sz="1200" b="1">
+                <a:solidFill>
+                  <a:srgbClr val="13294B"/>
+                </a:solidFill>
+                <a:latin typeface="맑은 고딕"/>
+                <a:ea typeface="맑은 고딕"/>
+                <a:cs typeface="맑은 고딕"/>
+              </a:rPr>
+              <a:t>2</a:t>
+            </a:r>
+          </a:p>
+        </p:txBody>
+      </p:sp>
+      <p:sp>
+        <p:nvSpPr>
+          <p:cNvPr id="12" name="TextBox 11"/>
+          <p:cNvSpPr txBox="1"/>
+          <p:nvPr/>
+        </p:nvSpPr>
+        <p:spPr>
+          <a:xfrm>
+            <a:off x="8549640" y="2798064"/>
+            <a:ext cx="3093415" cy="1170432"/>
+          </a:xfrm>
+          <a:prstGeom prst="rect">
+            <a:avLst/>
+          </a:prstGeom>
+          <a:noFill/>
+        </p:spPr>
+        <p:txBody>
+          <a:bodyPr wrap="square" anchor="t"/>
+          <a:lstStyle/>
+          <a:p>
+            <a:pPr algn="l" eaLnBrk="0">
+              <a:lnSpc>
+                <a:spcPct val="110000"/>
+              </a:lnSpc>
               <a:spcAft>
-                <a:spcPts val="100"/>
+                <a:spcPts val="400"/>
               </a:spcAft>
             </a:pPr>
             <a:r>
-              <a:rPr sz="1350" b="1">
+              <a:rPr sz="1700" b="1">
                 <a:solidFill>
                   <a:srgbClr val="13294B"/>
                 </a:solidFill>
@@ -10460,21 +10706,131 @@
                 <a:ea typeface="맑은 고딕"/>
                 <a:cs typeface="맑은 고딕"/>
               </a:rPr>
-              <a:t>Cause</a:t>
-            </a:r>
-          </a:p>
-        </p:txBody>
-      </p:sp>
-      <p:sp>
-        <p:nvSpPr>
-          <p:cNvPr id="8" name="TextBox 7"/>
-          <p:cNvSpPr txBox="1"/>
-          <p:nvPr/>
-        </p:nvSpPr>
-        <p:spPr>
-          <a:xfrm>
-            <a:off x="3271127" y="4279730"/>
-            <a:ext cx="1338025" cy="337185"/>
+              <a:t>남은 원인</a:t>
+            </a:r>
+          </a:p>
+          <a:p>
+            <a:pPr algn="l" eaLnBrk="0">
+              <a:lnSpc>
+                <a:spcPct val="110000"/>
+              </a:lnSpc>
+              <a:spcAft>
+                <a:spcPts val="400"/>
+              </a:spcAft>
+            </a:pPr>
+            <a:r>
+              <a:rPr sz="1400" b="0">
+                <a:solidFill>
+                  <a:srgbClr val="1F2A3A"/>
+                </a:solidFill>
+                <a:latin typeface="맑은 고딕"/>
+                <a:ea typeface="맑은 고딕"/>
+                <a:cs typeface="맑은 고딕"/>
+              </a:rPr>
+              <a:t>냉각 효율은 경보 기준 70 %에</a:t>
+            </a:r>
+          </a:p>
+          <a:p>
+            <a:pPr algn="l" eaLnBrk="0">
+              <a:lnSpc>
+                <a:spcPct val="110000"/>
+              </a:lnSpc>
+              <a:spcAft>
+                <a:spcPts val="400"/>
+              </a:spcAft>
+            </a:pPr>
+            <a:r>
+              <a:rPr sz="1400" b="0">
+                <a:solidFill>
+                  <a:srgbClr val="1F2A3A"/>
+                </a:solidFill>
+                <a:latin typeface="맑은 고딕"/>
+                <a:ea typeface="맑은 고딕"/>
+                <a:cs typeface="맑은 고딕"/>
+              </a:rPr>
+              <a:t>못 미친다. 핀 오염은 그대로다.</a:t>
+            </a:r>
+          </a:p>
+        </p:txBody>
+      </p:sp>
+      <p:sp>
+        <p:nvSpPr>
+          <p:cNvPr id="13" name="Oval 12"/>
+          <p:cNvSpPr/>
+          <p:nvPr/>
+        </p:nvSpPr>
+        <p:spPr>
+          <a:xfrm>
+            <a:off x="8138160" y="4023359"/>
+            <a:ext cx="347472" cy="347472"/>
+          </a:xfrm>
+          <a:prstGeom prst="ellipse">
+            <a:avLst/>
+          </a:prstGeom>
+          <a:solidFill>
+            <a:srgbClr val="13294B"/>
+          </a:solidFill>
+          <a:ln>
+            <a:noFill/>
+          </a:ln>
+        </p:spPr>
+        <p:txBody>
+          <a:bodyPr rtlCol="0" anchor="ctr"/>
+          <a:lstStyle/>
+          <a:p>
+            <a:pPr algn="ctr"/>
+          </a:p>
+        </p:txBody>
+      </p:sp>
+      <p:sp>
+        <p:nvSpPr>
+          <p:cNvPr id="14" name="TextBox 13"/>
+          <p:cNvSpPr txBox="1"/>
+          <p:nvPr/>
+        </p:nvSpPr>
+        <p:spPr>
+          <a:xfrm>
+            <a:off x="8138160" y="4023359"/>
+            <a:ext cx="347472" cy="347472"/>
+          </a:xfrm>
+          <a:prstGeom prst="rect">
+            <a:avLst/>
+          </a:prstGeom>
+          <a:noFill/>
+        </p:spPr>
+        <p:txBody>
+          <a:bodyPr wrap="square" anchor="ctr"/>
+          <a:lstStyle/>
+          <a:p>
+            <a:pPr algn="ctr" eaLnBrk="0">
+              <a:lnSpc>
+                <a:spcPct val="110000"/>
+              </a:lnSpc>
+            </a:pPr>
+            <a:r>
+              <a:rPr sz="1200" b="1">
+                <a:solidFill>
+                  <a:srgbClr val="FFFFFF"/>
+                </a:solidFill>
+                <a:latin typeface="맑은 고딕"/>
+                <a:ea typeface="맑은 고딕"/>
+                <a:cs typeface="맑은 고딕"/>
+              </a:rPr>
+              <a:t>3</a:t>
+            </a:r>
+          </a:p>
+        </p:txBody>
+      </p:sp>
+      <p:sp>
+        <p:nvSpPr>
+          <p:cNvPr id="15" name="TextBox 14"/>
+          <p:cNvSpPr txBox="1"/>
+          <p:nvPr/>
+        </p:nvSpPr>
+        <p:spPr>
+          <a:xfrm>
+            <a:off x="8549640" y="3968496"/>
+            <a:ext cx="3093415" cy="1170432"/>
           </a:xfrm>
           <a:prstGeom prst="rect">
             <a:avLst/>
@@ -10485,16 +10841,168 @@
           <a:bodyPr wrap="square" anchor="t"/>
           <a:lstStyle/>
           <a:p>
+            <a:pPr algn="l" eaLnBrk="0">
+              <a:lnSpc>
+                <a:spcPct val="110000"/>
+              </a:lnSpc>
+              <a:spcAft>
+                <a:spcPts val="400"/>
+              </a:spcAft>
+            </a:pPr>
+            <a:r>
+              <a:rPr sz="1700" b="1">
+                <a:solidFill>
+                  <a:srgbClr val="13294B"/>
+                </a:solidFill>
+                <a:latin typeface="맑은 고딕"/>
+                <a:ea typeface="맑은 고딕"/>
+                <a:cs typeface="맑은 고딕"/>
+              </a:rPr>
+              <a:t>근본 조치의 상태</a:t>
+            </a:r>
+          </a:p>
+          <a:p>
+            <a:pPr algn="l" eaLnBrk="0">
+              <a:lnSpc>
+                <a:spcPct val="110000"/>
+              </a:lnSpc>
+              <a:spcAft>
+                <a:spcPts val="400"/>
+              </a:spcAft>
+            </a:pPr>
+            <a:r>
+              <a:rPr sz="1400" b="0">
+                <a:solidFill>
+                  <a:srgbClr val="1F2A3A"/>
+                </a:solidFill>
+                <a:latin typeface="맑은 고딕"/>
+                <a:ea typeface="맑은 고딕"/>
+                <a:cs typeface="맑은 고딕"/>
+              </a:rPr>
+              <a:t>핀 세척은 작업지시로 등록되었다.</a:t>
+            </a:r>
+          </a:p>
+          <a:p>
+            <a:pPr algn="l" eaLnBrk="0">
+              <a:lnSpc>
+                <a:spcPct val="110000"/>
+              </a:lnSpc>
+              <a:spcAft>
+                <a:spcPts val="400"/>
+              </a:spcAft>
+            </a:pPr>
+            <a:r>
+              <a:rPr sz="1400" b="0">
+                <a:solidFill>
+                  <a:srgbClr val="1F2A3A"/>
+                </a:solidFill>
+                <a:latin typeface="맑은 고딕"/>
+                <a:ea typeface="맑은 고딕"/>
+                <a:cs typeface="맑은 고딕"/>
+              </a:rPr>
+              <a:t>등록은 정비 완료가 아니다.</a:t>
+            </a:r>
+          </a:p>
+        </p:txBody>
+      </p:sp>
+      <p:sp>
+        <p:nvSpPr>
+          <p:cNvPr id="16" name="Oval 15"/>
+          <p:cNvSpPr/>
+          <p:nvPr/>
+        </p:nvSpPr>
+        <p:spPr>
+          <a:xfrm>
+            <a:off x="8138160" y="5193792"/>
+            <a:ext cx="347472" cy="347472"/>
+          </a:xfrm>
+          <a:prstGeom prst="ellipse">
+            <a:avLst/>
+          </a:prstGeom>
+          <a:solidFill>
+            <a:srgbClr val="13294B"/>
+          </a:solidFill>
+          <a:ln>
+            <a:noFill/>
+          </a:ln>
+        </p:spPr>
+        <p:txBody>
+          <a:bodyPr rtlCol="0" anchor="ctr"/>
+          <a:lstStyle/>
+          <a:p>
+            <a:pPr algn="ctr"/>
+          </a:p>
+        </p:txBody>
+      </p:sp>
+      <p:sp>
+        <p:nvSpPr>
+          <p:cNvPr id="17" name="TextBox 16"/>
+          <p:cNvSpPr txBox="1"/>
+          <p:nvPr/>
+        </p:nvSpPr>
+        <p:spPr>
+          <a:xfrm>
+            <a:off x="8138160" y="5193792"/>
+            <a:ext cx="347472" cy="347472"/>
+          </a:xfrm>
+          <a:prstGeom prst="rect">
+            <a:avLst/>
+          </a:prstGeom>
+          <a:noFill/>
+        </p:spPr>
+        <p:txBody>
+          <a:bodyPr wrap="square" anchor="ctr"/>
+          <a:lstStyle/>
+          <a:p>
             <a:pPr algn="ctr" eaLnBrk="0">
               <a:lnSpc>
                 <a:spcPct val="110000"/>
               </a:lnSpc>
+            </a:pPr>
+            <a:r>
+              <a:rPr sz="1200" b="1">
+                <a:solidFill>
+                  <a:srgbClr val="FFFFFF"/>
+                </a:solidFill>
+                <a:latin typeface="맑은 고딕"/>
+                <a:ea typeface="맑은 고딕"/>
+                <a:cs typeface="맑은 고딕"/>
+              </a:rPr>
+              <a:t>4</a:t>
+            </a:r>
+          </a:p>
+        </p:txBody>
+      </p:sp>
+      <p:sp>
+        <p:nvSpPr>
+          <p:cNvPr id="18" name="TextBox 17"/>
+          <p:cNvSpPr txBox="1"/>
+          <p:nvPr/>
+        </p:nvSpPr>
+        <p:spPr>
+          <a:xfrm>
+            <a:off x="8549640" y="5138928"/>
+            <a:ext cx="3093415" cy="1170432"/>
+          </a:xfrm>
+          <a:prstGeom prst="rect">
+            <a:avLst/>
+          </a:prstGeom>
+          <a:noFill/>
+        </p:spPr>
+        <p:txBody>
+          <a:bodyPr wrap="square" anchor="t"/>
+          <a:lstStyle/>
+          <a:p>
+            <a:pPr algn="l" eaLnBrk="0">
+              <a:lnSpc>
+                <a:spcPct val="110000"/>
+              </a:lnSpc>
               <a:spcAft>
-                <a:spcPts val="100"/>
+                <a:spcPts val="400"/>
               </a:spcAft>
             </a:pPr>
             <a:r>
-              <a:rPr sz="1350" b="1">
+              <a:rPr sz="1700" b="1">
                 <a:solidFill>
                   <a:srgbClr val="13294B"/>
                 </a:solidFill>
@@ -10502,511 +11010,70 @@
                 <a:ea typeface="맑은 고딕"/>
                 <a:cs typeface="맑은 고딕"/>
               </a:rPr>
-              <a:t>FailureMode</a:t>
-            </a:r>
-          </a:p>
-        </p:txBody>
-      </p:sp>
-      <p:sp>
-        <p:nvSpPr>
-          <p:cNvPr id="9" name="TextBox 8"/>
-          <p:cNvSpPr txBox="1"/>
-          <p:nvPr/>
-        </p:nvSpPr>
-        <p:spPr>
-          <a:xfrm>
-            <a:off x="6021512" y="2790584"/>
-            <a:ext cx="743347" cy="337185"/>
-          </a:xfrm>
-          <a:prstGeom prst="rect">
-            <a:avLst/>
-          </a:prstGeom>
-          <a:noFill/>
-        </p:spPr>
-        <p:txBody>
-          <a:bodyPr wrap="square" anchor="t"/>
-          <a:lstStyle/>
-          <a:p>
-            <a:pPr algn="ctr" eaLnBrk="0">
+              <a:t>서로 다른 완료 기준</a:t>
+            </a:r>
+          </a:p>
+          <a:p>
+            <a:pPr algn="l" eaLnBrk="0">
               <a:lnSpc>
                 <a:spcPct val="110000"/>
               </a:lnSpc>
               <a:spcAft>
-                <a:spcPts val="100"/>
+                <a:spcPts val="400"/>
               </a:spcAft>
             </a:pPr>
             <a:r>
-              <a:rPr sz="1350" b="1">
-                <a:solidFill>
-                  <a:srgbClr val="13294B"/>
-                </a:solidFill>
-                <a:latin typeface="맑은 고딕"/>
-                <a:ea typeface="맑은 고딕"/>
-                <a:cs typeface="맑은 고딕"/>
-              </a:rPr>
-              <a:t>Skill</a:t>
-            </a:r>
-          </a:p>
-        </p:txBody>
-      </p:sp>
-      <p:sp>
-        <p:nvSpPr>
-          <p:cNvPr id="10" name="TextBox 9"/>
-          <p:cNvSpPr txBox="1"/>
-          <p:nvPr/>
-        </p:nvSpPr>
-        <p:spPr>
-          <a:xfrm>
-            <a:off x="8320580" y="2090921"/>
-            <a:ext cx="690251" cy="337185"/>
-          </a:xfrm>
-          <a:prstGeom prst="rect">
-            <a:avLst/>
-          </a:prstGeom>
-          <a:noFill/>
-        </p:spPr>
-        <p:txBody>
-          <a:bodyPr wrap="square" anchor="t"/>
-          <a:lstStyle/>
-          <a:p>
-            <a:pPr algn="ctr" eaLnBrk="0">
+              <a:rPr sz="1400" b="0">
+                <a:solidFill>
+                  <a:srgbClr val="1F2A3A"/>
+                </a:solidFill>
+                <a:latin typeface="맑은 고딕"/>
+                <a:ea typeface="맑은 고딕"/>
+                <a:cs typeface="맑은 고딕"/>
+              </a:rPr>
+              <a:t>경보 해제</a:t>
+            </a:r>
+          </a:p>
+          <a:p>
+            <a:pPr algn="l" eaLnBrk="0">
               <a:lnSpc>
                 <a:spcPct val="110000"/>
               </a:lnSpc>
               <a:spcAft>
-                <a:spcPts val="100"/>
+                <a:spcPts val="400"/>
               </a:spcAft>
             </a:pPr>
             <a:r>
-              <a:rPr sz="1350" b="1">
-                <a:solidFill>
-                  <a:srgbClr val="13294B"/>
-                </a:solidFill>
-                <a:latin typeface="맑은 고딕"/>
-                <a:ea typeface="맑은 고딕"/>
-                <a:cs typeface="맑은 고딕"/>
-              </a:rPr>
-              <a:t>Role</a:t>
-            </a:r>
-          </a:p>
-        </p:txBody>
-      </p:sp>
-      <p:sp>
-        <p:nvSpPr>
-          <p:cNvPr id="11" name="TextBox 10"/>
-          <p:cNvSpPr txBox="1"/>
-          <p:nvPr/>
-        </p:nvSpPr>
-        <p:spPr>
-          <a:xfrm>
-            <a:off x="7885190" y="4369551"/>
-            <a:ext cx="690251" cy="337185"/>
-          </a:xfrm>
-          <a:prstGeom prst="rect">
-            <a:avLst/>
-          </a:prstGeom>
-          <a:noFill/>
-        </p:spPr>
-        <p:txBody>
-          <a:bodyPr wrap="square" anchor="t"/>
-          <a:lstStyle/>
-          <a:p>
-            <a:pPr algn="ctr" eaLnBrk="0">
+              <a:rPr sz="1400" b="0">
+                <a:solidFill>
+                  <a:srgbClr val="1F2A3A"/>
+                </a:solidFill>
+                <a:latin typeface="맑은 고딕"/>
+                <a:ea typeface="맑은 고딕"/>
+                <a:cs typeface="맑은 고딕"/>
+              </a:rPr>
+              <a:t>완화 성공: 15분 유지</a:t>
+            </a:r>
+          </a:p>
+          <a:p>
+            <a:pPr algn="l" eaLnBrk="0">
               <a:lnSpc>
                 <a:spcPct val="110000"/>
               </a:lnSpc>
               <a:spcAft>
-                <a:spcPts val="100"/>
+                <a:spcPts val="400"/>
               </a:spcAft>
             </a:pPr>
             <a:r>
-              <a:rPr sz="1350" b="1">
-                <a:solidFill>
-                  <a:srgbClr val="13294B"/>
-                </a:solidFill>
-                <a:latin typeface="맑은 고딕"/>
-                <a:ea typeface="맑은 고딕"/>
-                <a:cs typeface="맑은 고딕"/>
-              </a:rPr>
-              <a:t>Step</a:t>
-            </a:r>
-          </a:p>
-        </p:txBody>
-      </p:sp>
-      <p:sp>
-        <p:nvSpPr>
-          <p:cNvPr id="12" name="TextBox 11"/>
-          <p:cNvSpPr txBox="1"/>
-          <p:nvPr/>
-        </p:nvSpPr>
-        <p:spPr>
-          <a:xfrm>
-            <a:off x="9701082" y="3665162"/>
-            <a:ext cx="1433598" cy="337185"/>
-          </a:xfrm>
-          <a:prstGeom prst="rect">
-            <a:avLst/>
-          </a:prstGeom>
-          <a:noFill/>
-        </p:spPr>
-        <p:txBody>
-          <a:bodyPr wrap="square" anchor="t"/>
-          <a:lstStyle/>
-          <a:p>
-            <a:pPr algn="ctr" eaLnBrk="0">
-              <a:lnSpc>
-                <a:spcPct val="110000"/>
-              </a:lnSpc>
-              <a:spcAft>
-                <a:spcPts val="100"/>
-              </a:spcAft>
-            </a:pPr>
-            <a:r>
-              <a:rPr sz="1350" b="1">
-                <a:solidFill>
-                  <a:srgbClr val="13294B"/>
-                </a:solidFill>
-                <a:latin typeface="맑은 고딕"/>
-                <a:ea typeface="맑은 고딕"/>
-                <a:cs typeface="맑은 고딕"/>
-              </a:rPr>
-              <a:t>ManualSection</a:t>
-            </a:r>
-          </a:p>
-        </p:txBody>
-      </p:sp>
-      <p:sp>
-        <p:nvSpPr>
-          <p:cNvPr id="13" name="TextBox 12"/>
-          <p:cNvSpPr txBox="1"/>
-          <p:nvPr/>
-        </p:nvSpPr>
-        <p:spPr>
-          <a:xfrm>
-            <a:off x="2028675" y="3754983"/>
-            <a:ext cx="849539" cy="298450"/>
-          </a:xfrm>
-          <a:prstGeom prst="rect">
-            <a:avLst/>
-          </a:prstGeom>
-          <a:noFill/>
-        </p:spPr>
-        <p:txBody>
-          <a:bodyPr wrap="square" anchor="t"/>
-          <a:lstStyle/>
-          <a:p>
-            <a:pPr algn="ctr" eaLnBrk="0">
-              <a:lnSpc>
-                <a:spcPct val="110000"/>
-              </a:lnSpc>
-              <a:spcAft>
-                <a:spcPts val="100"/>
-              </a:spcAft>
-            </a:pPr>
-            <a:r>
-              <a:rPr sz="1100" b="0">
-                <a:solidFill>
-                  <a:srgbClr val="13294B"/>
-                </a:solidFill>
-                <a:latin typeface="맑은 고딕"/>
-                <a:ea typeface="맑은 고딕"/>
-                <a:cs typeface="맑은 고딕"/>
-              </a:rPr>
-              <a:t>CAUSES</a:t>
-            </a:r>
-          </a:p>
-        </p:txBody>
-      </p:sp>
-      <p:sp>
-        <p:nvSpPr>
-          <p:cNvPr id="14" name="TextBox 13"/>
-          <p:cNvSpPr txBox="1"/>
-          <p:nvPr/>
-        </p:nvSpPr>
-        <p:spPr>
-          <a:xfrm>
-            <a:off x="4927730" y="4081177"/>
-            <a:ext cx="1168117" cy="639318"/>
-          </a:xfrm>
-          <a:prstGeom prst="rect">
-            <a:avLst/>
-          </a:prstGeom>
-          <a:noFill/>
-        </p:spPr>
-        <p:txBody>
-          <a:bodyPr wrap="square" anchor="t"/>
-          <a:lstStyle/>
-          <a:p>
-            <a:pPr algn="ctr" eaLnBrk="0">
-              <a:lnSpc>
-                <a:spcPct val="110000"/>
-              </a:lnSpc>
-              <a:spcAft>
-                <a:spcPts val="100"/>
-              </a:spcAft>
-            </a:pPr>
-            <a:r>
-              <a:rPr sz="1050" b="0">
-                <a:solidFill>
-                  <a:srgbClr val="13294B"/>
-                </a:solidFill>
-                <a:latin typeface="맑은 고딕"/>
-                <a:ea typeface="맑은 고딕"/>
-                <a:cs typeface="맑은 고딕"/>
-              </a:rPr>
-              <a:t>MITIGATED_BY</a:t>
-            </a:r>
-          </a:p>
-          <a:p>
-            <a:pPr algn="ctr" eaLnBrk="0">
-              <a:lnSpc>
-                <a:spcPct val="110000"/>
-              </a:lnSpc>
-              <a:spcAft>
-                <a:spcPts val="100"/>
-              </a:spcAft>
-            </a:pPr>
-            <a:r>
-              <a:rPr sz="1050" b="0">
-                <a:solidFill>
-                  <a:srgbClr val="13294B"/>
-                </a:solidFill>
-                <a:latin typeface="맑은 고딕"/>
-                <a:ea typeface="맑은 고딕"/>
-                <a:cs typeface="맑은 고딕"/>
-              </a:rPr>
-              <a:t>REMEDIED_BY</a:t>
-            </a:r>
-          </a:p>
-        </p:txBody>
-      </p:sp>
-      <p:sp>
-        <p:nvSpPr>
-          <p:cNvPr id="15" name="TextBox 14"/>
-          <p:cNvSpPr txBox="1"/>
-          <p:nvPr/>
-        </p:nvSpPr>
-        <p:spPr>
-          <a:xfrm>
-            <a:off x="3483512" y="2398206"/>
-            <a:ext cx="1168117" cy="298450"/>
-          </a:xfrm>
-          <a:prstGeom prst="rect">
-            <a:avLst/>
-          </a:prstGeom>
-          <a:noFill/>
-        </p:spPr>
-        <p:txBody>
-          <a:bodyPr wrap="square" anchor="t"/>
-          <a:lstStyle/>
-          <a:p>
-            <a:pPr algn="ctr" eaLnBrk="0">
-              <a:lnSpc>
-                <a:spcPct val="110000"/>
-              </a:lnSpc>
-              <a:spcAft>
-                <a:spcPts val="100"/>
-              </a:spcAft>
-            </a:pPr>
-            <a:r>
-              <a:rPr sz="1100" b="0">
-                <a:solidFill>
-                  <a:srgbClr val="13294B"/>
-                </a:solidFill>
-                <a:latin typeface="맑은 고딕"/>
-                <a:ea typeface="맑은 고딕"/>
-                <a:cs typeface="맑은 고딕"/>
-              </a:rPr>
-              <a:t>ADDRESSES</a:t>
-            </a:r>
-          </a:p>
-        </p:txBody>
-      </p:sp>
-      <p:sp>
-        <p:nvSpPr>
-          <p:cNvPr id="16" name="TextBox 15"/>
-          <p:cNvSpPr txBox="1"/>
-          <p:nvPr/>
-        </p:nvSpPr>
-        <p:spPr>
-          <a:xfrm>
-            <a:off x="6626810" y="2005827"/>
-            <a:ext cx="1274309" cy="298450"/>
-          </a:xfrm>
-          <a:prstGeom prst="rect">
-            <a:avLst/>
-          </a:prstGeom>
-          <a:noFill/>
-        </p:spPr>
-        <p:txBody>
-          <a:bodyPr wrap="square" anchor="t"/>
-          <a:lstStyle/>
-          <a:p>
-            <a:pPr algn="ctr" eaLnBrk="0">
-              <a:lnSpc>
-                <a:spcPct val="110000"/>
-              </a:lnSpc>
-              <a:spcAft>
-                <a:spcPts val="100"/>
-              </a:spcAft>
-            </a:pPr>
-            <a:r>
-              <a:rPr sz="1100" b="0">
-                <a:solidFill>
-                  <a:srgbClr val="13294B"/>
-                </a:solidFill>
-                <a:latin typeface="맑은 고딕"/>
-                <a:ea typeface="맑은 고딕"/>
-                <a:cs typeface="맑은 고딕"/>
-              </a:rPr>
-              <a:t>APPROVED_BY</a:t>
-            </a:r>
-          </a:p>
-        </p:txBody>
-      </p:sp>
-      <p:sp>
-        <p:nvSpPr>
-          <p:cNvPr id="17" name="TextBox 16"/>
-          <p:cNvSpPr txBox="1"/>
-          <p:nvPr/>
-        </p:nvSpPr>
-        <p:spPr>
-          <a:xfrm>
-            <a:off x="6329471" y="4019720"/>
-            <a:ext cx="1168117" cy="298450"/>
-          </a:xfrm>
-          <a:prstGeom prst="rect">
-            <a:avLst/>
-          </a:prstGeom>
-          <a:noFill/>
-        </p:spPr>
-        <p:txBody>
-          <a:bodyPr wrap="square" anchor="t"/>
-          <a:lstStyle/>
-          <a:p>
-            <a:pPr algn="ctr" eaLnBrk="0">
-              <a:lnSpc>
-                <a:spcPct val="110000"/>
-              </a:lnSpc>
-              <a:spcAft>
-                <a:spcPts val="100"/>
-              </a:spcAft>
-            </a:pPr>
-            <a:r>
-              <a:rPr sz="1100" b="0">
-                <a:solidFill>
-                  <a:srgbClr val="13294B"/>
-                </a:solidFill>
-                <a:latin typeface="맑은 고딕"/>
-                <a:ea typeface="맑은 고딕"/>
-                <a:cs typeface="맑은 고딕"/>
-              </a:rPr>
-              <a:t>HAS_STEP</a:t>
-            </a:r>
-          </a:p>
-        </p:txBody>
-      </p:sp>
-      <p:sp>
-        <p:nvSpPr>
-          <p:cNvPr id="18" name="TextBox 17"/>
-          <p:cNvSpPr txBox="1"/>
-          <p:nvPr/>
-        </p:nvSpPr>
-        <p:spPr>
-          <a:xfrm>
-            <a:off x="8867471" y="4544467"/>
-            <a:ext cx="1168117" cy="298450"/>
-          </a:xfrm>
-          <a:prstGeom prst="rect">
-            <a:avLst/>
-          </a:prstGeom>
-          <a:noFill/>
-        </p:spPr>
-        <p:txBody>
-          <a:bodyPr wrap="square" anchor="t"/>
-          <a:lstStyle/>
-          <a:p>
-            <a:pPr algn="ctr" eaLnBrk="0">
-              <a:lnSpc>
-                <a:spcPct val="110000"/>
-              </a:lnSpc>
-              <a:spcAft>
-                <a:spcPts val="100"/>
-              </a:spcAft>
-            </a:pPr>
-            <a:r>
-              <a:rPr sz="1100" b="0">
-                <a:solidFill>
-                  <a:srgbClr val="13294B"/>
-                </a:solidFill>
-                <a:latin typeface="맑은 고딕"/>
-                <a:ea typeface="맑은 고딕"/>
-                <a:cs typeface="맑은 고딕"/>
-              </a:rPr>
-              <a:t>REFERS_TO</a:t>
-            </a:r>
-          </a:p>
-        </p:txBody>
-      </p:sp>
-      <p:sp>
-        <p:nvSpPr>
-          <p:cNvPr id="19" name="TextBox 18"/>
-          <p:cNvSpPr txBox="1"/>
-          <p:nvPr/>
-        </p:nvSpPr>
-        <p:spPr>
-          <a:xfrm>
-            <a:off x="1423378" y="5669600"/>
-            <a:ext cx="9344938" cy="507618"/>
-          </a:xfrm>
-          <a:prstGeom prst="rect">
-            <a:avLst/>
-          </a:prstGeom>
-          <a:noFill/>
-        </p:spPr>
-        <p:txBody>
-          <a:bodyPr wrap="square" anchor="t"/>
-          <a:lstStyle/>
-          <a:p>
-            <a:pPr algn="ctr" eaLnBrk="0">
-              <a:lnSpc>
-                <a:spcPct val="110000"/>
-              </a:lnSpc>
-              <a:spcAft>
-                <a:spcPts val="100"/>
-              </a:spcAft>
-            </a:pPr>
-            <a:r>
-              <a:rPr sz="1350" b="1">
-                <a:solidFill>
-                  <a:srgbClr val="13294B"/>
-                </a:solidFill>
-                <a:latin typeface="맑은 고딕"/>
-                <a:ea typeface="맑은 고딕"/>
-                <a:cs typeface="맑은 고딕"/>
-              </a:rPr>
-              <a:t>쿨러 사건의 연결</a:t>
-            </a:r>
-          </a:p>
-          <a:p>
-            <a:pPr algn="ctr" eaLnBrk="0">
-              <a:lnSpc>
-                <a:spcPct val="110000"/>
-              </a:lnSpc>
-              <a:spcAft>
-                <a:spcPts val="100"/>
-              </a:spcAft>
-            </a:pPr>
-            <a:r>
-              <a:rPr sz="1100" b="0">
-                <a:solidFill>
-                  <a:srgbClr val="556175"/>
-                </a:solidFill>
-                <a:latin typeface="맑은 고딕"/>
-                <a:ea typeface="맑은 고딕"/>
-                <a:cs typeface="맑은 고딕"/>
-              </a:rPr>
-              <a:t>쿨러 핀 오염 → 쿨러 냉각 성능 상실 → SOP-COOL-11 팬 최대 운전 → 단계 1~3 → HM-8.5 · 운전원</a:t>
+              <a:rPr sz="1400" b="0">
+                <a:solidFill>
+                  <a:srgbClr val="1F2A3A"/>
+                </a:solidFill>
+                <a:latin typeface="맑은 고딕"/>
+                <a:ea typeface="맑은 고딕"/>
+                <a:cs typeface="맑은 고딕"/>
+              </a:rPr>
+              <a:t>정비 완료: 재가동 뒤 CE 80 % 이상</a:t>
             </a:r>
           </a:p>
         </p:txBody>
@@ -11071,7 +11138,7 @@
                 <a:ea typeface="맑은 고딕"/>
                 <a:cs typeface="맑은 고딕"/>
               </a:rPr>
-              <a:t>경보 해제와 근본 조치 완료의 차이</a:t>
+              <a:t>고장 유형 · 조치 방법 · 단계 · 근거의 연결 구조</a:t>
             </a:r>
           </a:p>
         </p:txBody>
@@ -11110,7 +11177,7 @@
                 <a:ea typeface="맑은 고딕"/>
                 <a:cs typeface="맑은 고딕"/>
               </a:rPr>
-              <a:t>팬 최대 운전 뒤 경보는 해제되었지만 냉각 효율은 기준에 못 미쳐, 핀 오염을 없애는 정비가 따로 필요하다.</a:t>
+              <a:t>고장 유형에서 조치 후보를 찾고, 원인 한정 관계와 단계·근거 절·승인 역할을 함께 확인한다.</a:t>
             </a:r>
           </a:p>
         </p:txBody>
@@ -11185,7 +11252,7 @@
       </p:sp>
       <p:pic>
         <p:nvPicPr>
-          <p:cNvPr id="6" name="Picture 5" descr="그래프_쿨러열화_TS1_CE.png"/>
+          <p:cNvPr id="6" name="삽화:조치연결_그래프.svg" descr="illust_5749565405265043420_1792123197.png"/>
           <p:cNvPicPr>
             <a:picLocks noChangeAspect="1"/>
           </p:cNvPicPr>
@@ -11199,45 +11266,53 @@
         </p:blipFill>
         <p:spPr>
           <a:xfrm>
-            <a:off x="548640" y="1682496"/>
-            <a:ext cx="7223760" cy="4572000"/>
-          </a:xfrm>
-          <a:prstGeom prst="rect">
-            <a:avLst/>
-          </a:prstGeom>
-          <a:ln w="12700">
-            <a:solidFill>
-              <a:srgbClr val="D3D9E1"/>
-            </a:solidFill>
-          </a:ln>
+            <a:off x="786223" y="1627632"/>
+            <a:ext cx="10619248" cy="4727448"/>
+          </a:xfrm>
+          <a:prstGeom prst="rect">
+            <a:avLst/>
+          </a:prstGeom>
         </p:spPr>
       </p:pic>
       <p:sp>
         <p:nvSpPr>
-          <p:cNvPr id="7" name="Oval 6"/>
-          <p:cNvSpPr/>
-          <p:nvPr/>
-        </p:nvSpPr>
-        <p:spPr>
-          <a:xfrm>
-            <a:off x="8138160" y="1682496"/>
-            <a:ext cx="347472" cy="347472"/>
-          </a:xfrm>
-          <a:prstGeom prst="ellipse">
-            <a:avLst/>
-          </a:prstGeom>
-          <a:solidFill>
-            <a:srgbClr val="5CB8F2"/>
-          </a:solidFill>
-          <a:ln>
-            <a:noFill/>
-          </a:ln>
-        </p:spPr>
-        <p:txBody>
-          <a:bodyPr rtlCol="0" anchor="ctr"/>
-          <a:lstStyle/>
-          <a:p>
-            <a:pPr algn="ctr"/>
+          <p:cNvPr id="7" name="TextBox 6"/>
+          <p:cNvSpPr txBox="1"/>
+          <p:nvPr/>
+        </p:nvSpPr>
+        <p:spPr>
+          <a:xfrm>
+            <a:off x="1298071" y="2530574"/>
+            <a:ext cx="902636" cy="337185"/>
+          </a:xfrm>
+          <a:prstGeom prst="rect">
+            <a:avLst/>
+          </a:prstGeom>
+          <a:noFill/>
+        </p:spPr>
+        <p:txBody>
+          <a:bodyPr wrap="square" anchor="t"/>
+          <a:lstStyle/>
+          <a:p>
+            <a:pPr algn="ctr" eaLnBrk="0">
+              <a:lnSpc>
+                <a:spcPct val="110000"/>
+              </a:lnSpc>
+              <a:spcAft>
+                <a:spcPts val="100"/>
+              </a:spcAft>
+            </a:pPr>
+            <a:r>
+              <a:rPr sz="1350" b="1">
+                <a:solidFill>
+                  <a:srgbClr val="13294B"/>
+                </a:solidFill>
+                <a:latin typeface="맑은 고딕"/>
+                <a:ea typeface="맑은 고딕"/>
+                <a:cs typeface="맑은 고딕"/>
+              </a:rPr>
+              <a:t>Cause</a:t>
+            </a:r>
           </a:p>
         </p:txBody>
       </p:sp>
@@ -11249,25 +11324,28 @@
         </p:nvSpPr>
         <p:spPr>
           <a:xfrm>
-            <a:off x="8138160" y="1682496"/>
-            <a:ext cx="347472" cy="347472"/>
-          </a:xfrm>
-          <a:prstGeom prst="rect">
-            <a:avLst/>
-          </a:prstGeom>
-          <a:noFill/>
-        </p:spPr>
-        <p:txBody>
-          <a:bodyPr wrap="square" anchor="ctr"/>
+            <a:off x="3271127" y="4279730"/>
+            <a:ext cx="1338025" cy="337185"/>
+          </a:xfrm>
+          <a:prstGeom prst="rect">
+            <a:avLst/>
+          </a:prstGeom>
+          <a:noFill/>
+        </p:spPr>
+        <p:txBody>
+          <a:bodyPr wrap="square" anchor="t"/>
           <a:lstStyle/>
           <a:p>
             <a:pPr algn="ctr" eaLnBrk="0">
               <a:lnSpc>
                 <a:spcPct val="110000"/>
               </a:lnSpc>
-            </a:pPr>
-            <a:r>
-              <a:rPr sz="1200" b="1">
+              <a:spcAft>
+                <a:spcPts val="100"/>
+              </a:spcAft>
+            </a:pPr>
+            <a:r>
+              <a:rPr sz="1350" b="1">
                 <a:solidFill>
                   <a:srgbClr val="13294B"/>
                 </a:solidFill>
@@ -11275,7 +11353,7 @@
                 <a:ea typeface="맑은 고딕"/>
                 <a:cs typeface="맑은 고딕"/>
               </a:rPr>
-              <a:t>1</a:t>
+              <a:t>FailureMode</a:t>
             </a:r>
           </a:p>
         </p:txBody>
@@ -11288,8 +11366,8 @@
         </p:nvSpPr>
         <p:spPr>
           <a:xfrm>
-            <a:off x="8549640" y="1627632"/>
-            <a:ext cx="3093415" cy="1170432"/>
+            <a:off x="6021512" y="2790584"/>
+            <a:ext cx="743347" cy="337185"/>
           </a:xfrm>
           <a:prstGeom prst="rect">
             <a:avLst/>
@@ -11300,16 +11378,16 @@
           <a:bodyPr wrap="square" anchor="t"/>
           <a:lstStyle/>
           <a:p>
-            <a:pPr algn="l" eaLnBrk="0">
+            <a:pPr algn="ctr" eaLnBrk="0">
               <a:lnSpc>
                 <a:spcPct val="110000"/>
               </a:lnSpc>
               <a:spcAft>
-                <a:spcPts val="400"/>
+                <a:spcPts val="100"/>
               </a:spcAft>
             </a:pPr>
             <a:r>
-              <a:rPr sz="1700" b="1">
+              <a:rPr sz="1350" b="1">
                 <a:solidFill>
                   <a:srgbClr val="13294B"/>
                 </a:solidFill>
@@ -11317,109 +11395,125 @@
                 <a:ea typeface="맑은 고딕"/>
                 <a:cs typeface="맑은 고딕"/>
               </a:rPr>
-              <a:t>완화의 결과</a:t>
-            </a:r>
-          </a:p>
-          <a:p>
-            <a:pPr algn="l" eaLnBrk="0">
+              <a:t>Skill</a:t>
+            </a:r>
+          </a:p>
+        </p:txBody>
+      </p:sp>
+      <p:sp>
+        <p:nvSpPr>
+          <p:cNvPr id="10" name="TextBox 9"/>
+          <p:cNvSpPr txBox="1"/>
+          <p:nvPr/>
+        </p:nvSpPr>
+        <p:spPr>
+          <a:xfrm>
+            <a:off x="8320580" y="2090921"/>
+            <a:ext cx="690251" cy="337185"/>
+          </a:xfrm>
+          <a:prstGeom prst="rect">
+            <a:avLst/>
+          </a:prstGeom>
+          <a:noFill/>
+        </p:spPr>
+        <p:txBody>
+          <a:bodyPr wrap="square" anchor="t"/>
+          <a:lstStyle/>
+          <a:p>
+            <a:pPr algn="ctr" eaLnBrk="0">
               <a:lnSpc>
                 <a:spcPct val="110000"/>
               </a:lnSpc>
               <a:spcAft>
-                <a:spcPts val="400"/>
+                <a:spcPts val="100"/>
               </a:spcAft>
             </a:pPr>
             <a:r>
-              <a:rPr sz="1400" b="0">
-                <a:solidFill>
-                  <a:srgbClr val="1F2A3A"/>
-                </a:solidFill>
-                <a:latin typeface="맑은 고딕"/>
-                <a:ea typeface="맑은 고딕"/>
-                <a:cs typeface="맑은 고딕"/>
-              </a:rPr>
-              <a:t>승인 11:14:56 뒤 유온이 내려가</a:t>
-            </a:r>
-          </a:p>
-          <a:p>
-            <a:pPr algn="l" eaLnBrk="0">
+              <a:rPr sz="1350" b="1">
+                <a:solidFill>
+                  <a:srgbClr val="13294B"/>
+                </a:solidFill>
+                <a:latin typeface="맑은 고딕"/>
+                <a:ea typeface="맑은 고딕"/>
+                <a:cs typeface="맑은 고딕"/>
+              </a:rPr>
+              <a:t>Role</a:t>
+            </a:r>
+          </a:p>
+        </p:txBody>
+      </p:sp>
+      <p:sp>
+        <p:nvSpPr>
+          <p:cNvPr id="11" name="TextBox 10"/>
+          <p:cNvSpPr txBox="1"/>
+          <p:nvPr/>
+        </p:nvSpPr>
+        <p:spPr>
+          <a:xfrm>
+            <a:off x="7885190" y="4369551"/>
+            <a:ext cx="690251" cy="337185"/>
+          </a:xfrm>
+          <a:prstGeom prst="rect">
+            <a:avLst/>
+          </a:prstGeom>
+          <a:noFill/>
+        </p:spPr>
+        <p:txBody>
+          <a:bodyPr wrap="square" anchor="t"/>
+          <a:lstStyle/>
+          <a:p>
+            <a:pPr algn="ctr" eaLnBrk="0">
               <a:lnSpc>
                 <a:spcPct val="110000"/>
               </a:lnSpc>
               <a:spcAft>
-                <a:spcPts val="400"/>
+                <a:spcPts val="100"/>
               </a:spcAft>
             </a:pPr>
             <a:r>
-              <a:rPr sz="1400" b="0">
-                <a:solidFill>
-                  <a:srgbClr val="1F2A3A"/>
-                </a:solidFill>
-                <a:latin typeface="맑은 고딕"/>
-                <a:ea typeface="맑은 고딕"/>
-                <a:cs typeface="맑은 고딕"/>
-              </a:rPr>
-              <a:t>경보가 해제되었다.</a:t>
-            </a:r>
-          </a:p>
-        </p:txBody>
-      </p:sp>
-      <p:sp>
-        <p:nvSpPr>
-          <p:cNvPr id="10" name="Oval 9"/>
-          <p:cNvSpPr/>
-          <p:nvPr/>
-        </p:nvSpPr>
-        <p:spPr>
-          <a:xfrm>
-            <a:off x="8138160" y="2852928"/>
-            <a:ext cx="347472" cy="347472"/>
-          </a:xfrm>
-          <a:prstGeom prst="ellipse">
-            <a:avLst/>
-          </a:prstGeom>
-          <a:solidFill>
-            <a:srgbClr val="5CB8F2"/>
-          </a:solidFill>
-          <a:ln>
-            <a:noFill/>
-          </a:ln>
-        </p:spPr>
-        <p:txBody>
-          <a:bodyPr rtlCol="0" anchor="ctr"/>
-          <a:lstStyle/>
-          <a:p>
-            <a:pPr algn="ctr"/>
-          </a:p>
-        </p:txBody>
-      </p:sp>
-      <p:sp>
-        <p:nvSpPr>
-          <p:cNvPr id="11" name="TextBox 10"/>
-          <p:cNvSpPr txBox="1"/>
-          <p:nvPr/>
-        </p:nvSpPr>
-        <p:spPr>
-          <a:xfrm>
-            <a:off x="8138160" y="2852928"/>
-            <a:ext cx="347472" cy="347472"/>
-          </a:xfrm>
-          <a:prstGeom prst="rect">
-            <a:avLst/>
-          </a:prstGeom>
-          <a:noFill/>
-        </p:spPr>
-        <p:txBody>
-          <a:bodyPr wrap="square" anchor="ctr"/>
+              <a:rPr sz="1350" b="1">
+                <a:solidFill>
+                  <a:srgbClr val="13294B"/>
+                </a:solidFill>
+                <a:latin typeface="맑은 고딕"/>
+                <a:ea typeface="맑은 고딕"/>
+                <a:cs typeface="맑은 고딕"/>
+              </a:rPr>
+              <a:t>Step</a:t>
+            </a:r>
+          </a:p>
+        </p:txBody>
+      </p:sp>
+      <p:sp>
+        <p:nvSpPr>
+          <p:cNvPr id="12" name="TextBox 11"/>
+          <p:cNvSpPr txBox="1"/>
+          <p:nvPr/>
+        </p:nvSpPr>
+        <p:spPr>
+          <a:xfrm>
+            <a:off x="9701082" y="3665162"/>
+            <a:ext cx="1433598" cy="337185"/>
+          </a:xfrm>
+          <a:prstGeom prst="rect">
+            <a:avLst/>
+          </a:prstGeom>
+          <a:noFill/>
+        </p:spPr>
+        <p:txBody>
+          <a:bodyPr wrap="square" anchor="t"/>
           <a:lstStyle/>
           <a:p>
             <a:pPr algn="ctr" eaLnBrk="0">
               <a:lnSpc>
                 <a:spcPct val="110000"/>
               </a:lnSpc>
-            </a:pPr>
-            <a:r>
-              <a:rPr sz="1200" b="1">
+              <a:spcAft>
+                <a:spcPts val="100"/>
+              </a:spcAft>
+            </a:pPr>
+            <a:r>
+              <a:rPr sz="1350" b="1">
                 <a:solidFill>
                   <a:srgbClr val="13294B"/>
                 </a:solidFill>
@@ -11427,21 +11521,21 @@
                 <a:ea typeface="맑은 고딕"/>
                 <a:cs typeface="맑은 고딕"/>
               </a:rPr>
-              <a:t>2</a:t>
-            </a:r>
-          </a:p>
-        </p:txBody>
-      </p:sp>
-      <p:sp>
-        <p:nvSpPr>
-          <p:cNvPr id="12" name="TextBox 11"/>
-          <p:cNvSpPr txBox="1"/>
-          <p:nvPr/>
-        </p:nvSpPr>
-        <p:spPr>
-          <a:xfrm>
-            <a:off x="8549640" y="2798064"/>
-            <a:ext cx="3093415" cy="1170432"/>
+              <a:t>ManualSection</a:t>
+            </a:r>
+          </a:p>
+        </p:txBody>
+      </p:sp>
+      <p:sp>
+        <p:nvSpPr>
+          <p:cNvPr id="13" name="TextBox 12"/>
+          <p:cNvSpPr txBox="1"/>
+          <p:nvPr/>
+        </p:nvSpPr>
+        <p:spPr>
+          <a:xfrm>
+            <a:off x="2028675" y="3754983"/>
+            <a:ext cx="849539" cy="298450"/>
           </a:xfrm>
           <a:prstGeom prst="rect">
             <a:avLst/>
@@ -11452,16 +11546,16 @@
           <a:bodyPr wrap="square" anchor="t"/>
           <a:lstStyle/>
           <a:p>
-            <a:pPr algn="l" eaLnBrk="0">
+            <a:pPr algn="ctr" eaLnBrk="0">
               <a:lnSpc>
                 <a:spcPct val="110000"/>
               </a:lnSpc>
               <a:spcAft>
-                <a:spcPts val="400"/>
+                <a:spcPts val="100"/>
               </a:spcAft>
             </a:pPr>
             <a:r>
-              <a:rPr sz="1700" b="1">
+              <a:rPr sz="1100" b="0">
                 <a:solidFill>
                   <a:srgbClr val="13294B"/>
                 </a:solidFill>
@@ -11469,131 +11563,126 @@
                 <a:ea typeface="맑은 고딕"/>
                 <a:cs typeface="맑은 고딕"/>
               </a:rPr>
-              <a:t>남은 원인</a:t>
-            </a:r>
-          </a:p>
-          <a:p>
-            <a:pPr algn="l" eaLnBrk="0">
+              <a:t>CAUSES</a:t>
+            </a:r>
+          </a:p>
+        </p:txBody>
+      </p:sp>
+      <p:sp>
+        <p:nvSpPr>
+          <p:cNvPr id="14" name="TextBox 13"/>
+          <p:cNvSpPr txBox="1"/>
+          <p:nvPr/>
+        </p:nvSpPr>
+        <p:spPr>
+          <a:xfrm>
+            <a:off x="4927730" y="4081177"/>
+            <a:ext cx="1168117" cy="639318"/>
+          </a:xfrm>
+          <a:prstGeom prst="rect">
+            <a:avLst/>
+          </a:prstGeom>
+          <a:noFill/>
+        </p:spPr>
+        <p:txBody>
+          <a:bodyPr wrap="square" anchor="t"/>
+          <a:lstStyle/>
+          <a:p>
+            <a:pPr algn="ctr" eaLnBrk="0">
               <a:lnSpc>
                 <a:spcPct val="110000"/>
               </a:lnSpc>
               <a:spcAft>
-                <a:spcPts val="400"/>
+                <a:spcPts val="100"/>
               </a:spcAft>
             </a:pPr>
             <a:r>
-              <a:rPr sz="1400" b="0">
-                <a:solidFill>
-                  <a:srgbClr val="1F2A3A"/>
-                </a:solidFill>
-                <a:latin typeface="맑은 고딕"/>
-                <a:ea typeface="맑은 고딕"/>
-                <a:cs typeface="맑은 고딕"/>
-              </a:rPr>
-              <a:t>냉각 효율 55 %, 기준 70 % 미만.</a:t>
-            </a:r>
-          </a:p>
-          <a:p>
-            <a:pPr algn="l" eaLnBrk="0">
+              <a:rPr sz="1050" b="0">
+                <a:solidFill>
+                  <a:srgbClr val="13294B"/>
+                </a:solidFill>
+                <a:latin typeface="맑은 고딕"/>
+                <a:ea typeface="맑은 고딕"/>
+                <a:cs typeface="맑은 고딕"/>
+              </a:rPr>
+              <a:t>MITIGATED_BY</a:t>
+            </a:r>
+          </a:p>
+          <a:p>
+            <a:pPr algn="ctr" eaLnBrk="0">
               <a:lnSpc>
                 <a:spcPct val="110000"/>
               </a:lnSpc>
               <a:spcAft>
-                <a:spcPts val="400"/>
+                <a:spcPts val="100"/>
               </a:spcAft>
             </a:pPr>
             <a:r>
-              <a:rPr sz="1400" b="0">
-                <a:solidFill>
-                  <a:srgbClr val="1F2A3A"/>
-                </a:solidFill>
-                <a:latin typeface="맑은 고딕"/>
-                <a:ea typeface="맑은 고딕"/>
-                <a:cs typeface="맑은 고딕"/>
-              </a:rPr>
-              <a:t>핀 오염은 그대로다.</a:t>
-            </a:r>
-          </a:p>
-        </p:txBody>
-      </p:sp>
-      <p:sp>
-        <p:nvSpPr>
-          <p:cNvPr id="13" name="Oval 12"/>
-          <p:cNvSpPr/>
-          <p:nvPr/>
-        </p:nvSpPr>
-        <p:spPr>
-          <a:xfrm>
-            <a:off x="8138160" y="4023359"/>
-            <a:ext cx="347472" cy="347472"/>
-          </a:xfrm>
-          <a:prstGeom prst="ellipse">
-            <a:avLst/>
-          </a:prstGeom>
-          <a:solidFill>
-            <a:srgbClr val="13294B"/>
-          </a:solidFill>
-          <a:ln>
-            <a:noFill/>
-          </a:ln>
-        </p:spPr>
-        <p:txBody>
-          <a:bodyPr rtlCol="0" anchor="ctr"/>
-          <a:lstStyle/>
-          <a:p>
-            <a:pPr algn="ctr"/>
-          </a:p>
-        </p:txBody>
-      </p:sp>
-      <p:sp>
-        <p:nvSpPr>
-          <p:cNvPr id="14" name="TextBox 13"/>
-          <p:cNvSpPr txBox="1"/>
-          <p:nvPr/>
-        </p:nvSpPr>
-        <p:spPr>
-          <a:xfrm>
-            <a:off x="8138160" y="4023359"/>
-            <a:ext cx="347472" cy="347472"/>
-          </a:xfrm>
-          <a:prstGeom prst="rect">
-            <a:avLst/>
-          </a:prstGeom>
-          <a:noFill/>
-        </p:spPr>
-        <p:txBody>
-          <a:bodyPr wrap="square" anchor="ctr"/>
+              <a:rPr sz="1050" b="0">
+                <a:solidFill>
+                  <a:srgbClr val="13294B"/>
+                </a:solidFill>
+                <a:latin typeface="맑은 고딕"/>
+                <a:ea typeface="맑은 고딕"/>
+                <a:cs typeface="맑은 고딕"/>
+              </a:rPr>
+              <a:t>REMEDIED_BY</a:t>
+            </a:r>
+          </a:p>
+        </p:txBody>
+      </p:sp>
+      <p:sp>
+        <p:nvSpPr>
+          <p:cNvPr id="15" name="TextBox 14"/>
+          <p:cNvSpPr txBox="1"/>
+          <p:nvPr/>
+        </p:nvSpPr>
+        <p:spPr>
+          <a:xfrm>
+            <a:off x="3483512" y="2398206"/>
+            <a:ext cx="1168117" cy="298450"/>
+          </a:xfrm>
+          <a:prstGeom prst="rect">
+            <a:avLst/>
+          </a:prstGeom>
+          <a:noFill/>
+        </p:spPr>
+        <p:txBody>
+          <a:bodyPr wrap="square" anchor="t"/>
           <a:lstStyle/>
           <a:p>
             <a:pPr algn="ctr" eaLnBrk="0">
               <a:lnSpc>
                 <a:spcPct val="110000"/>
               </a:lnSpc>
-            </a:pPr>
-            <a:r>
-              <a:rPr sz="1200" b="1">
-                <a:solidFill>
-                  <a:srgbClr val="FFFFFF"/>
-                </a:solidFill>
-                <a:latin typeface="맑은 고딕"/>
-                <a:ea typeface="맑은 고딕"/>
-                <a:cs typeface="맑은 고딕"/>
-              </a:rPr>
-              <a:t>3</a:t>
-            </a:r>
-          </a:p>
-        </p:txBody>
-      </p:sp>
-      <p:sp>
-        <p:nvSpPr>
-          <p:cNvPr id="15" name="TextBox 14"/>
-          <p:cNvSpPr txBox="1"/>
-          <p:nvPr/>
-        </p:nvSpPr>
-        <p:spPr>
-          <a:xfrm>
-            <a:off x="8549640" y="3968496"/>
-            <a:ext cx="3093415" cy="1170432"/>
+              <a:spcAft>
+                <a:spcPts val="100"/>
+              </a:spcAft>
+            </a:pPr>
+            <a:r>
+              <a:rPr sz="1100" b="0">
+                <a:solidFill>
+                  <a:srgbClr val="13294B"/>
+                </a:solidFill>
+                <a:latin typeface="맑은 고딕"/>
+                <a:ea typeface="맑은 고딕"/>
+                <a:cs typeface="맑은 고딕"/>
+              </a:rPr>
+              <a:t>ADDRESSES</a:t>
+            </a:r>
+          </a:p>
+        </p:txBody>
+      </p:sp>
+      <p:sp>
+        <p:nvSpPr>
+          <p:cNvPr id="16" name="TextBox 15"/>
+          <p:cNvSpPr txBox="1"/>
+          <p:nvPr/>
+        </p:nvSpPr>
+        <p:spPr>
+          <a:xfrm>
+            <a:off x="6626810" y="2005827"/>
+            <a:ext cx="1274309" cy="298450"/>
           </a:xfrm>
           <a:prstGeom prst="rect">
             <a:avLst/>
@@ -11604,16 +11693,16 @@
           <a:bodyPr wrap="square" anchor="t"/>
           <a:lstStyle/>
           <a:p>
-            <a:pPr algn="l" eaLnBrk="0">
+            <a:pPr algn="ctr" eaLnBrk="0">
               <a:lnSpc>
                 <a:spcPct val="110000"/>
               </a:lnSpc>
               <a:spcAft>
-                <a:spcPts val="400"/>
+                <a:spcPts val="100"/>
               </a:spcAft>
             </a:pPr>
             <a:r>
-              <a:rPr sz="1700" b="1">
+              <a:rPr sz="1100" b="0">
                 <a:solidFill>
                   <a:srgbClr val="13294B"/>
                 </a:solidFill>
@@ -11621,151 +11710,125 @@
                 <a:ea typeface="맑은 고딕"/>
                 <a:cs typeface="맑은 고딕"/>
               </a:rPr>
-              <a:t>근본 조치의 상태</a:t>
-            </a:r>
-          </a:p>
-          <a:p>
-            <a:pPr algn="l" eaLnBrk="0">
+              <a:t>APPROVED_BY</a:t>
+            </a:r>
+          </a:p>
+        </p:txBody>
+      </p:sp>
+      <p:sp>
+        <p:nvSpPr>
+          <p:cNvPr id="17" name="TextBox 16"/>
+          <p:cNvSpPr txBox="1"/>
+          <p:nvPr/>
+        </p:nvSpPr>
+        <p:spPr>
+          <a:xfrm>
+            <a:off x="6329471" y="4019720"/>
+            <a:ext cx="1168117" cy="298450"/>
+          </a:xfrm>
+          <a:prstGeom prst="rect">
+            <a:avLst/>
+          </a:prstGeom>
+          <a:noFill/>
+        </p:spPr>
+        <p:txBody>
+          <a:bodyPr wrap="square" anchor="t"/>
+          <a:lstStyle/>
+          <a:p>
+            <a:pPr algn="ctr" eaLnBrk="0">
               <a:lnSpc>
                 <a:spcPct val="110000"/>
               </a:lnSpc>
               <a:spcAft>
-                <a:spcPts val="400"/>
+                <a:spcPts val="100"/>
               </a:spcAft>
             </a:pPr>
             <a:r>
-              <a:rPr sz="1400" b="0">
-                <a:solidFill>
-                  <a:srgbClr val="1F2A3A"/>
-                </a:solidFill>
-                <a:latin typeface="맑은 고딕"/>
-                <a:ea typeface="맑은 고딕"/>
-                <a:cs typeface="맑은 고딕"/>
-              </a:rPr>
-              <a:t>핀 세척은 작업지시로 등록되었다.</a:t>
-            </a:r>
-          </a:p>
-          <a:p>
-            <a:pPr algn="l" eaLnBrk="0">
+              <a:rPr sz="1100" b="0">
+                <a:solidFill>
+                  <a:srgbClr val="13294B"/>
+                </a:solidFill>
+                <a:latin typeface="맑은 고딕"/>
+                <a:ea typeface="맑은 고딕"/>
+                <a:cs typeface="맑은 고딕"/>
+              </a:rPr>
+              <a:t>HAS_STEP</a:t>
+            </a:r>
+          </a:p>
+        </p:txBody>
+      </p:sp>
+      <p:sp>
+        <p:nvSpPr>
+          <p:cNvPr id="18" name="TextBox 17"/>
+          <p:cNvSpPr txBox="1"/>
+          <p:nvPr/>
+        </p:nvSpPr>
+        <p:spPr>
+          <a:xfrm>
+            <a:off x="8867471" y="4544467"/>
+            <a:ext cx="1168117" cy="298450"/>
+          </a:xfrm>
+          <a:prstGeom prst="rect">
+            <a:avLst/>
+          </a:prstGeom>
+          <a:noFill/>
+        </p:spPr>
+        <p:txBody>
+          <a:bodyPr wrap="square" anchor="t"/>
+          <a:lstStyle/>
+          <a:p>
+            <a:pPr algn="ctr" eaLnBrk="0">
               <a:lnSpc>
                 <a:spcPct val="110000"/>
               </a:lnSpc>
               <a:spcAft>
-                <a:spcPts val="400"/>
+                <a:spcPts val="100"/>
               </a:spcAft>
             </a:pPr>
             <a:r>
-              <a:rPr sz="1400" b="0">
-                <a:solidFill>
-                  <a:srgbClr val="1F2A3A"/>
-                </a:solidFill>
-                <a:latin typeface="맑은 고딕"/>
-                <a:ea typeface="맑은 고딕"/>
-                <a:cs typeface="맑은 고딕"/>
-              </a:rPr>
-              <a:t>등록은 정비 완료가 아니다.</a:t>
-            </a:r>
-          </a:p>
-        </p:txBody>
-      </p:sp>
-      <p:sp>
-        <p:nvSpPr>
-          <p:cNvPr id="16" name="Oval 15"/>
-          <p:cNvSpPr/>
-          <p:nvPr/>
-        </p:nvSpPr>
-        <p:spPr>
-          <a:xfrm>
-            <a:off x="8138160" y="5193792"/>
-            <a:ext cx="347472" cy="347472"/>
-          </a:xfrm>
-          <a:prstGeom prst="ellipse">
-            <a:avLst/>
-          </a:prstGeom>
-          <a:solidFill>
-            <a:srgbClr val="13294B"/>
-          </a:solidFill>
-          <a:ln>
-            <a:noFill/>
-          </a:ln>
-        </p:spPr>
-        <p:txBody>
-          <a:bodyPr rtlCol="0" anchor="ctr"/>
-          <a:lstStyle/>
-          <a:p>
-            <a:pPr algn="ctr"/>
-          </a:p>
-        </p:txBody>
-      </p:sp>
-      <p:sp>
-        <p:nvSpPr>
-          <p:cNvPr id="17" name="TextBox 16"/>
-          <p:cNvSpPr txBox="1"/>
-          <p:nvPr/>
-        </p:nvSpPr>
-        <p:spPr>
-          <a:xfrm>
-            <a:off x="8138160" y="5193792"/>
-            <a:ext cx="347472" cy="347472"/>
-          </a:xfrm>
-          <a:prstGeom prst="rect">
-            <a:avLst/>
-          </a:prstGeom>
-          <a:noFill/>
-        </p:spPr>
-        <p:txBody>
-          <a:bodyPr wrap="square" anchor="ctr"/>
+              <a:rPr sz="1100" b="0">
+                <a:solidFill>
+                  <a:srgbClr val="13294B"/>
+                </a:solidFill>
+                <a:latin typeface="맑은 고딕"/>
+                <a:ea typeface="맑은 고딕"/>
+                <a:cs typeface="맑은 고딕"/>
+              </a:rPr>
+              <a:t>REFERS_TO</a:t>
+            </a:r>
+          </a:p>
+        </p:txBody>
+      </p:sp>
+      <p:sp>
+        <p:nvSpPr>
+          <p:cNvPr id="19" name="TextBox 18"/>
+          <p:cNvSpPr txBox="1"/>
+          <p:nvPr/>
+        </p:nvSpPr>
+        <p:spPr>
+          <a:xfrm>
+            <a:off x="1423378" y="5669600"/>
+            <a:ext cx="9344938" cy="507618"/>
+          </a:xfrm>
+          <a:prstGeom prst="rect">
+            <a:avLst/>
+          </a:prstGeom>
+          <a:noFill/>
+        </p:spPr>
+        <p:txBody>
+          <a:bodyPr wrap="square" anchor="t"/>
           <a:lstStyle/>
           <a:p>
             <a:pPr algn="ctr" eaLnBrk="0">
               <a:lnSpc>
                 <a:spcPct val="110000"/>
               </a:lnSpc>
-            </a:pPr>
-            <a:r>
-              <a:rPr sz="1200" b="1">
-                <a:solidFill>
-                  <a:srgbClr val="FFFFFF"/>
-                </a:solidFill>
-                <a:latin typeface="맑은 고딕"/>
-                <a:ea typeface="맑은 고딕"/>
-                <a:cs typeface="맑은 고딕"/>
-              </a:rPr>
-              <a:t>4</a:t>
-            </a:r>
-          </a:p>
-        </p:txBody>
-      </p:sp>
-      <p:sp>
-        <p:nvSpPr>
-          <p:cNvPr id="18" name="TextBox 17"/>
-          <p:cNvSpPr txBox="1"/>
-          <p:nvPr/>
-        </p:nvSpPr>
-        <p:spPr>
-          <a:xfrm>
-            <a:off x="8549640" y="5138928"/>
-            <a:ext cx="3093415" cy="1170432"/>
-          </a:xfrm>
-          <a:prstGeom prst="rect">
-            <a:avLst/>
-          </a:prstGeom>
-          <a:noFill/>
-        </p:spPr>
-        <p:txBody>
-          <a:bodyPr wrap="square" anchor="t"/>
-          <a:lstStyle/>
-          <a:p>
-            <a:pPr algn="l" eaLnBrk="0">
-              <a:lnSpc>
-                <a:spcPct val="110000"/>
-              </a:lnSpc>
               <a:spcAft>
-                <a:spcPts val="400"/>
+                <a:spcPts val="100"/>
               </a:spcAft>
             </a:pPr>
             <a:r>
-              <a:rPr sz="1700" b="1">
+              <a:rPr sz="1350" b="1">
                 <a:solidFill>
                   <a:srgbClr val="13294B"/>
                 </a:solidFill>
@@ -11773,49 +11836,28 @@
                 <a:ea typeface="맑은 고딕"/>
                 <a:cs typeface="맑은 고딕"/>
               </a:rPr>
-              <a:t>서로 다른 완료 기준</a:t>
-            </a:r>
-          </a:p>
-          <a:p>
-            <a:pPr algn="l" eaLnBrk="0">
+              <a:t>쿨러 사건의 연결</a:t>
+            </a:r>
+          </a:p>
+          <a:p>
+            <a:pPr algn="ctr" eaLnBrk="0">
               <a:lnSpc>
                 <a:spcPct val="110000"/>
               </a:lnSpc>
               <a:spcAft>
-                <a:spcPts val="400"/>
+                <a:spcPts val="100"/>
               </a:spcAft>
             </a:pPr>
             <a:r>
-              <a:rPr sz="1350" b="0">
-                <a:solidFill>
-                  <a:srgbClr val="1F2A3A"/>
-                </a:solidFill>
-                <a:latin typeface="맑은 고딕"/>
-                <a:ea typeface="맑은 고딕"/>
-                <a:cs typeface="맑은 고딕"/>
-              </a:rPr>
-              <a:t>경보 해제, 매뉴얼: 15분 유지,</a:t>
-            </a:r>
-          </a:p>
-          <a:p>
-            <a:pPr algn="l" eaLnBrk="0">
-              <a:lnSpc>
-                <a:spcPct val="110000"/>
-              </a:lnSpc>
-              <a:spcAft>
-                <a:spcPts val="400"/>
-              </a:spcAft>
-            </a:pPr>
-            <a:r>
-              <a:rPr sz="1350" b="0">
-                <a:solidFill>
-                  <a:srgbClr val="1F2A3A"/>
-                </a:solidFill>
-                <a:latin typeface="맑은 고딕"/>
-                <a:ea typeface="맑은 고딕"/>
-                <a:cs typeface="맑은 고딕"/>
-              </a:rPr>
-              <a:t>재가동 뒤 CE 80 % 이상의 정비 완료.</a:t>
+              <a:rPr sz="1100" b="0">
+                <a:solidFill>
+                  <a:srgbClr val="556175"/>
+                </a:solidFill>
+                <a:latin typeface="맑은 고딕"/>
+                <a:ea typeface="맑은 고딕"/>
+                <a:cs typeface="맑은 고딕"/>
+              </a:rPr>
+              <a:t>쿨러 핀 오염 → 쿨러 냉각 성능 상실 → SOP-COOL-11 팬 최대 운전 → 단계 1~3 → HM-8.5 · 운전원</a:t>
             </a:r>
           </a:p>
         </p:txBody>
@@ -17267,7 +17309,7 @@
                 <a:ea typeface="맑은 고딕"/>
                 <a:cs typeface="맑은 고딕"/>
               </a:rPr>
-              <a:t>• 판정 기능을 네 입력으로 검증한다</a:t>
+              <a:t>• 판정 기능을 여러 입력으로 검증한다</a:t>
             </a:r>
           </a:p>
         </p:txBody>
@@ -17935,6 +17977,24 @@
               <a:t>같다 — pattern == 'PM_DUE'</a:t>
             </a:r>
           </a:p>
+          <a:p>
+            <a:pPr algn="l" eaLnBrk="0">
+              <a:lnSpc>
+                <a:spcPct val="110000"/>
+              </a:lnSpc>
+            </a:pPr>
+            <a:r>
+              <a:rPr sz="1400" b="0">
+                <a:solidFill>
+                  <a:srgbClr val="1F2A3A"/>
+                </a:solidFill>
+                <a:latin typeface="맑은 고딕"/>
+                <a:ea typeface="맑은 고딕"/>
+                <a:cs typeface="맑은 고딕"/>
+              </a:rPr>
+              <a:t>이상 패턴이 정기 정비 도래</a:t>
+            </a:r>
+          </a:p>
         </p:txBody>
       </p:sp>
       <p:sp>
@@ -18673,6 +18733,24 @@
                 <a:cs typeface="맑은 고딕"/>
               </a:rPr>
               <a:t>작거나 같다(이하) — order_due &lt;= 24</a:t>
+            </a:r>
+          </a:p>
+          <a:p>
+            <a:pPr algn="l" eaLnBrk="0">
+              <a:lnSpc>
+                <a:spcPct val="110000"/>
+              </a:lnSpc>
+            </a:pPr>
+            <a:r>
+              <a:rPr sz="1400" b="0">
+                <a:solidFill>
+                  <a:srgbClr val="1F2A3A"/>
+                </a:solidFill>
+                <a:latin typeface="맑은 고딕"/>
+                <a:ea typeface="맑은 고딕"/>
+                <a:cs typeface="맑은 고딕"/>
+              </a:rPr>
+              <a:t>정기 정비 규칙의 납기 조건</a:t>
             </a:r>
           </a:p>
         </p:txBody>
@@ -18890,7 +18968,7 @@
       </p:sp>
       <p:pic>
         <p:nvPicPr>
-          <p:cNvPr id="6" name="삽화:수직선_경계.svg" descr="illust_2276185494946075178_1792037122.png"/>
+          <p:cNvPr id="6" name="삽화:수직선_경계.svg" descr="illust_7748683450934596947_1792123197.png"/>
           <p:cNvPicPr>
             <a:picLocks noChangeAspect="1"/>
           </p:cNvPicPr>
@@ -21219,7 +21297,7 @@
                 <a:ea typeface="맑은 고딕"/>
                 <a:cs typeface="맑은 고딕"/>
               </a:rPr>
-              <a:t>후보 선택 · 제외 · 감점 · 경고의 출력</a:t>
+              <a:t>후보 선택 · 제외 · 감점 · 경고 · 순위의 출력</a:t>
             </a:r>
           </a:p>
         </p:txBody>
@@ -21258,7 +21336,7 @@
                 <a:ea typeface="맑은 고딕"/>
                 <a:cs typeface="맑은 고딕"/>
               </a:rPr>
-              <a:t>규칙의 출력은 후보에 올리기, 빼기, 깎아서 견주기, 알리고 남기기로 나뉘며 후보에 오른 것이 실행 허가는 아니다.</a:t>
+              <a:t>규칙의 출력은 후보 선택 · 제외 · 감점 · 경고 · 순위의 다섯이며, 후보에 오른 것이 실행 허가는 아니다.</a:t>
             </a:r>
           </a:p>
         </p:txBody>
@@ -21339,7 +21417,7 @@
         </p:nvSpPr>
         <p:spPr>
           <a:xfrm>
-            <a:off x="548640" y="1961387"/>
+            <a:off x="548640" y="1627632"/>
             <a:ext cx="11094415" cy="347472"/>
           </a:xfrm>
           <a:prstGeom prst="roundRect">
@@ -21370,7 +21448,7 @@
         </p:nvSpPr>
         <p:spPr>
           <a:xfrm>
-            <a:off x="685800" y="1961387"/>
+            <a:off x="685800" y="1627632"/>
             <a:ext cx="2514600" cy="347472"/>
           </a:xfrm>
           <a:prstGeom prst="rect">
@@ -21396,7 +21474,7 @@
                 <a:ea typeface="맑은 고딕"/>
                 <a:cs typeface="맑은 고딕"/>
               </a:rPr>
-              <a:t>출력(effect)</a:t>
+              <a:t>출력(effect) · 결정표</a:t>
             </a:r>
           </a:p>
         </p:txBody>
@@ -21409,7 +21487,7 @@
         </p:nvSpPr>
         <p:spPr>
           <a:xfrm>
-            <a:off x="3200400" y="1961387"/>
+            <a:off x="3200400" y="1627632"/>
             <a:ext cx="6248095" cy="347472"/>
           </a:xfrm>
           <a:prstGeom prst="rect">
@@ -21448,7 +21526,7 @@
         </p:nvSpPr>
         <p:spPr>
           <a:xfrm>
-            <a:off x="9448495" y="1961387"/>
+            <a:off x="9448495" y="1627632"/>
             <a:ext cx="2194560" cy="347472"/>
           </a:xfrm>
           <a:prstGeom prst="rect">
@@ -21487,8 +21565,8 @@
         </p:nvSpPr>
         <p:spPr>
           <a:xfrm>
-            <a:off x="548640" y="2395727"/>
-            <a:ext cx="11094415" cy="850392"/>
+            <a:off x="548640" y="2061972"/>
+            <a:ext cx="11094415" cy="801014"/>
           </a:xfrm>
           <a:prstGeom prst="roundRect">
             <a:avLst>
@@ -21518,8 +21596,8 @@
         </p:nvSpPr>
         <p:spPr>
           <a:xfrm>
-            <a:off x="685800" y="2363723"/>
-            <a:ext cx="2514600" cy="914400"/>
+            <a:off x="685800" y="2029968"/>
+            <a:ext cx="2514600" cy="865022"/>
           </a:xfrm>
           <a:prstGeom prst="rect">
             <a:avLst/>
@@ -21544,7 +21622,7 @@
                 <a:ea typeface="맑은 고딕"/>
                 <a:cs typeface="맑은 고딕"/>
               </a:rPr>
-              <a:t>후보 선택 SELECT</a:t>
+              <a:t>후보 선택 SELECT / 후보 선택 표</a:t>
             </a:r>
           </a:p>
         </p:txBody>
@@ -21557,8 +21635,8 @@
         </p:nvSpPr>
         <p:spPr>
           <a:xfrm>
-            <a:off x="3200400" y="2363723"/>
-            <a:ext cx="6156655" cy="914400"/>
+            <a:off x="3200400" y="2029968"/>
+            <a:ext cx="6156655" cy="865022"/>
           </a:xfrm>
           <a:prstGeom prst="rect">
             <a:avLst/>
@@ -21614,8 +21692,8 @@
         </p:nvSpPr>
         <p:spPr>
           <a:xfrm>
-            <a:off x="9448495" y="2363723"/>
-            <a:ext cx="2103120" cy="914400"/>
+            <a:off x="9448495" y="2029968"/>
+            <a:ext cx="2103120" cy="865022"/>
           </a:xfrm>
           <a:prstGeom prst="rect">
             <a:avLst/>
@@ -21653,174 +21731,8 @@
         </p:nvSpPr>
         <p:spPr>
           <a:xfrm>
-            <a:off x="548640" y="3310127"/>
-            <a:ext cx="11094415" cy="850392"/>
-          </a:xfrm>
-          <a:prstGeom prst="roundRect">
-            <a:avLst>
-              <a:gd name="adj" fmla="val 8000"/>
-            </a:avLst>
-          </a:prstGeom>
-          <a:solidFill>
-            <a:srgbClr val="E7F3FD"/>
-          </a:solidFill>
-          <a:ln>
-            <a:noFill/>
-          </a:ln>
-        </p:spPr>
-        <p:txBody>
-          <a:bodyPr rtlCol="0" anchor="ctr"/>
-          <a:lstStyle/>
-          <a:p>
-            <a:pPr algn="ctr"/>
-          </a:p>
-        </p:txBody>
-      </p:sp>
-      <p:sp>
-        <p:nvSpPr>
-          <p:cNvPr id="15" name="TextBox 14"/>
-          <p:cNvSpPr txBox="1"/>
-          <p:nvPr/>
-        </p:nvSpPr>
-        <p:spPr>
-          <a:xfrm>
-            <a:off x="685800" y="3278123"/>
-            <a:ext cx="2514600" cy="914400"/>
-          </a:xfrm>
-          <a:prstGeom prst="rect">
-            <a:avLst/>
-          </a:prstGeom>
-          <a:noFill/>
-        </p:spPr>
-        <p:txBody>
-          <a:bodyPr wrap="square" anchor="ctr"/>
-          <a:lstStyle/>
-          <a:p>
-            <a:pPr algn="l" eaLnBrk="0">
-              <a:lnSpc>
-                <a:spcPct val="110000"/>
-              </a:lnSpc>
-            </a:pPr>
-            <a:r>
-              <a:rPr sz="1600" b="1">
-                <a:solidFill>
-                  <a:srgbClr val="13294B"/>
-                </a:solidFill>
-                <a:latin typeface="맑은 고딕"/>
-                <a:ea typeface="맑은 고딕"/>
-                <a:cs typeface="맑은 고딕"/>
-              </a:rPr>
-              <a:t>제외 EXCLUDE</a:t>
-            </a:r>
-          </a:p>
-        </p:txBody>
-      </p:sp>
-      <p:sp>
-        <p:nvSpPr>
-          <p:cNvPr id="16" name="TextBox 15"/>
-          <p:cNvSpPr txBox="1"/>
-          <p:nvPr/>
-        </p:nvSpPr>
-        <p:spPr>
-          <a:xfrm>
-            <a:off x="3200400" y="3278123"/>
-            <a:ext cx="6156655" cy="914400"/>
-          </a:xfrm>
-          <a:prstGeom prst="rect">
-            <a:avLst/>
-          </a:prstGeom>
-          <a:noFill/>
-        </p:spPr>
-        <p:txBody>
-          <a:bodyPr wrap="square" anchor="ctr"/>
-          <a:lstStyle/>
-          <a:p>
-            <a:pPr algn="l" eaLnBrk="0">
-              <a:lnSpc>
-                <a:spcPct val="110000"/>
-              </a:lnSpc>
-            </a:pPr>
-            <a:r>
-              <a:rPr sz="1400" b="0">
-                <a:solidFill>
-                  <a:srgbClr val="1F2A3A"/>
-                </a:solidFill>
-                <a:latin typeface="맑은 고딕"/>
-                <a:ea typeface="맑은 고딕"/>
-                <a:cs typeface="맑은 고딕"/>
-              </a:rPr>
-              <a:t>plc_mode != 'REMOTE_AUTO' → SOP-COOL-11 · 12 · 13 (HM-8.8)</a:t>
-            </a:r>
-          </a:p>
-        </p:txBody>
-      </p:sp>
-      <p:sp>
-        <p:nvSpPr>
-          <p:cNvPr id="17" name="TextBox 16"/>
-          <p:cNvSpPr txBox="1"/>
-          <p:nvPr/>
-        </p:nvSpPr>
-        <p:spPr>
-          <a:xfrm>
-            <a:off x="9448495" y="3278123"/>
-            <a:ext cx="2103120" cy="914400"/>
-          </a:xfrm>
-          <a:prstGeom prst="rect">
-            <a:avLst/>
-          </a:prstGeom>
-          <a:noFill/>
-        </p:spPr>
-        <p:txBody>
-          <a:bodyPr wrap="square" anchor="ctr"/>
-          <a:lstStyle/>
-          <a:p>
-            <a:pPr algn="l" eaLnBrk="0">
-              <a:lnSpc>
-                <a:spcPct val="110000"/>
-              </a:lnSpc>
-            </a:pPr>
-            <a:r>
-              <a:rPr sz="1250" b="1">
-                <a:solidFill>
-                  <a:srgbClr val="1A6FC4"/>
-                </a:solidFill>
-                <a:latin typeface="맑은 고딕"/>
-                <a:ea typeface="맑은 고딕"/>
-                <a:cs typeface="맑은 고딕"/>
-              </a:rPr>
-              <a:t>뺀다</a:t>
-            </a:r>
-          </a:p>
-          <a:p>
-            <a:pPr algn="l" eaLnBrk="0">
-              <a:lnSpc>
-                <a:spcPct val="110000"/>
-              </a:lnSpc>
-            </a:pPr>
-            <a:r>
-              <a:rPr sz="1250" b="1">
-                <a:solidFill>
-                  <a:srgbClr val="1A6FC4"/>
-                </a:solidFill>
-                <a:latin typeface="맑은 고딕"/>
-                <a:ea typeface="맑은 고딕"/>
-                <a:cs typeface="맑은 고딕"/>
-              </a:rPr>
-              <a:t>다른 점수로 되살아나지 않는다</a:t>
-            </a:r>
-          </a:p>
-        </p:txBody>
-      </p:sp>
-      <p:sp>
-        <p:nvSpPr>
-          <p:cNvPr id="18" name="Rounded Rectangle 17"/>
-          <p:cNvSpPr/>
-          <p:nvPr/>
-        </p:nvSpPr>
-        <p:spPr>
-          <a:xfrm>
-            <a:off x="548640" y="4224527"/>
-            <a:ext cx="11094415" cy="850392"/>
+            <a:off x="548640" y="2926994"/>
+            <a:ext cx="11094415" cy="801014"/>
           </a:xfrm>
           <a:prstGeom prst="roundRect">
             <a:avLst>
@@ -21844,14 +21756,14 @@
       </p:sp>
       <p:sp>
         <p:nvSpPr>
-          <p:cNvPr id="19" name="TextBox 18"/>
-          <p:cNvSpPr txBox="1"/>
-          <p:nvPr/>
-        </p:nvSpPr>
-        <p:spPr>
-          <a:xfrm>
-            <a:off x="685800" y="4192523"/>
-            <a:ext cx="2514600" cy="914400"/>
+          <p:cNvPr id="15" name="TextBox 14"/>
+          <p:cNvSpPr txBox="1"/>
+          <p:nvPr/>
+        </p:nvSpPr>
+        <p:spPr>
+          <a:xfrm>
+            <a:off x="685800" y="2894990"/>
+            <a:ext cx="2514600" cy="865022"/>
           </a:xfrm>
           <a:prstGeom prst="rect">
             <a:avLst/>
@@ -21870,27 +21782,38 @@
             <a:r>
               <a:rPr sz="1600" b="1">
                 <a:solidFill>
+                  <a:srgbClr val="1A6FC4"/>
+                </a:solidFill>
+                <a:latin typeface="맑은 고딕"/>
+                <a:ea typeface="맑은 고딕"/>
+                <a:cs typeface="맑은 고딕"/>
+              </a:rPr>
+              <a:t>제외 EXCLUDE</a:t>
+            </a:r>
+            <a:r>
+              <a:rPr sz="1600" b="1">
+                <a:solidFill>
                   <a:srgbClr val="13294B"/>
                 </a:solidFill>
                 <a:latin typeface="맑은 고딕"/>
                 <a:ea typeface="맑은 고딕"/>
                 <a:cs typeface="맑은 고딕"/>
               </a:rPr>
-              <a:t>감점 PENALTY</a:t>
-            </a:r>
-          </a:p>
-        </p:txBody>
-      </p:sp>
-      <p:sp>
-        <p:nvSpPr>
-          <p:cNvPr id="20" name="TextBox 19"/>
-          <p:cNvSpPr txBox="1"/>
-          <p:nvPr/>
-        </p:nvSpPr>
-        <p:spPr>
-          <a:xfrm>
-            <a:off x="3200400" y="4192523"/>
-            <a:ext cx="6156655" cy="914400"/>
+              <a:t> / 규정 적합성 표</a:t>
+            </a:r>
+          </a:p>
+        </p:txBody>
+      </p:sp>
+      <p:sp>
+        <p:nvSpPr>
+          <p:cNvPr id="16" name="TextBox 15"/>
+          <p:cNvSpPr txBox="1"/>
+          <p:nvPr/>
+        </p:nvSpPr>
+        <p:spPr>
+          <a:xfrm>
+            <a:off x="3200400" y="2894990"/>
+            <a:ext cx="6156655" cy="865022"/>
           </a:xfrm>
           <a:prstGeom prst="rect">
             <a:avLst/>
@@ -21915,39 +21838,21 @@
                 <a:ea typeface="맑은 고딕"/>
                 <a:cs typeface="맑은 고딕"/>
               </a:rPr>
-              <a:t>fan100_hours &gt; 24 → 팬 최대 운전 조치만 20만 원 감점</a:t>
-            </a:r>
-          </a:p>
-          <a:p>
-            <a:pPr algn="l" eaLnBrk="0">
-              <a:lnSpc>
-                <a:spcPct val="110000"/>
-              </a:lnSpc>
-            </a:pPr>
-            <a:r>
-              <a:rPr sz="1400" b="0">
-                <a:solidFill>
-                  <a:srgbClr val="1F2A3A"/>
-                </a:solidFill>
-                <a:latin typeface="맑은 고딕"/>
-                <a:ea typeface="맑은 고딕"/>
-                <a:cs typeface="맑은 고딕"/>
-              </a:rPr>
-              <a:t>적용 대상: SOP-COOL-11 · 12 (HM-8.8)</a:t>
-            </a:r>
-          </a:p>
-        </p:txBody>
-      </p:sp>
-      <p:sp>
-        <p:nvSpPr>
-          <p:cNvPr id="21" name="TextBox 20"/>
-          <p:cNvSpPr txBox="1"/>
-          <p:nvPr/>
-        </p:nvSpPr>
-        <p:spPr>
-          <a:xfrm>
-            <a:off x="9448495" y="4192523"/>
-            <a:ext cx="2103120" cy="914400"/>
+              <a:t>plc_mode != 'REMOTE_AUTO' → SOP-COOL-11 · 12 · 13 (HM-8.8)</a:t>
+            </a:r>
+          </a:p>
+        </p:txBody>
+      </p:sp>
+      <p:sp>
+        <p:nvSpPr>
+          <p:cNvPr id="17" name="TextBox 16"/>
+          <p:cNvSpPr txBox="1"/>
+          <p:nvPr/>
+        </p:nvSpPr>
+        <p:spPr>
+          <a:xfrm>
+            <a:off x="9448495" y="2894990"/>
+            <a:ext cx="2103120" cy="865022"/>
           </a:xfrm>
           <a:prstGeom prst="rect">
             <a:avLst/>
@@ -21972,21 +21877,39 @@
                 <a:ea typeface="맑은 고딕"/>
                 <a:cs typeface="맑은 고딕"/>
               </a:rPr>
-              <a:t>남기고 깎는다</a:t>
-            </a:r>
-          </a:p>
-        </p:txBody>
-      </p:sp>
-      <p:sp>
-        <p:nvSpPr>
-          <p:cNvPr id="22" name="Rounded Rectangle 21"/>
+              <a:t>뺀다</a:t>
+            </a:r>
+          </a:p>
+          <a:p>
+            <a:pPr algn="l" eaLnBrk="0">
+              <a:lnSpc>
+                <a:spcPct val="110000"/>
+              </a:lnSpc>
+            </a:pPr>
+            <a:r>
+              <a:rPr sz="1250" b="1">
+                <a:solidFill>
+                  <a:srgbClr val="556175"/>
+                </a:solidFill>
+                <a:latin typeface="맑은 고딕"/>
+                <a:ea typeface="맑은 고딕"/>
+                <a:cs typeface="맑은 고딕"/>
+              </a:rPr>
+              <a:t>다른 점수로 되살아나지 않는다</a:t>
+            </a:r>
+          </a:p>
+        </p:txBody>
+      </p:sp>
+      <p:sp>
+        <p:nvSpPr>
+          <p:cNvPr id="18" name="Rounded Rectangle 17"/>
           <p:cNvSpPr/>
           <p:nvPr/>
         </p:nvSpPr>
         <p:spPr>
           <a:xfrm>
-            <a:off x="548640" y="5138927"/>
-            <a:ext cx="11094415" cy="850392"/>
+            <a:off x="548640" y="3792016"/>
+            <a:ext cx="11094415" cy="801014"/>
           </a:xfrm>
           <a:prstGeom prst="roundRect">
             <a:avLst>
@@ -22010,14 +21933,180 @@
       </p:sp>
       <p:sp>
         <p:nvSpPr>
+          <p:cNvPr id="19" name="TextBox 18"/>
+          <p:cNvSpPr txBox="1"/>
+          <p:nvPr/>
+        </p:nvSpPr>
+        <p:spPr>
+          <a:xfrm>
+            <a:off x="685800" y="3760012"/>
+            <a:ext cx="2514600" cy="865022"/>
+          </a:xfrm>
+          <a:prstGeom prst="rect">
+            <a:avLst/>
+          </a:prstGeom>
+          <a:noFill/>
+        </p:spPr>
+        <p:txBody>
+          <a:bodyPr wrap="square" anchor="ctr"/>
+          <a:lstStyle/>
+          <a:p>
+            <a:pPr algn="l" eaLnBrk="0">
+              <a:lnSpc>
+                <a:spcPct val="110000"/>
+              </a:lnSpc>
+            </a:pPr>
+            <a:r>
+              <a:rPr sz="1600" b="1">
+                <a:solidFill>
+                  <a:srgbClr val="13294B"/>
+                </a:solidFill>
+                <a:latin typeface="맑은 고딕"/>
+                <a:ea typeface="맑은 고딕"/>
+                <a:cs typeface="맑은 고딕"/>
+              </a:rPr>
+              <a:t>감점 PENALTY / 규정 적합성 표</a:t>
+            </a:r>
+          </a:p>
+        </p:txBody>
+      </p:sp>
+      <p:sp>
+        <p:nvSpPr>
+          <p:cNvPr id="20" name="TextBox 19"/>
+          <p:cNvSpPr txBox="1"/>
+          <p:nvPr/>
+        </p:nvSpPr>
+        <p:spPr>
+          <a:xfrm>
+            <a:off x="3200400" y="3760012"/>
+            <a:ext cx="6156655" cy="865022"/>
+          </a:xfrm>
+          <a:prstGeom prst="rect">
+            <a:avLst/>
+          </a:prstGeom>
+          <a:noFill/>
+        </p:spPr>
+        <p:txBody>
+          <a:bodyPr wrap="square" anchor="ctr"/>
+          <a:lstStyle/>
+          <a:p>
+            <a:pPr algn="l" eaLnBrk="0">
+              <a:lnSpc>
+                <a:spcPct val="110000"/>
+              </a:lnSpc>
+            </a:pPr>
+            <a:r>
+              <a:rPr sz="1400" b="0">
+                <a:solidFill>
+                  <a:srgbClr val="1F2A3A"/>
+                </a:solidFill>
+                <a:latin typeface="맑은 고딕"/>
+                <a:ea typeface="맑은 고딕"/>
+                <a:cs typeface="맑은 고딕"/>
+              </a:rPr>
+              <a:t>fan100_hours &gt; 24 → 팬 최대 운전 조치만 20만 원 감점</a:t>
+            </a:r>
+          </a:p>
+          <a:p>
+            <a:pPr algn="l" eaLnBrk="0">
+              <a:lnSpc>
+                <a:spcPct val="110000"/>
+              </a:lnSpc>
+            </a:pPr>
+            <a:r>
+              <a:rPr sz="1400" b="0">
+                <a:solidFill>
+                  <a:srgbClr val="1F2A3A"/>
+                </a:solidFill>
+                <a:latin typeface="맑은 고딕"/>
+                <a:ea typeface="맑은 고딕"/>
+                <a:cs typeface="맑은 고딕"/>
+              </a:rPr>
+              <a:t>적용 대상: SOP-COOL-11 · 12 (HM-8.8)</a:t>
+            </a:r>
+          </a:p>
+        </p:txBody>
+      </p:sp>
+      <p:sp>
+        <p:nvSpPr>
+          <p:cNvPr id="21" name="TextBox 20"/>
+          <p:cNvSpPr txBox="1"/>
+          <p:nvPr/>
+        </p:nvSpPr>
+        <p:spPr>
+          <a:xfrm>
+            <a:off x="9448495" y="3760012"/>
+            <a:ext cx="2103120" cy="865022"/>
+          </a:xfrm>
+          <a:prstGeom prst="rect">
+            <a:avLst/>
+          </a:prstGeom>
+          <a:noFill/>
+        </p:spPr>
+        <p:txBody>
+          <a:bodyPr wrap="square" anchor="ctr"/>
+          <a:lstStyle/>
+          <a:p>
+            <a:pPr algn="l" eaLnBrk="0">
+              <a:lnSpc>
+                <a:spcPct val="110000"/>
+              </a:lnSpc>
+            </a:pPr>
+            <a:r>
+              <a:rPr sz="1250" b="1">
+                <a:solidFill>
+                  <a:srgbClr val="556175"/>
+                </a:solidFill>
+                <a:latin typeface="맑은 고딕"/>
+                <a:ea typeface="맑은 고딕"/>
+                <a:cs typeface="맑은 고딕"/>
+              </a:rPr>
+              <a:t>남기고 깎는다</a:t>
+            </a:r>
+          </a:p>
+        </p:txBody>
+      </p:sp>
+      <p:sp>
+        <p:nvSpPr>
+          <p:cNvPr id="22" name="Rounded Rectangle 21"/>
+          <p:cNvSpPr/>
+          <p:nvPr/>
+        </p:nvSpPr>
+        <p:spPr>
+          <a:xfrm>
+            <a:off x="548640" y="4657039"/>
+            <a:ext cx="11094415" cy="801014"/>
+          </a:xfrm>
+          <a:prstGeom prst="roundRect">
+            <a:avLst>
+              <a:gd name="adj" fmla="val 8000"/>
+            </a:avLst>
+          </a:prstGeom>
+          <a:solidFill>
+            <a:srgbClr val="F3F6F9"/>
+          </a:solidFill>
+          <a:ln>
+            <a:noFill/>
+          </a:ln>
+        </p:spPr>
+        <p:txBody>
+          <a:bodyPr rtlCol="0" anchor="ctr"/>
+          <a:lstStyle/>
+          <a:p>
+            <a:pPr algn="ctr"/>
+          </a:p>
+        </p:txBody>
+      </p:sp>
+      <p:sp>
+        <p:nvSpPr>
           <p:cNvPr id="23" name="TextBox 22"/>
           <p:cNvSpPr txBox="1"/>
           <p:nvPr/>
         </p:nvSpPr>
         <p:spPr>
           <a:xfrm>
-            <a:off x="685800" y="5106923"/>
-            <a:ext cx="2514600" cy="914400"/>
+            <a:off x="685800" y="4625035"/>
+            <a:ext cx="2514600" cy="865022"/>
           </a:xfrm>
           <a:prstGeom prst="rect">
             <a:avLst/>
@@ -22042,7 +22131,7 @@
                 <a:ea typeface="맑은 고딕"/>
                 <a:cs typeface="맑은 고딕"/>
               </a:rPr>
-              <a:t>경고 WARN</a:t>
+              <a:t>경고 WARN / 규정 적합성 표</a:t>
             </a:r>
           </a:p>
         </p:txBody>
@@ -22055,8 +22144,8 @@
         </p:nvSpPr>
         <p:spPr>
           <a:xfrm>
-            <a:off x="3200400" y="5106923"/>
-            <a:ext cx="6156655" cy="914400"/>
+            <a:off x="3200400" y="4625035"/>
+            <a:ext cx="6156655" cy="865022"/>
           </a:xfrm>
           <a:prstGeom prst="rect">
             <a:avLst/>
@@ -22112,8 +22201,8 @@
         </p:nvSpPr>
         <p:spPr>
           <a:xfrm>
-            <a:off x="9448495" y="5106923"/>
-            <a:ext cx="2103120" cy="914400"/>
+            <a:off x="9448495" y="4625035"/>
+            <a:ext cx="2103120" cy="865022"/>
           </a:xfrm>
           <a:prstGeom prst="rect">
             <a:avLst/>
@@ -22139,6 +22228,154 @@
                 <a:cs typeface="맑은 고딕"/>
               </a:rPr>
               <a:t>남기고 알린다</a:t>
+            </a:r>
+          </a:p>
+        </p:txBody>
+      </p:sp>
+      <p:sp>
+        <p:nvSpPr>
+          <p:cNvPr id="26" name="Rounded Rectangle 25"/>
+          <p:cNvSpPr/>
+          <p:nvPr/>
+        </p:nvSpPr>
+        <p:spPr>
+          <a:xfrm>
+            <a:off x="548640" y="5522061"/>
+            <a:ext cx="11094415" cy="801014"/>
+          </a:xfrm>
+          <a:prstGeom prst="roundRect">
+            <a:avLst>
+              <a:gd name="adj" fmla="val 8000"/>
+            </a:avLst>
+          </a:prstGeom>
+          <a:solidFill>
+            <a:srgbClr val="F3F6F9"/>
+          </a:solidFill>
+          <a:ln>
+            <a:noFill/>
+          </a:ln>
+        </p:spPr>
+        <p:txBody>
+          <a:bodyPr rtlCol="0" anchor="ctr"/>
+          <a:lstStyle/>
+          <a:p>
+            <a:pPr algn="ctr"/>
+          </a:p>
+        </p:txBody>
+      </p:sp>
+      <p:sp>
+        <p:nvSpPr>
+          <p:cNvPr id="27" name="TextBox 26"/>
+          <p:cNvSpPr txBox="1"/>
+          <p:nvPr/>
+        </p:nvSpPr>
+        <p:spPr>
+          <a:xfrm>
+            <a:off x="685800" y="5490057"/>
+            <a:ext cx="2514600" cy="865022"/>
+          </a:xfrm>
+          <a:prstGeom prst="rect">
+            <a:avLst/>
+          </a:prstGeom>
+          <a:noFill/>
+        </p:spPr>
+        <p:txBody>
+          <a:bodyPr wrap="square" anchor="ctr"/>
+          <a:lstStyle/>
+          <a:p>
+            <a:pPr algn="l" eaLnBrk="0">
+              <a:lnSpc>
+                <a:spcPct val="110000"/>
+              </a:lnSpc>
+            </a:pPr>
+            <a:r>
+              <a:rPr sz="1600" b="1">
+                <a:solidFill>
+                  <a:srgbClr val="13294B"/>
+                </a:solidFill>
+                <a:latin typeface="맑은 고딕"/>
+                <a:ea typeface="맑은 고딕"/>
+                <a:cs typeface="맑은 고딕"/>
+              </a:rPr>
+              <a:t>순위 RANK / 순위 결정표</a:t>
+            </a:r>
+          </a:p>
+        </p:txBody>
+      </p:sp>
+      <p:sp>
+        <p:nvSpPr>
+          <p:cNvPr id="28" name="TextBox 27"/>
+          <p:cNvSpPr txBox="1"/>
+          <p:nvPr/>
+        </p:nvSpPr>
+        <p:spPr>
+          <a:xfrm>
+            <a:off x="3200400" y="5490057"/>
+            <a:ext cx="6156655" cy="865022"/>
+          </a:xfrm>
+          <a:prstGeom prst="rect">
+            <a:avLst/>
+          </a:prstGeom>
+          <a:noFill/>
+        </p:spPr>
+        <p:txBody>
+          <a:bodyPr wrap="square" anchor="ctr"/>
+          <a:lstStyle/>
+          <a:p>
+            <a:pPr algn="l" eaLnBrk="0">
+              <a:lnSpc>
+                <a:spcPct val="110000"/>
+              </a:lnSpc>
+            </a:pPr>
+            <a:r>
+              <a:rPr sz="1400" b="0">
+                <a:solidFill>
+                  <a:srgbClr val="1F2A3A"/>
+                </a:solidFill>
+                <a:latin typeface="맑은 고딕"/>
+                <a:ea typeface="맑은 고딕"/>
+                <a:cs typeface="맑은 고딕"/>
+              </a:rPr>
+              <a:t>남은 후보에 점수를 매길 식의 묶음, 순위 정책을 담는다</a:t>
+            </a:r>
+          </a:p>
+        </p:txBody>
+      </p:sp>
+      <p:sp>
+        <p:nvSpPr>
+          <p:cNvPr id="29" name="TextBox 28"/>
+          <p:cNvSpPr txBox="1"/>
+          <p:nvPr/>
+        </p:nvSpPr>
+        <p:spPr>
+          <a:xfrm>
+            <a:off x="9448495" y="5490057"/>
+            <a:ext cx="2103120" cy="865022"/>
+          </a:xfrm>
+          <a:prstGeom prst="rect">
+            <a:avLst/>
+          </a:prstGeom>
+          <a:noFill/>
+        </p:spPr>
+        <p:txBody>
+          <a:bodyPr wrap="square" anchor="ctr"/>
+          <a:lstStyle/>
+          <a:p>
+            <a:pPr algn="l" eaLnBrk="0">
+              <a:lnSpc>
+                <a:spcPct val="110000"/>
+              </a:lnSpc>
+            </a:pPr>
+            <a:r>
+              <a:rPr sz="1250" b="1">
+                <a:solidFill>
+                  <a:srgbClr val="556175"/>
+                </a:solidFill>
+                <a:latin typeface="맑은 고딕"/>
+                <a:ea typeface="맑은 고딕"/>
+                <a:cs typeface="맑은 고딕"/>
+              </a:rPr>
+              <a:t>점수로 견준다</a:t>
             </a:r>
           </a:p>
         </p:txBody>
@@ -26741,6 +26978,24 @@
               <a:t>원격 제어 후보만 있는데 운전 모드를 모른다</a:t>
             </a:r>
           </a:p>
+          <a:p>
+            <a:pPr algn="l" eaLnBrk="0">
+              <a:lnSpc>
+                <a:spcPct val="110000"/>
+              </a:lnSpc>
+            </a:pPr>
+            <a:r>
+              <a:rPr sz="1400" b="0">
+                <a:solidFill>
+                  <a:srgbClr val="1F2A3A"/>
+                </a:solidFill>
+                <a:latin typeface="맑은 고딕"/>
+                <a:ea typeface="맑은 고딕"/>
+                <a:cs typeface="맑은 고딕"/>
+              </a:rPr>
+              <a:t>설비가 보호 정지(TRIP): 리셋 외 후보 제외</a:t>
+            </a:r>
+          </a:p>
         </p:txBody>
       </p:sp>
       <p:sp>
@@ -31269,7 +31524,7 @@
                 <a:ea typeface="맑은 고딕"/>
                 <a:cs typeface="맑은 고딕"/>
               </a:rPr>
-              <a:t>HYD는 DMN의 결정 · 입력 · 규칙 · 처리 정책을 그래프에 저장하고, 그 정의에 맞는 평가 함수로 판정한다.</a:t>
+              <a:t>DMN의 개념을 쓴다고 표준 모델을 그대로 실행하는 것은 아니어서, 조건 식과 실행 주체를 표준과 견준다.</a:t>
             </a:r>
           </a:p>
         </p:txBody>
@@ -31350,7 +31605,7 @@
         </p:nvSpPr>
         <p:spPr>
           <a:xfrm>
-            <a:off x="548640" y="1627632"/>
+            <a:off x="548640" y="2418587"/>
             <a:ext cx="11094415" cy="347472"/>
           </a:xfrm>
           <a:prstGeom prst="roundRect">
@@ -31381,7 +31636,7 @@
         </p:nvSpPr>
         <p:spPr>
           <a:xfrm>
-            <a:off x="685800" y="1627632"/>
+            <a:off x="685800" y="2418587"/>
             <a:ext cx="2514600" cy="347472"/>
           </a:xfrm>
           <a:prstGeom prst="rect">
@@ -31420,7 +31675,7 @@
         </p:nvSpPr>
         <p:spPr>
           <a:xfrm>
-            <a:off x="3200400" y="1627632"/>
+            <a:off x="3200400" y="2418587"/>
             <a:ext cx="6248095" cy="347472"/>
           </a:xfrm>
           <a:prstGeom prst="rect">
@@ -31459,7 +31714,7 @@
         </p:nvSpPr>
         <p:spPr>
           <a:xfrm>
-            <a:off x="9448495" y="1627632"/>
+            <a:off x="9448495" y="2418587"/>
             <a:ext cx="2194560" cy="347472"/>
           </a:xfrm>
           <a:prstGeom prst="rect">
@@ -31498,8 +31753,8 @@
         </p:nvSpPr>
         <p:spPr>
           <a:xfrm>
-            <a:off x="548640" y="2061972"/>
-            <a:ext cx="11094415" cy="801014"/>
+            <a:off x="548640" y="2852927"/>
+            <a:ext cx="11094415" cy="850392"/>
           </a:xfrm>
           <a:prstGeom prst="roundRect">
             <a:avLst>
@@ -31529,8 +31784,8 @@
         </p:nvSpPr>
         <p:spPr>
           <a:xfrm>
-            <a:off x="685800" y="2029968"/>
-            <a:ext cx="2514600" cy="865022"/>
+            <a:off x="685800" y="2820923"/>
+            <a:ext cx="2514600" cy="914400"/>
           </a:xfrm>
           <a:prstGeom prst="rect">
             <a:avLst/>
@@ -31555,7 +31810,7 @@
                 <a:ea typeface="맑은 고딕"/>
                 <a:cs typeface="맑은 고딕"/>
               </a:rPr>
-              <a:t>결정과 규칙</a:t>
+              <a:t>조건 식</a:t>
             </a:r>
           </a:p>
         </p:txBody>
@@ -31568,8 +31823,8 @@
         </p:nvSpPr>
         <p:spPr>
           <a:xfrm>
-            <a:off x="3200400" y="2029968"/>
-            <a:ext cx="6156655" cy="865022"/>
+            <a:off x="3200400" y="2820923"/>
+            <a:ext cx="6156655" cy="914400"/>
           </a:xfrm>
           <a:prstGeom prst="rect">
             <a:avLst/>
@@ -31594,7 +31849,7 @@
                 <a:ea typeface="맑은 고딕"/>
                 <a:cs typeface="맑은 고딕"/>
               </a:rPr>
-              <a:t>Decision · DecisionTable · Rule</a:t>
+              <a:t>FEEL(Friendly Enough Expression Language)</a:t>
             </a:r>
           </a:p>
           <a:p>
@@ -31612,7 +31867,7 @@
                 <a:ea typeface="맑은 고딕"/>
                 <a:cs typeface="맑은 고딕"/>
               </a:rPr>
-              <a:t>업무 판단을 모델과 표로 정의한다</a:t>
+              <a:t>범위 · 목록 등을 식 하나로 적는다</a:t>
             </a:r>
           </a:p>
         </p:txBody>
@@ -31625,8 +31880,8 @@
         </p:nvSpPr>
         <p:spPr>
           <a:xfrm>
-            <a:off x="9448495" y="2029968"/>
-            <a:ext cx="2103120" cy="865022"/>
+            <a:off x="9448495" y="2820923"/>
+            <a:ext cx="2103120" cy="914400"/>
           </a:xfrm>
           <a:prstGeom prst="rect">
             <a:avLst/>
@@ -31651,7 +31906,25 @@
                 <a:ea typeface="맑은 고딕"/>
                 <a:cs typeface="맑은 고딕"/>
               </a:rPr>
-              <a:t>노드와 관계로 저장</a:t>
+              <a:t>TESTS의 연산자 · 기준값</a:t>
+            </a:r>
+          </a:p>
+          <a:p>
+            <a:pPr algn="l" eaLnBrk="0">
+              <a:lnSpc>
+                <a:spcPct val="110000"/>
+              </a:lnSpc>
+            </a:pPr>
+            <a:r>
+              <a:rPr sz="1250" b="1">
+                <a:solidFill>
+                  <a:srgbClr val="556175"/>
+                </a:solidFill>
+                <a:latin typeface="맑은 고딕"/>
+                <a:ea typeface="맑은 고딕"/>
+                <a:cs typeface="맑은 고딕"/>
+              </a:rPr>
+              <a:t>한 행의 검사는 AND</a:t>
             </a:r>
           </a:p>
         </p:txBody>
@@ -31664,8 +31937,174 @@
         </p:nvSpPr>
         <p:spPr>
           <a:xfrm>
-            <a:off x="548640" y="2926994"/>
-            <a:ext cx="11094415" cy="801014"/>
+            <a:off x="548640" y="3767327"/>
+            <a:ext cx="11094415" cy="850392"/>
+          </a:xfrm>
+          <a:prstGeom prst="roundRect">
+            <a:avLst>
+              <a:gd name="adj" fmla="val 8000"/>
+            </a:avLst>
+          </a:prstGeom>
+          <a:solidFill>
+            <a:srgbClr val="E7F3FD"/>
+          </a:solidFill>
+          <a:ln>
+            <a:noFill/>
+          </a:ln>
+        </p:spPr>
+        <p:txBody>
+          <a:bodyPr rtlCol="0" anchor="ctr"/>
+          <a:lstStyle/>
+          <a:p>
+            <a:pPr algn="ctr"/>
+          </a:p>
+        </p:txBody>
+      </p:sp>
+      <p:sp>
+        <p:nvSpPr>
+          <p:cNvPr id="15" name="TextBox 14"/>
+          <p:cNvSpPr txBox="1"/>
+          <p:nvPr/>
+        </p:nvSpPr>
+        <p:spPr>
+          <a:xfrm>
+            <a:off x="685800" y="3735323"/>
+            <a:ext cx="2514600" cy="914400"/>
+          </a:xfrm>
+          <a:prstGeom prst="rect">
+            <a:avLst/>
+          </a:prstGeom>
+          <a:noFill/>
+        </p:spPr>
+        <p:txBody>
+          <a:bodyPr wrap="square" anchor="ctr"/>
+          <a:lstStyle/>
+          <a:p>
+            <a:pPr algn="l" eaLnBrk="0">
+              <a:lnSpc>
+                <a:spcPct val="110000"/>
+              </a:lnSpc>
+            </a:pPr>
+            <a:r>
+              <a:rPr sz="1600" b="1">
+                <a:solidFill>
+                  <a:srgbClr val="13294B"/>
+                </a:solidFill>
+                <a:latin typeface="맑은 고딕"/>
+                <a:ea typeface="맑은 고딕"/>
+                <a:cs typeface="맑은 고딕"/>
+              </a:rPr>
+              <a:t>실행 주체</a:t>
+            </a:r>
+          </a:p>
+        </p:txBody>
+      </p:sp>
+      <p:sp>
+        <p:nvSpPr>
+          <p:cNvPr id="16" name="TextBox 15"/>
+          <p:cNvSpPr txBox="1"/>
+          <p:nvPr/>
+        </p:nvSpPr>
+        <p:spPr>
+          <a:xfrm>
+            <a:off x="3200400" y="3735323"/>
+            <a:ext cx="6156655" cy="914400"/>
+          </a:xfrm>
+          <a:prstGeom prst="rect">
+            <a:avLst/>
+          </a:prstGeom>
+          <a:noFill/>
+        </p:spPr>
+        <p:txBody>
+          <a:bodyPr wrap="square" anchor="ctr"/>
+          <a:lstStyle/>
+          <a:p>
+            <a:pPr algn="l" eaLnBrk="0">
+              <a:lnSpc>
+                <a:spcPct val="110000"/>
+              </a:lnSpc>
+            </a:pPr>
+            <a:r>
+              <a:rPr sz="1400" b="0">
+                <a:solidFill>
+                  <a:srgbClr val="1F2A3A"/>
+                </a:solidFill>
+                <a:latin typeface="맑은 고딕"/>
+                <a:ea typeface="맑은 고딕"/>
+                <a:cs typeface="맑은 고딕"/>
+              </a:rPr>
+              <a:t>표준 DMN 모델 파일을 읽는 엔진</a:t>
+            </a:r>
+          </a:p>
+        </p:txBody>
+      </p:sp>
+      <p:sp>
+        <p:nvSpPr>
+          <p:cNvPr id="17" name="TextBox 16"/>
+          <p:cNvSpPr txBox="1"/>
+          <p:nvPr/>
+        </p:nvSpPr>
+        <p:spPr>
+          <a:xfrm>
+            <a:off x="9448495" y="3735323"/>
+            <a:ext cx="2103120" cy="914400"/>
+          </a:xfrm>
+          <a:prstGeom prst="rect">
+            <a:avLst/>
+          </a:prstGeom>
+          <a:noFill/>
+        </p:spPr>
+        <p:txBody>
+          <a:bodyPr wrap="square" anchor="ctr"/>
+          <a:lstStyle/>
+          <a:p>
+            <a:pPr algn="l" eaLnBrk="0">
+              <a:lnSpc>
+                <a:spcPct val="110000"/>
+              </a:lnSpc>
+            </a:pPr>
+            <a:r>
+              <a:rPr sz="1250" b="1">
+                <a:solidFill>
+                  <a:srgbClr val="1A6FC4"/>
+                </a:solidFill>
+                <a:latin typeface="맑은 고딕"/>
+                <a:ea typeface="맑은 고딕"/>
+                <a:cs typeface="맑은 고딕"/>
+              </a:rPr>
+              <a:t>그래프의 규칙을</a:t>
+            </a:r>
+          </a:p>
+          <a:p>
+            <a:pPr algn="l" eaLnBrk="0">
+              <a:lnSpc>
+                <a:spcPct val="110000"/>
+              </a:lnSpc>
+            </a:pPr>
+            <a:r>
+              <a:rPr sz="1250" b="1">
+                <a:solidFill>
+                  <a:srgbClr val="1A6FC4"/>
+                </a:solidFill>
+                <a:latin typeface="맑은 고딕"/>
+                <a:ea typeface="맑은 고딕"/>
+                <a:cs typeface="맑은 고딕"/>
+              </a:rPr>
+              <a:t>평가 함수가 읽는다</a:t>
+            </a:r>
+          </a:p>
+        </p:txBody>
+      </p:sp>
+      <p:sp>
+        <p:nvSpPr>
+          <p:cNvPr id="18" name="Rounded Rectangle 17"/>
+          <p:cNvSpPr/>
+          <p:nvPr/>
+        </p:nvSpPr>
+        <p:spPr>
+          <a:xfrm>
+            <a:off x="548640" y="4681727"/>
+            <a:ext cx="11094415" cy="850392"/>
           </a:xfrm>
           <a:prstGeom prst="roundRect">
             <a:avLst>
@@ -31689,14 +32128,14 @@
       </p:sp>
       <p:sp>
         <p:nvSpPr>
-          <p:cNvPr id="15" name="TextBox 14"/>
-          <p:cNvSpPr txBox="1"/>
-          <p:nvPr/>
-        </p:nvSpPr>
-        <p:spPr>
-          <a:xfrm>
-            <a:off x="685800" y="2894990"/>
-            <a:ext cx="2514600" cy="865022"/>
+          <p:cNvPr id="19" name="TextBox 18"/>
+          <p:cNvSpPr txBox="1"/>
+          <p:nvPr/>
+        </p:nvSpPr>
+        <p:spPr>
+          <a:xfrm>
+            <a:off x="685800" y="4649723"/>
+            <a:ext cx="2514600" cy="914400"/>
           </a:xfrm>
           <a:prstGeom prst="rect">
             <a:avLst/>
@@ -31721,21 +32160,21 @@
                 <a:ea typeface="맑은 고딕"/>
                 <a:cs typeface="맑은 고딕"/>
               </a:rPr>
-              <a:t>조건</a:t>
-            </a:r>
-          </a:p>
-        </p:txBody>
-      </p:sp>
-      <p:sp>
-        <p:nvSpPr>
-          <p:cNvPr id="16" name="TextBox 15"/>
-          <p:cNvSpPr txBox="1"/>
-          <p:nvPr/>
-        </p:nvSpPr>
-        <p:spPr>
-          <a:xfrm>
-            <a:off x="3200400" y="2894990"/>
-            <a:ext cx="6156655" cy="865022"/>
+              <a:t>선언과 평가의 일치</a:t>
+            </a:r>
+          </a:p>
+        </p:txBody>
+      </p:sp>
+      <p:sp>
+        <p:nvSpPr>
+          <p:cNvPr id="20" name="TextBox 19"/>
+          <p:cNvSpPr txBox="1"/>
+          <p:nvPr/>
+        </p:nvSpPr>
+        <p:spPr>
+          <a:xfrm>
+            <a:off x="3200400" y="4649723"/>
+            <a:ext cx="6156655" cy="914400"/>
           </a:xfrm>
           <a:prstGeom prst="rect">
             <a:avLst/>
@@ -31760,173 +32199,7 @@
                 <a:ea typeface="맑은 고딕"/>
                 <a:cs typeface="맑은 고딕"/>
               </a:rPr>
-              <a:t>FEEL 식 언어로 입력 조건을 표현한다</a:t>
-            </a:r>
-          </a:p>
-        </p:txBody>
-      </p:sp>
-      <p:sp>
-        <p:nvSpPr>
-          <p:cNvPr id="17" name="TextBox 16"/>
-          <p:cNvSpPr txBox="1"/>
-          <p:nvPr/>
-        </p:nvSpPr>
-        <p:spPr>
-          <a:xfrm>
-            <a:off x="9448495" y="2894990"/>
-            <a:ext cx="2103120" cy="865022"/>
-          </a:xfrm>
-          <a:prstGeom prst="rect">
-            <a:avLst/>
-          </a:prstGeom>
-          <a:noFill/>
-        </p:spPr>
-        <p:txBody>
-          <a:bodyPr wrap="square" anchor="ctr"/>
-          <a:lstStyle/>
-          <a:p>
-            <a:pPr algn="l" eaLnBrk="0">
-              <a:lnSpc>
-                <a:spcPct val="110000"/>
-              </a:lnSpc>
-            </a:pPr>
-            <a:r>
-              <a:rPr sz="1250" b="1">
-                <a:solidFill>
-                  <a:srgbClr val="556175"/>
-                </a:solidFill>
-                <a:latin typeface="맑은 고딕"/>
-                <a:ea typeface="맑은 고딕"/>
-                <a:cs typeface="맑은 고딕"/>
-              </a:rPr>
-              <a:t>TESTS의 연산자 · 값</a:t>
-            </a:r>
-          </a:p>
-          <a:p>
-            <a:pPr algn="l" eaLnBrk="0">
-              <a:lnSpc>
-                <a:spcPct val="110000"/>
-              </a:lnSpc>
-            </a:pPr>
-            <a:r>
-              <a:rPr sz="1250" b="1">
-                <a:solidFill>
-                  <a:srgbClr val="556175"/>
-                </a:solidFill>
-                <a:latin typeface="맑은 고딕"/>
-                <a:ea typeface="맑은 고딕"/>
-                <a:cs typeface="맑은 고딕"/>
-              </a:rPr>
-              <a:t>한 행의 검사는 AND</a:t>
-            </a:r>
-          </a:p>
-        </p:txBody>
-      </p:sp>
-      <p:sp>
-        <p:nvSpPr>
-          <p:cNvPr id="18" name="Rounded Rectangle 17"/>
-          <p:cNvSpPr/>
-          <p:nvPr/>
-        </p:nvSpPr>
-        <p:spPr>
-          <a:xfrm>
-            <a:off x="548640" y="3792016"/>
-            <a:ext cx="11094415" cy="801014"/>
-          </a:xfrm>
-          <a:prstGeom prst="roundRect">
-            <a:avLst>
-              <a:gd name="adj" fmla="val 8000"/>
-            </a:avLst>
-          </a:prstGeom>
-          <a:solidFill>
-            <a:srgbClr val="F3F6F9"/>
-          </a:solidFill>
-          <a:ln>
-            <a:noFill/>
-          </a:ln>
-        </p:spPr>
-        <p:txBody>
-          <a:bodyPr rtlCol="0" anchor="ctr"/>
-          <a:lstStyle/>
-          <a:p>
-            <a:pPr algn="ctr"/>
-          </a:p>
-        </p:txBody>
-      </p:sp>
-      <p:sp>
-        <p:nvSpPr>
-          <p:cNvPr id="19" name="TextBox 18"/>
-          <p:cNvSpPr txBox="1"/>
-          <p:nvPr/>
-        </p:nvSpPr>
-        <p:spPr>
-          <a:xfrm>
-            <a:off x="685800" y="3760012"/>
-            <a:ext cx="2514600" cy="865022"/>
-          </a:xfrm>
-          <a:prstGeom prst="rect">
-            <a:avLst/>
-          </a:prstGeom>
-          <a:noFill/>
-        </p:spPr>
-        <p:txBody>
-          <a:bodyPr wrap="square" anchor="ctr"/>
-          <a:lstStyle/>
-          <a:p>
-            <a:pPr algn="l" eaLnBrk="0">
-              <a:lnSpc>
-                <a:spcPct val="110000"/>
-              </a:lnSpc>
-            </a:pPr>
-            <a:r>
-              <a:rPr sz="1600" b="1">
-                <a:solidFill>
-                  <a:srgbClr val="13294B"/>
-                </a:solidFill>
-                <a:latin typeface="맑은 고딕"/>
-                <a:ea typeface="맑은 고딕"/>
-                <a:cs typeface="맑은 고딕"/>
-              </a:rPr>
-              <a:t>처리 정책</a:t>
-            </a:r>
-          </a:p>
-        </p:txBody>
-      </p:sp>
-      <p:sp>
-        <p:nvSpPr>
-          <p:cNvPr id="20" name="TextBox 19"/>
-          <p:cNvSpPr txBox="1"/>
-          <p:nvPr/>
-        </p:nvSpPr>
-        <p:spPr>
-          <a:xfrm>
-            <a:off x="3200400" y="3760012"/>
-            <a:ext cx="6156655" cy="865022"/>
-          </a:xfrm>
-          <a:prstGeom prst="rect">
-            <a:avLst/>
-          </a:prstGeom>
-          <a:noFill/>
-        </p:spPr>
-        <p:txBody>
-          <a:bodyPr wrap="square" anchor="ctr"/>
-          <a:lstStyle/>
-          <a:p>
-            <a:pPr algn="l" eaLnBrk="0">
-              <a:lnSpc>
-                <a:spcPct val="110000"/>
-              </a:lnSpc>
-            </a:pPr>
-            <a:r>
-              <a:rPr sz="1400" b="0">
-                <a:solidFill>
-                  <a:srgbClr val="1F2A3A"/>
-                </a:solidFill>
-                <a:latin typeface="맑은 고딕"/>
-                <a:ea typeface="맑은 고딕"/>
-                <a:cs typeface="맑은 고딕"/>
-              </a:rPr>
-              <a:t>Hit Policy로 일치 행의 처리 방식을 정한다</a:t>
+              <a:t>선언한 Hit Policy대로 결과를 해석한다</a:t>
             </a:r>
           </a:p>
         </p:txBody>
@@ -31939,340 +32212,8 @@
         </p:nvSpPr>
         <p:spPr>
           <a:xfrm>
-            <a:off x="9448495" y="3760012"/>
-            <a:ext cx="2103120" cy="865022"/>
-          </a:xfrm>
-          <a:prstGeom prst="rect">
-            <a:avLst/>
-          </a:prstGeom>
-          <a:noFill/>
-        </p:spPr>
-        <p:txBody>
-          <a:bodyPr wrap="square" anchor="ctr"/>
-          <a:lstStyle/>
-          <a:p>
-            <a:pPr algn="l" eaLnBrk="0">
-              <a:lnSpc>
-                <a:spcPct val="110000"/>
-              </a:lnSpc>
-            </a:pPr>
-            <a:r>
-              <a:rPr sz="1250" b="1">
-                <a:solidFill>
-                  <a:srgbClr val="556175"/>
-                </a:solidFill>
-                <a:latin typeface="맑은 고딕"/>
-                <a:ea typeface="맑은 고딕"/>
-                <a:cs typeface="맑은 고딕"/>
-              </a:rPr>
-              <a:t>후보 · 규정: COLLECT</a:t>
-            </a:r>
-          </a:p>
-          <a:p>
-            <a:pPr algn="l" eaLnBrk="0">
-              <a:lnSpc>
-                <a:spcPct val="110000"/>
-              </a:lnSpc>
-            </a:pPr>
-            <a:r>
-              <a:rPr sz="1250" b="1">
-                <a:solidFill>
-                  <a:srgbClr val="556175"/>
-                </a:solidFill>
-                <a:latin typeface="맑은 고딕"/>
-                <a:ea typeface="맑은 고딕"/>
-                <a:cs typeface="맑은 고딕"/>
-              </a:rPr>
-              <a:t>순위 정책: UNIQUE</a:t>
-            </a:r>
-          </a:p>
-        </p:txBody>
-      </p:sp>
-      <p:sp>
-        <p:nvSpPr>
-          <p:cNvPr id="22" name="Rounded Rectangle 21"/>
-          <p:cNvSpPr/>
-          <p:nvPr/>
-        </p:nvSpPr>
-        <p:spPr>
-          <a:xfrm>
-            <a:off x="548640" y="4657039"/>
-            <a:ext cx="11094415" cy="801014"/>
-          </a:xfrm>
-          <a:prstGeom prst="roundRect">
-            <a:avLst>
-              <a:gd name="adj" fmla="val 8000"/>
-            </a:avLst>
-          </a:prstGeom>
-          <a:solidFill>
-            <a:srgbClr val="E7F3FD"/>
-          </a:solidFill>
-          <a:ln>
-            <a:noFill/>
-          </a:ln>
-        </p:spPr>
-        <p:txBody>
-          <a:bodyPr rtlCol="0" anchor="ctr"/>
-          <a:lstStyle/>
-          <a:p>
-            <a:pPr algn="ctr"/>
-          </a:p>
-        </p:txBody>
-      </p:sp>
-      <p:sp>
-        <p:nvSpPr>
-          <p:cNvPr id="23" name="TextBox 22"/>
-          <p:cNvSpPr txBox="1"/>
-          <p:nvPr/>
-        </p:nvSpPr>
-        <p:spPr>
-          <a:xfrm>
-            <a:off x="685800" y="4625035"/>
-            <a:ext cx="2514600" cy="865022"/>
-          </a:xfrm>
-          <a:prstGeom prst="rect">
-            <a:avLst/>
-          </a:prstGeom>
-          <a:noFill/>
-        </p:spPr>
-        <p:txBody>
-          <a:bodyPr wrap="square" anchor="ctr"/>
-          <a:lstStyle/>
-          <a:p>
-            <a:pPr algn="l" eaLnBrk="0">
-              <a:lnSpc>
-                <a:spcPct val="110000"/>
-              </a:lnSpc>
-            </a:pPr>
-            <a:r>
-              <a:rPr sz="1600" b="1">
-                <a:solidFill>
-                  <a:srgbClr val="13294B"/>
-                </a:solidFill>
-                <a:latin typeface="맑은 고딕"/>
-                <a:ea typeface="맑은 고딕"/>
-                <a:cs typeface="맑은 고딕"/>
-              </a:rPr>
-              <a:t>실행</a:t>
-            </a:r>
-          </a:p>
-        </p:txBody>
-      </p:sp>
-      <p:sp>
-        <p:nvSpPr>
-          <p:cNvPr id="24" name="TextBox 23"/>
-          <p:cNvSpPr txBox="1"/>
-          <p:nvPr/>
-        </p:nvSpPr>
-        <p:spPr>
-          <a:xfrm>
-            <a:off x="3200400" y="4625035"/>
-            <a:ext cx="6156655" cy="865022"/>
-          </a:xfrm>
-          <a:prstGeom prst="rect">
-            <a:avLst/>
-          </a:prstGeom>
-          <a:noFill/>
-        </p:spPr>
-        <p:txBody>
-          <a:bodyPr wrap="square" anchor="ctr"/>
-          <a:lstStyle/>
-          <a:p>
-            <a:pPr algn="l" eaLnBrk="0">
-              <a:lnSpc>
-                <a:spcPct val="110000"/>
-              </a:lnSpc>
-            </a:pPr>
-            <a:r>
-              <a:rPr sz="1400" b="0">
-                <a:solidFill>
-                  <a:srgbClr val="1F2A3A"/>
-                </a:solidFill>
-                <a:latin typeface="맑은 고딕"/>
-                <a:ea typeface="맑은 고딕"/>
-                <a:cs typeface="맑은 고딕"/>
-              </a:rPr>
-              <a:t>표준 DMN 모델을 실행하는 엔진</a:t>
-            </a:r>
-          </a:p>
-        </p:txBody>
-      </p:sp>
-      <p:sp>
-        <p:nvSpPr>
-          <p:cNvPr id="25" name="TextBox 24"/>
-          <p:cNvSpPr txBox="1"/>
-          <p:nvPr/>
-        </p:nvSpPr>
-        <p:spPr>
-          <a:xfrm>
-            <a:off x="9448495" y="4625035"/>
-            <a:ext cx="2103120" cy="865022"/>
-          </a:xfrm>
-          <a:prstGeom prst="rect">
-            <a:avLst/>
-          </a:prstGeom>
-          <a:noFill/>
-        </p:spPr>
-        <p:txBody>
-          <a:bodyPr wrap="square" anchor="ctr"/>
-          <a:lstStyle/>
-          <a:p>
-            <a:pPr algn="l" eaLnBrk="0">
-              <a:lnSpc>
-                <a:spcPct val="110000"/>
-              </a:lnSpc>
-            </a:pPr>
-            <a:r>
-              <a:rPr sz="1250" b="1">
-                <a:solidFill>
-                  <a:srgbClr val="1A6FC4"/>
-                </a:solidFill>
-                <a:latin typeface="맑은 고딕"/>
-                <a:ea typeface="맑은 고딕"/>
-                <a:cs typeface="맑은 고딕"/>
-              </a:rPr>
-              <a:t>그래프의 규칙을</a:t>
-            </a:r>
-          </a:p>
-          <a:p>
-            <a:pPr algn="l" eaLnBrk="0">
-              <a:lnSpc>
-                <a:spcPct val="110000"/>
-              </a:lnSpc>
-            </a:pPr>
-            <a:r>
-              <a:rPr sz="1250" b="1">
-                <a:solidFill>
-                  <a:srgbClr val="1A6FC4"/>
-                </a:solidFill>
-                <a:latin typeface="맑은 고딕"/>
-                <a:ea typeface="맑은 고딕"/>
-                <a:cs typeface="맑은 고딕"/>
-              </a:rPr>
-              <a:t>평가 함수가 읽는다</a:t>
-            </a:r>
-          </a:p>
-        </p:txBody>
-      </p:sp>
-      <p:sp>
-        <p:nvSpPr>
-          <p:cNvPr id="26" name="Rounded Rectangle 25"/>
-          <p:cNvSpPr/>
-          <p:nvPr/>
-        </p:nvSpPr>
-        <p:spPr>
-          <a:xfrm>
-            <a:off x="548640" y="5522061"/>
-            <a:ext cx="11094415" cy="801014"/>
-          </a:xfrm>
-          <a:prstGeom prst="roundRect">
-            <a:avLst>
-              <a:gd name="adj" fmla="val 8000"/>
-            </a:avLst>
-          </a:prstGeom>
-          <a:solidFill>
-            <a:srgbClr val="F3F6F9"/>
-          </a:solidFill>
-          <a:ln>
-            <a:noFill/>
-          </a:ln>
-        </p:spPr>
-        <p:txBody>
-          <a:bodyPr rtlCol="0" anchor="ctr"/>
-          <a:lstStyle/>
-          <a:p>
-            <a:pPr algn="ctr"/>
-          </a:p>
-        </p:txBody>
-      </p:sp>
-      <p:sp>
-        <p:nvSpPr>
-          <p:cNvPr id="27" name="TextBox 26"/>
-          <p:cNvSpPr txBox="1"/>
-          <p:nvPr/>
-        </p:nvSpPr>
-        <p:spPr>
-          <a:xfrm>
-            <a:off x="685800" y="5490057"/>
-            <a:ext cx="2514600" cy="865022"/>
-          </a:xfrm>
-          <a:prstGeom prst="rect">
-            <a:avLst/>
-          </a:prstGeom>
-          <a:noFill/>
-        </p:spPr>
-        <p:txBody>
-          <a:bodyPr wrap="square" anchor="ctr"/>
-          <a:lstStyle/>
-          <a:p>
-            <a:pPr algn="l" eaLnBrk="0">
-              <a:lnSpc>
-                <a:spcPct val="110000"/>
-              </a:lnSpc>
-            </a:pPr>
-            <a:r>
-              <a:rPr sz="1600" b="1">
-                <a:solidFill>
-                  <a:srgbClr val="13294B"/>
-                </a:solidFill>
-                <a:latin typeface="맑은 고딕"/>
-                <a:ea typeface="맑은 고딕"/>
-                <a:cs typeface="맑은 고딕"/>
-              </a:rPr>
-              <a:t>선언과 평가의 일치</a:t>
-            </a:r>
-          </a:p>
-        </p:txBody>
-      </p:sp>
-      <p:sp>
-        <p:nvSpPr>
-          <p:cNvPr id="28" name="TextBox 27"/>
-          <p:cNvSpPr txBox="1"/>
-          <p:nvPr/>
-        </p:nvSpPr>
-        <p:spPr>
-          <a:xfrm>
-            <a:off x="3200400" y="5490057"/>
-            <a:ext cx="6156655" cy="865022"/>
-          </a:xfrm>
-          <a:prstGeom prst="rect">
-            <a:avLst/>
-          </a:prstGeom>
-          <a:noFill/>
-        </p:spPr>
-        <p:txBody>
-          <a:bodyPr wrap="square" anchor="ctr"/>
-          <a:lstStyle/>
-          <a:p>
-            <a:pPr algn="l" eaLnBrk="0">
-              <a:lnSpc>
-                <a:spcPct val="110000"/>
-              </a:lnSpc>
-            </a:pPr>
-            <a:r>
-              <a:rPr sz="1400" b="0">
-                <a:solidFill>
-                  <a:srgbClr val="1F2A3A"/>
-                </a:solidFill>
-                <a:latin typeface="맑은 고딕"/>
-                <a:ea typeface="맑은 고딕"/>
-                <a:cs typeface="맑은 고딕"/>
-              </a:rPr>
-              <a:t>정의한 정책에 따라 결과를 해석한다</a:t>
-            </a:r>
-          </a:p>
-        </p:txBody>
-      </p:sp>
-      <p:sp>
-        <p:nvSpPr>
-          <p:cNvPr id="29" name="TextBox 28"/>
-          <p:cNvSpPr txBox="1"/>
-          <p:nvPr/>
-        </p:nvSpPr>
-        <p:spPr>
-          <a:xfrm>
-            <a:off x="9448495" y="5490057"/>
-            <a:ext cx="2103120" cy="865022"/>
+            <a:off x="9448495" y="4649723"/>
+            <a:ext cx="2103120" cy="914400"/>
           </a:xfrm>
           <a:prstGeom prst="rect">
             <a:avLst/>
@@ -32494,7 +32435,7 @@
       </p:sp>
       <p:pic>
         <p:nvPicPr>
-          <p:cNvPr id="6" name="삽화:결정표_그래프.svg" descr="illust_3873825685148864893_1792037122.png"/>
+          <p:cNvPr id="6" name="삽화:결정표_그래프.svg" descr="illust_3002272561414521080_1792123197.png"/>
           <p:cNvPicPr>
             <a:picLocks noChangeAspect="1"/>
           </p:cNvPicPr>
@@ -35915,7 +35856,7 @@
                 <a:ea typeface="맑은 고딕"/>
                 <a:cs typeface="맑은 고딕"/>
               </a:rPr>
-              <a:t>지체상금은 만원/월 · DOWN(작을수록 좋다)</a:t>
+              <a:t>비용 지표는 DOWN(작을수록 좋다)</a:t>
             </a:r>
           </a:p>
         </p:txBody>
@@ -36247,7 +36188,7 @@
                 <a:ea typeface="맑은 고딕"/>
                 <a:cs typeface="맑은 고딕"/>
               </a:rPr>
-              <a:t>thresholdWarn = 5 ℃</a:t>
+              <a:t>경고 기준 5 ℃</a:t>
             </a:r>
           </a:p>
           <a:p>
@@ -36265,7 +36206,7 @@
                 <a:ea typeface="맑은 고딕"/>
                 <a:cs typeface="맑은 고딕"/>
               </a:rPr>
-              <a:t>thresholdCrit = 0 ℃</a:t>
+              <a:t>위험 기준 0 ℃</a:t>
             </a:r>
           </a:p>
         </p:txBody>
@@ -36432,42 +36373,6 @@
                 <a:cs typeface="맑은 고딕"/>
               </a:rPr>
               <a:t>실시간 · 생산팀</a:t>
-            </a:r>
-          </a:p>
-          <a:p>
-            <a:pPr algn="l" eaLnBrk="0">
-              <a:lnSpc>
-                <a:spcPct val="110000"/>
-              </a:lnSpc>
-            </a:pPr>
-            <a:r>
-              <a:rPr sz="1400" b="0">
-                <a:solidFill>
-                  <a:srgbClr val="1F2A3A"/>
-                </a:solidFill>
-                <a:latin typeface="맑은 고딕"/>
-                <a:ea typeface="맑은 고딕"/>
-                <a:cs typeface="맑은 고딕"/>
-              </a:rPr>
-              <a:t>납기 준수율: 주 · 영업팀</a:t>
-            </a:r>
-          </a:p>
-          <a:p>
-            <a:pPr algn="l" eaLnBrk="0">
-              <a:lnSpc>
-                <a:spcPct val="110000"/>
-              </a:lnSpc>
-            </a:pPr>
-            <a:r>
-              <a:rPr sz="1400" b="0">
-                <a:solidFill>
-                  <a:srgbClr val="1F2A3A"/>
-                </a:solidFill>
-                <a:latin typeface="맑은 고딕"/>
-                <a:ea typeface="맑은 고딕"/>
-                <a:cs typeface="맑은 고딕"/>
-              </a:rPr>
-              <a:t>설비 가동률: 일 · 생산팀</a:t>
             </a:r>
           </a:p>
         </p:txBody>
@@ -40001,7 +39906,7 @@
       </p:sp>
       <p:pic>
         <p:nvPicPr>
-          <p:cNvPr id="6" name="삽화:전략맵_그래프.svg" descr="illust_6240599731728851956_1792037122.png"/>
+          <p:cNvPr id="6" name="삽화:전략맵_그래프.svg" descr="illust_2322640560915261336_1792123197.png"/>
           <p:cNvPicPr>
             <a:picLocks noChangeAspect="1"/>
           </p:cNvPicPr>
@@ -40701,7 +40606,7 @@
       </p:sp>
       <p:pic>
         <p:nvPicPr>
-          <p:cNvPr id="6" name="삽화:선행후행_경로.svg" descr="illust_5405931167734474174_1792037122.png"/>
+          <p:cNvPr id="6" name="삽화:선행후행_경로.svg" descr="illust_5596633277258699066_1792123197.png"/>
           <p:cNvPicPr>
             <a:picLocks noChangeAspect="1"/>
           </p:cNvPicPr>
@@ -41401,7 +41306,7 @@
       </p:sp>
       <p:pic>
         <p:nvPicPr>
-          <p:cNvPr id="6" name="삽화:조건부영향.svg" descr="illust_6397420479421010800_1792037122.png"/>
+          <p:cNvPr id="6" name="삽화:조건부영향.svg" descr="illust_9034890914270291967_1792123197.png"/>
           <p:cNvPicPr>
             <a:picLocks noChangeAspect="1"/>
           </p:cNvPicPr>
@@ -43430,7 +43335,7 @@
       </p:sp>
       <p:pic>
         <p:nvPicPr>
-          <p:cNvPr id="6" name="삽화:성과경로_6.svg" descr="illust_6207606794825715006_1792037122.png"/>
+          <p:cNvPr id="6" name="삽화:성과경로_6.svg" descr="illust_1818023412005640104_1792123197.png"/>
           <p:cNvPicPr>
             <a:picLocks noChangeAspect="1"/>
           </p:cNvPicPr>
@@ -45386,7 +45291,7 @@
                 <a:ea typeface="맑은 고딕"/>
                 <a:cs typeface="맑은 고딕"/>
               </a:rPr>
-              <a:t>쿨러 사건 네 후보의 예측 유온과 순위</a:t>
+              <a:t>쿨러 사건 네 후보의 예측 유온과 판단 순위</a:t>
             </a:r>
           </a:p>
         </p:txBody>
@@ -50790,7 +50695,7 @@
       </p:sp>
       <p:pic>
         <p:nvPicPr>
-          <p:cNvPr id="6" name="삽화:가정분석_3.svg" descr="illust_137817303407899810_1792037122.png"/>
+          <p:cNvPr id="6" name="삽화:가정분석_3.svg" descr="illust_850849513068163759_1792123197.png"/>
           <p:cNvPicPr>
             <a:picLocks noChangeAspect="1"/>
           </p:cNvPicPr>
@@ -50996,7 +50901,7 @@
                 <a:ea typeface="맑은 고딕"/>
                 <a:cs typeface="맑은 고딕"/>
               </a:rPr>
-              <a:t>납기 · 위약금 · 전력 단가 · 감점 기준</a:t>
+              <a:t>납기 · 위약금 · 감점 기준 · 관점 중요도</a:t>
             </a:r>
           </a:p>
         </p:txBody>
@@ -53839,7 +53744,7 @@
                 <a:ea typeface="맑은 고딕"/>
                 <a:cs typeface="맑은 고딕"/>
               </a:rPr>
-              <a:t>모드 · 설비 상태 · 예비 펌프 · 팬 연속 시간 중 하나를 바꾼다</a:t>
+              <a:t>운전 모드 · 설비 상태 · 팬 연속 시간 중 하나를 바꾼다</a:t>
             </a:r>
           </a:p>
         </p:txBody>
@@ -54373,7 +54278,7 @@
                 <a:ea typeface="맑은 고딕"/>
                 <a:cs typeface="맑은 고딕"/>
               </a:rPr>
-              <a:t>완성본의 계산과 결과를 대조한다</a:t>
+              <a:t>시험값은 사본에만: 설비 명령 · 원본은 그대로</a:t>
             </a:r>
           </a:p>
         </p:txBody>
@@ -55122,6 +55027,24 @@
               <a:t>기존 식별자와 고장 유형을 재사용한다</a:t>
             </a:r>
           </a:p>
+          <a:p>
+            <a:pPr algn="l" eaLnBrk="0">
+              <a:lnSpc>
+                <a:spcPct val="110000"/>
+              </a:lnSpc>
+            </a:pPr>
+            <a:r>
+              <a:rPr sz="1400" b="0">
+                <a:solidFill>
+                  <a:srgbClr val="1F2A3A"/>
+                </a:solidFill>
+                <a:latin typeface="맑은 고딕"/>
+                <a:ea typeface="맑은 고딕"/>
+                <a:cs typeface="맑은 고딕"/>
+              </a:rPr>
+              <a:t>원문 자동 추출은 만들지 않는다</a:t>
+            </a:r>
+          </a:p>
         </p:txBody>
       </p:sp>
       <p:sp>
@@ -59329,7 +59252,7 @@
         <p:spPr>
           <a:xfrm>
             <a:off x="3200400" y="1961387"/>
-            <a:ext cx="6248095" cy="347472"/>
+            <a:ext cx="8442655" cy="347472"/>
           </a:xfrm>
           <a:prstGeom prst="rect">
             <a:avLst/>
@@ -59354,45 +59277,6 @@
                 <a:ea typeface="맑은 고딕"/>
                 <a:cs typeface="맑은 고딕"/>
               </a:rPr>
-              <a:t>구별할 개념</a:t>
-            </a:r>
-          </a:p>
-        </p:txBody>
-      </p:sp>
-      <p:sp>
-        <p:nvSpPr>
-          <p:cNvPr id="9" name="TextBox 8"/>
-          <p:cNvSpPr txBox="1"/>
-          <p:nvPr/>
-        </p:nvSpPr>
-        <p:spPr>
-          <a:xfrm>
-            <a:off x="9448495" y="1961387"/>
-            <a:ext cx="2194560" cy="347472"/>
-          </a:xfrm>
-          <a:prstGeom prst="rect">
-            <a:avLst/>
-          </a:prstGeom>
-          <a:noFill/>
-        </p:spPr>
-        <p:txBody>
-          <a:bodyPr wrap="square" anchor="ctr"/>
-          <a:lstStyle/>
-          <a:p>
-            <a:pPr algn="l" eaLnBrk="0">
-              <a:lnSpc>
-                <a:spcPct val="110000"/>
-              </a:lnSpc>
-            </a:pPr>
-            <a:r>
-              <a:rPr sz="1300" b="1">
-                <a:solidFill>
-                  <a:srgbClr val="FFFFFF"/>
-                </a:solidFill>
-                <a:latin typeface="맑은 고딕"/>
-                <a:ea typeface="맑은 고딕"/>
-                <a:cs typeface="맑은 고딕"/>
-              </a:rPr>
               <a:t>찾을 근거</a:t>
             </a:r>
           </a:p>
@@ -59400,7 +59284,7 @@
       </p:sp>
       <p:sp>
         <p:nvSpPr>
-          <p:cNvPr id="10" name="Rounded Rectangle 9"/>
+          <p:cNvPr id="9" name="Rounded Rectangle 8"/>
           <p:cNvSpPr/>
           <p:nvPr/>
         </p:nvSpPr>
@@ -59431,7 +59315,7 @@
       </p:sp>
       <p:sp>
         <p:nvSpPr>
-          <p:cNvPr id="11" name="TextBox 10"/>
+          <p:cNvPr id="10" name="TextBox 9"/>
           <p:cNvSpPr txBox="1"/>
           <p:nvPr/>
         </p:nvSpPr>
@@ -59470,14 +59354,14 @@
       </p:sp>
       <p:sp>
         <p:nvSpPr>
-          <p:cNvPr id="12" name="TextBox 11"/>
+          <p:cNvPr id="11" name="TextBox 10"/>
           <p:cNvSpPr txBox="1"/>
           <p:nvPr/>
         </p:nvSpPr>
         <p:spPr>
           <a:xfrm>
             <a:off x="3200400" y="2363723"/>
-            <a:ext cx="6156655" cy="914400"/>
+            <a:ext cx="8351215" cy="914400"/>
           </a:xfrm>
           <a:prstGeom prst="rect">
             <a:avLst/>
@@ -59502,71 +59386,14 @@
                 <a:ea typeface="맑은 고딕"/>
                 <a:cs typeface="맑은 고딕"/>
               </a:rPr>
-              <a:t>SOP · DMN · BSC · What-if 중 선택</a:t>
-            </a:r>
-          </a:p>
-        </p:txBody>
-      </p:sp>
-      <p:sp>
-        <p:nvSpPr>
-          <p:cNvPr id="13" name="TextBox 12"/>
-          <p:cNvSpPr txBox="1"/>
-          <p:nvPr/>
-        </p:nvSpPr>
-        <p:spPr>
-          <a:xfrm>
-            <a:off x="9448495" y="2363723"/>
-            <a:ext cx="2103120" cy="914400"/>
-          </a:xfrm>
-          <a:prstGeom prst="rect">
-            <a:avLst/>
-          </a:prstGeom>
-          <a:noFill/>
-        </p:spPr>
-        <p:txBody>
-          <a:bodyPr wrap="square" anchor="ctr"/>
-          <a:lstStyle/>
-          <a:p>
-            <a:pPr algn="l" eaLnBrk="0">
-              <a:lnSpc>
-                <a:spcPct val="110000"/>
-              </a:lnSpc>
-            </a:pPr>
-            <a:r>
-              <a:rPr sz="1250" b="1">
-                <a:solidFill>
-                  <a:srgbClr val="556175"/>
-                </a:solidFill>
-                <a:latin typeface="맑은 고딕"/>
-                <a:ea typeface="맑은 고딕"/>
-                <a:cs typeface="맑은 고딕"/>
-              </a:rPr>
-              <a:t>재가동 뒤 확인할</a:t>
-            </a:r>
-          </a:p>
-          <a:p>
-            <a:pPr algn="l" eaLnBrk="0">
-              <a:lnSpc>
-                <a:spcPct val="110000"/>
-              </a:lnSpc>
-            </a:pPr>
-            <a:r>
-              <a:rPr sz="1250" b="1">
-                <a:solidFill>
-                  <a:srgbClr val="556175"/>
-                </a:solidFill>
-                <a:latin typeface="맑은 고딕"/>
-                <a:ea typeface="맑은 고딕"/>
-                <a:cs typeface="맑은 고딕"/>
-              </a:rPr>
-              <a:t>매뉴얼의 완료 기준</a:t>
-            </a:r>
-          </a:p>
-        </p:txBody>
-      </p:sp>
-      <p:sp>
-        <p:nvSpPr>
-          <p:cNvPr id="14" name="Rounded Rectangle 13"/>
+              <a:t>재가동 뒤 확인할 매뉴얼의 완료 기준</a:t>
+            </a:r>
+          </a:p>
+        </p:txBody>
+      </p:sp>
+      <p:sp>
+        <p:nvSpPr>
+          <p:cNvPr id="12" name="Rounded Rectangle 11"/>
           <p:cNvSpPr/>
           <p:nvPr/>
         </p:nvSpPr>
@@ -59597,7 +59424,7 @@
       </p:sp>
       <p:sp>
         <p:nvSpPr>
-          <p:cNvPr id="15" name="TextBox 14"/>
+          <p:cNvPr id="13" name="TextBox 12"/>
           <p:cNvSpPr txBox="1"/>
           <p:nvPr/>
         </p:nvSpPr>
@@ -59636,14 +59463,14 @@
       </p:sp>
       <p:sp>
         <p:nvSpPr>
-          <p:cNvPr id="16" name="TextBox 15"/>
+          <p:cNvPr id="14" name="TextBox 13"/>
           <p:cNvSpPr txBox="1"/>
           <p:nvPr/>
         </p:nvSpPr>
         <p:spPr>
           <a:xfrm>
             <a:off x="3200400" y="3278123"/>
-            <a:ext cx="6156655" cy="914400"/>
+            <a:ext cx="8351215" cy="914400"/>
           </a:xfrm>
           <a:prstGeom prst="rect">
             <a:avLst/>
@@ -59668,71 +59495,14 @@
                 <a:ea typeface="맑은 고딕"/>
                 <a:cs typeface="맑은 고딕"/>
               </a:rPr>
-              <a:t>SOP · DMN · BSC · What-if 중 선택</a:t>
-            </a:r>
-          </a:p>
-        </p:txBody>
-      </p:sp>
-      <p:sp>
-        <p:nvSpPr>
-          <p:cNvPr id="17" name="TextBox 16"/>
-          <p:cNvSpPr txBox="1"/>
-          <p:nvPr/>
-        </p:nvSpPr>
-        <p:spPr>
-          <a:xfrm>
-            <a:off x="9448495" y="3278123"/>
-            <a:ext cx="2103120" cy="914400"/>
-          </a:xfrm>
-          <a:prstGeom prst="rect">
-            <a:avLst/>
-          </a:prstGeom>
-          <a:noFill/>
-        </p:spPr>
-        <p:txBody>
-          <a:bodyPr wrap="square" anchor="ctr"/>
-          <a:lstStyle/>
-          <a:p>
-            <a:pPr algn="l" eaLnBrk="0">
-              <a:lnSpc>
-                <a:spcPct val="110000"/>
-              </a:lnSpc>
-            </a:pPr>
-            <a:r>
-              <a:rPr sz="1250" b="1">
-                <a:solidFill>
-                  <a:srgbClr val="556175"/>
-                </a:solidFill>
-                <a:latin typeface="맑은 고딕"/>
-                <a:ea typeface="맑은 고딕"/>
-                <a:cs typeface="맑은 고딕"/>
-              </a:rPr>
-              <a:t>현재 운전 모드와</a:t>
-            </a:r>
-          </a:p>
-          <a:p>
-            <a:pPr algn="l" eaLnBrk="0">
-              <a:lnSpc>
-                <a:spcPct val="110000"/>
-              </a:lnSpc>
-            </a:pPr>
-            <a:r>
-              <a:rPr sz="1250" b="1">
-                <a:solidFill>
-                  <a:srgbClr val="556175"/>
-                </a:solidFill>
-                <a:latin typeface="맑은 고딕"/>
-                <a:ea typeface="맑은 고딕"/>
-                <a:cs typeface="맑은 고딕"/>
-              </a:rPr>
-              <a:t>원격 조치 제외 조건</a:t>
-            </a:r>
-          </a:p>
-        </p:txBody>
-      </p:sp>
-      <p:sp>
-        <p:nvSpPr>
-          <p:cNvPr id="18" name="Rounded Rectangle 17"/>
+              <a:t>현재 운전 모드와 원격 조치 제외 조건</a:t>
+            </a:r>
+          </a:p>
+        </p:txBody>
+      </p:sp>
+      <p:sp>
+        <p:nvSpPr>
+          <p:cNvPr id="15" name="Rounded Rectangle 14"/>
           <p:cNvSpPr/>
           <p:nvPr/>
         </p:nvSpPr>
@@ -59763,7 +59533,7 @@
       </p:sp>
       <p:sp>
         <p:nvSpPr>
-          <p:cNvPr id="19" name="TextBox 18"/>
+          <p:cNvPr id="16" name="TextBox 15"/>
           <p:cNvSpPr txBox="1"/>
           <p:nvPr/>
         </p:nvSpPr>
@@ -59802,14 +59572,14 @@
       </p:sp>
       <p:sp>
         <p:nvSpPr>
-          <p:cNvPr id="20" name="TextBox 19"/>
+          <p:cNvPr id="17" name="TextBox 16"/>
           <p:cNvSpPr txBox="1"/>
           <p:nvPr/>
         </p:nvSpPr>
         <p:spPr>
           <a:xfrm>
             <a:off x="3200400" y="4192523"/>
-            <a:ext cx="6156655" cy="914400"/>
+            <a:ext cx="8351215" cy="914400"/>
           </a:xfrm>
           <a:prstGeom prst="rect">
             <a:avLst/>
@@ -59834,71 +59604,14 @@
                 <a:ea typeface="맑은 고딕"/>
                 <a:cs typeface="맑은 고딕"/>
               </a:rPr>
-              <a:t>SOP · DMN · BSC · What-if 중 선택</a:t>
-            </a:r>
-          </a:p>
-        </p:txBody>
-      </p:sp>
-      <p:sp>
-        <p:nvSpPr>
-          <p:cNvPr id="21" name="TextBox 20"/>
-          <p:cNvSpPr txBox="1"/>
-          <p:nvPr/>
-        </p:nvSpPr>
-        <p:spPr>
-          <a:xfrm>
-            <a:off x="9448495" y="4192523"/>
-            <a:ext cx="2103120" cy="914400"/>
-          </a:xfrm>
-          <a:prstGeom prst="rect">
-            <a:avLst/>
-          </a:prstGeom>
-          <a:noFill/>
-        </p:spPr>
-        <p:txBody>
-          <a:bodyPr wrap="square" anchor="ctr"/>
-          <a:lstStyle/>
-          <a:p>
-            <a:pPr algn="l" eaLnBrk="0">
-              <a:lnSpc>
-                <a:spcPct val="110000"/>
-              </a:lnSpc>
-            </a:pPr>
-            <a:r>
-              <a:rPr sz="1250" b="1">
-                <a:solidFill>
-                  <a:srgbClr val="556175"/>
-                </a:solidFill>
-                <a:latin typeface="맑은 고딕"/>
-                <a:ea typeface="맑은 고딕"/>
-                <a:cs typeface="맑은 고딕"/>
-              </a:rPr>
-              <a:t>성과 목표와 지표</a:t>
-            </a:r>
-          </a:p>
-          <a:p>
-            <a:pPr algn="l" eaLnBrk="0">
-              <a:lnSpc>
-                <a:spcPct val="110000"/>
-              </a:lnSpc>
-            </a:pPr>
-            <a:r>
-              <a:rPr sz="1250" b="1">
-                <a:solidFill>
-                  <a:srgbClr val="556175"/>
-                </a:solidFill>
-                <a:latin typeface="맑은 고딕"/>
-                <a:ea typeface="맑은 고딕"/>
-                <a:cs typeface="맑은 고딕"/>
-              </a:rPr>
-              <a:t>조치의 득실 경로</a:t>
-            </a:r>
-          </a:p>
-        </p:txBody>
-      </p:sp>
-      <p:sp>
-        <p:nvSpPr>
-          <p:cNvPr id="22" name="Rounded Rectangle 21"/>
+              <a:t>성과 목표와 지표, 조치의 득실 경로</a:t>
+            </a:r>
+          </a:p>
+        </p:txBody>
+      </p:sp>
+      <p:sp>
+        <p:nvSpPr>
+          <p:cNvPr id="18" name="Rounded Rectangle 17"/>
           <p:cNvSpPr/>
           <p:nvPr/>
         </p:nvSpPr>
@@ -59929,7 +59642,7 @@
       </p:sp>
       <p:sp>
         <p:nvSpPr>
-          <p:cNvPr id="23" name="TextBox 22"/>
+          <p:cNvPr id="19" name="TextBox 18"/>
           <p:cNvSpPr txBox="1"/>
           <p:nvPr/>
         </p:nvSpPr>
@@ -59968,14 +59681,14 @@
       </p:sp>
       <p:sp>
         <p:nvSpPr>
-          <p:cNvPr id="24" name="TextBox 23"/>
+          <p:cNvPr id="20" name="TextBox 19"/>
           <p:cNvSpPr txBox="1"/>
           <p:nvPr/>
         </p:nvSpPr>
         <p:spPr>
           <a:xfrm>
             <a:off x="3200400" y="5106923"/>
-            <a:ext cx="6156655" cy="914400"/>
+            <a:ext cx="8351215" cy="914400"/>
           </a:xfrm>
           <a:prstGeom prst="rect">
             <a:avLst/>
@@ -60000,64 +59713,7 @@
                 <a:ea typeface="맑은 고딕"/>
                 <a:cs typeface="맑은 고딕"/>
               </a:rPr>
-              <a:t>SOP · DMN · BSC · What-if 중 선택</a:t>
-            </a:r>
-          </a:p>
-        </p:txBody>
-      </p:sp>
-      <p:sp>
-        <p:nvSpPr>
-          <p:cNvPr id="25" name="TextBox 24"/>
-          <p:cNvSpPr txBox="1"/>
-          <p:nvPr/>
-        </p:nvSpPr>
-        <p:spPr>
-          <a:xfrm>
-            <a:off x="9448495" y="5106923"/>
-            <a:ext cx="2103120" cy="914400"/>
-          </a:xfrm>
-          <a:prstGeom prst="rect">
-            <a:avLst/>
-          </a:prstGeom>
-          <a:noFill/>
-        </p:spPr>
-        <p:txBody>
-          <a:bodyPr wrap="square" anchor="ctr"/>
-          <a:lstStyle/>
-          <a:p>
-            <a:pPr algn="l" eaLnBrk="0">
-              <a:lnSpc>
-                <a:spcPct val="110000"/>
-              </a:lnSpc>
-            </a:pPr>
-            <a:r>
-              <a:rPr sz="1250" b="1">
-                <a:solidFill>
-                  <a:srgbClr val="1A6FC4"/>
-                </a:solidFill>
-                <a:latin typeface="맑은 고딕"/>
-                <a:ea typeface="맑은 고딕"/>
-                <a:cs typeface="맑은 고딕"/>
-              </a:rPr>
-              <a:t>고정한 기준 입력과</a:t>
-            </a:r>
-          </a:p>
-          <a:p>
-            <a:pPr algn="l" eaLnBrk="0">
-              <a:lnSpc>
-                <a:spcPct val="110000"/>
-              </a:lnSpc>
-            </a:pPr>
-            <a:r>
-              <a:rPr sz="1250" b="1">
-                <a:solidFill>
-                  <a:srgbClr val="1A6FC4"/>
-                </a:solidFill>
-                <a:latin typeface="맑은 고딕"/>
-                <a:ea typeface="맑은 고딕"/>
-                <a:cs typeface="맑은 고딕"/>
-              </a:rPr>
-              <a:t>바꿔 넣은 가정값</a:t>
+              <a:t>고정한 기준 입력과 바꿔 넣은 가정값</a:t>
             </a:r>
           </a:p>
         </p:txBody>
@@ -60535,7 +60191,7 @@
                 <a:ea typeface="맑은 고딕"/>
                 <a:cs typeface="맑은 고딕"/>
               </a:rPr>
-              <a:t>LOTO</a:t>
+              <a:t>DMN</a:t>
             </a:r>
           </a:p>
         </p:txBody>
@@ -60574,7 +60230,7 @@
                 <a:ea typeface="맑은 고딕"/>
                 <a:cs typeface="맑은 고딕"/>
               </a:rPr>
-              <a:t>Lockout/Tagout</a:t>
+              <a:t>Decision Model and Notation</a:t>
             </a:r>
           </a:p>
           <a:p>
@@ -60592,7 +60248,7 @@
                 <a:ea typeface="맑은 고딕"/>
                 <a:cs typeface="맑은 고딕"/>
               </a:rPr>
-              <a:t>정비 전에 에너지원을 차단해 잠그고 표시하는 안전 절차</a:t>
+              <a:t>업무의 의사결정을 표와 모델로 정의하는 표준</a:t>
             </a:r>
           </a:p>
         </p:txBody>
@@ -60662,7 +60318,7 @@
                 <a:ea typeface="맑은 고딕"/>
                 <a:cs typeface="맑은 고딕"/>
               </a:rPr>
-              <a:t>DMN</a:t>
+              <a:t>결정표</a:t>
             </a:r>
           </a:p>
         </p:txBody>
@@ -60701,7 +60357,7 @@
                 <a:ea typeface="맑은 고딕"/>
                 <a:cs typeface="맑은 고딕"/>
               </a:rPr>
-              <a:t>Decision Model and Notation</a:t>
+              <a:t>Decision Table</a:t>
             </a:r>
           </a:p>
           <a:p>
@@ -60719,7 +60375,7 @@
                 <a:ea typeface="맑은 고딕"/>
                 <a:cs typeface="맑은 고딕"/>
               </a:rPr>
-              <a:t>업무의 의사결정을 표와 모델로 정의하는 표준</a:t>
+              <a:t>입력 조건의 조합마다 출력을 정한 표</a:t>
             </a:r>
           </a:p>
         </p:txBody>
@@ -60789,7 +60445,7 @@
                 <a:ea typeface="맑은 고딕"/>
                 <a:cs typeface="맑은 고딕"/>
               </a:rPr>
-              <a:t>OMG</a:t>
+              <a:t>임계값</a:t>
             </a:r>
           </a:p>
         </p:txBody>
@@ -60828,7 +60484,7 @@
                 <a:ea typeface="맑은 고딕"/>
                 <a:cs typeface="맑은 고딕"/>
               </a:rPr>
-              <a:t>Object Management Group</a:t>
+              <a:t>Threshold</a:t>
             </a:r>
           </a:p>
           <a:p>
@@ -60846,7 +60502,7 @@
                 <a:ea typeface="맑은 고딕"/>
                 <a:cs typeface="맑은 고딕"/>
               </a:rPr>
-              <a:t>DMN 같은 모델링 표준을 정하는 국제 표준 단체</a:t>
+              <a:t>조건의 판정이 갈리는 기준값</a:t>
             </a:r>
           </a:p>
         </p:txBody>
@@ -60916,7 +60572,7 @@
                 <a:ea typeface="맑은 고딕"/>
                 <a:cs typeface="맑은 고딕"/>
               </a:rPr>
-              <a:t>결정표</a:t>
+              <a:t>Hit Policy</a:t>
             </a:r>
           </a:p>
         </p:txBody>
@@ -60955,7 +60611,7 @@
                 <a:ea typeface="맑은 고딕"/>
                 <a:cs typeface="맑은 고딕"/>
               </a:rPr>
-              <a:t>Decision Table</a:t>
+              <a:t>Hit Policy</a:t>
             </a:r>
           </a:p>
           <a:p>
@@ -60973,7 +60629,7 @@
                 <a:ea typeface="맑은 고딕"/>
                 <a:cs typeface="맑은 고딕"/>
               </a:rPr>
-              <a:t>입력 조건의 조합마다 출력을 정한 표</a:t>
+              <a:t>여러 규칙이 함께 맞을 때 결과를 고르는 방식</a:t>
             </a:r>
           </a:p>
         </p:txBody>
@@ -61043,7 +60699,7 @@
                 <a:ea typeface="맑은 고딕"/>
                 <a:cs typeface="맑은 고딕"/>
               </a:rPr>
-              <a:t>Hit Policy</a:t>
+              <a:t>BSC</a:t>
             </a:r>
           </a:p>
         </p:txBody>
@@ -61082,7 +60738,7 @@
                 <a:ea typeface="맑은 고딕"/>
                 <a:cs typeface="맑은 고딕"/>
               </a:rPr>
-              <a:t>Hit Policy</a:t>
+              <a:t>Balanced Scorecard</a:t>
             </a:r>
           </a:p>
           <a:p>
@@ -61100,7 +60756,7 @@
                 <a:ea typeface="맑은 고딕"/>
                 <a:cs typeface="맑은 고딕"/>
               </a:rPr>
-              <a:t>여러 규칙이 함께 맞을 때 결과를 고르는 방식</a:t>
+              <a:t>재무 · 고객 · 내부 프로세스 · 학습과 성장의 네 관점으로 성과를 보는 경영 틀</a:t>
             </a:r>
           </a:p>
         </p:txBody>
@@ -61170,7 +60826,7 @@
                 <a:ea typeface="맑은 고딕"/>
                 <a:cs typeface="맑은 고딕"/>
               </a:rPr>
-              <a:t>BSC</a:t>
+              <a:t>KPI</a:t>
             </a:r>
           </a:p>
         </p:txBody>
@@ -61209,7 +60865,7 @@
                 <a:ea typeface="맑은 고딕"/>
                 <a:cs typeface="맑은 고딕"/>
               </a:rPr>
-              <a:t>Balanced Scorecard</a:t>
+              <a:t>Key Performance Indicator</a:t>
             </a:r>
           </a:p>
           <a:p>
@@ -61227,7 +60883,7 @@
                 <a:ea typeface="맑은 고딕"/>
                 <a:cs typeface="맑은 고딕"/>
               </a:rPr>
-              <a:t>재무 · 고객 · 내부 프로세스 · 학습과 성장의 네 관점으로 성과를 보는 경영 틀</a:t>
+              <a:t>목표를 얼마나 이뤘는지 재는 핵심 성과 지표</a:t>
             </a:r>
           </a:p>
         </p:txBody>
@@ -61297,7 +60953,7 @@
                 <a:ea typeface="맑은 고딕"/>
                 <a:cs typeface="맑은 고딕"/>
               </a:rPr>
-              <a:t>KPI</a:t>
+              <a:t>전략맵</a:t>
             </a:r>
           </a:p>
         </p:txBody>
@@ -61336,7 +60992,7 @@
                 <a:ea typeface="맑은 고딕"/>
                 <a:cs typeface="맑은 고딕"/>
               </a:rPr>
-              <a:t>Key Performance Indicator</a:t>
+              <a:t>Strategy Map</a:t>
             </a:r>
           </a:p>
           <a:p>
@@ -61354,7 +61010,7 @@
                 <a:ea typeface="맑은 고딕"/>
                 <a:cs typeface="맑은 고딕"/>
               </a:rPr>
-              <a:t>목표를 얼마나 이뤘는지 재는 핵심 성과 지표</a:t>
+              <a:t>전략 목표 사이의 인과를 화살표로 이은 그림</a:t>
             </a:r>
           </a:p>
         </p:txBody>
@@ -64035,7 +63691,7 @@
                 <a:ea typeface="맑은 고딕"/>
                 <a:cs typeface="맑은 고딕"/>
               </a:rPr>
-              <a:t>부하를 낮춰 생산이 줄어 납기 · 성과 지표에서 잃은 것이 예측에서 얻은 것보다 컸기 때문이다</a:t>
+              <a:t>부하를 낮춰 생산이 줄어 납기에서 잃은 것이 예측에서 얻은 것보다 컸기 때문이다</a:t>
             </a:r>
           </a:p>
         </p:txBody>
@@ -64760,7 +64416,7 @@
                 <a:ea typeface="맑은 고딕"/>
                 <a:cs typeface="맑은 고딕"/>
               </a:rPr>
-              <a:t>네 후보 모두 규칙을 통과했다. 순위는 예측에서 얻은 것과 납기 · 성과 지표에서 잃은 것을 견준 결과이다.</a:t>
+              <a:t>네 후보 모두 규칙을 통과했다. 순위는 예측에서 얻은 것과 납기에서 잃은 것을 견준 결과이다.</a:t>
             </a:r>
           </a:p>
         </p:txBody>

--- a/산출물/교재/PPTX/통합반_온라인/통합반_03일차.pptx
+++ b/산출물/교재/PPTX/통합반_온라인/통합반_03일차.pptx
@@ -568,7 +568,7 @@
           <a:lstStyle/>
           <a:p>
             <a:r>
-              <a:t>이번 회차에서 할 일은 네 가지입니다. 먼저 조치를 수행하는 순서와 기준을 정한 절차가 무엇으로 이루어지는지, 설비의 운전 상태가 그 절차를 쓸 수 있는지에 어떻게 관여하는지를 봅니다. 이어서 절차 속 조건을 결정표로 옮겨 값에 대어 판정하고 그 근거를 남기는 방법을 다룹니다. 그다음 성과 목표와 지표로 남은 후보의 득실을 견주고, 가정값을 바꾸어 결과를 다시 계산해 봅니다. 마지막으로 직접 절차 구조와 결정표를 만들고 판정 기능을 시험합니다.</a:t>
+              <a:t>이번 회차에서 할 일은 네 가지입니다. 먼저 조치를 수행하는 순서와 기준을 정한 절차가 무엇으로 이루어지는지, 설비의 운전 상태가 그 절차를 쓸 수 있는지에 어떻게 관여하는지를 봅니다. 이어서 절차 속 조건을 결정표로 옮겨 값에 대어 판정하고 그 근거를 남기는 방법을 다룹니다. 그다음 성과 목표와 지표로 남은 후보의 득실을 견주고, 가정값을 바꾸어 결과를 다시 계산해 봅니다. 마지막으로 직접 절차 구조와 결정표를 만들고 판정 기능을 경계값과 여러 규칙이 맞는 경우까지 시험합니다.</a:t>
             </a:r>
           </a:p>
         </p:txBody>
@@ -638,7 +638,7 @@
           <a:lstStyle/>
           <a:p>
             <a:r>
-              <a:t>팬 최대 운전 뒤 유온은 내려갔지만 냉각 효율은 55 %로 기준에 못 미쳤습니다. 핀 오염을 제거한 것은 아니므로 핀 세척을 작업지시로 따로 등록했습니다. 경보 해제, 매뉴얼의 완화 성공 기준, 정비 완료 기준은 서로 다릅니다. 화면의 그래프와 등록 기록을 보고 세척까지 끝났다고 판단하면 안 됩니다.</a:t>
+              <a:t>원인 Cause는 CAUSES로 고장 유형을 일으키고, 조치 방법 Skill은 그 고장 유형에 MITIGATED_BY나 REMEDIED_BY로 붙으므로 한 고장 유형에 조치가 여럿 모입니다. 핀 세척처럼 특정 원인에만 맞는 조치는 ADDRESSES로 그 원인을 함께 가리켜, 원인이 주변 온도 상승이면 후보에서 빠집니다. 조치 방법에서는 HAS_STEP으로 단계가, 단계에서는 REFERS_TO로 근거 절이 이어지고, APPROVED_BY는 그 조치를 승인할 최소 역할입니다. 승인하는 역할과 실제로 수행하는 주체는 달라서, 팬 최대 운전은 운전원이 승인하고 설비 제어 시스템이 수행하며 핀 세척 작업지시는 정비 관리 시스템이 발행합니다. 아래 띠가 쿨러 사건에서 실제로 따라간 연결입니다.</a:t>
             </a:r>
           </a:p>
         </p:txBody>
@@ -918,7 +918,7 @@
           <a:lstStyle/>
           <a:p>
             <a:r>
-              <a:t>결정표를 만들 때 가장 먼저 정하는 것은 표가 답할 물음 하나이고, 이것을 결정이라고 합니다. 매뉴얼의 조건 문장 하나가 규칙 한 행이 되어 왼쪽의 조건과 오른쪽의 출력으로 나뉘며, 원격 자동이 아니면 세 절차를 뺀다는 문장이 Rule 1, 24시간을 넘겼으면 20만 원을 깎는다는 문장이 Rule 2입니다. 놀이공원의 탑승 기준표에 키와 나이를 대면 누가 판정해도 같은 것과 닮았지만, 결정표는 값의 출처와 규칙의 근거, 여러 행이 맞을 때의 처리까지 정한다는 점이 다릅니다. 지금 원격 자동이고 팬이 30시간째 최대로 돌았다면 Rule 1은 맞지 않고 Rule 2는 맞으므로, 답은 팬을 올리는 두 절차에 감점 20만 원입니다.</a:t>
+              <a:t>입력이 정해졌으면 그 값으로 무엇에 답할지가 표의 물음이 되고, 이 물음 하나를 결정이라고 합니다. 매뉴얼의 조건 문장 하나가 규칙 한 행이 되어 왼쪽의 조건과 오른쪽의 출력으로 나뉘며, 원격 자동이 아니면 세 절차를 뺀다는 문장이 Rule 1, 24시간을 넘겼으면 20만 원을 깎는다는 문장이 Rule 2입니다. 놀이공원의 탑승 기준표에 키와 나이를 대면 누가 판정해도 같은 것과 닮았지만, 결정표는 값의 출처와 규칙의 근거, 여러 행이 맞을 때의 처리까지 정한다는 점이 다릅니다. 지금 원격 자동이고 팬이 30시간째 최대로 돌았다면 Rule 1은 맞지 않고 Rule 2는 맞으므로, 답은 팬을 올리는 두 절차에 감점 20만 원입니다.</a:t>
             </a:r>
           </a:p>
         </p:txBody>
@@ -1128,7 +1128,7 @@
           <a:lstStyle/>
           <a:p>
             <a:r>
-              <a:t>하한과 상한을 함께 두면 범위가 되며, 이 표기에서는 검사 둘을 한 행에 적어 둘 다 맞을 때만 맞게 합니다. 실제 표에서 검사가 둘인 행은 정기 정비의 시행 방안을 고르는 규칙으로, 정기 정비 도래 경보가 났고 마지막 정비 뒤 운전시간이 1,800시간 이상일 때만 네 방안을 후보로 올립니다. 둘 가운데 하나만 맞아도 되는 경우는 한 행에 넣지 않고 같은 출력을 내는 행 둘로 나누므로, 매뉴얼의 문장이 「그리고」인지 「또는」인지를 먼저 가려야 합니다. 위의 55와 65 사이 구간은 범위 표기를 위한 예이며, 실제 쿨러 성능 저하 판정은 냉각 효율이 70 % 아래이고 유온이 계속 오르는지까지 봅니다.</a:t>
+              <a:t>하한과 상한을 함께 두면 범위가 되며, 이 표기에서는 검사 둘을 한 행에 적어 둘 다 맞을 때만 맞게 합니다. 실제 표에서 검사가 둘인 행의 하나는 정기 정비의 시행 방안을 고르는 규칙으로, 정기 정비 도래 경보가 났고 마지막 정비 뒤 운전시간이 1,800시간 이상일 때만 네 방안을 후보로 올립니다. 둘 가운데 하나만 맞아도 되는 경우는 한 행에 넣지 않고 같은 출력을 내는 행 둘로 나누므로, 매뉴얼의 문장이 「그리고」인지 「또는」인지를 먼저 가려야 합니다. 위의 55와 65 사이 구간은 범위 표기를 위한 예이며, 실제 쿨러 성능 저하 판정은 냉각 효율이 70 % 아래이고 유온이 계속 오르는지까지 봅니다.</a:t>
             </a:r>
           </a:p>
         </p:txBody>
@@ -1198,7 +1198,7 @@
           <a:lstStyle/>
           <a:p>
             <a:r>
-              <a:t>규칙이 내는 것은 네 가지입니다. 후보 선택은 고장 유형이 냉각 성능 상실이면 완화 조치 셋을, 원인이 핀 오염이면 핀 세척을 올려 쿨러 사건의 후보 넷을 만듭니다. 제외된 조치는 다른 면에서 아무리 좋아도 고를 수 없고, 감점은 후보에 남기되 팬 수명 손실만큼 깎아서 견주게 하며, 경고는 후보에 남기면서 승인하는 사람이 알아야 할 사항을 붙입니다. 해서는 안 되는 것, 해도 되지만 대가가 있는 것, 해도 되지만 알고 해야 하는 것의 구분이며, 후보에 올랐다고 실행이 허가된 것은 아니고 실행은 사람이 승인한 뒤에 이루어집니다.</a:t>
+              <a:t>규칙이 내는 것은 다섯 가지이고, 출력마다 그 출력을 내는 결정표가 다릅니다. 후보 선택 표는 고장 유형이 냉각 성능 상실이면 완화 조치 셋을, 원인이 핀 오염이면 핀 세척을 올리며, 그 가운데 고장 유형에 관계로 이어진 조치가 쿨러 사건의 후보 넷이 됩니다. 규정 적합성 표에서 제외된 조치는 다른 면에서 아무리 좋아도 고를 수 없고, 감점은 후보에 남기되 팬 수명 손실만큼 깎아서 견주게 하며, 경고는 승인하는 사람이 알아야 할 사항을 붙입니다. 순위 결정표의 행은 남은 후보에 점수를 매길 식, 순위 정책을 담습니다. 후보에 올랐다고 실행이 허가된 것은 아니고 실행은 사람이 승인한 뒤에 이루어집니다.</a:t>
             </a:r>
           </a:p>
         </p:txBody>
@@ -1548,7 +1548,7 @@
           <a:lstStyle/>
           <a:p>
             <a:r>
-              <a:t>운전 모드를 읽지 못했을 때 값이 없으니 조건이 맞지 않았다고 넘어가면, 원격 자동이 아닐 수도 있는 설비에 원격 조치가 남습니다. 그래서 제외나 감점 규칙의 값을 모르면 「확인되지 않은 조건」으로 결과에 올리고 제외 쪽으로 처리합니다. 다만 한 행의 조건은 모두 맞아야 하므로, 같은 행의 다른 조건이 이미 거짓이면 그 규칙은 어차피 맞지 않아 모르는 값은 상관이 없습니다. 경고 규칙의 값을 모를 때는 경고로 남겨 사람이 그 불확실성을 보고 고르게 하며, 모든 후보가 빠지면 억지로 하나를 고르지 않고 추천 없이 제외 사유를 보입니다.</a:t>
+              <a:t>운전 모드를 읽지 못했을 때 값이 없으니 조건이 맞지 않았다고 넘어가면, 원격 자동이 아닐 수도 있는 설비에 원격 조치가 남습니다. 그래서 제외나 감점 규칙의 값을 모르면 「확인되지 않은 조건」으로 결과에 올리고 제외 쪽으로 처리합니다. 다만 한 행의 조건은 모두 맞아야 하므로, 같은 행의 다른 조건이 이미 거짓이면 그 규칙은 어차피 맞지 않아 모르는 값은 상관이 없습니다. 경고 규칙의 값을 모를 때는 경고로 남겨 사람이 그 불확실성을 보고 고르게 하며, 모든 후보가 빠지면 억지로 하나를 고르지 않고 추천 없이 제외 사유를 보입니다. 값을 알아도 모든 후보가 빠질 수 있어서, 설비가 보호 정지 상태이면 리셋 말고는 어떤 후보도 남지 않습니다.</a:t>
             </a:r>
           </a:p>
         </p:txBody>
@@ -1758,7 +1758,7 @@
           <a:lstStyle/>
           <a:p>
             <a:r>
-              <a:t>결정표를 그래프에 적어 두는 것과 그 정의대로 평가하는 일을 연결합니다. HYD는 표준 DMN 파일을 실행하는 엔진이 아니라, DMN의 주요 개념을 그래프로 표현하고 평가 함수가 읽는 구조입니다. 표준의 조건 식 언어는 FEEL이며 여기서는 비교 연산자와 기준값을 가진 TESTS 관계를 씁니다. 원인 진단 표의 PRIORITY 선언은 이 평가기의 실행 대상이 아니고, 원인 순위는 증거로 별도 계산합니다. 실제로 실행하는 세 결정표는 선언된 정책과 평가 방식이 달라지면 거절합니다.</a:t>
+              <a:t>DMN의 개념으로 판단을 설명하는 것과 표준 모델 파일을 그대로 실행하는 것은 다른 일입니다. 표준의 조건 식 언어는 FEEL이지만 여기서는 입력 하나 · 연산자 하나 · 기준값 하나의 TESTS 관계로 조건을 적고, 표준 엔진 대신 평가 함수가 그래프의 규칙을 읽어 판정합니다. 실제로 실행하는 세 결정표는 선언된 Hit Policy와 평가 방식이 다르면 판정하지 않고 거절하며, 원인 진단 표의 PRIORITY 선언은 이 평가 함수의 실행 대상이 아닙니다.</a:t>
             </a:r>
           </a:p>
         </p:txBody>
@@ -2808,7 +2808,7 @@
           <a:lstStyle/>
           <a:p>
             <a:r>
-              <a:t>규칙을 통과한 네 후보에 점수가 매겨진 결과입니다. 설비가 원격 자동이고 팬은 60 %로 돌고 있었으므로 제외된 후보는 없고, 예측 유온은 같은 시점의 설비 상태에 후보마다 조치를 대어 계산한 평형값입니다. 유온을 가장 많이 내리는 팬 최대 운전과 부하 80 %는 공동 2순위였고, 5도 가까이 덜 내리는 팬 최대 운전이 1순위였으니 순위를 가른 기준이 유온 하나가 아닙니다. 원인을 없애는 쿨러 핀 세척은 작업지시를 내는 것만으로는 지금의 유온을 바꾸지 못해 예측이 62.5도에 머물고 경고가 붙어 4순위입니다.</a:t>
+              <a:t>규칙을 통과한 네 후보에 순위 정책의 점수를 매긴 판단 순위이며, 추천안은 이 순위로 정해지고 앞의 손익 항목을 금액으로 더한 순서는 손익 순위로 따로 봅니다. 설비가 원격 자동이고 팬은 60 %로 돌고 있었으므로 제외된 후보는 없고, 예측 유온은 같은 시점의 설비 상태에 후보마다 조치를 대어 계산한 평형값입니다. 유온을 가장 많이 내리는 팬 최대 운전과 부하 80 %는 공동 2순위였고, 5도 가까이 덜 내리는 팬 최대 운전이 1순위였으니 순위를 가른 기준이 유온 하나가 아닙니다. 원인을 없애는 쿨러 핀 세척은 작업지시를 내는 것만으로는 지금의 유온을 바꾸지 못해 예측이 62.5도에 머물고 경고가 붙어 4순위입니다.</a:t>
             </a:r>
           </a:p>
         </p:txBody>
@@ -3088,7 +3088,7 @@
           <a:lstStyle/>
           <a:p>
             <a:r>
-              <a:t>상황이 달랐다면 순위도 달랐을지를 실제로 계산해 보는 방법이 What-if 분석입니다. 먼저 판단 한 건에 쓰인 후보와 규칙과 입력 값을 사본으로 떠 두고, 사본 안에서 납기까지 남은 시간이나 지연 위약금, 전력 단가, 감점 기준 같은 값 하나를 바꾸어 넣으며, 이렇게 실제와 다르게 넣는 값이 가정값입니다. 그 사본으로 판단 순위와 원 단위의 예상 손익 순위를 다시 계산해 지금의 값으로 낸 기준 결과와 나란히 놓습니다. 원본은 읽기만 하므로 가정값을 넣어 보아도 지식 그래프와 업무 데이터는 바뀌지 않고, 결과에 원본 그대로라는 표시가 붙습니다.</a:t>
+              <a:t>상황이 달랐다면 순위도 달랐을지를 실제로 계산해 보는 방법이 What-if 분석입니다. 먼저 판단 한 건에 쓰인 후보와 규칙과 입력 값을 사본으로 떠 두고, 사본 안에서 납기까지 남은 시간이나 지연 위약금, 전력 단가, 감점 기준 같은 값 하나를 바꾸어 넣으며, 이렇게 실제와 다르게 넣는 값이 가정값입니다. 그 사본으로 판단 순위와 원 단위의 예상 손익 순위를 다시 계산해 지금의 값으로 낸 기준 결과와 나란히 놓습니다. BSC 관점마다 중요도 배수를 주는 것도 가정값의 하나여서, 그 비중으로 성과 지표의 득실을 다시 계산합니다. 원본은 읽기만 하므로 가정값을 넣어 보아도 지식 그래프와 업무 데이터는 바뀌지 않고, 결과에 원본 그대로라는 표시가 붙습니다.</a:t>
             </a:r>
           </a:p>
         </p:txBody>
@@ -3508,7 +3508,7 @@
           <a:lstStyle/>
           <a:p>
             <a:r>
-              <a:t>각 상황이 어떤 판단인지 먼저 고릅니다. 완료 기준은 SOP, 원격 조치의 가능 여부는 DMN 규칙, 냉각과 생산의 득실은 BSC 관점, 납기 가정의 전후 비교는 What-if에 연결됩니다. 답 이름을 외우기보다 어떤 근거를 확인해야 하는지 말해 봅니다.</a:t>
+              <a:t>각 상황에 SOP · DMN · BSC · What-if 가운데 어느 개념이 먼저 필요한지 고릅니다. 완료 기준은 SOP, 원격 조치의 가능 여부는 DMN 규칙, 냉각과 생산의 득실은 BSC 관점, 납기 가정의 전후 비교는 What-if에 연결됩니다. 답 이름을 외우기보다 어떤 근거를 확인해야 하는지 말해 봅니다.</a:t>
             </a:r>
           </a:p>
         </p:txBody>
@@ -4138,7 +4138,7 @@
           <a:lstStyle/>
           <a:p>
             <a:r>
-              <a:t>세 종류는 무엇을 겨냥하느냐가 다릅니다. 경보 직후에 쓰는 즉시 완화는 유온을 곧바로 내리지만 핀에 낀 오염은 그대로 남고, 정비 시간에 쓰는 근본 조치는 원인 자체를 없애며 핀 세척은 원인이 핀 오염일 때만 맞습니다. 예방 조치는 생긴 고장을 없애는 것이 아니라 씰과 필터를 2,000시간마다 바꾸어 펌프의 체적 효율 저하를 미리 막는 정기 정비입니다. 고장 유형에 예방 조치 관계가 있어도 경보가 났을 때의 후보로 따라가지는 않고, 정기 정비 도래 알림이 왔을 때만 후보가 됩니다. 시간으로 놓으면 예방은 고장 전, 완화는 경보 직후, 근본 조치는 정비 시간에 쓰입니다.</a:t>
+              <a:t>세 종류는 무엇을 겨냥하느냐가 다릅니다. 경보 직후에 쓰는 즉시 완화는 유온을 곧바로 내리지만 핀에 낀 오염은 그대로 남고, 정비 시간에 쓰는 근본 조치는 원인 자체를 없애며 핀 세척은 원인이 핀 오염일 때만 맞습니다. 예방 조치는 생긴 고장을 없애는 것이 아니라 씰과 필터를 정해진 운전시간마다 바꾸어 펌프의 체적 효율 저하를 미리 막는 정기 정비입니다. 고장 유형에 예방 조치 관계가 있어도 경보가 났을 때의 후보로 따라가지는 않고, 정기 정비 도래 알림이 왔을 때만 후보가 됩니다. 시간으로 놓으면 예방은 고장 전, 완화는 경보 직후, 근본 조치는 정비 시간에 쓰입니다.</a:t>
             </a:r>
           </a:p>
         </p:txBody>
@@ -4208,7 +4208,7 @@
           <a:lstStyle/>
           <a:p>
             <a:r>
-              <a:t>원인 Cause는 CAUSES로 고장 유형을 일으키고, 조치 방법 Skill은 그 고장 유형에 MITIGATED_BY나 REMEDIED_BY로 붙으므로 한 고장 유형에 조치가 여럿 모입니다. 핀 세척처럼 특정 원인에만 맞는 조치는 ADDRESSES로 그 원인을 함께 가리켜, 원인이 주변 온도 상승이면 후보에서 빠집니다. 조치 방법에서는 HAS_STEP으로 단계가, 단계에서는 REFERS_TO로 근거 절이 이어지고, APPROVED_BY는 그 조치를 승인할 최소 역할입니다. 승인하는 역할과 실제로 수행하는 주체는 달라서, 팬 최대 운전은 운전원이 승인하고 설비 제어 시스템이 수행하며 핀 세척 작업지시는 정비 관리 시스템이 발행합니다. 아래 띠가 쿨러 사건에서 실제로 따라간 연결입니다.</a:t>
+              <a:t>앞에서 본 완화와 근본 조치의 차이가 쿨러 사건에서 그대로 나타났습니다. 팬 최대 운전 뒤 유온은 내려가 경보가 해제되었지만 냉각 효율은 경보 기준에도 못 미쳐, 핀 오염을 없애는 핀 세척을 작업지시로 따로 등록했습니다. 재관측 구간에서 유온이 55 ℃ 미만이었던 몫은 58 %여서, 이 기록만으로 매뉴얼의 15분 유지를 채웠다고 하지 않습니다. 경보 해제, 완화 성공, 정비 완료는 서로 다른 완료 기준입니다.</a:t>
             </a:r>
           </a:p>
         </p:txBody>
@@ -9963,7 +9963,7 @@
                 <a:ea typeface="맑은 고딕"/>
                 <a:cs typeface="맑은 고딕"/>
               </a:rPr>
-              <a:t>고장을 일으킨 원인을 없앤다. 원인 한정이면 ADDRESSES를 단다</a:t>
+              <a:t>고장을 일으킨 원인을 없앤다. 원인마다 맞는 조치가 다르다</a:t>
             </a:r>
           </a:p>
           <a:p>
@@ -10287,7 +10287,7 @@
                 <a:ea typeface="맑은 고딕"/>
                 <a:cs typeface="맑은 고딕"/>
               </a:rPr>
-              <a:t>고장 유형 · 조치 방법 · 단계 · 근거의 연결 구조</a:t>
+              <a:t>경보 해제와 근본 조치 완료의 차이</a:t>
             </a:r>
           </a:p>
         </p:txBody>
@@ -10326,7 +10326,7 @@
                 <a:ea typeface="맑은 고딕"/>
                 <a:cs typeface="맑은 고딕"/>
               </a:rPr>
-              <a:t>고장 유형에서 조치 후보를 찾고, 원인 한정 관계와 단계·근거 절·승인 역할을 함께 확인한다.</a:t>
+              <a:t>팬 최대 운전 뒤 경보는 해제되었지만 냉각 효율은 기준에 못 미쳐, 핀 오염을 없애는 정비가 따로 필요하다.</a:t>
             </a:r>
           </a:p>
         </p:txBody>
@@ -10401,7 +10401,7 @@
       </p:sp>
       <p:pic>
         <p:nvPicPr>
-          <p:cNvPr id="6" name="삽화:조치연결_그래프.svg" descr="illust_7061860299310659188_1792037122.png"/>
+          <p:cNvPr id="6" name="Picture 5" descr="그래프_쿨러열화_TS1_CE.png"/>
           <p:cNvPicPr>
             <a:picLocks noChangeAspect="1"/>
           </p:cNvPicPr>
@@ -10415,24 +10415,97 @@
         </p:blipFill>
         <p:spPr>
           <a:xfrm>
-            <a:off x="786223" y="1627632"/>
-            <a:ext cx="10619248" cy="4727448"/>
-          </a:xfrm>
-          <a:prstGeom prst="rect">
-            <a:avLst/>
-          </a:prstGeom>
+            <a:off x="548640" y="1682496"/>
+            <a:ext cx="7223760" cy="4572000"/>
+          </a:xfrm>
+          <a:prstGeom prst="rect">
+            <a:avLst/>
+          </a:prstGeom>
+          <a:ln w="12700">
+            <a:solidFill>
+              <a:srgbClr val="D3D9E1"/>
+            </a:solidFill>
+          </a:ln>
         </p:spPr>
       </p:pic>
       <p:sp>
         <p:nvSpPr>
-          <p:cNvPr id="7" name="TextBox 6"/>
-          <p:cNvSpPr txBox="1"/>
-          <p:nvPr/>
-        </p:nvSpPr>
-        <p:spPr>
-          <a:xfrm>
-            <a:off x="1298071" y="2530574"/>
-            <a:ext cx="902636" cy="337185"/>
+          <p:cNvPr id="7" name="Oval 6"/>
+          <p:cNvSpPr/>
+          <p:nvPr/>
+        </p:nvSpPr>
+        <p:spPr>
+          <a:xfrm>
+            <a:off x="8138160" y="1682496"/>
+            <a:ext cx="347472" cy="347472"/>
+          </a:xfrm>
+          <a:prstGeom prst="ellipse">
+            <a:avLst/>
+          </a:prstGeom>
+          <a:solidFill>
+            <a:srgbClr val="5CB8F2"/>
+          </a:solidFill>
+          <a:ln>
+            <a:noFill/>
+          </a:ln>
+        </p:spPr>
+        <p:txBody>
+          <a:bodyPr rtlCol="0" anchor="ctr"/>
+          <a:lstStyle/>
+          <a:p>
+            <a:pPr algn="ctr"/>
+          </a:p>
+        </p:txBody>
+      </p:sp>
+      <p:sp>
+        <p:nvSpPr>
+          <p:cNvPr id="8" name="TextBox 7"/>
+          <p:cNvSpPr txBox="1"/>
+          <p:nvPr/>
+        </p:nvSpPr>
+        <p:spPr>
+          <a:xfrm>
+            <a:off x="8138160" y="1682496"/>
+            <a:ext cx="347472" cy="347472"/>
+          </a:xfrm>
+          <a:prstGeom prst="rect">
+            <a:avLst/>
+          </a:prstGeom>
+          <a:noFill/>
+        </p:spPr>
+        <p:txBody>
+          <a:bodyPr wrap="square" anchor="ctr"/>
+          <a:lstStyle/>
+          <a:p>
+            <a:pPr algn="ctr" eaLnBrk="0">
+              <a:lnSpc>
+                <a:spcPct val="110000"/>
+              </a:lnSpc>
+            </a:pPr>
+            <a:r>
+              <a:rPr sz="1200" b="1">
+                <a:solidFill>
+                  <a:srgbClr val="13294B"/>
+                </a:solidFill>
+                <a:latin typeface="맑은 고딕"/>
+                <a:ea typeface="맑은 고딕"/>
+                <a:cs typeface="맑은 고딕"/>
+              </a:rPr>
+              <a:t>1</a:t>
+            </a:r>
+          </a:p>
+        </p:txBody>
+      </p:sp>
+      <p:sp>
+        <p:nvSpPr>
+          <p:cNvPr id="9" name="TextBox 8"/>
+          <p:cNvSpPr txBox="1"/>
+          <p:nvPr/>
+        </p:nvSpPr>
+        <p:spPr>
+          <a:xfrm>
+            <a:off x="8549640" y="1627632"/>
+            <a:ext cx="3093415" cy="1170432"/>
           </a:xfrm>
           <a:prstGeom prst="rect">
             <a:avLst/>
@@ -10443,16 +10516,189 @@
           <a:bodyPr wrap="square" anchor="t"/>
           <a:lstStyle/>
           <a:p>
+            <a:pPr algn="l" eaLnBrk="0">
+              <a:lnSpc>
+                <a:spcPct val="110000"/>
+              </a:lnSpc>
+              <a:spcAft>
+                <a:spcPts val="400"/>
+              </a:spcAft>
+            </a:pPr>
+            <a:r>
+              <a:rPr sz="1700" b="1">
+                <a:solidFill>
+                  <a:srgbClr val="13294B"/>
+                </a:solidFill>
+                <a:latin typeface="맑은 고딕"/>
+                <a:ea typeface="맑은 고딕"/>
+                <a:cs typeface="맑은 고딕"/>
+              </a:rPr>
+              <a:t>완화의 결과</a:t>
+            </a:r>
+          </a:p>
+          <a:p>
+            <a:pPr algn="l" eaLnBrk="0">
+              <a:lnSpc>
+                <a:spcPct val="110000"/>
+              </a:lnSpc>
+              <a:spcAft>
+                <a:spcPts val="400"/>
+              </a:spcAft>
+            </a:pPr>
+            <a:r>
+              <a:rPr sz="1400" b="0">
+                <a:solidFill>
+                  <a:srgbClr val="1F2A3A"/>
+                </a:solidFill>
+                <a:latin typeface="맑은 고딕"/>
+                <a:ea typeface="맑은 고딕"/>
+                <a:cs typeface="맑은 고딕"/>
+              </a:rPr>
+              <a:t>승인 11:14:56 뒤 유온이 내려가</a:t>
+            </a:r>
+          </a:p>
+          <a:p>
+            <a:pPr algn="l" eaLnBrk="0">
+              <a:lnSpc>
+                <a:spcPct val="110000"/>
+              </a:lnSpc>
+              <a:spcAft>
+                <a:spcPts val="400"/>
+              </a:spcAft>
+            </a:pPr>
+            <a:r>
+              <a:rPr sz="1400" b="0">
+                <a:solidFill>
+                  <a:srgbClr val="1F2A3A"/>
+                </a:solidFill>
+                <a:latin typeface="맑은 고딕"/>
+                <a:ea typeface="맑은 고딕"/>
+                <a:cs typeface="맑은 고딕"/>
+              </a:rPr>
+              <a:t>경보가 해제되었다.</a:t>
+            </a:r>
+          </a:p>
+          <a:p>
+            <a:pPr algn="l" eaLnBrk="0">
+              <a:lnSpc>
+                <a:spcPct val="110000"/>
+              </a:lnSpc>
+              <a:spcAft>
+                <a:spcPts val="400"/>
+              </a:spcAft>
+            </a:pPr>
+            <a:r>
+              <a:rPr sz="1400" b="0">
+                <a:solidFill>
+                  <a:srgbClr val="1F2A3A"/>
+                </a:solidFill>
+                <a:latin typeface="맑은 고딕"/>
+                <a:ea typeface="맑은 고딕"/>
+                <a:cs typeface="맑은 고딕"/>
+              </a:rPr>
+              <a:t>재관측 구간 중 55 ℃ 미만: 58 %</a:t>
+            </a:r>
+          </a:p>
+        </p:txBody>
+      </p:sp>
+      <p:sp>
+        <p:nvSpPr>
+          <p:cNvPr id="10" name="Oval 9"/>
+          <p:cNvSpPr/>
+          <p:nvPr/>
+        </p:nvSpPr>
+        <p:spPr>
+          <a:xfrm>
+            <a:off x="8138160" y="2852928"/>
+            <a:ext cx="347472" cy="347472"/>
+          </a:xfrm>
+          <a:prstGeom prst="ellipse">
+            <a:avLst/>
+          </a:prstGeom>
+          <a:solidFill>
+            <a:srgbClr val="5CB8F2"/>
+          </a:solidFill>
+          <a:ln>
+            <a:noFill/>
+          </a:ln>
+        </p:spPr>
+        <p:txBody>
+          <a:bodyPr rtlCol="0" anchor="ctr"/>
+          <a:lstStyle/>
+          <a:p>
+            <a:pPr algn="ctr"/>
+          </a:p>
+        </p:txBody>
+      </p:sp>
+      <p:sp>
+        <p:nvSpPr>
+          <p:cNvPr id="11" name="TextBox 10"/>
+          <p:cNvSpPr txBox="1"/>
+          <p:nvPr/>
+        </p:nvSpPr>
+        <p:spPr>
+          <a:xfrm>
+            <a:off x="8138160" y="2852928"/>
+            <a:ext cx="347472" cy="347472"/>
+          </a:xfrm>
+          <a:prstGeom prst="rect">
+            <a:avLst/>
+          </a:prstGeom>
+          <a:noFill/>
+        </p:spPr>
+        <p:txBody>
+          <a:bodyPr wrap="square" anchor="ctr"/>
+          <a:lstStyle/>
+          <a:p>
             <a:pPr algn="ctr" eaLnBrk="0">
               <a:lnSpc>
                 <a:spcPct val="110000"/>
               </a:lnSpc>
+            </a:pPr>
+            <a:r>
+              <a:rPr sz="1200" b="1">
+                <a:solidFill>
+                  <a:srgbClr val="13294B"/>
+                </a:solidFill>
+                <a:latin typeface="맑은 고딕"/>
+                <a:ea typeface="맑은 고딕"/>
+                <a:cs typeface="맑은 고딕"/>
+              </a:rPr>
+              <a:t>2</a:t>
+            </a:r>
+          </a:p>
+        </p:txBody>
+      </p:sp>
+      <p:sp>
+        <p:nvSpPr>
+          <p:cNvPr id="12" name="TextBox 11"/>
+          <p:cNvSpPr txBox="1"/>
+          <p:nvPr/>
+        </p:nvSpPr>
+        <p:spPr>
+          <a:xfrm>
+            <a:off x="8549640" y="2798064"/>
+            <a:ext cx="3093415" cy="1170432"/>
+          </a:xfrm>
+          <a:prstGeom prst="rect">
+            <a:avLst/>
+          </a:prstGeom>
+          <a:noFill/>
+        </p:spPr>
+        <p:txBody>
+          <a:bodyPr wrap="square" anchor="t"/>
+          <a:lstStyle/>
+          <a:p>
+            <a:pPr algn="l" eaLnBrk="0">
+              <a:lnSpc>
+                <a:spcPct val="110000"/>
+              </a:lnSpc>
               <a:spcAft>
-                <a:spcPts val="100"/>
+                <a:spcPts val="400"/>
               </a:spcAft>
             </a:pPr>
             <a:r>
-              <a:rPr sz="1350" b="1">
+              <a:rPr sz="1700" b="1">
                 <a:solidFill>
                   <a:srgbClr val="13294B"/>
                 </a:solidFill>
@@ -10460,21 +10706,131 @@
                 <a:ea typeface="맑은 고딕"/>
                 <a:cs typeface="맑은 고딕"/>
               </a:rPr>
-              <a:t>Cause</a:t>
-            </a:r>
-          </a:p>
-        </p:txBody>
-      </p:sp>
-      <p:sp>
-        <p:nvSpPr>
-          <p:cNvPr id="8" name="TextBox 7"/>
-          <p:cNvSpPr txBox="1"/>
-          <p:nvPr/>
-        </p:nvSpPr>
-        <p:spPr>
-          <a:xfrm>
-            <a:off x="3271127" y="4279730"/>
-            <a:ext cx="1338025" cy="337185"/>
+              <a:t>남은 원인</a:t>
+            </a:r>
+          </a:p>
+          <a:p>
+            <a:pPr algn="l" eaLnBrk="0">
+              <a:lnSpc>
+                <a:spcPct val="110000"/>
+              </a:lnSpc>
+              <a:spcAft>
+                <a:spcPts val="400"/>
+              </a:spcAft>
+            </a:pPr>
+            <a:r>
+              <a:rPr sz="1400" b="0">
+                <a:solidFill>
+                  <a:srgbClr val="1F2A3A"/>
+                </a:solidFill>
+                <a:latin typeface="맑은 고딕"/>
+                <a:ea typeface="맑은 고딕"/>
+                <a:cs typeface="맑은 고딕"/>
+              </a:rPr>
+              <a:t>냉각 효율은 경보 기준 70 %에</a:t>
+            </a:r>
+          </a:p>
+          <a:p>
+            <a:pPr algn="l" eaLnBrk="0">
+              <a:lnSpc>
+                <a:spcPct val="110000"/>
+              </a:lnSpc>
+              <a:spcAft>
+                <a:spcPts val="400"/>
+              </a:spcAft>
+            </a:pPr>
+            <a:r>
+              <a:rPr sz="1400" b="0">
+                <a:solidFill>
+                  <a:srgbClr val="1F2A3A"/>
+                </a:solidFill>
+                <a:latin typeface="맑은 고딕"/>
+                <a:ea typeface="맑은 고딕"/>
+                <a:cs typeface="맑은 고딕"/>
+              </a:rPr>
+              <a:t>못 미친다. 핀 오염은 그대로다.</a:t>
+            </a:r>
+          </a:p>
+        </p:txBody>
+      </p:sp>
+      <p:sp>
+        <p:nvSpPr>
+          <p:cNvPr id="13" name="Oval 12"/>
+          <p:cNvSpPr/>
+          <p:nvPr/>
+        </p:nvSpPr>
+        <p:spPr>
+          <a:xfrm>
+            <a:off x="8138160" y="4023359"/>
+            <a:ext cx="347472" cy="347472"/>
+          </a:xfrm>
+          <a:prstGeom prst="ellipse">
+            <a:avLst/>
+          </a:prstGeom>
+          <a:solidFill>
+            <a:srgbClr val="13294B"/>
+          </a:solidFill>
+          <a:ln>
+            <a:noFill/>
+          </a:ln>
+        </p:spPr>
+        <p:txBody>
+          <a:bodyPr rtlCol="0" anchor="ctr"/>
+          <a:lstStyle/>
+          <a:p>
+            <a:pPr algn="ctr"/>
+          </a:p>
+        </p:txBody>
+      </p:sp>
+      <p:sp>
+        <p:nvSpPr>
+          <p:cNvPr id="14" name="TextBox 13"/>
+          <p:cNvSpPr txBox="1"/>
+          <p:nvPr/>
+        </p:nvSpPr>
+        <p:spPr>
+          <a:xfrm>
+            <a:off x="8138160" y="4023359"/>
+            <a:ext cx="347472" cy="347472"/>
+          </a:xfrm>
+          <a:prstGeom prst="rect">
+            <a:avLst/>
+          </a:prstGeom>
+          <a:noFill/>
+        </p:spPr>
+        <p:txBody>
+          <a:bodyPr wrap="square" anchor="ctr"/>
+          <a:lstStyle/>
+          <a:p>
+            <a:pPr algn="ctr" eaLnBrk="0">
+              <a:lnSpc>
+                <a:spcPct val="110000"/>
+              </a:lnSpc>
+            </a:pPr>
+            <a:r>
+              <a:rPr sz="1200" b="1">
+                <a:solidFill>
+                  <a:srgbClr val="FFFFFF"/>
+                </a:solidFill>
+                <a:latin typeface="맑은 고딕"/>
+                <a:ea typeface="맑은 고딕"/>
+                <a:cs typeface="맑은 고딕"/>
+              </a:rPr>
+              <a:t>3</a:t>
+            </a:r>
+          </a:p>
+        </p:txBody>
+      </p:sp>
+      <p:sp>
+        <p:nvSpPr>
+          <p:cNvPr id="15" name="TextBox 14"/>
+          <p:cNvSpPr txBox="1"/>
+          <p:nvPr/>
+        </p:nvSpPr>
+        <p:spPr>
+          <a:xfrm>
+            <a:off x="8549640" y="3968496"/>
+            <a:ext cx="3093415" cy="1170432"/>
           </a:xfrm>
           <a:prstGeom prst="rect">
             <a:avLst/>
@@ -10485,16 +10841,168 @@
           <a:bodyPr wrap="square" anchor="t"/>
           <a:lstStyle/>
           <a:p>
+            <a:pPr algn="l" eaLnBrk="0">
+              <a:lnSpc>
+                <a:spcPct val="110000"/>
+              </a:lnSpc>
+              <a:spcAft>
+                <a:spcPts val="400"/>
+              </a:spcAft>
+            </a:pPr>
+            <a:r>
+              <a:rPr sz="1700" b="1">
+                <a:solidFill>
+                  <a:srgbClr val="13294B"/>
+                </a:solidFill>
+                <a:latin typeface="맑은 고딕"/>
+                <a:ea typeface="맑은 고딕"/>
+                <a:cs typeface="맑은 고딕"/>
+              </a:rPr>
+              <a:t>근본 조치의 상태</a:t>
+            </a:r>
+          </a:p>
+          <a:p>
+            <a:pPr algn="l" eaLnBrk="0">
+              <a:lnSpc>
+                <a:spcPct val="110000"/>
+              </a:lnSpc>
+              <a:spcAft>
+                <a:spcPts val="400"/>
+              </a:spcAft>
+            </a:pPr>
+            <a:r>
+              <a:rPr sz="1400" b="0">
+                <a:solidFill>
+                  <a:srgbClr val="1F2A3A"/>
+                </a:solidFill>
+                <a:latin typeface="맑은 고딕"/>
+                <a:ea typeface="맑은 고딕"/>
+                <a:cs typeface="맑은 고딕"/>
+              </a:rPr>
+              <a:t>핀 세척은 작업지시로 등록되었다.</a:t>
+            </a:r>
+          </a:p>
+          <a:p>
+            <a:pPr algn="l" eaLnBrk="0">
+              <a:lnSpc>
+                <a:spcPct val="110000"/>
+              </a:lnSpc>
+              <a:spcAft>
+                <a:spcPts val="400"/>
+              </a:spcAft>
+            </a:pPr>
+            <a:r>
+              <a:rPr sz="1400" b="0">
+                <a:solidFill>
+                  <a:srgbClr val="1F2A3A"/>
+                </a:solidFill>
+                <a:latin typeface="맑은 고딕"/>
+                <a:ea typeface="맑은 고딕"/>
+                <a:cs typeface="맑은 고딕"/>
+              </a:rPr>
+              <a:t>등록은 정비 완료가 아니다.</a:t>
+            </a:r>
+          </a:p>
+        </p:txBody>
+      </p:sp>
+      <p:sp>
+        <p:nvSpPr>
+          <p:cNvPr id="16" name="Oval 15"/>
+          <p:cNvSpPr/>
+          <p:nvPr/>
+        </p:nvSpPr>
+        <p:spPr>
+          <a:xfrm>
+            <a:off x="8138160" y="5193792"/>
+            <a:ext cx="347472" cy="347472"/>
+          </a:xfrm>
+          <a:prstGeom prst="ellipse">
+            <a:avLst/>
+          </a:prstGeom>
+          <a:solidFill>
+            <a:srgbClr val="13294B"/>
+          </a:solidFill>
+          <a:ln>
+            <a:noFill/>
+          </a:ln>
+        </p:spPr>
+        <p:txBody>
+          <a:bodyPr rtlCol="0" anchor="ctr"/>
+          <a:lstStyle/>
+          <a:p>
+            <a:pPr algn="ctr"/>
+          </a:p>
+        </p:txBody>
+      </p:sp>
+      <p:sp>
+        <p:nvSpPr>
+          <p:cNvPr id="17" name="TextBox 16"/>
+          <p:cNvSpPr txBox="1"/>
+          <p:nvPr/>
+        </p:nvSpPr>
+        <p:spPr>
+          <a:xfrm>
+            <a:off x="8138160" y="5193792"/>
+            <a:ext cx="347472" cy="347472"/>
+          </a:xfrm>
+          <a:prstGeom prst="rect">
+            <a:avLst/>
+          </a:prstGeom>
+          <a:noFill/>
+        </p:spPr>
+        <p:txBody>
+          <a:bodyPr wrap="square" anchor="ctr"/>
+          <a:lstStyle/>
+          <a:p>
             <a:pPr algn="ctr" eaLnBrk="0">
               <a:lnSpc>
                 <a:spcPct val="110000"/>
               </a:lnSpc>
+            </a:pPr>
+            <a:r>
+              <a:rPr sz="1200" b="1">
+                <a:solidFill>
+                  <a:srgbClr val="FFFFFF"/>
+                </a:solidFill>
+                <a:latin typeface="맑은 고딕"/>
+                <a:ea typeface="맑은 고딕"/>
+                <a:cs typeface="맑은 고딕"/>
+              </a:rPr>
+              <a:t>4</a:t>
+            </a:r>
+          </a:p>
+        </p:txBody>
+      </p:sp>
+      <p:sp>
+        <p:nvSpPr>
+          <p:cNvPr id="18" name="TextBox 17"/>
+          <p:cNvSpPr txBox="1"/>
+          <p:nvPr/>
+        </p:nvSpPr>
+        <p:spPr>
+          <a:xfrm>
+            <a:off x="8549640" y="5138928"/>
+            <a:ext cx="3093415" cy="1170432"/>
+          </a:xfrm>
+          <a:prstGeom prst="rect">
+            <a:avLst/>
+          </a:prstGeom>
+          <a:noFill/>
+        </p:spPr>
+        <p:txBody>
+          <a:bodyPr wrap="square" anchor="t"/>
+          <a:lstStyle/>
+          <a:p>
+            <a:pPr algn="l" eaLnBrk="0">
+              <a:lnSpc>
+                <a:spcPct val="110000"/>
+              </a:lnSpc>
               <a:spcAft>
-                <a:spcPts val="100"/>
+                <a:spcPts val="400"/>
               </a:spcAft>
             </a:pPr>
             <a:r>
-              <a:rPr sz="1350" b="1">
+              <a:rPr sz="1700" b="1">
                 <a:solidFill>
                   <a:srgbClr val="13294B"/>
                 </a:solidFill>
@@ -10502,511 +11010,70 @@
                 <a:ea typeface="맑은 고딕"/>
                 <a:cs typeface="맑은 고딕"/>
               </a:rPr>
-              <a:t>FailureMode</a:t>
-            </a:r>
-          </a:p>
-        </p:txBody>
-      </p:sp>
-      <p:sp>
-        <p:nvSpPr>
-          <p:cNvPr id="9" name="TextBox 8"/>
-          <p:cNvSpPr txBox="1"/>
-          <p:nvPr/>
-        </p:nvSpPr>
-        <p:spPr>
-          <a:xfrm>
-            <a:off x="6021512" y="2790584"/>
-            <a:ext cx="743347" cy="337185"/>
-          </a:xfrm>
-          <a:prstGeom prst="rect">
-            <a:avLst/>
-          </a:prstGeom>
-          <a:noFill/>
-        </p:spPr>
-        <p:txBody>
-          <a:bodyPr wrap="square" anchor="t"/>
-          <a:lstStyle/>
-          <a:p>
-            <a:pPr algn="ctr" eaLnBrk="0">
+              <a:t>서로 다른 완료 기준</a:t>
+            </a:r>
+          </a:p>
+          <a:p>
+            <a:pPr algn="l" eaLnBrk="0">
               <a:lnSpc>
                 <a:spcPct val="110000"/>
               </a:lnSpc>
               <a:spcAft>
-                <a:spcPts val="100"/>
+                <a:spcPts val="400"/>
               </a:spcAft>
             </a:pPr>
             <a:r>
-              <a:rPr sz="1350" b="1">
-                <a:solidFill>
-                  <a:srgbClr val="13294B"/>
-                </a:solidFill>
-                <a:latin typeface="맑은 고딕"/>
-                <a:ea typeface="맑은 고딕"/>
-                <a:cs typeface="맑은 고딕"/>
-              </a:rPr>
-              <a:t>Skill</a:t>
-            </a:r>
-          </a:p>
-        </p:txBody>
-      </p:sp>
-      <p:sp>
-        <p:nvSpPr>
-          <p:cNvPr id="10" name="TextBox 9"/>
-          <p:cNvSpPr txBox="1"/>
-          <p:nvPr/>
-        </p:nvSpPr>
-        <p:spPr>
-          <a:xfrm>
-            <a:off x="8320580" y="2090921"/>
-            <a:ext cx="690251" cy="337185"/>
-          </a:xfrm>
-          <a:prstGeom prst="rect">
-            <a:avLst/>
-          </a:prstGeom>
-          <a:noFill/>
-        </p:spPr>
-        <p:txBody>
-          <a:bodyPr wrap="square" anchor="t"/>
-          <a:lstStyle/>
-          <a:p>
-            <a:pPr algn="ctr" eaLnBrk="0">
+              <a:rPr sz="1400" b="0">
+                <a:solidFill>
+                  <a:srgbClr val="1F2A3A"/>
+                </a:solidFill>
+                <a:latin typeface="맑은 고딕"/>
+                <a:ea typeface="맑은 고딕"/>
+                <a:cs typeface="맑은 고딕"/>
+              </a:rPr>
+              <a:t>경보 해제</a:t>
+            </a:r>
+          </a:p>
+          <a:p>
+            <a:pPr algn="l" eaLnBrk="0">
               <a:lnSpc>
                 <a:spcPct val="110000"/>
               </a:lnSpc>
               <a:spcAft>
-                <a:spcPts val="100"/>
+                <a:spcPts val="400"/>
               </a:spcAft>
             </a:pPr>
             <a:r>
-              <a:rPr sz="1350" b="1">
-                <a:solidFill>
-                  <a:srgbClr val="13294B"/>
-                </a:solidFill>
-                <a:latin typeface="맑은 고딕"/>
-                <a:ea typeface="맑은 고딕"/>
-                <a:cs typeface="맑은 고딕"/>
-              </a:rPr>
-              <a:t>Role</a:t>
-            </a:r>
-          </a:p>
-        </p:txBody>
-      </p:sp>
-      <p:sp>
-        <p:nvSpPr>
-          <p:cNvPr id="11" name="TextBox 10"/>
-          <p:cNvSpPr txBox="1"/>
-          <p:nvPr/>
-        </p:nvSpPr>
-        <p:spPr>
-          <a:xfrm>
-            <a:off x="7885190" y="4369551"/>
-            <a:ext cx="690251" cy="337185"/>
-          </a:xfrm>
-          <a:prstGeom prst="rect">
-            <a:avLst/>
-          </a:prstGeom>
-          <a:noFill/>
-        </p:spPr>
-        <p:txBody>
-          <a:bodyPr wrap="square" anchor="t"/>
-          <a:lstStyle/>
-          <a:p>
-            <a:pPr algn="ctr" eaLnBrk="0">
+              <a:rPr sz="1400" b="0">
+                <a:solidFill>
+                  <a:srgbClr val="1F2A3A"/>
+                </a:solidFill>
+                <a:latin typeface="맑은 고딕"/>
+                <a:ea typeface="맑은 고딕"/>
+                <a:cs typeface="맑은 고딕"/>
+              </a:rPr>
+              <a:t>완화 성공: 15분 유지</a:t>
+            </a:r>
+          </a:p>
+          <a:p>
+            <a:pPr algn="l" eaLnBrk="0">
               <a:lnSpc>
                 <a:spcPct val="110000"/>
               </a:lnSpc>
               <a:spcAft>
-                <a:spcPts val="100"/>
+                <a:spcPts val="400"/>
               </a:spcAft>
             </a:pPr>
             <a:r>
-              <a:rPr sz="1350" b="1">
-                <a:solidFill>
-                  <a:srgbClr val="13294B"/>
-                </a:solidFill>
-                <a:latin typeface="맑은 고딕"/>
-                <a:ea typeface="맑은 고딕"/>
-                <a:cs typeface="맑은 고딕"/>
-              </a:rPr>
-              <a:t>Step</a:t>
-            </a:r>
-          </a:p>
-        </p:txBody>
-      </p:sp>
-      <p:sp>
-        <p:nvSpPr>
-          <p:cNvPr id="12" name="TextBox 11"/>
-          <p:cNvSpPr txBox="1"/>
-          <p:nvPr/>
-        </p:nvSpPr>
-        <p:spPr>
-          <a:xfrm>
-            <a:off x="9701082" y="3665162"/>
-            <a:ext cx="1433598" cy="337185"/>
-          </a:xfrm>
-          <a:prstGeom prst="rect">
-            <a:avLst/>
-          </a:prstGeom>
-          <a:noFill/>
-        </p:spPr>
-        <p:txBody>
-          <a:bodyPr wrap="square" anchor="t"/>
-          <a:lstStyle/>
-          <a:p>
-            <a:pPr algn="ctr" eaLnBrk="0">
-              <a:lnSpc>
-                <a:spcPct val="110000"/>
-              </a:lnSpc>
-              <a:spcAft>
-                <a:spcPts val="100"/>
-              </a:spcAft>
-            </a:pPr>
-            <a:r>
-              <a:rPr sz="1350" b="1">
-                <a:solidFill>
-                  <a:srgbClr val="13294B"/>
-                </a:solidFill>
-                <a:latin typeface="맑은 고딕"/>
-                <a:ea typeface="맑은 고딕"/>
-                <a:cs typeface="맑은 고딕"/>
-              </a:rPr>
-              <a:t>ManualSection</a:t>
-            </a:r>
-          </a:p>
-        </p:txBody>
-      </p:sp>
-      <p:sp>
-        <p:nvSpPr>
-          <p:cNvPr id="13" name="TextBox 12"/>
-          <p:cNvSpPr txBox="1"/>
-          <p:nvPr/>
-        </p:nvSpPr>
-        <p:spPr>
-          <a:xfrm>
-            <a:off x="2028675" y="3754983"/>
-            <a:ext cx="849539" cy="298450"/>
-          </a:xfrm>
-          <a:prstGeom prst="rect">
-            <a:avLst/>
-          </a:prstGeom>
-          <a:noFill/>
-        </p:spPr>
-        <p:txBody>
-          <a:bodyPr wrap="square" anchor="t"/>
-          <a:lstStyle/>
-          <a:p>
-            <a:pPr algn="ctr" eaLnBrk="0">
-              <a:lnSpc>
-                <a:spcPct val="110000"/>
-              </a:lnSpc>
-              <a:spcAft>
-                <a:spcPts val="100"/>
-              </a:spcAft>
-            </a:pPr>
-            <a:r>
-              <a:rPr sz="1100" b="0">
-                <a:solidFill>
-                  <a:srgbClr val="13294B"/>
-                </a:solidFill>
-                <a:latin typeface="맑은 고딕"/>
-                <a:ea typeface="맑은 고딕"/>
-                <a:cs typeface="맑은 고딕"/>
-              </a:rPr>
-              <a:t>CAUSES</a:t>
-            </a:r>
-          </a:p>
-        </p:txBody>
-      </p:sp>
-      <p:sp>
-        <p:nvSpPr>
-          <p:cNvPr id="14" name="TextBox 13"/>
-          <p:cNvSpPr txBox="1"/>
-          <p:nvPr/>
-        </p:nvSpPr>
-        <p:spPr>
-          <a:xfrm>
-            <a:off x="4927730" y="4081177"/>
-            <a:ext cx="1168117" cy="639318"/>
-          </a:xfrm>
-          <a:prstGeom prst="rect">
-            <a:avLst/>
-          </a:prstGeom>
-          <a:noFill/>
-        </p:spPr>
-        <p:txBody>
-          <a:bodyPr wrap="square" anchor="t"/>
-          <a:lstStyle/>
-          <a:p>
-            <a:pPr algn="ctr" eaLnBrk="0">
-              <a:lnSpc>
-                <a:spcPct val="110000"/>
-              </a:lnSpc>
-              <a:spcAft>
-                <a:spcPts val="100"/>
-              </a:spcAft>
-            </a:pPr>
-            <a:r>
-              <a:rPr sz="1050" b="0">
-                <a:solidFill>
-                  <a:srgbClr val="13294B"/>
-                </a:solidFill>
-                <a:latin typeface="맑은 고딕"/>
-                <a:ea typeface="맑은 고딕"/>
-                <a:cs typeface="맑은 고딕"/>
-              </a:rPr>
-              <a:t>MITIGATED_BY</a:t>
-            </a:r>
-          </a:p>
-          <a:p>
-            <a:pPr algn="ctr" eaLnBrk="0">
-              <a:lnSpc>
-                <a:spcPct val="110000"/>
-              </a:lnSpc>
-              <a:spcAft>
-                <a:spcPts val="100"/>
-              </a:spcAft>
-            </a:pPr>
-            <a:r>
-              <a:rPr sz="1050" b="0">
-                <a:solidFill>
-                  <a:srgbClr val="13294B"/>
-                </a:solidFill>
-                <a:latin typeface="맑은 고딕"/>
-                <a:ea typeface="맑은 고딕"/>
-                <a:cs typeface="맑은 고딕"/>
-              </a:rPr>
-              <a:t>REMEDIED_BY</a:t>
-            </a:r>
-          </a:p>
-        </p:txBody>
-      </p:sp>
-      <p:sp>
-        <p:nvSpPr>
-          <p:cNvPr id="15" name="TextBox 14"/>
-          <p:cNvSpPr txBox="1"/>
-          <p:nvPr/>
-        </p:nvSpPr>
-        <p:spPr>
-          <a:xfrm>
-            <a:off x="3483512" y="2398206"/>
-            <a:ext cx="1168117" cy="298450"/>
-          </a:xfrm>
-          <a:prstGeom prst="rect">
-            <a:avLst/>
-          </a:prstGeom>
-          <a:noFill/>
-        </p:spPr>
-        <p:txBody>
-          <a:bodyPr wrap="square" anchor="t"/>
-          <a:lstStyle/>
-          <a:p>
-            <a:pPr algn="ctr" eaLnBrk="0">
-              <a:lnSpc>
-                <a:spcPct val="110000"/>
-              </a:lnSpc>
-              <a:spcAft>
-                <a:spcPts val="100"/>
-              </a:spcAft>
-            </a:pPr>
-            <a:r>
-              <a:rPr sz="1100" b="0">
-                <a:solidFill>
-                  <a:srgbClr val="13294B"/>
-                </a:solidFill>
-                <a:latin typeface="맑은 고딕"/>
-                <a:ea typeface="맑은 고딕"/>
-                <a:cs typeface="맑은 고딕"/>
-              </a:rPr>
-              <a:t>ADDRESSES</a:t>
-            </a:r>
-          </a:p>
-        </p:txBody>
-      </p:sp>
-      <p:sp>
-        <p:nvSpPr>
-          <p:cNvPr id="16" name="TextBox 15"/>
-          <p:cNvSpPr txBox="1"/>
-          <p:nvPr/>
-        </p:nvSpPr>
-        <p:spPr>
-          <a:xfrm>
-            <a:off x="6626810" y="2005827"/>
-            <a:ext cx="1274309" cy="298450"/>
-          </a:xfrm>
-          <a:prstGeom prst="rect">
-            <a:avLst/>
-          </a:prstGeom>
-          <a:noFill/>
-        </p:spPr>
-        <p:txBody>
-          <a:bodyPr wrap="square" anchor="t"/>
-          <a:lstStyle/>
-          <a:p>
-            <a:pPr algn="ctr" eaLnBrk="0">
-              <a:lnSpc>
-                <a:spcPct val="110000"/>
-              </a:lnSpc>
-              <a:spcAft>
-                <a:spcPts val="100"/>
-              </a:spcAft>
-            </a:pPr>
-            <a:r>
-              <a:rPr sz="1100" b="0">
-                <a:solidFill>
-                  <a:srgbClr val="13294B"/>
-                </a:solidFill>
-                <a:latin typeface="맑은 고딕"/>
-                <a:ea typeface="맑은 고딕"/>
-                <a:cs typeface="맑은 고딕"/>
-              </a:rPr>
-              <a:t>APPROVED_BY</a:t>
-            </a:r>
-          </a:p>
-        </p:txBody>
-      </p:sp>
-      <p:sp>
-        <p:nvSpPr>
-          <p:cNvPr id="17" name="TextBox 16"/>
-          <p:cNvSpPr txBox="1"/>
-          <p:nvPr/>
-        </p:nvSpPr>
-        <p:spPr>
-          <a:xfrm>
-            <a:off x="6329471" y="4019720"/>
-            <a:ext cx="1168117" cy="298450"/>
-          </a:xfrm>
-          <a:prstGeom prst="rect">
-            <a:avLst/>
-          </a:prstGeom>
-          <a:noFill/>
-        </p:spPr>
-        <p:txBody>
-          <a:bodyPr wrap="square" anchor="t"/>
-          <a:lstStyle/>
-          <a:p>
-            <a:pPr algn="ctr" eaLnBrk="0">
-              <a:lnSpc>
-                <a:spcPct val="110000"/>
-              </a:lnSpc>
-              <a:spcAft>
-                <a:spcPts val="100"/>
-              </a:spcAft>
-            </a:pPr>
-            <a:r>
-              <a:rPr sz="1100" b="0">
-                <a:solidFill>
-                  <a:srgbClr val="13294B"/>
-                </a:solidFill>
-                <a:latin typeface="맑은 고딕"/>
-                <a:ea typeface="맑은 고딕"/>
-                <a:cs typeface="맑은 고딕"/>
-              </a:rPr>
-              <a:t>HAS_STEP</a:t>
-            </a:r>
-          </a:p>
-        </p:txBody>
-      </p:sp>
-      <p:sp>
-        <p:nvSpPr>
-          <p:cNvPr id="18" name="TextBox 17"/>
-          <p:cNvSpPr txBox="1"/>
-          <p:nvPr/>
-        </p:nvSpPr>
-        <p:spPr>
-          <a:xfrm>
-            <a:off x="8867471" y="4544467"/>
-            <a:ext cx="1168117" cy="298450"/>
-          </a:xfrm>
-          <a:prstGeom prst="rect">
-            <a:avLst/>
-          </a:prstGeom>
-          <a:noFill/>
-        </p:spPr>
-        <p:txBody>
-          <a:bodyPr wrap="square" anchor="t"/>
-          <a:lstStyle/>
-          <a:p>
-            <a:pPr algn="ctr" eaLnBrk="0">
-              <a:lnSpc>
-                <a:spcPct val="110000"/>
-              </a:lnSpc>
-              <a:spcAft>
-                <a:spcPts val="100"/>
-              </a:spcAft>
-            </a:pPr>
-            <a:r>
-              <a:rPr sz="1100" b="0">
-                <a:solidFill>
-                  <a:srgbClr val="13294B"/>
-                </a:solidFill>
-                <a:latin typeface="맑은 고딕"/>
-                <a:ea typeface="맑은 고딕"/>
-                <a:cs typeface="맑은 고딕"/>
-              </a:rPr>
-              <a:t>REFERS_TO</a:t>
-            </a:r>
-          </a:p>
-        </p:txBody>
-      </p:sp>
-      <p:sp>
-        <p:nvSpPr>
-          <p:cNvPr id="19" name="TextBox 18"/>
-          <p:cNvSpPr txBox="1"/>
-          <p:nvPr/>
-        </p:nvSpPr>
-        <p:spPr>
-          <a:xfrm>
-            <a:off x="1423378" y="5669600"/>
-            <a:ext cx="9344938" cy="507618"/>
-          </a:xfrm>
-          <a:prstGeom prst="rect">
-            <a:avLst/>
-          </a:prstGeom>
-          <a:noFill/>
-        </p:spPr>
-        <p:txBody>
-          <a:bodyPr wrap="square" anchor="t"/>
-          <a:lstStyle/>
-          <a:p>
-            <a:pPr algn="ctr" eaLnBrk="0">
-              <a:lnSpc>
-                <a:spcPct val="110000"/>
-              </a:lnSpc>
-              <a:spcAft>
-                <a:spcPts val="100"/>
-              </a:spcAft>
-            </a:pPr>
-            <a:r>
-              <a:rPr sz="1350" b="1">
-                <a:solidFill>
-                  <a:srgbClr val="13294B"/>
-                </a:solidFill>
-                <a:latin typeface="맑은 고딕"/>
-                <a:ea typeface="맑은 고딕"/>
-                <a:cs typeface="맑은 고딕"/>
-              </a:rPr>
-              <a:t>쿨러 사건의 연결</a:t>
-            </a:r>
-          </a:p>
-          <a:p>
-            <a:pPr algn="ctr" eaLnBrk="0">
-              <a:lnSpc>
-                <a:spcPct val="110000"/>
-              </a:lnSpc>
-              <a:spcAft>
-                <a:spcPts val="100"/>
-              </a:spcAft>
-            </a:pPr>
-            <a:r>
-              <a:rPr sz="1100" b="0">
-                <a:solidFill>
-                  <a:srgbClr val="556175"/>
-                </a:solidFill>
-                <a:latin typeface="맑은 고딕"/>
-                <a:ea typeface="맑은 고딕"/>
-                <a:cs typeface="맑은 고딕"/>
-              </a:rPr>
-              <a:t>쿨러 핀 오염 → 쿨러 냉각 성능 상실 → SOP-COOL-11 팬 최대 운전 → 단계 1~3 → HM-8.5 · 운전원</a:t>
+              <a:rPr sz="1400" b="0">
+                <a:solidFill>
+                  <a:srgbClr val="1F2A3A"/>
+                </a:solidFill>
+                <a:latin typeface="맑은 고딕"/>
+                <a:ea typeface="맑은 고딕"/>
+                <a:cs typeface="맑은 고딕"/>
+              </a:rPr>
+              <a:t>정비 완료: 재가동 뒤 CE 80 % 이상</a:t>
             </a:r>
           </a:p>
         </p:txBody>
@@ -11071,7 +11138,7 @@
                 <a:ea typeface="맑은 고딕"/>
                 <a:cs typeface="맑은 고딕"/>
               </a:rPr>
-              <a:t>경보 해제와 근본 조치 완료의 차이</a:t>
+              <a:t>고장 유형 · 조치 방법 · 단계 · 근거의 연결 구조</a:t>
             </a:r>
           </a:p>
         </p:txBody>
@@ -11110,7 +11177,7 @@
                 <a:ea typeface="맑은 고딕"/>
                 <a:cs typeface="맑은 고딕"/>
               </a:rPr>
-              <a:t>팬 최대 운전 뒤 경보는 해제되었지만 냉각 효율은 기준에 못 미쳐, 핀 오염을 없애는 정비가 따로 필요하다.</a:t>
+              <a:t>고장 유형에서 조치 후보를 찾고, 원인 한정 관계와 단계·근거 절·승인 역할을 함께 확인한다.</a:t>
             </a:r>
           </a:p>
         </p:txBody>
@@ -11185,7 +11252,7 @@
       </p:sp>
       <p:pic>
         <p:nvPicPr>
-          <p:cNvPr id="6" name="Picture 5" descr="그래프_쿨러열화_TS1_CE.png"/>
+          <p:cNvPr id="6" name="삽화:조치연결_그래프.svg" descr="illust_5103104973670051504_1792130363.png"/>
           <p:cNvPicPr>
             <a:picLocks noChangeAspect="1"/>
           </p:cNvPicPr>
@@ -11199,45 +11266,53 @@
         </p:blipFill>
         <p:spPr>
           <a:xfrm>
-            <a:off x="548640" y="1682496"/>
-            <a:ext cx="7223760" cy="4572000"/>
-          </a:xfrm>
-          <a:prstGeom prst="rect">
-            <a:avLst/>
-          </a:prstGeom>
-          <a:ln w="12700">
-            <a:solidFill>
-              <a:srgbClr val="D3D9E1"/>
-            </a:solidFill>
-          </a:ln>
+            <a:off x="786223" y="1627632"/>
+            <a:ext cx="10619248" cy="4727448"/>
+          </a:xfrm>
+          <a:prstGeom prst="rect">
+            <a:avLst/>
+          </a:prstGeom>
         </p:spPr>
       </p:pic>
       <p:sp>
         <p:nvSpPr>
-          <p:cNvPr id="7" name="Oval 6"/>
-          <p:cNvSpPr/>
-          <p:nvPr/>
-        </p:nvSpPr>
-        <p:spPr>
-          <a:xfrm>
-            <a:off x="8138160" y="1682496"/>
-            <a:ext cx="347472" cy="347472"/>
-          </a:xfrm>
-          <a:prstGeom prst="ellipse">
-            <a:avLst/>
-          </a:prstGeom>
-          <a:solidFill>
-            <a:srgbClr val="5CB8F2"/>
-          </a:solidFill>
-          <a:ln>
-            <a:noFill/>
-          </a:ln>
-        </p:spPr>
-        <p:txBody>
-          <a:bodyPr rtlCol="0" anchor="ctr"/>
-          <a:lstStyle/>
-          <a:p>
-            <a:pPr algn="ctr"/>
+          <p:cNvPr id="7" name="TextBox 6"/>
+          <p:cNvSpPr txBox="1"/>
+          <p:nvPr/>
+        </p:nvSpPr>
+        <p:spPr>
+          <a:xfrm>
+            <a:off x="1298071" y="2530574"/>
+            <a:ext cx="902636" cy="337185"/>
+          </a:xfrm>
+          <a:prstGeom prst="rect">
+            <a:avLst/>
+          </a:prstGeom>
+          <a:noFill/>
+        </p:spPr>
+        <p:txBody>
+          <a:bodyPr wrap="square" anchor="t"/>
+          <a:lstStyle/>
+          <a:p>
+            <a:pPr algn="ctr" eaLnBrk="0">
+              <a:lnSpc>
+                <a:spcPct val="110000"/>
+              </a:lnSpc>
+              <a:spcAft>
+                <a:spcPts val="100"/>
+              </a:spcAft>
+            </a:pPr>
+            <a:r>
+              <a:rPr sz="1350" b="1">
+                <a:solidFill>
+                  <a:srgbClr val="13294B"/>
+                </a:solidFill>
+                <a:latin typeface="맑은 고딕"/>
+                <a:ea typeface="맑은 고딕"/>
+                <a:cs typeface="맑은 고딕"/>
+              </a:rPr>
+              <a:t>Cause</a:t>
+            </a:r>
           </a:p>
         </p:txBody>
       </p:sp>
@@ -11249,25 +11324,28 @@
         </p:nvSpPr>
         <p:spPr>
           <a:xfrm>
-            <a:off x="8138160" y="1682496"/>
-            <a:ext cx="347472" cy="347472"/>
-          </a:xfrm>
-          <a:prstGeom prst="rect">
-            <a:avLst/>
-          </a:prstGeom>
-          <a:noFill/>
-        </p:spPr>
-        <p:txBody>
-          <a:bodyPr wrap="square" anchor="ctr"/>
+            <a:off x="3271127" y="4279730"/>
+            <a:ext cx="1338025" cy="337185"/>
+          </a:xfrm>
+          <a:prstGeom prst="rect">
+            <a:avLst/>
+          </a:prstGeom>
+          <a:noFill/>
+        </p:spPr>
+        <p:txBody>
+          <a:bodyPr wrap="square" anchor="t"/>
           <a:lstStyle/>
           <a:p>
             <a:pPr algn="ctr" eaLnBrk="0">
               <a:lnSpc>
                 <a:spcPct val="110000"/>
               </a:lnSpc>
-            </a:pPr>
-            <a:r>
-              <a:rPr sz="1200" b="1">
+              <a:spcAft>
+                <a:spcPts val="100"/>
+              </a:spcAft>
+            </a:pPr>
+            <a:r>
+              <a:rPr sz="1350" b="1">
                 <a:solidFill>
                   <a:srgbClr val="13294B"/>
                 </a:solidFill>
@@ -11275,7 +11353,7 @@
                 <a:ea typeface="맑은 고딕"/>
                 <a:cs typeface="맑은 고딕"/>
               </a:rPr>
-              <a:t>1</a:t>
+              <a:t>FailureMode</a:t>
             </a:r>
           </a:p>
         </p:txBody>
@@ -11288,8 +11366,8 @@
         </p:nvSpPr>
         <p:spPr>
           <a:xfrm>
-            <a:off x="8549640" y="1627632"/>
-            <a:ext cx="3093415" cy="1170432"/>
+            <a:off x="6021512" y="2790584"/>
+            <a:ext cx="743347" cy="337185"/>
           </a:xfrm>
           <a:prstGeom prst="rect">
             <a:avLst/>
@@ -11300,16 +11378,16 @@
           <a:bodyPr wrap="square" anchor="t"/>
           <a:lstStyle/>
           <a:p>
-            <a:pPr algn="l" eaLnBrk="0">
+            <a:pPr algn="ctr" eaLnBrk="0">
               <a:lnSpc>
                 <a:spcPct val="110000"/>
               </a:lnSpc>
               <a:spcAft>
-                <a:spcPts val="400"/>
+                <a:spcPts val="100"/>
               </a:spcAft>
             </a:pPr>
             <a:r>
-              <a:rPr sz="1700" b="1">
+              <a:rPr sz="1350" b="1">
                 <a:solidFill>
                   <a:srgbClr val="13294B"/>
                 </a:solidFill>
@@ -11317,109 +11395,125 @@
                 <a:ea typeface="맑은 고딕"/>
                 <a:cs typeface="맑은 고딕"/>
               </a:rPr>
-              <a:t>완화의 결과</a:t>
-            </a:r>
-          </a:p>
-          <a:p>
-            <a:pPr algn="l" eaLnBrk="0">
+              <a:t>Skill</a:t>
+            </a:r>
+          </a:p>
+        </p:txBody>
+      </p:sp>
+      <p:sp>
+        <p:nvSpPr>
+          <p:cNvPr id="10" name="TextBox 9"/>
+          <p:cNvSpPr txBox="1"/>
+          <p:nvPr/>
+        </p:nvSpPr>
+        <p:spPr>
+          <a:xfrm>
+            <a:off x="8320580" y="2090921"/>
+            <a:ext cx="690251" cy="337185"/>
+          </a:xfrm>
+          <a:prstGeom prst="rect">
+            <a:avLst/>
+          </a:prstGeom>
+          <a:noFill/>
+        </p:spPr>
+        <p:txBody>
+          <a:bodyPr wrap="square" anchor="t"/>
+          <a:lstStyle/>
+          <a:p>
+            <a:pPr algn="ctr" eaLnBrk="0">
               <a:lnSpc>
                 <a:spcPct val="110000"/>
               </a:lnSpc>
               <a:spcAft>
-                <a:spcPts val="400"/>
+                <a:spcPts val="100"/>
               </a:spcAft>
             </a:pPr>
             <a:r>
-              <a:rPr sz="1400" b="0">
-                <a:solidFill>
-                  <a:srgbClr val="1F2A3A"/>
-                </a:solidFill>
-                <a:latin typeface="맑은 고딕"/>
-                <a:ea typeface="맑은 고딕"/>
-                <a:cs typeface="맑은 고딕"/>
-              </a:rPr>
-              <a:t>승인 11:14:56 뒤 유온이 내려가</a:t>
-            </a:r>
-          </a:p>
-          <a:p>
-            <a:pPr algn="l" eaLnBrk="0">
+              <a:rPr sz="1350" b="1">
+                <a:solidFill>
+                  <a:srgbClr val="13294B"/>
+                </a:solidFill>
+                <a:latin typeface="맑은 고딕"/>
+                <a:ea typeface="맑은 고딕"/>
+                <a:cs typeface="맑은 고딕"/>
+              </a:rPr>
+              <a:t>Role</a:t>
+            </a:r>
+          </a:p>
+        </p:txBody>
+      </p:sp>
+      <p:sp>
+        <p:nvSpPr>
+          <p:cNvPr id="11" name="TextBox 10"/>
+          <p:cNvSpPr txBox="1"/>
+          <p:nvPr/>
+        </p:nvSpPr>
+        <p:spPr>
+          <a:xfrm>
+            <a:off x="7885190" y="4369551"/>
+            <a:ext cx="690251" cy="337185"/>
+          </a:xfrm>
+          <a:prstGeom prst="rect">
+            <a:avLst/>
+          </a:prstGeom>
+          <a:noFill/>
+        </p:spPr>
+        <p:txBody>
+          <a:bodyPr wrap="square" anchor="t"/>
+          <a:lstStyle/>
+          <a:p>
+            <a:pPr algn="ctr" eaLnBrk="0">
               <a:lnSpc>
                 <a:spcPct val="110000"/>
               </a:lnSpc>
               <a:spcAft>
-                <a:spcPts val="400"/>
+                <a:spcPts val="100"/>
               </a:spcAft>
             </a:pPr>
             <a:r>
-              <a:rPr sz="1400" b="0">
-                <a:solidFill>
-                  <a:srgbClr val="1F2A3A"/>
-                </a:solidFill>
-                <a:latin typeface="맑은 고딕"/>
-                <a:ea typeface="맑은 고딕"/>
-                <a:cs typeface="맑은 고딕"/>
-              </a:rPr>
-              <a:t>경보가 해제되었다.</a:t>
-            </a:r>
-          </a:p>
-        </p:txBody>
-      </p:sp>
-      <p:sp>
-        <p:nvSpPr>
-          <p:cNvPr id="10" name="Oval 9"/>
-          <p:cNvSpPr/>
-          <p:nvPr/>
-        </p:nvSpPr>
-        <p:spPr>
-          <a:xfrm>
-            <a:off x="8138160" y="2852928"/>
-            <a:ext cx="347472" cy="347472"/>
-          </a:xfrm>
-          <a:prstGeom prst="ellipse">
-            <a:avLst/>
-          </a:prstGeom>
-          <a:solidFill>
-            <a:srgbClr val="5CB8F2"/>
-          </a:solidFill>
-          <a:ln>
-            <a:noFill/>
-          </a:ln>
-        </p:spPr>
-        <p:txBody>
-          <a:bodyPr rtlCol="0" anchor="ctr"/>
-          <a:lstStyle/>
-          <a:p>
-            <a:pPr algn="ctr"/>
-          </a:p>
-        </p:txBody>
-      </p:sp>
-      <p:sp>
-        <p:nvSpPr>
-          <p:cNvPr id="11" name="TextBox 10"/>
-          <p:cNvSpPr txBox="1"/>
-          <p:nvPr/>
-        </p:nvSpPr>
-        <p:spPr>
-          <a:xfrm>
-            <a:off x="8138160" y="2852928"/>
-            <a:ext cx="347472" cy="347472"/>
-          </a:xfrm>
-          <a:prstGeom prst="rect">
-            <a:avLst/>
-          </a:prstGeom>
-          <a:noFill/>
-        </p:spPr>
-        <p:txBody>
-          <a:bodyPr wrap="square" anchor="ctr"/>
+              <a:rPr sz="1350" b="1">
+                <a:solidFill>
+                  <a:srgbClr val="13294B"/>
+                </a:solidFill>
+                <a:latin typeface="맑은 고딕"/>
+                <a:ea typeface="맑은 고딕"/>
+                <a:cs typeface="맑은 고딕"/>
+              </a:rPr>
+              <a:t>Step</a:t>
+            </a:r>
+          </a:p>
+        </p:txBody>
+      </p:sp>
+      <p:sp>
+        <p:nvSpPr>
+          <p:cNvPr id="12" name="TextBox 11"/>
+          <p:cNvSpPr txBox="1"/>
+          <p:nvPr/>
+        </p:nvSpPr>
+        <p:spPr>
+          <a:xfrm>
+            <a:off x="9701082" y="3665162"/>
+            <a:ext cx="1433598" cy="337185"/>
+          </a:xfrm>
+          <a:prstGeom prst="rect">
+            <a:avLst/>
+          </a:prstGeom>
+          <a:noFill/>
+        </p:spPr>
+        <p:txBody>
+          <a:bodyPr wrap="square" anchor="t"/>
           <a:lstStyle/>
           <a:p>
             <a:pPr algn="ctr" eaLnBrk="0">
               <a:lnSpc>
                 <a:spcPct val="110000"/>
               </a:lnSpc>
-            </a:pPr>
-            <a:r>
-              <a:rPr sz="1200" b="1">
+              <a:spcAft>
+                <a:spcPts val="100"/>
+              </a:spcAft>
+            </a:pPr>
+            <a:r>
+              <a:rPr sz="1350" b="1">
                 <a:solidFill>
                   <a:srgbClr val="13294B"/>
                 </a:solidFill>
@@ -11427,21 +11521,21 @@
                 <a:ea typeface="맑은 고딕"/>
                 <a:cs typeface="맑은 고딕"/>
               </a:rPr>
-              <a:t>2</a:t>
-            </a:r>
-          </a:p>
-        </p:txBody>
-      </p:sp>
-      <p:sp>
-        <p:nvSpPr>
-          <p:cNvPr id="12" name="TextBox 11"/>
-          <p:cNvSpPr txBox="1"/>
-          <p:nvPr/>
-        </p:nvSpPr>
-        <p:spPr>
-          <a:xfrm>
-            <a:off x="8549640" y="2798064"/>
-            <a:ext cx="3093415" cy="1170432"/>
+              <a:t>ManualSection</a:t>
+            </a:r>
+          </a:p>
+        </p:txBody>
+      </p:sp>
+      <p:sp>
+        <p:nvSpPr>
+          <p:cNvPr id="13" name="TextBox 12"/>
+          <p:cNvSpPr txBox="1"/>
+          <p:nvPr/>
+        </p:nvSpPr>
+        <p:spPr>
+          <a:xfrm>
+            <a:off x="2028675" y="3754983"/>
+            <a:ext cx="849539" cy="298450"/>
           </a:xfrm>
           <a:prstGeom prst="rect">
             <a:avLst/>
@@ -11452,16 +11546,16 @@
           <a:bodyPr wrap="square" anchor="t"/>
           <a:lstStyle/>
           <a:p>
-            <a:pPr algn="l" eaLnBrk="0">
+            <a:pPr algn="ctr" eaLnBrk="0">
               <a:lnSpc>
                 <a:spcPct val="110000"/>
               </a:lnSpc>
               <a:spcAft>
-                <a:spcPts val="400"/>
+                <a:spcPts val="100"/>
               </a:spcAft>
             </a:pPr>
             <a:r>
-              <a:rPr sz="1700" b="1">
+              <a:rPr sz="1100" b="0">
                 <a:solidFill>
                   <a:srgbClr val="13294B"/>
                 </a:solidFill>
@@ -11469,131 +11563,126 @@
                 <a:ea typeface="맑은 고딕"/>
                 <a:cs typeface="맑은 고딕"/>
               </a:rPr>
-              <a:t>남은 원인</a:t>
-            </a:r>
-          </a:p>
-          <a:p>
-            <a:pPr algn="l" eaLnBrk="0">
+              <a:t>CAUSES</a:t>
+            </a:r>
+          </a:p>
+        </p:txBody>
+      </p:sp>
+      <p:sp>
+        <p:nvSpPr>
+          <p:cNvPr id="14" name="TextBox 13"/>
+          <p:cNvSpPr txBox="1"/>
+          <p:nvPr/>
+        </p:nvSpPr>
+        <p:spPr>
+          <a:xfrm>
+            <a:off x="4927730" y="4081177"/>
+            <a:ext cx="1168117" cy="639318"/>
+          </a:xfrm>
+          <a:prstGeom prst="rect">
+            <a:avLst/>
+          </a:prstGeom>
+          <a:noFill/>
+        </p:spPr>
+        <p:txBody>
+          <a:bodyPr wrap="square" anchor="t"/>
+          <a:lstStyle/>
+          <a:p>
+            <a:pPr algn="ctr" eaLnBrk="0">
               <a:lnSpc>
                 <a:spcPct val="110000"/>
               </a:lnSpc>
               <a:spcAft>
-                <a:spcPts val="400"/>
+                <a:spcPts val="100"/>
               </a:spcAft>
             </a:pPr>
             <a:r>
-              <a:rPr sz="1400" b="0">
-                <a:solidFill>
-                  <a:srgbClr val="1F2A3A"/>
-                </a:solidFill>
-                <a:latin typeface="맑은 고딕"/>
-                <a:ea typeface="맑은 고딕"/>
-                <a:cs typeface="맑은 고딕"/>
-              </a:rPr>
-              <a:t>냉각 효율 55 %, 기준 70 % 미만.</a:t>
-            </a:r>
-          </a:p>
-          <a:p>
-            <a:pPr algn="l" eaLnBrk="0">
+              <a:rPr sz="1050" b="0">
+                <a:solidFill>
+                  <a:srgbClr val="13294B"/>
+                </a:solidFill>
+                <a:latin typeface="맑은 고딕"/>
+                <a:ea typeface="맑은 고딕"/>
+                <a:cs typeface="맑은 고딕"/>
+              </a:rPr>
+              <a:t>MITIGATED_BY</a:t>
+            </a:r>
+          </a:p>
+          <a:p>
+            <a:pPr algn="ctr" eaLnBrk="0">
               <a:lnSpc>
                 <a:spcPct val="110000"/>
               </a:lnSpc>
               <a:spcAft>
-                <a:spcPts val="400"/>
+                <a:spcPts val="100"/>
               </a:spcAft>
             </a:pPr>
             <a:r>
-              <a:rPr sz="1400" b="0">
-                <a:solidFill>
-                  <a:srgbClr val="1F2A3A"/>
-                </a:solidFill>
-                <a:latin typeface="맑은 고딕"/>
-                <a:ea typeface="맑은 고딕"/>
-                <a:cs typeface="맑은 고딕"/>
-              </a:rPr>
-              <a:t>핀 오염은 그대로다.</a:t>
-            </a:r>
-          </a:p>
-        </p:txBody>
-      </p:sp>
-      <p:sp>
-        <p:nvSpPr>
-          <p:cNvPr id="13" name="Oval 12"/>
-          <p:cNvSpPr/>
-          <p:nvPr/>
-        </p:nvSpPr>
-        <p:spPr>
-          <a:xfrm>
-            <a:off x="8138160" y="4023359"/>
-            <a:ext cx="347472" cy="347472"/>
-          </a:xfrm>
-          <a:prstGeom prst="ellipse">
-            <a:avLst/>
-          </a:prstGeom>
-          <a:solidFill>
-            <a:srgbClr val="13294B"/>
-          </a:solidFill>
-          <a:ln>
-            <a:noFill/>
-          </a:ln>
-        </p:spPr>
-        <p:txBody>
-          <a:bodyPr rtlCol="0" anchor="ctr"/>
-          <a:lstStyle/>
-          <a:p>
-            <a:pPr algn="ctr"/>
-          </a:p>
-        </p:txBody>
-      </p:sp>
-      <p:sp>
-        <p:nvSpPr>
-          <p:cNvPr id="14" name="TextBox 13"/>
-          <p:cNvSpPr txBox="1"/>
-          <p:nvPr/>
-        </p:nvSpPr>
-        <p:spPr>
-          <a:xfrm>
-            <a:off x="8138160" y="4023359"/>
-            <a:ext cx="347472" cy="347472"/>
-          </a:xfrm>
-          <a:prstGeom prst="rect">
-            <a:avLst/>
-          </a:prstGeom>
-          <a:noFill/>
-        </p:spPr>
-        <p:txBody>
-          <a:bodyPr wrap="square" anchor="ctr"/>
+              <a:rPr sz="1050" b="0">
+                <a:solidFill>
+                  <a:srgbClr val="13294B"/>
+                </a:solidFill>
+                <a:latin typeface="맑은 고딕"/>
+                <a:ea typeface="맑은 고딕"/>
+                <a:cs typeface="맑은 고딕"/>
+              </a:rPr>
+              <a:t>REMEDIED_BY</a:t>
+            </a:r>
+          </a:p>
+        </p:txBody>
+      </p:sp>
+      <p:sp>
+        <p:nvSpPr>
+          <p:cNvPr id="15" name="TextBox 14"/>
+          <p:cNvSpPr txBox="1"/>
+          <p:nvPr/>
+        </p:nvSpPr>
+        <p:spPr>
+          <a:xfrm>
+            <a:off x="3483512" y="2398206"/>
+            <a:ext cx="1168117" cy="298450"/>
+          </a:xfrm>
+          <a:prstGeom prst="rect">
+            <a:avLst/>
+          </a:prstGeom>
+          <a:noFill/>
+        </p:spPr>
+        <p:txBody>
+          <a:bodyPr wrap="square" anchor="t"/>
           <a:lstStyle/>
           <a:p>
             <a:pPr algn="ctr" eaLnBrk="0">
               <a:lnSpc>
                 <a:spcPct val="110000"/>
               </a:lnSpc>
-            </a:pPr>
-            <a:r>
-              <a:rPr sz="1200" b="1">
-                <a:solidFill>
-                  <a:srgbClr val="FFFFFF"/>
-                </a:solidFill>
-                <a:latin typeface="맑은 고딕"/>
-                <a:ea typeface="맑은 고딕"/>
-                <a:cs typeface="맑은 고딕"/>
-              </a:rPr>
-              <a:t>3</a:t>
-            </a:r>
-          </a:p>
-        </p:txBody>
-      </p:sp>
-      <p:sp>
-        <p:nvSpPr>
-          <p:cNvPr id="15" name="TextBox 14"/>
-          <p:cNvSpPr txBox="1"/>
-          <p:nvPr/>
-        </p:nvSpPr>
-        <p:spPr>
-          <a:xfrm>
-            <a:off x="8549640" y="3968496"/>
-            <a:ext cx="3093415" cy="1170432"/>
+              <a:spcAft>
+                <a:spcPts val="100"/>
+              </a:spcAft>
+            </a:pPr>
+            <a:r>
+              <a:rPr sz="1100" b="0">
+                <a:solidFill>
+                  <a:srgbClr val="13294B"/>
+                </a:solidFill>
+                <a:latin typeface="맑은 고딕"/>
+                <a:ea typeface="맑은 고딕"/>
+                <a:cs typeface="맑은 고딕"/>
+              </a:rPr>
+              <a:t>ADDRESSES</a:t>
+            </a:r>
+          </a:p>
+        </p:txBody>
+      </p:sp>
+      <p:sp>
+        <p:nvSpPr>
+          <p:cNvPr id="16" name="TextBox 15"/>
+          <p:cNvSpPr txBox="1"/>
+          <p:nvPr/>
+        </p:nvSpPr>
+        <p:spPr>
+          <a:xfrm>
+            <a:off x="6626810" y="2005827"/>
+            <a:ext cx="1274309" cy="298450"/>
           </a:xfrm>
           <a:prstGeom prst="rect">
             <a:avLst/>
@@ -11604,16 +11693,16 @@
           <a:bodyPr wrap="square" anchor="t"/>
           <a:lstStyle/>
           <a:p>
-            <a:pPr algn="l" eaLnBrk="0">
+            <a:pPr algn="ctr" eaLnBrk="0">
               <a:lnSpc>
                 <a:spcPct val="110000"/>
               </a:lnSpc>
               <a:spcAft>
-                <a:spcPts val="400"/>
+                <a:spcPts val="100"/>
               </a:spcAft>
             </a:pPr>
             <a:r>
-              <a:rPr sz="1700" b="1">
+              <a:rPr sz="1100" b="0">
                 <a:solidFill>
                   <a:srgbClr val="13294B"/>
                 </a:solidFill>
@@ -11621,151 +11710,125 @@
                 <a:ea typeface="맑은 고딕"/>
                 <a:cs typeface="맑은 고딕"/>
               </a:rPr>
-              <a:t>근본 조치의 상태</a:t>
-            </a:r>
-          </a:p>
-          <a:p>
-            <a:pPr algn="l" eaLnBrk="0">
+              <a:t>APPROVED_BY</a:t>
+            </a:r>
+          </a:p>
+        </p:txBody>
+      </p:sp>
+      <p:sp>
+        <p:nvSpPr>
+          <p:cNvPr id="17" name="TextBox 16"/>
+          <p:cNvSpPr txBox="1"/>
+          <p:nvPr/>
+        </p:nvSpPr>
+        <p:spPr>
+          <a:xfrm>
+            <a:off x="6329471" y="4019720"/>
+            <a:ext cx="1168117" cy="298450"/>
+          </a:xfrm>
+          <a:prstGeom prst="rect">
+            <a:avLst/>
+          </a:prstGeom>
+          <a:noFill/>
+        </p:spPr>
+        <p:txBody>
+          <a:bodyPr wrap="square" anchor="t"/>
+          <a:lstStyle/>
+          <a:p>
+            <a:pPr algn="ctr" eaLnBrk="0">
               <a:lnSpc>
                 <a:spcPct val="110000"/>
               </a:lnSpc>
               <a:spcAft>
-                <a:spcPts val="400"/>
+                <a:spcPts val="100"/>
               </a:spcAft>
             </a:pPr>
             <a:r>
-              <a:rPr sz="1400" b="0">
-                <a:solidFill>
-                  <a:srgbClr val="1F2A3A"/>
-                </a:solidFill>
-                <a:latin typeface="맑은 고딕"/>
-                <a:ea typeface="맑은 고딕"/>
-                <a:cs typeface="맑은 고딕"/>
-              </a:rPr>
-              <a:t>핀 세척은 작업지시로 등록되었다.</a:t>
-            </a:r>
-          </a:p>
-          <a:p>
-            <a:pPr algn="l" eaLnBrk="0">
+              <a:rPr sz="1100" b="0">
+                <a:solidFill>
+                  <a:srgbClr val="13294B"/>
+                </a:solidFill>
+                <a:latin typeface="맑은 고딕"/>
+                <a:ea typeface="맑은 고딕"/>
+                <a:cs typeface="맑은 고딕"/>
+              </a:rPr>
+              <a:t>HAS_STEP</a:t>
+            </a:r>
+          </a:p>
+        </p:txBody>
+      </p:sp>
+      <p:sp>
+        <p:nvSpPr>
+          <p:cNvPr id="18" name="TextBox 17"/>
+          <p:cNvSpPr txBox="1"/>
+          <p:nvPr/>
+        </p:nvSpPr>
+        <p:spPr>
+          <a:xfrm>
+            <a:off x="8867471" y="4544467"/>
+            <a:ext cx="1168117" cy="298450"/>
+          </a:xfrm>
+          <a:prstGeom prst="rect">
+            <a:avLst/>
+          </a:prstGeom>
+          <a:noFill/>
+        </p:spPr>
+        <p:txBody>
+          <a:bodyPr wrap="square" anchor="t"/>
+          <a:lstStyle/>
+          <a:p>
+            <a:pPr algn="ctr" eaLnBrk="0">
               <a:lnSpc>
                 <a:spcPct val="110000"/>
               </a:lnSpc>
               <a:spcAft>
-                <a:spcPts val="400"/>
+                <a:spcPts val="100"/>
               </a:spcAft>
             </a:pPr>
             <a:r>
-              <a:rPr sz="1400" b="0">
-                <a:solidFill>
-                  <a:srgbClr val="1F2A3A"/>
-                </a:solidFill>
-                <a:latin typeface="맑은 고딕"/>
-                <a:ea typeface="맑은 고딕"/>
-                <a:cs typeface="맑은 고딕"/>
-              </a:rPr>
-              <a:t>등록은 정비 완료가 아니다.</a:t>
-            </a:r>
-          </a:p>
-        </p:txBody>
-      </p:sp>
-      <p:sp>
-        <p:nvSpPr>
-          <p:cNvPr id="16" name="Oval 15"/>
-          <p:cNvSpPr/>
-          <p:nvPr/>
-        </p:nvSpPr>
-        <p:spPr>
-          <a:xfrm>
-            <a:off x="8138160" y="5193792"/>
-            <a:ext cx="347472" cy="347472"/>
-          </a:xfrm>
-          <a:prstGeom prst="ellipse">
-            <a:avLst/>
-          </a:prstGeom>
-          <a:solidFill>
-            <a:srgbClr val="13294B"/>
-          </a:solidFill>
-          <a:ln>
-            <a:noFill/>
-          </a:ln>
-        </p:spPr>
-        <p:txBody>
-          <a:bodyPr rtlCol="0" anchor="ctr"/>
-          <a:lstStyle/>
-          <a:p>
-            <a:pPr algn="ctr"/>
-          </a:p>
-        </p:txBody>
-      </p:sp>
-      <p:sp>
-        <p:nvSpPr>
-          <p:cNvPr id="17" name="TextBox 16"/>
-          <p:cNvSpPr txBox="1"/>
-          <p:nvPr/>
-        </p:nvSpPr>
-        <p:spPr>
-          <a:xfrm>
-            <a:off x="8138160" y="5193792"/>
-            <a:ext cx="347472" cy="347472"/>
-          </a:xfrm>
-          <a:prstGeom prst="rect">
-            <a:avLst/>
-          </a:prstGeom>
-          <a:noFill/>
-        </p:spPr>
-        <p:txBody>
-          <a:bodyPr wrap="square" anchor="ctr"/>
+              <a:rPr sz="1100" b="0">
+                <a:solidFill>
+                  <a:srgbClr val="13294B"/>
+                </a:solidFill>
+                <a:latin typeface="맑은 고딕"/>
+                <a:ea typeface="맑은 고딕"/>
+                <a:cs typeface="맑은 고딕"/>
+              </a:rPr>
+              <a:t>REFERS_TO</a:t>
+            </a:r>
+          </a:p>
+        </p:txBody>
+      </p:sp>
+      <p:sp>
+        <p:nvSpPr>
+          <p:cNvPr id="19" name="TextBox 18"/>
+          <p:cNvSpPr txBox="1"/>
+          <p:nvPr/>
+        </p:nvSpPr>
+        <p:spPr>
+          <a:xfrm>
+            <a:off x="1423378" y="5669600"/>
+            <a:ext cx="9344938" cy="507618"/>
+          </a:xfrm>
+          <a:prstGeom prst="rect">
+            <a:avLst/>
+          </a:prstGeom>
+          <a:noFill/>
+        </p:spPr>
+        <p:txBody>
+          <a:bodyPr wrap="square" anchor="t"/>
           <a:lstStyle/>
           <a:p>
             <a:pPr algn="ctr" eaLnBrk="0">
               <a:lnSpc>
                 <a:spcPct val="110000"/>
               </a:lnSpc>
-            </a:pPr>
-            <a:r>
-              <a:rPr sz="1200" b="1">
-                <a:solidFill>
-                  <a:srgbClr val="FFFFFF"/>
-                </a:solidFill>
-                <a:latin typeface="맑은 고딕"/>
-                <a:ea typeface="맑은 고딕"/>
-                <a:cs typeface="맑은 고딕"/>
-              </a:rPr>
-              <a:t>4</a:t>
-            </a:r>
-          </a:p>
-        </p:txBody>
-      </p:sp>
-      <p:sp>
-        <p:nvSpPr>
-          <p:cNvPr id="18" name="TextBox 17"/>
-          <p:cNvSpPr txBox="1"/>
-          <p:nvPr/>
-        </p:nvSpPr>
-        <p:spPr>
-          <a:xfrm>
-            <a:off x="8549640" y="5138928"/>
-            <a:ext cx="3093415" cy="1170432"/>
-          </a:xfrm>
-          <a:prstGeom prst="rect">
-            <a:avLst/>
-          </a:prstGeom>
-          <a:noFill/>
-        </p:spPr>
-        <p:txBody>
-          <a:bodyPr wrap="square" anchor="t"/>
-          <a:lstStyle/>
-          <a:p>
-            <a:pPr algn="l" eaLnBrk="0">
-              <a:lnSpc>
-                <a:spcPct val="110000"/>
-              </a:lnSpc>
               <a:spcAft>
-                <a:spcPts val="400"/>
+                <a:spcPts val="100"/>
               </a:spcAft>
             </a:pPr>
             <a:r>
-              <a:rPr sz="1700" b="1">
+              <a:rPr sz="1350" b="1">
                 <a:solidFill>
                   <a:srgbClr val="13294B"/>
                 </a:solidFill>
@@ -11773,49 +11836,28 @@
                 <a:ea typeface="맑은 고딕"/>
                 <a:cs typeface="맑은 고딕"/>
               </a:rPr>
-              <a:t>서로 다른 완료 기준</a:t>
-            </a:r>
-          </a:p>
-          <a:p>
-            <a:pPr algn="l" eaLnBrk="0">
+              <a:t>쿨러 사건의 연결</a:t>
+            </a:r>
+          </a:p>
+          <a:p>
+            <a:pPr algn="ctr" eaLnBrk="0">
               <a:lnSpc>
                 <a:spcPct val="110000"/>
               </a:lnSpc>
               <a:spcAft>
-                <a:spcPts val="400"/>
+                <a:spcPts val="100"/>
               </a:spcAft>
             </a:pPr>
             <a:r>
-              <a:rPr sz="1350" b="0">
-                <a:solidFill>
-                  <a:srgbClr val="1F2A3A"/>
-                </a:solidFill>
-                <a:latin typeface="맑은 고딕"/>
-                <a:ea typeface="맑은 고딕"/>
-                <a:cs typeface="맑은 고딕"/>
-              </a:rPr>
-              <a:t>경보 해제, 매뉴얼: 15분 유지,</a:t>
-            </a:r>
-          </a:p>
-          <a:p>
-            <a:pPr algn="l" eaLnBrk="0">
-              <a:lnSpc>
-                <a:spcPct val="110000"/>
-              </a:lnSpc>
-              <a:spcAft>
-                <a:spcPts val="400"/>
-              </a:spcAft>
-            </a:pPr>
-            <a:r>
-              <a:rPr sz="1350" b="0">
-                <a:solidFill>
-                  <a:srgbClr val="1F2A3A"/>
-                </a:solidFill>
-                <a:latin typeface="맑은 고딕"/>
-                <a:ea typeface="맑은 고딕"/>
-                <a:cs typeface="맑은 고딕"/>
-              </a:rPr>
-              <a:t>재가동 뒤 CE 80 % 이상의 정비 완료.</a:t>
+              <a:rPr sz="1100" b="0">
+                <a:solidFill>
+                  <a:srgbClr val="556175"/>
+                </a:solidFill>
+                <a:latin typeface="맑은 고딕"/>
+                <a:ea typeface="맑은 고딕"/>
+                <a:cs typeface="맑은 고딕"/>
+              </a:rPr>
+              <a:t>쿨러 핀 오염 → 쿨러 냉각 성능 상실 → SOP-COOL-11 팬 최대 운전 → 단계 1~3 → HM-8.5 · 운전원</a:t>
             </a:r>
           </a:p>
         </p:txBody>
@@ -17267,7 +17309,7 @@
                 <a:ea typeface="맑은 고딕"/>
                 <a:cs typeface="맑은 고딕"/>
               </a:rPr>
-              <a:t>• 판정 기능을 네 입력으로 검증한다</a:t>
+              <a:t>• 판정 기능을 여러 입력으로 검증한다</a:t>
             </a:r>
           </a:p>
         </p:txBody>
@@ -17935,6 +17977,24 @@
               <a:t>같다 — pattern == 'PM_DUE'</a:t>
             </a:r>
           </a:p>
+          <a:p>
+            <a:pPr algn="l" eaLnBrk="0">
+              <a:lnSpc>
+                <a:spcPct val="110000"/>
+              </a:lnSpc>
+            </a:pPr>
+            <a:r>
+              <a:rPr sz="1400" b="0">
+                <a:solidFill>
+                  <a:srgbClr val="1F2A3A"/>
+                </a:solidFill>
+                <a:latin typeface="맑은 고딕"/>
+                <a:ea typeface="맑은 고딕"/>
+                <a:cs typeface="맑은 고딕"/>
+              </a:rPr>
+              <a:t>이상 패턴이 정기 정비 도래</a:t>
+            </a:r>
+          </a:p>
         </p:txBody>
       </p:sp>
       <p:sp>
@@ -18673,6 +18733,24 @@
                 <a:cs typeface="맑은 고딕"/>
               </a:rPr>
               <a:t>작거나 같다(이하) — order_due &lt;= 24</a:t>
+            </a:r>
+          </a:p>
+          <a:p>
+            <a:pPr algn="l" eaLnBrk="0">
+              <a:lnSpc>
+                <a:spcPct val="110000"/>
+              </a:lnSpc>
+            </a:pPr>
+            <a:r>
+              <a:rPr sz="1400" b="0">
+                <a:solidFill>
+                  <a:srgbClr val="1F2A3A"/>
+                </a:solidFill>
+                <a:latin typeface="맑은 고딕"/>
+                <a:ea typeface="맑은 고딕"/>
+                <a:cs typeface="맑은 고딕"/>
+              </a:rPr>
+              <a:t>정기 정비 규칙의 납기 조건</a:t>
             </a:r>
           </a:p>
         </p:txBody>
@@ -18890,7 +18968,7 @@
       </p:sp>
       <p:pic>
         <p:nvPicPr>
-          <p:cNvPr id="6" name="삽화:수직선_경계.svg" descr="illust_2276185494946075178_1792037122.png"/>
+          <p:cNvPr id="6" name="삽화:수직선_경계.svg" descr="illust_4801180510362397550_1792130363.png"/>
           <p:cNvPicPr>
             <a:picLocks noChangeAspect="1"/>
           </p:cNvPicPr>
@@ -21219,7 +21297,7 @@
                 <a:ea typeface="맑은 고딕"/>
                 <a:cs typeface="맑은 고딕"/>
               </a:rPr>
-              <a:t>후보 선택 · 제외 · 감점 · 경고의 출력</a:t>
+              <a:t>후보 선택 · 제외 · 감점 · 경고 · 순위의 출력</a:t>
             </a:r>
           </a:p>
         </p:txBody>
@@ -21258,7 +21336,7 @@
                 <a:ea typeface="맑은 고딕"/>
                 <a:cs typeface="맑은 고딕"/>
               </a:rPr>
-              <a:t>규칙의 출력은 후보에 올리기, 빼기, 깎아서 견주기, 알리고 남기기로 나뉘며 후보에 오른 것이 실행 허가는 아니다.</a:t>
+              <a:t>규칙의 출력은 후보 선택 · 제외 · 감점 · 경고 · 순위의 다섯이며, 후보에 오른 것이 실행 허가는 아니다.</a:t>
             </a:r>
           </a:p>
         </p:txBody>
@@ -21339,7 +21417,7 @@
         </p:nvSpPr>
         <p:spPr>
           <a:xfrm>
-            <a:off x="548640" y="1961387"/>
+            <a:off x="548640" y="1627632"/>
             <a:ext cx="11094415" cy="347472"/>
           </a:xfrm>
           <a:prstGeom prst="roundRect">
@@ -21370,7 +21448,7 @@
         </p:nvSpPr>
         <p:spPr>
           <a:xfrm>
-            <a:off x="685800" y="1961387"/>
+            <a:off x="685800" y="1627632"/>
             <a:ext cx="2514600" cy="347472"/>
           </a:xfrm>
           <a:prstGeom prst="rect">
@@ -21396,7 +21474,7 @@
                 <a:ea typeface="맑은 고딕"/>
                 <a:cs typeface="맑은 고딕"/>
               </a:rPr>
-              <a:t>출력(effect)</a:t>
+              <a:t>출력(effect) · 결정표</a:t>
             </a:r>
           </a:p>
         </p:txBody>
@@ -21409,7 +21487,7 @@
         </p:nvSpPr>
         <p:spPr>
           <a:xfrm>
-            <a:off x="3200400" y="1961387"/>
+            <a:off x="3200400" y="1627632"/>
             <a:ext cx="6248095" cy="347472"/>
           </a:xfrm>
           <a:prstGeom prst="rect">
@@ -21448,7 +21526,7 @@
         </p:nvSpPr>
         <p:spPr>
           <a:xfrm>
-            <a:off x="9448495" y="1961387"/>
+            <a:off x="9448495" y="1627632"/>
             <a:ext cx="2194560" cy="347472"/>
           </a:xfrm>
           <a:prstGeom prst="rect">
@@ -21487,8 +21565,8 @@
         </p:nvSpPr>
         <p:spPr>
           <a:xfrm>
-            <a:off x="548640" y="2395727"/>
-            <a:ext cx="11094415" cy="850392"/>
+            <a:off x="548640" y="2061972"/>
+            <a:ext cx="11094415" cy="801014"/>
           </a:xfrm>
           <a:prstGeom prst="roundRect">
             <a:avLst>
@@ -21518,8 +21596,8 @@
         </p:nvSpPr>
         <p:spPr>
           <a:xfrm>
-            <a:off x="685800" y="2363723"/>
-            <a:ext cx="2514600" cy="914400"/>
+            <a:off x="685800" y="2029968"/>
+            <a:ext cx="2514600" cy="865022"/>
           </a:xfrm>
           <a:prstGeom prst="rect">
             <a:avLst/>
@@ -21544,7 +21622,7 @@
                 <a:ea typeface="맑은 고딕"/>
                 <a:cs typeface="맑은 고딕"/>
               </a:rPr>
-              <a:t>후보 선택 SELECT</a:t>
+              <a:t>후보 선택 SELECT / 후보 선택 표</a:t>
             </a:r>
           </a:p>
         </p:txBody>
@@ -21557,8 +21635,8 @@
         </p:nvSpPr>
         <p:spPr>
           <a:xfrm>
-            <a:off x="3200400" y="2363723"/>
-            <a:ext cx="6156655" cy="914400"/>
+            <a:off x="3200400" y="2029968"/>
+            <a:ext cx="6156655" cy="865022"/>
           </a:xfrm>
           <a:prstGeom prst="rect">
             <a:avLst/>
@@ -21614,8 +21692,8 @@
         </p:nvSpPr>
         <p:spPr>
           <a:xfrm>
-            <a:off x="9448495" y="2363723"/>
-            <a:ext cx="2103120" cy="914400"/>
+            <a:off x="9448495" y="2029968"/>
+            <a:ext cx="2103120" cy="865022"/>
           </a:xfrm>
           <a:prstGeom prst="rect">
             <a:avLst/>
@@ -21653,174 +21731,8 @@
         </p:nvSpPr>
         <p:spPr>
           <a:xfrm>
-            <a:off x="548640" y="3310127"/>
-            <a:ext cx="11094415" cy="850392"/>
-          </a:xfrm>
-          <a:prstGeom prst="roundRect">
-            <a:avLst>
-              <a:gd name="adj" fmla="val 8000"/>
-            </a:avLst>
-          </a:prstGeom>
-          <a:solidFill>
-            <a:srgbClr val="E7F3FD"/>
-          </a:solidFill>
-          <a:ln>
-            <a:noFill/>
-          </a:ln>
-        </p:spPr>
-        <p:txBody>
-          <a:bodyPr rtlCol="0" anchor="ctr"/>
-          <a:lstStyle/>
-          <a:p>
-            <a:pPr algn="ctr"/>
-          </a:p>
-        </p:txBody>
-      </p:sp>
-      <p:sp>
-        <p:nvSpPr>
-          <p:cNvPr id="15" name="TextBox 14"/>
-          <p:cNvSpPr txBox="1"/>
-          <p:nvPr/>
-        </p:nvSpPr>
-        <p:spPr>
-          <a:xfrm>
-            <a:off x="685800" y="3278123"/>
-            <a:ext cx="2514600" cy="914400"/>
-          </a:xfrm>
-          <a:prstGeom prst="rect">
-            <a:avLst/>
-          </a:prstGeom>
-          <a:noFill/>
-        </p:spPr>
-        <p:txBody>
-          <a:bodyPr wrap="square" anchor="ctr"/>
-          <a:lstStyle/>
-          <a:p>
-            <a:pPr algn="l" eaLnBrk="0">
-              <a:lnSpc>
-                <a:spcPct val="110000"/>
-              </a:lnSpc>
-            </a:pPr>
-            <a:r>
-              <a:rPr sz="1600" b="1">
-                <a:solidFill>
-                  <a:srgbClr val="13294B"/>
-                </a:solidFill>
-                <a:latin typeface="맑은 고딕"/>
-                <a:ea typeface="맑은 고딕"/>
-                <a:cs typeface="맑은 고딕"/>
-              </a:rPr>
-              <a:t>제외 EXCLUDE</a:t>
-            </a:r>
-          </a:p>
-        </p:txBody>
-      </p:sp>
-      <p:sp>
-        <p:nvSpPr>
-          <p:cNvPr id="16" name="TextBox 15"/>
-          <p:cNvSpPr txBox="1"/>
-          <p:nvPr/>
-        </p:nvSpPr>
-        <p:spPr>
-          <a:xfrm>
-            <a:off x="3200400" y="3278123"/>
-            <a:ext cx="6156655" cy="914400"/>
-          </a:xfrm>
-          <a:prstGeom prst="rect">
-            <a:avLst/>
-          </a:prstGeom>
-          <a:noFill/>
-        </p:spPr>
-        <p:txBody>
-          <a:bodyPr wrap="square" anchor="ctr"/>
-          <a:lstStyle/>
-          <a:p>
-            <a:pPr algn="l" eaLnBrk="0">
-              <a:lnSpc>
-                <a:spcPct val="110000"/>
-              </a:lnSpc>
-            </a:pPr>
-            <a:r>
-              <a:rPr sz="1400" b="0">
-                <a:solidFill>
-                  <a:srgbClr val="1F2A3A"/>
-                </a:solidFill>
-                <a:latin typeface="맑은 고딕"/>
-                <a:ea typeface="맑은 고딕"/>
-                <a:cs typeface="맑은 고딕"/>
-              </a:rPr>
-              <a:t>plc_mode != 'REMOTE_AUTO' → SOP-COOL-11 · 12 · 13 (HM-8.8)</a:t>
-            </a:r>
-          </a:p>
-        </p:txBody>
-      </p:sp>
-      <p:sp>
-        <p:nvSpPr>
-          <p:cNvPr id="17" name="TextBox 16"/>
-          <p:cNvSpPr txBox="1"/>
-          <p:nvPr/>
-        </p:nvSpPr>
-        <p:spPr>
-          <a:xfrm>
-            <a:off x="9448495" y="3278123"/>
-            <a:ext cx="2103120" cy="914400"/>
-          </a:xfrm>
-          <a:prstGeom prst="rect">
-            <a:avLst/>
-          </a:prstGeom>
-          <a:noFill/>
-        </p:spPr>
-        <p:txBody>
-          <a:bodyPr wrap="square" anchor="ctr"/>
-          <a:lstStyle/>
-          <a:p>
-            <a:pPr algn="l" eaLnBrk="0">
-              <a:lnSpc>
-                <a:spcPct val="110000"/>
-              </a:lnSpc>
-            </a:pPr>
-            <a:r>
-              <a:rPr sz="1250" b="1">
-                <a:solidFill>
-                  <a:srgbClr val="1A6FC4"/>
-                </a:solidFill>
-                <a:latin typeface="맑은 고딕"/>
-                <a:ea typeface="맑은 고딕"/>
-                <a:cs typeface="맑은 고딕"/>
-              </a:rPr>
-              <a:t>뺀다</a:t>
-            </a:r>
-          </a:p>
-          <a:p>
-            <a:pPr algn="l" eaLnBrk="0">
-              <a:lnSpc>
-                <a:spcPct val="110000"/>
-              </a:lnSpc>
-            </a:pPr>
-            <a:r>
-              <a:rPr sz="1250" b="1">
-                <a:solidFill>
-                  <a:srgbClr val="1A6FC4"/>
-                </a:solidFill>
-                <a:latin typeface="맑은 고딕"/>
-                <a:ea typeface="맑은 고딕"/>
-                <a:cs typeface="맑은 고딕"/>
-              </a:rPr>
-              <a:t>다른 점수로 되살아나지 않는다</a:t>
-            </a:r>
-          </a:p>
-        </p:txBody>
-      </p:sp>
-      <p:sp>
-        <p:nvSpPr>
-          <p:cNvPr id="18" name="Rounded Rectangle 17"/>
-          <p:cNvSpPr/>
-          <p:nvPr/>
-        </p:nvSpPr>
-        <p:spPr>
-          <a:xfrm>
-            <a:off x="548640" y="4224527"/>
-            <a:ext cx="11094415" cy="850392"/>
+            <a:off x="548640" y="2926994"/>
+            <a:ext cx="11094415" cy="801014"/>
           </a:xfrm>
           <a:prstGeom prst="roundRect">
             <a:avLst>
@@ -21844,14 +21756,14 @@
       </p:sp>
       <p:sp>
         <p:nvSpPr>
-          <p:cNvPr id="19" name="TextBox 18"/>
-          <p:cNvSpPr txBox="1"/>
-          <p:nvPr/>
-        </p:nvSpPr>
-        <p:spPr>
-          <a:xfrm>
-            <a:off x="685800" y="4192523"/>
-            <a:ext cx="2514600" cy="914400"/>
+          <p:cNvPr id="15" name="TextBox 14"/>
+          <p:cNvSpPr txBox="1"/>
+          <p:nvPr/>
+        </p:nvSpPr>
+        <p:spPr>
+          <a:xfrm>
+            <a:off x="685800" y="2894990"/>
+            <a:ext cx="2514600" cy="865022"/>
           </a:xfrm>
           <a:prstGeom prst="rect">
             <a:avLst/>
@@ -21870,27 +21782,38 @@
             <a:r>
               <a:rPr sz="1600" b="1">
                 <a:solidFill>
+                  <a:srgbClr val="1A6FC4"/>
+                </a:solidFill>
+                <a:latin typeface="맑은 고딕"/>
+                <a:ea typeface="맑은 고딕"/>
+                <a:cs typeface="맑은 고딕"/>
+              </a:rPr>
+              <a:t>제외 EXCLUDE</a:t>
+            </a:r>
+            <a:r>
+              <a:rPr sz="1600" b="1">
+                <a:solidFill>
                   <a:srgbClr val="13294B"/>
                 </a:solidFill>
                 <a:latin typeface="맑은 고딕"/>
                 <a:ea typeface="맑은 고딕"/>
                 <a:cs typeface="맑은 고딕"/>
               </a:rPr>
-              <a:t>감점 PENALTY</a:t>
-            </a:r>
-          </a:p>
-        </p:txBody>
-      </p:sp>
-      <p:sp>
-        <p:nvSpPr>
-          <p:cNvPr id="20" name="TextBox 19"/>
-          <p:cNvSpPr txBox="1"/>
-          <p:nvPr/>
-        </p:nvSpPr>
-        <p:spPr>
-          <a:xfrm>
-            <a:off x="3200400" y="4192523"/>
-            <a:ext cx="6156655" cy="914400"/>
+              <a:t> / 규정 적합성 표</a:t>
+            </a:r>
+          </a:p>
+        </p:txBody>
+      </p:sp>
+      <p:sp>
+        <p:nvSpPr>
+          <p:cNvPr id="16" name="TextBox 15"/>
+          <p:cNvSpPr txBox="1"/>
+          <p:nvPr/>
+        </p:nvSpPr>
+        <p:spPr>
+          <a:xfrm>
+            <a:off x="3200400" y="2894990"/>
+            <a:ext cx="6156655" cy="865022"/>
           </a:xfrm>
           <a:prstGeom prst="rect">
             <a:avLst/>
@@ -21915,39 +21838,21 @@
                 <a:ea typeface="맑은 고딕"/>
                 <a:cs typeface="맑은 고딕"/>
               </a:rPr>
-              <a:t>fan100_hours &gt; 24 → 팬 최대 운전 조치만 20만 원 감점</a:t>
-            </a:r>
-          </a:p>
-          <a:p>
-            <a:pPr algn="l" eaLnBrk="0">
-              <a:lnSpc>
-                <a:spcPct val="110000"/>
-              </a:lnSpc>
-            </a:pPr>
-            <a:r>
-              <a:rPr sz="1400" b="0">
-                <a:solidFill>
-                  <a:srgbClr val="1F2A3A"/>
-                </a:solidFill>
-                <a:latin typeface="맑은 고딕"/>
-                <a:ea typeface="맑은 고딕"/>
-                <a:cs typeface="맑은 고딕"/>
-              </a:rPr>
-              <a:t>적용 대상: SOP-COOL-11 · 12 (HM-8.8)</a:t>
-            </a:r>
-          </a:p>
-        </p:txBody>
-      </p:sp>
-      <p:sp>
-        <p:nvSpPr>
-          <p:cNvPr id="21" name="TextBox 20"/>
-          <p:cNvSpPr txBox="1"/>
-          <p:nvPr/>
-        </p:nvSpPr>
-        <p:spPr>
-          <a:xfrm>
-            <a:off x="9448495" y="4192523"/>
-            <a:ext cx="2103120" cy="914400"/>
+              <a:t>plc_mode != 'REMOTE_AUTO' → SOP-COOL-11 · 12 · 13 (HM-8.8)</a:t>
+            </a:r>
+          </a:p>
+        </p:txBody>
+      </p:sp>
+      <p:sp>
+        <p:nvSpPr>
+          <p:cNvPr id="17" name="TextBox 16"/>
+          <p:cNvSpPr txBox="1"/>
+          <p:nvPr/>
+        </p:nvSpPr>
+        <p:spPr>
+          <a:xfrm>
+            <a:off x="9448495" y="2894990"/>
+            <a:ext cx="2103120" cy="865022"/>
           </a:xfrm>
           <a:prstGeom prst="rect">
             <a:avLst/>
@@ -21972,21 +21877,39 @@
                 <a:ea typeface="맑은 고딕"/>
                 <a:cs typeface="맑은 고딕"/>
               </a:rPr>
-              <a:t>남기고 깎는다</a:t>
-            </a:r>
-          </a:p>
-        </p:txBody>
-      </p:sp>
-      <p:sp>
-        <p:nvSpPr>
-          <p:cNvPr id="22" name="Rounded Rectangle 21"/>
+              <a:t>뺀다</a:t>
+            </a:r>
+          </a:p>
+          <a:p>
+            <a:pPr algn="l" eaLnBrk="0">
+              <a:lnSpc>
+                <a:spcPct val="110000"/>
+              </a:lnSpc>
+            </a:pPr>
+            <a:r>
+              <a:rPr sz="1250" b="1">
+                <a:solidFill>
+                  <a:srgbClr val="556175"/>
+                </a:solidFill>
+                <a:latin typeface="맑은 고딕"/>
+                <a:ea typeface="맑은 고딕"/>
+                <a:cs typeface="맑은 고딕"/>
+              </a:rPr>
+              <a:t>다른 점수로 되살아나지 않는다</a:t>
+            </a:r>
+          </a:p>
+        </p:txBody>
+      </p:sp>
+      <p:sp>
+        <p:nvSpPr>
+          <p:cNvPr id="18" name="Rounded Rectangle 17"/>
           <p:cNvSpPr/>
           <p:nvPr/>
         </p:nvSpPr>
         <p:spPr>
           <a:xfrm>
-            <a:off x="548640" y="5138927"/>
-            <a:ext cx="11094415" cy="850392"/>
+            <a:off x="548640" y="3792016"/>
+            <a:ext cx="11094415" cy="801014"/>
           </a:xfrm>
           <a:prstGeom prst="roundRect">
             <a:avLst>
@@ -22010,14 +21933,180 @@
       </p:sp>
       <p:sp>
         <p:nvSpPr>
+          <p:cNvPr id="19" name="TextBox 18"/>
+          <p:cNvSpPr txBox="1"/>
+          <p:nvPr/>
+        </p:nvSpPr>
+        <p:spPr>
+          <a:xfrm>
+            <a:off x="685800" y="3760012"/>
+            <a:ext cx="2514600" cy="865022"/>
+          </a:xfrm>
+          <a:prstGeom prst="rect">
+            <a:avLst/>
+          </a:prstGeom>
+          <a:noFill/>
+        </p:spPr>
+        <p:txBody>
+          <a:bodyPr wrap="square" anchor="ctr"/>
+          <a:lstStyle/>
+          <a:p>
+            <a:pPr algn="l" eaLnBrk="0">
+              <a:lnSpc>
+                <a:spcPct val="110000"/>
+              </a:lnSpc>
+            </a:pPr>
+            <a:r>
+              <a:rPr sz="1600" b="1">
+                <a:solidFill>
+                  <a:srgbClr val="13294B"/>
+                </a:solidFill>
+                <a:latin typeface="맑은 고딕"/>
+                <a:ea typeface="맑은 고딕"/>
+                <a:cs typeface="맑은 고딕"/>
+              </a:rPr>
+              <a:t>감점 PENALTY / 규정 적합성 표</a:t>
+            </a:r>
+          </a:p>
+        </p:txBody>
+      </p:sp>
+      <p:sp>
+        <p:nvSpPr>
+          <p:cNvPr id="20" name="TextBox 19"/>
+          <p:cNvSpPr txBox="1"/>
+          <p:nvPr/>
+        </p:nvSpPr>
+        <p:spPr>
+          <a:xfrm>
+            <a:off x="3200400" y="3760012"/>
+            <a:ext cx="6156655" cy="865022"/>
+          </a:xfrm>
+          <a:prstGeom prst="rect">
+            <a:avLst/>
+          </a:prstGeom>
+          <a:noFill/>
+        </p:spPr>
+        <p:txBody>
+          <a:bodyPr wrap="square" anchor="ctr"/>
+          <a:lstStyle/>
+          <a:p>
+            <a:pPr algn="l" eaLnBrk="0">
+              <a:lnSpc>
+                <a:spcPct val="110000"/>
+              </a:lnSpc>
+            </a:pPr>
+            <a:r>
+              <a:rPr sz="1400" b="0">
+                <a:solidFill>
+                  <a:srgbClr val="1F2A3A"/>
+                </a:solidFill>
+                <a:latin typeface="맑은 고딕"/>
+                <a:ea typeface="맑은 고딕"/>
+                <a:cs typeface="맑은 고딕"/>
+              </a:rPr>
+              <a:t>fan100_hours &gt; 24 → 팬 최대 운전 조치만 20만 원 감점</a:t>
+            </a:r>
+          </a:p>
+          <a:p>
+            <a:pPr algn="l" eaLnBrk="0">
+              <a:lnSpc>
+                <a:spcPct val="110000"/>
+              </a:lnSpc>
+            </a:pPr>
+            <a:r>
+              <a:rPr sz="1400" b="0">
+                <a:solidFill>
+                  <a:srgbClr val="1F2A3A"/>
+                </a:solidFill>
+                <a:latin typeface="맑은 고딕"/>
+                <a:ea typeface="맑은 고딕"/>
+                <a:cs typeface="맑은 고딕"/>
+              </a:rPr>
+              <a:t>적용 대상: SOP-COOL-11 · 12 (HM-8.8)</a:t>
+            </a:r>
+          </a:p>
+        </p:txBody>
+      </p:sp>
+      <p:sp>
+        <p:nvSpPr>
+          <p:cNvPr id="21" name="TextBox 20"/>
+          <p:cNvSpPr txBox="1"/>
+          <p:nvPr/>
+        </p:nvSpPr>
+        <p:spPr>
+          <a:xfrm>
+            <a:off x="9448495" y="3760012"/>
+            <a:ext cx="2103120" cy="865022"/>
+          </a:xfrm>
+          <a:prstGeom prst="rect">
+            <a:avLst/>
+          </a:prstGeom>
+          <a:noFill/>
+        </p:spPr>
+        <p:txBody>
+          <a:bodyPr wrap="square" anchor="ctr"/>
+          <a:lstStyle/>
+          <a:p>
+            <a:pPr algn="l" eaLnBrk="0">
+              <a:lnSpc>
+                <a:spcPct val="110000"/>
+              </a:lnSpc>
+            </a:pPr>
+            <a:r>
+              <a:rPr sz="1250" b="1">
+                <a:solidFill>
+                  <a:srgbClr val="556175"/>
+                </a:solidFill>
+                <a:latin typeface="맑은 고딕"/>
+                <a:ea typeface="맑은 고딕"/>
+                <a:cs typeface="맑은 고딕"/>
+              </a:rPr>
+              <a:t>남기고 깎는다</a:t>
+            </a:r>
+          </a:p>
+        </p:txBody>
+      </p:sp>
+      <p:sp>
+        <p:nvSpPr>
+          <p:cNvPr id="22" name="Rounded Rectangle 21"/>
+          <p:cNvSpPr/>
+          <p:nvPr/>
+        </p:nvSpPr>
+        <p:spPr>
+          <a:xfrm>
+            <a:off x="548640" y="4657039"/>
+            <a:ext cx="11094415" cy="801014"/>
+          </a:xfrm>
+          <a:prstGeom prst="roundRect">
+            <a:avLst>
+              <a:gd name="adj" fmla="val 8000"/>
+            </a:avLst>
+          </a:prstGeom>
+          <a:solidFill>
+            <a:srgbClr val="F3F6F9"/>
+          </a:solidFill>
+          <a:ln>
+            <a:noFill/>
+          </a:ln>
+        </p:spPr>
+        <p:txBody>
+          <a:bodyPr rtlCol="0" anchor="ctr"/>
+          <a:lstStyle/>
+          <a:p>
+            <a:pPr algn="ctr"/>
+          </a:p>
+        </p:txBody>
+      </p:sp>
+      <p:sp>
+        <p:nvSpPr>
           <p:cNvPr id="23" name="TextBox 22"/>
           <p:cNvSpPr txBox="1"/>
           <p:nvPr/>
         </p:nvSpPr>
         <p:spPr>
           <a:xfrm>
-            <a:off x="685800" y="5106923"/>
-            <a:ext cx="2514600" cy="914400"/>
+            <a:off x="685800" y="4625035"/>
+            <a:ext cx="2514600" cy="865022"/>
           </a:xfrm>
           <a:prstGeom prst="rect">
             <a:avLst/>
@@ -22042,7 +22131,7 @@
                 <a:ea typeface="맑은 고딕"/>
                 <a:cs typeface="맑은 고딕"/>
               </a:rPr>
-              <a:t>경고 WARN</a:t>
+              <a:t>경고 WARN / 규정 적합성 표</a:t>
             </a:r>
           </a:p>
         </p:txBody>
@@ -22055,8 +22144,8 @@
         </p:nvSpPr>
         <p:spPr>
           <a:xfrm>
-            <a:off x="3200400" y="5106923"/>
-            <a:ext cx="6156655" cy="914400"/>
+            <a:off x="3200400" y="4625035"/>
+            <a:ext cx="6156655" cy="865022"/>
           </a:xfrm>
           <a:prstGeom prst="rect">
             <a:avLst/>
@@ -22112,8 +22201,8 @@
         </p:nvSpPr>
         <p:spPr>
           <a:xfrm>
-            <a:off x="9448495" y="5106923"/>
-            <a:ext cx="2103120" cy="914400"/>
+            <a:off x="9448495" y="4625035"/>
+            <a:ext cx="2103120" cy="865022"/>
           </a:xfrm>
           <a:prstGeom prst="rect">
             <a:avLst/>
@@ -22139,6 +22228,154 @@
                 <a:cs typeface="맑은 고딕"/>
               </a:rPr>
               <a:t>남기고 알린다</a:t>
+            </a:r>
+          </a:p>
+        </p:txBody>
+      </p:sp>
+      <p:sp>
+        <p:nvSpPr>
+          <p:cNvPr id="26" name="Rounded Rectangle 25"/>
+          <p:cNvSpPr/>
+          <p:nvPr/>
+        </p:nvSpPr>
+        <p:spPr>
+          <a:xfrm>
+            <a:off x="548640" y="5522061"/>
+            <a:ext cx="11094415" cy="801014"/>
+          </a:xfrm>
+          <a:prstGeom prst="roundRect">
+            <a:avLst>
+              <a:gd name="adj" fmla="val 8000"/>
+            </a:avLst>
+          </a:prstGeom>
+          <a:solidFill>
+            <a:srgbClr val="F3F6F9"/>
+          </a:solidFill>
+          <a:ln>
+            <a:noFill/>
+          </a:ln>
+        </p:spPr>
+        <p:txBody>
+          <a:bodyPr rtlCol="0" anchor="ctr"/>
+          <a:lstStyle/>
+          <a:p>
+            <a:pPr algn="ctr"/>
+          </a:p>
+        </p:txBody>
+      </p:sp>
+      <p:sp>
+        <p:nvSpPr>
+          <p:cNvPr id="27" name="TextBox 26"/>
+          <p:cNvSpPr txBox="1"/>
+          <p:nvPr/>
+        </p:nvSpPr>
+        <p:spPr>
+          <a:xfrm>
+            <a:off x="685800" y="5490057"/>
+            <a:ext cx="2514600" cy="865022"/>
+          </a:xfrm>
+          <a:prstGeom prst="rect">
+            <a:avLst/>
+          </a:prstGeom>
+          <a:noFill/>
+        </p:spPr>
+        <p:txBody>
+          <a:bodyPr wrap="square" anchor="ctr"/>
+          <a:lstStyle/>
+          <a:p>
+            <a:pPr algn="l" eaLnBrk="0">
+              <a:lnSpc>
+                <a:spcPct val="110000"/>
+              </a:lnSpc>
+            </a:pPr>
+            <a:r>
+              <a:rPr sz="1600" b="1">
+                <a:solidFill>
+                  <a:srgbClr val="13294B"/>
+                </a:solidFill>
+                <a:latin typeface="맑은 고딕"/>
+                <a:ea typeface="맑은 고딕"/>
+                <a:cs typeface="맑은 고딕"/>
+              </a:rPr>
+              <a:t>순위 RANK / 순위 결정표</a:t>
+            </a:r>
+          </a:p>
+        </p:txBody>
+      </p:sp>
+      <p:sp>
+        <p:nvSpPr>
+          <p:cNvPr id="28" name="TextBox 27"/>
+          <p:cNvSpPr txBox="1"/>
+          <p:nvPr/>
+        </p:nvSpPr>
+        <p:spPr>
+          <a:xfrm>
+            <a:off x="3200400" y="5490057"/>
+            <a:ext cx="6156655" cy="865022"/>
+          </a:xfrm>
+          <a:prstGeom prst="rect">
+            <a:avLst/>
+          </a:prstGeom>
+          <a:noFill/>
+        </p:spPr>
+        <p:txBody>
+          <a:bodyPr wrap="square" anchor="ctr"/>
+          <a:lstStyle/>
+          <a:p>
+            <a:pPr algn="l" eaLnBrk="0">
+              <a:lnSpc>
+                <a:spcPct val="110000"/>
+              </a:lnSpc>
+            </a:pPr>
+            <a:r>
+              <a:rPr sz="1400" b="0">
+                <a:solidFill>
+                  <a:srgbClr val="1F2A3A"/>
+                </a:solidFill>
+                <a:latin typeface="맑은 고딕"/>
+                <a:ea typeface="맑은 고딕"/>
+                <a:cs typeface="맑은 고딕"/>
+              </a:rPr>
+              <a:t>남은 후보에 점수를 매길 식의 묶음, 순위 정책을 담는다</a:t>
+            </a:r>
+          </a:p>
+        </p:txBody>
+      </p:sp>
+      <p:sp>
+        <p:nvSpPr>
+          <p:cNvPr id="29" name="TextBox 28"/>
+          <p:cNvSpPr txBox="1"/>
+          <p:nvPr/>
+        </p:nvSpPr>
+        <p:spPr>
+          <a:xfrm>
+            <a:off x="9448495" y="5490057"/>
+            <a:ext cx="2103120" cy="865022"/>
+          </a:xfrm>
+          <a:prstGeom prst="rect">
+            <a:avLst/>
+          </a:prstGeom>
+          <a:noFill/>
+        </p:spPr>
+        <p:txBody>
+          <a:bodyPr wrap="square" anchor="ctr"/>
+          <a:lstStyle/>
+          <a:p>
+            <a:pPr algn="l" eaLnBrk="0">
+              <a:lnSpc>
+                <a:spcPct val="110000"/>
+              </a:lnSpc>
+            </a:pPr>
+            <a:r>
+              <a:rPr sz="1250" b="1">
+                <a:solidFill>
+                  <a:srgbClr val="556175"/>
+                </a:solidFill>
+                <a:latin typeface="맑은 고딕"/>
+                <a:ea typeface="맑은 고딕"/>
+                <a:cs typeface="맑은 고딕"/>
+              </a:rPr>
+              <a:t>점수로 견준다</a:t>
             </a:r>
           </a:p>
         </p:txBody>
@@ -26741,6 +26978,24 @@
               <a:t>원격 제어 후보만 있는데 운전 모드를 모른다</a:t>
             </a:r>
           </a:p>
+          <a:p>
+            <a:pPr algn="l" eaLnBrk="0">
+              <a:lnSpc>
+                <a:spcPct val="110000"/>
+              </a:lnSpc>
+            </a:pPr>
+            <a:r>
+              <a:rPr sz="1400" b="0">
+                <a:solidFill>
+                  <a:srgbClr val="1F2A3A"/>
+                </a:solidFill>
+                <a:latin typeface="맑은 고딕"/>
+                <a:ea typeface="맑은 고딕"/>
+                <a:cs typeface="맑은 고딕"/>
+              </a:rPr>
+              <a:t>설비가 보호 정지(TRIP): 리셋 외 후보 제외</a:t>
+            </a:r>
+          </a:p>
         </p:txBody>
       </p:sp>
       <p:sp>
@@ -31269,7 +31524,7 @@
                 <a:ea typeface="맑은 고딕"/>
                 <a:cs typeface="맑은 고딕"/>
               </a:rPr>
-              <a:t>HYD는 DMN의 결정 · 입력 · 규칙 · 처리 정책을 그래프에 저장하고, 그 정의에 맞는 평가 함수로 판정한다.</a:t>
+              <a:t>DMN의 개념을 쓴다고 표준 모델을 그대로 실행하는 것은 아니어서, 조건 식과 실행 주체를 표준과 견준다.</a:t>
             </a:r>
           </a:p>
         </p:txBody>
@@ -31350,7 +31605,7 @@
         </p:nvSpPr>
         <p:spPr>
           <a:xfrm>
-            <a:off x="548640" y="1627632"/>
+            <a:off x="548640" y="2418587"/>
             <a:ext cx="11094415" cy="347472"/>
           </a:xfrm>
           <a:prstGeom prst="roundRect">
@@ -31381,7 +31636,7 @@
         </p:nvSpPr>
         <p:spPr>
           <a:xfrm>
-            <a:off x="685800" y="1627632"/>
+            <a:off x="685800" y="2418587"/>
             <a:ext cx="2514600" cy="347472"/>
           </a:xfrm>
           <a:prstGeom prst="rect">
@@ -31420,7 +31675,7 @@
         </p:nvSpPr>
         <p:spPr>
           <a:xfrm>
-            <a:off x="3200400" y="1627632"/>
+            <a:off x="3200400" y="2418587"/>
             <a:ext cx="6248095" cy="347472"/>
           </a:xfrm>
           <a:prstGeom prst="rect">
@@ -31459,7 +31714,7 @@
         </p:nvSpPr>
         <p:spPr>
           <a:xfrm>
-            <a:off x="9448495" y="1627632"/>
+            <a:off x="9448495" y="2418587"/>
             <a:ext cx="2194560" cy="347472"/>
           </a:xfrm>
           <a:prstGeom prst="rect">
@@ -31498,8 +31753,8 @@
         </p:nvSpPr>
         <p:spPr>
           <a:xfrm>
-            <a:off x="548640" y="2061972"/>
-            <a:ext cx="11094415" cy="801014"/>
+            <a:off x="548640" y="2852927"/>
+            <a:ext cx="11094415" cy="850392"/>
           </a:xfrm>
           <a:prstGeom prst="roundRect">
             <a:avLst>
@@ -31529,8 +31784,8 @@
         </p:nvSpPr>
         <p:spPr>
           <a:xfrm>
-            <a:off x="685800" y="2029968"/>
-            <a:ext cx="2514600" cy="865022"/>
+            <a:off x="685800" y="2820923"/>
+            <a:ext cx="2514600" cy="914400"/>
           </a:xfrm>
           <a:prstGeom prst="rect">
             <a:avLst/>
@@ -31555,7 +31810,7 @@
                 <a:ea typeface="맑은 고딕"/>
                 <a:cs typeface="맑은 고딕"/>
               </a:rPr>
-              <a:t>결정과 규칙</a:t>
+              <a:t>조건 식</a:t>
             </a:r>
           </a:p>
         </p:txBody>
@@ -31568,8 +31823,8 @@
         </p:nvSpPr>
         <p:spPr>
           <a:xfrm>
-            <a:off x="3200400" y="2029968"/>
-            <a:ext cx="6156655" cy="865022"/>
+            <a:off x="3200400" y="2820923"/>
+            <a:ext cx="6156655" cy="914400"/>
           </a:xfrm>
           <a:prstGeom prst="rect">
             <a:avLst/>
@@ -31594,7 +31849,7 @@
                 <a:ea typeface="맑은 고딕"/>
                 <a:cs typeface="맑은 고딕"/>
               </a:rPr>
-              <a:t>Decision · DecisionTable · Rule</a:t>
+              <a:t>FEEL(Friendly Enough Expression Language)</a:t>
             </a:r>
           </a:p>
           <a:p>
@@ -31612,7 +31867,7 @@
                 <a:ea typeface="맑은 고딕"/>
                 <a:cs typeface="맑은 고딕"/>
               </a:rPr>
-              <a:t>업무 판단을 모델과 표로 정의한다</a:t>
+              <a:t>범위 · 목록 등을 식 하나로 적는다</a:t>
             </a:r>
           </a:p>
         </p:txBody>
@@ -31625,8 +31880,8 @@
         </p:nvSpPr>
         <p:spPr>
           <a:xfrm>
-            <a:off x="9448495" y="2029968"/>
-            <a:ext cx="2103120" cy="865022"/>
+            <a:off x="9448495" y="2820923"/>
+            <a:ext cx="2103120" cy="914400"/>
           </a:xfrm>
           <a:prstGeom prst="rect">
             <a:avLst/>
@@ -31651,7 +31906,25 @@
                 <a:ea typeface="맑은 고딕"/>
                 <a:cs typeface="맑은 고딕"/>
               </a:rPr>
-              <a:t>노드와 관계로 저장</a:t>
+              <a:t>TESTS의 연산자 · 기준값</a:t>
+            </a:r>
+          </a:p>
+          <a:p>
+            <a:pPr algn="l" eaLnBrk="0">
+              <a:lnSpc>
+                <a:spcPct val="110000"/>
+              </a:lnSpc>
+            </a:pPr>
+            <a:r>
+              <a:rPr sz="1250" b="1">
+                <a:solidFill>
+                  <a:srgbClr val="556175"/>
+                </a:solidFill>
+                <a:latin typeface="맑은 고딕"/>
+                <a:ea typeface="맑은 고딕"/>
+                <a:cs typeface="맑은 고딕"/>
+              </a:rPr>
+              <a:t>한 행의 검사는 AND</a:t>
             </a:r>
           </a:p>
         </p:txBody>
@@ -31664,8 +31937,174 @@
         </p:nvSpPr>
         <p:spPr>
           <a:xfrm>
-            <a:off x="548640" y="2926994"/>
-            <a:ext cx="11094415" cy="801014"/>
+            <a:off x="548640" y="3767327"/>
+            <a:ext cx="11094415" cy="850392"/>
+          </a:xfrm>
+          <a:prstGeom prst="roundRect">
+            <a:avLst>
+              <a:gd name="adj" fmla="val 8000"/>
+            </a:avLst>
+          </a:prstGeom>
+          <a:solidFill>
+            <a:srgbClr val="E7F3FD"/>
+          </a:solidFill>
+          <a:ln>
+            <a:noFill/>
+          </a:ln>
+        </p:spPr>
+        <p:txBody>
+          <a:bodyPr rtlCol="0" anchor="ctr"/>
+          <a:lstStyle/>
+          <a:p>
+            <a:pPr algn="ctr"/>
+          </a:p>
+        </p:txBody>
+      </p:sp>
+      <p:sp>
+        <p:nvSpPr>
+          <p:cNvPr id="15" name="TextBox 14"/>
+          <p:cNvSpPr txBox="1"/>
+          <p:nvPr/>
+        </p:nvSpPr>
+        <p:spPr>
+          <a:xfrm>
+            <a:off x="685800" y="3735323"/>
+            <a:ext cx="2514600" cy="914400"/>
+          </a:xfrm>
+          <a:prstGeom prst="rect">
+            <a:avLst/>
+          </a:prstGeom>
+          <a:noFill/>
+        </p:spPr>
+        <p:txBody>
+          <a:bodyPr wrap="square" anchor="ctr"/>
+          <a:lstStyle/>
+          <a:p>
+            <a:pPr algn="l" eaLnBrk="0">
+              <a:lnSpc>
+                <a:spcPct val="110000"/>
+              </a:lnSpc>
+            </a:pPr>
+            <a:r>
+              <a:rPr sz="1600" b="1">
+                <a:solidFill>
+                  <a:srgbClr val="13294B"/>
+                </a:solidFill>
+                <a:latin typeface="맑은 고딕"/>
+                <a:ea typeface="맑은 고딕"/>
+                <a:cs typeface="맑은 고딕"/>
+              </a:rPr>
+              <a:t>실행 주체</a:t>
+            </a:r>
+          </a:p>
+        </p:txBody>
+      </p:sp>
+      <p:sp>
+        <p:nvSpPr>
+          <p:cNvPr id="16" name="TextBox 15"/>
+          <p:cNvSpPr txBox="1"/>
+          <p:nvPr/>
+        </p:nvSpPr>
+        <p:spPr>
+          <a:xfrm>
+            <a:off x="3200400" y="3735323"/>
+            <a:ext cx="6156655" cy="914400"/>
+          </a:xfrm>
+          <a:prstGeom prst="rect">
+            <a:avLst/>
+          </a:prstGeom>
+          <a:noFill/>
+        </p:spPr>
+        <p:txBody>
+          <a:bodyPr wrap="square" anchor="ctr"/>
+          <a:lstStyle/>
+          <a:p>
+            <a:pPr algn="l" eaLnBrk="0">
+              <a:lnSpc>
+                <a:spcPct val="110000"/>
+              </a:lnSpc>
+            </a:pPr>
+            <a:r>
+              <a:rPr sz="1400" b="0">
+                <a:solidFill>
+                  <a:srgbClr val="1F2A3A"/>
+                </a:solidFill>
+                <a:latin typeface="맑은 고딕"/>
+                <a:ea typeface="맑은 고딕"/>
+                <a:cs typeface="맑은 고딕"/>
+              </a:rPr>
+              <a:t>표준 DMN 모델 파일을 읽는 엔진</a:t>
+            </a:r>
+          </a:p>
+        </p:txBody>
+      </p:sp>
+      <p:sp>
+        <p:nvSpPr>
+          <p:cNvPr id="17" name="TextBox 16"/>
+          <p:cNvSpPr txBox="1"/>
+          <p:nvPr/>
+        </p:nvSpPr>
+        <p:spPr>
+          <a:xfrm>
+            <a:off x="9448495" y="3735323"/>
+            <a:ext cx="2103120" cy="914400"/>
+          </a:xfrm>
+          <a:prstGeom prst="rect">
+            <a:avLst/>
+          </a:prstGeom>
+          <a:noFill/>
+        </p:spPr>
+        <p:txBody>
+          <a:bodyPr wrap="square" anchor="ctr"/>
+          <a:lstStyle/>
+          <a:p>
+            <a:pPr algn="l" eaLnBrk="0">
+              <a:lnSpc>
+                <a:spcPct val="110000"/>
+              </a:lnSpc>
+            </a:pPr>
+            <a:r>
+              <a:rPr sz="1250" b="1">
+                <a:solidFill>
+                  <a:srgbClr val="1A6FC4"/>
+                </a:solidFill>
+                <a:latin typeface="맑은 고딕"/>
+                <a:ea typeface="맑은 고딕"/>
+                <a:cs typeface="맑은 고딕"/>
+              </a:rPr>
+              <a:t>그래프의 규칙을</a:t>
+            </a:r>
+          </a:p>
+          <a:p>
+            <a:pPr algn="l" eaLnBrk="0">
+              <a:lnSpc>
+                <a:spcPct val="110000"/>
+              </a:lnSpc>
+            </a:pPr>
+            <a:r>
+              <a:rPr sz="1250" b="1">
+                <a:solidFill>
+                  <a:srgbClr val="1A6FC4"/>
+                </a:solidFill>
+                <a:latin typeface="맑은 고딕"/>
+                <a:ea typeface="맑은 고딕"/>
+                <a:cs typeface="맑은 고딕"/>
+              </a:rPr>
+              <a:t>평가 함수가 읽는다</a:t>
+            </a:r>
+          </a:p>
+        </p:txBody>
+      </p:sp>
+      <p:sp>
+        <p:nvSpPr>
+          <p:cNvPr id="18" name="Rounded Rectangle 17"/>
+          <p:cNvSpPr/>
+          <p:nvPr/>
+        </p:nvSpPr>
+        <p:spPr>
+          <a:xfrm>
+            <a:off x="548640" y="4681727"/>
+            <a:ext cx="11094415" cy="850392"/>
           </a:xfrm>
           <a:prstGeom prst="roundRect">
             <a:avLst>
@@ -31689,14 +32128,14 @@
       </p:sp>
       <p:sp>
         <p:nvSpPr>
-          <p:cNvPr id="15" name="TextBox 14"/>
-          <p:cNvSpPr txBox="1"/>
-          <p:nvPr/>
-        </p:nvSpPr>
-        <p:spPr>
-          <a:xfrm>
-            <a:off x="685800" y="2894990"/>
-            <a:ext cx="2514600" cy="865022"/>
+          <p:cNvPr id="19" name="TextBox 18"/>
+          <p:cNvSpPr txBox="1"/>
+          <p:nvPr/>
+        </p:nvSpPr>
+        <p:spPr>
+          <a:xfrm>
+            <a:off x="685800" y="4649723"/>
+            <a:ext cx="2514600" cy="914400"/>
           </a:xfrm>
           <a:prstGeom prst="rect">
             <a:avLst/>
@@ -31721,21 +32160,21 @@
                 <a:ea typeface="맑은 고딕"/>
                 <a:cs typeface="맑은 고딕"/>
               </a:rPr>
-              <a:t>조건</a:t>
-            </a:r>
-          </a:p>
-        </p:txBody>
-      </p:sp>
-      <p:sp>
-        <p:nvSpPr>
-          <p:cNvPr id="16" name="TextBox 15"/>
-          <p:cNvSpPr txBox="1"/>
-          <p:nvPr/>
-        </p:nvSpPr>
-        <p:spPr>
-          <a:xfrm>
-            <a:off x="3200400" y="2894990"/>
-            <a:ext cx="6156655" cy="865022"/>
+              <a:t>선언과 평가의 일치</a:t>
+            </a:r>
+          </a:p>
+        </p:txBody>
+      </p:sp>
+      <p:sp>
+        <p:nvSpPr>
+          <p:cNvPr id="20" name="TextBox 19"/>
+          <p:cNvSpPr txBox="1"/>
+          <p:nvPr/>
+        </p:nvSpPr>
+        <p:spPr>
+          <a:xfrm>
+            <a:off x="3200400" y="4649723"/>
+            <a:ext cx="6156655" cy="914400"/>
           </a:xfrm>
           <a:prstGeom prst="rect">
             <a:avLst/>
@@ -31760,173 +32199,7 @@
                 <a:ea typeface="맑은 고딕"/>
                 <a:cs typeface="맑은 고딕"/>
               </a:rPr>
-              <a:t>FEEL 식 언어로 입력 조건을 표현한다</a:t>
-            </a:r>
-          </a:p>
-        </p:txBody>
-      </p:sp>
-      <p:sp>
-        <p:nvSpPr>
-          <p:cNvPr id="17" name="TextBox 16"/>
-          <p:cNvSpPr txBox="1"/>
-          <p:nvPr/>
-        </p:nvSpPr>
-        <p:spPr>
-          <a:xfrm>
-            <a:off x="9448495" y="2894990"/>
-            <a:ext cx="2103120" cy="865022"/>
-          </a:xfrm>
-          <a:prstGeom prst="rect">
-            <a:avLst/>
-          </a:prstGeom>
-          <a:noFill/>
-        </p:spPr>
-        <p:txBody>
-          <a:bodyPr wrap="square" anchor="ctr"/>
-          <a:lstStyle/>
-          <a:p>
-            <a:pPr algn="l" eaLnBrk="0">
-              <a:lnSpc>
-                <a:spcPct val="110000"/>
-              </a:lnSpc>
-            </a:pPr>
-            <a:r>
-              <a:rPr sz="1250" b="1">
-                <a:solidFill>
-                  <a:srgbClr val="556175"/>
-                </a:solidFill>
-                <a:latin typeface="맑은 고딕"/>
-                <a:ea typeface="맑은 고딕"/>
-                <a:cs typeface="맑은 고딕"/>
-              </a:rPr>
-              <a:t>TESTS의 연산자 · 값</a:t>
-            </a:r>
-          </a:p>
-          <a:p>
-            <a:pPr algn="l" eaLnBrk="0">
-              <a:lnSpc>
-                <a:spcPct val="110000"/>
-              </a:lnSpc>
-            </a:pPr>
-            <a:r>
-              <a:rPr sz="1250" b="1">
-                <a:solidFill>
-                  <a:srgbClr val="556175"/>
-                </a:solidFill>
-                <a:latin typeface="맑은 고딕"/>
-                <a:ea typeface="맑은 고딕"/>
-                <a:cs typeface="맑은 고딕"/>
-              </a:rPr>
-              <a:t>한 행의 검사는 AND</a:t>
-            </a:r>
-          </a:p>
-        </p:txBody>
-      </p:sp>
-      <p:sp>
-        <p:nvSpPr>
-          <p:cNvPr id="18" name="Rounded Rectangle 17"/>
-          <p:cNvSpPr/>
-          <p:nvPr/>
-        </p:nvSpPr>
-        <p:spPr>
-          <a:xfrm>
-            <a:off x="548640" y="3792016"/>
-            <a:ext cx="11094415" cy="801014"/>
-          </a:xfrm>
-          <a:prstGeom prst="roundRect">
-            <a:avLst>
-              <a:gd name="adj" fmla="val 8000"/>
-            </a:avLst>
-          </a:prstGeom>
-          <a:solidFill>
-            <a:srgbClr val="F3F6F9"/>
-          </a:solidFill>
-          <a:ln>
-            <a:noFill/>
-          </a:ln>
-        </p:spPr>
-        <p:txBody>
-          <a:bodyPr rtlCol="0" anchor="ctr"/>
-          <a:lstStyle/>
-          <a:p>
-            <a:pPr algn="ctr"/>
-          </a:p>
-        </p:txBody>
-      </p:sp>
-      <p:sp>
-        <p:nvSpPr>
-          <p:cNvPr id="19" name="TextBox 18"/>
-          <p:cNvSpPr txBox="1"/>
-          <p:nvPr/>
-        </p:nvSpPr>
-        <p:spPr>
-          <a:xfrm>
-            <a:off x="685800" y="3760012"/>
-            <a:ext cx="2514600" cy="865022"/>
-          </a:xfrm>
-          <a:prstGeom prst="rect">
-            <a:avLst/>
-          </a:prstGeom>
-          <a:noFill/>
-        </p:spPr>
-        <p:txBody>
-          <a:bodyPr wrap="square" anchor="ctr"/>
-          <a:lstStyle/>
-          <a:p>
-            <a:pPr algn="l" eaLnBrk="0">
-              <a:lnSpc>
-                <a:spcPct val="110000"/>
-              </a:lnSpc>
-            </a:pPr>
-            <a:r>
-              <a:rPr sz="1600" b="1">
-                <a:solidFill>
-                  <a:srgbClr val="13294B"/>
-                </a:solidFill>
-                <a:latin typeface="맑은 고딕"/>
-                <a:ea typeface="맑은 고딕"/>
-                <a:cs typeface="맑은 고딕"/>
-              </a:rPr>
-              <a:t>처리 정책</a:t>
-            </a:r>
-          </a:p>
-        </p:txBody>
-      </p:sp>
-      <p:sp>
-        <p:nvSpPr>
-          <p:cNvPr id="20" name="TextBox 19"/>
-          <p:cNvSpPr txBox="1"/>
-          <p:nvPr/>
-        </p:nvSpPr>
-        <p:spPr>
-          <a:xfrm>
-            <a:off x="3200400" y="3760012"/>
-            <a:ext cx="6156655" cy="865022"/>
-          </a:xfrm>
-          <a:prstGeom prst="rect">
-            <a:avLst/>
-          </a:prstGeom>
-          <a:noFill/>
-        </p:spPr>
-        <p:txBody>
-          <a:bodyPr wrap="square" anchor="ctr"/>
-          <a:lstStyle/>
-          <a:p>
-            <a:pPr algn="l" eaLnBrk="0">
-              <a:lnSpc>
-                <a:spcPct val="110000"/>
-              </a:lnSpc>
-            </a:pPr>
-            <a:r>
-              <a:rPr sz="1400" b="0">
-                <a:solidFill>
-                  <a:srgbClr val="1F2A3A"/>
-                </a:solidFill>
-                <a:latin typeface="맑은 고딕"/>
-                <a:ea typeface="맑은 고딕"/>
-                <a:cs typeface="맑은 고딕"/>
-              </a:rPr>
-              <a:t>Hit Policy로 일치 행의 처리 방식을 정한다</a:t>
+              <a:t>선언한 Hit Policy대로 결과를 해석한다</a:t>
             </a:r>
           </a:p>
         </p:txBody>
@@ -31939,340 +32212,8 @@
         </p:nvSpPr>
         <p:spPr>
           <a:xfrm>
-            <a:off x="9448495" y="3760012"/>
-            <a:ext cx="2103120" cy="865022"/>
-          </a:xfrm>
-          <a:prstGeom prst="rect">
-            <a:avLst/>
-          </a:prstGeom>
-          <a:noFill/>
-        </p:spPr>
-        <p:txBody>
-          <a:bodyPr wrap="square" anchor="ctr"/>
-          <a:lstStyle/>
-          <a:p>
-            <a:pPr algn="l" eaLnBrk="0">
-              <a:lnSpc>
-                <a:spcPct val="110000"/>
-              </a:lnSpc>
-            </a:pPr>
-            <a:r>
-              <a:rPr sz="1250" b="1">
-                <a:solidFill>
-                  <a:srgbClr val="556175"/>
-                </a:solidFill>
-                <a:latin typeface="맑은 고딕"/>
-                <a:ea typeface="맑은 고딕"/>
-                <a:cs typeface="맑은 고딕"/>
-              </a:rPr>
-              <a:t>후보 · 규정: COLLECT</a:t>
-            </a:r>
-          </a:p>
-          <a:p>
-            <a:pPr algn="l" eaLnBrk="0">
-              <a:lnSpc>
-                <a:spcPct val="110000"/>
-              </a:lnSpc>
-            </a:pPr>
-            <a:r>
-              <a:rPr sz="1250" b="1">
-                <a:solidFill>
-                  <a:srgbClr val="556175"/>
-                </a:solidFill>
-                <a:latin typeface="맑은 고딕"/>
-                <a:ea typeface="맑은 고딕"/>
-                <a:cs typeface="맑은 고딕"/>
-              </a:rPr>
-              <a:t>순위 정책: UNIQUE</a:t>
-            </a:r>
-          </a:p>
-        </p:txBody>
-      </p:sp>
-      <p:sp>
-        <p:nvSpPr>
-          <p:cNvPr id="22" name="Rounded Rectangle 21"/>
-          <p:cNvSpPr/>
-          <p:nvPr/>
-        </p:nvSpPr>
-        <p:spPr>
-          <a:xfrm>
-            <a:off x="548640" y="4657039"/>
-            <a:ext cx="11094415" cy="801014"/>
-          </a:xfrm>
-          <a:prstGeom prst="roundRect">
-            <a:avLst>
-              <a:gd name="adj" fmla="val 8000"/>
-            </a:avLst>
-          </a:prstGeom>
-          <a:solidFill>
-            <a:srgbClr val="E7F3FD"/>
-          </a:solidFill>
-          <a:ln>
-            <a:noFill/>
-          </a:ln>
-        </p:spPr>
-        <p:txBody>
-          <a:bodyPr rtlCol="0" anchor="ctr"/>
-          <a:lstStyle/>
-          <a:p>
-            <a:pPr algn="ctr"/>
-          </a:p>
-        </p:txBody>
-      </p:sp>
-      <p:sp>
-        <p:nvSpPr>
-          <p:cNvPr id="23" name="TextBox 22"/>
-          <p:cNvSpPr txBox="1"/>
-          <p:nvPr/>
-        </p:nvSpPr>
-        <p:spPr>
-          <a:xfrm>
-            <a:off x="685800" y="4625035"/>
-            <a:ext cx="2514600" cy="865022"/>
-          </a:xfrm>
-          <a:prstGeom prst="rect">
-            <a:avLst/>
-          </a:prstGeom>
-          <a:noFill/>
-        </p:spPr>
-        <p:txBody>
-          <a:bodyPr wrap="square" anchor="ctr"/>
-          <a:lstStyle/>
-          <a:p>
-            <a:pPr algn="l" eaLnBrk="0">
-              <a:lnSpc>
-                <a:spcPct val="110000"/>
-              </a:lnSpc>
-            </a:pPr>
-            <a:r>
-              <a:rPr sz="1600" b="1">
-                <a:solidFill>
-                  <a:srgbClr val="13294B"/>
-                </a:solidFill>
-                <a:latin typeface="맑은 고딕"/>
-                <a:ea typeface="맑은 고딕"/>
-                <a:cs typeface="맑은 고딕"/>
-              </a:rPr>
-              <a:t>실행</a:t>
-            </a:r>
-          </a:p>
-        </p:txBody>
-      </p:sp>
-      <p:sp>
-        <p:nvSpPr>
-          <p:cNvPr id="24" name="TextBox 23"/>
-          <p:cNvSpPr txBox="1"/>
-          <p:nvPr/>
-        </p:nvSpPr>
-        <p:spPr>
-          <a:xfrm>
-            <a:off x="3200400" y="4625035"/>
-            <a:ext cx="6156655" cy="865022"/>
-          </a:xfrm>
-          <a:prstGeom prst="rect">
-            <a:avLst/>
-          </a:prstGeom>
-          <a:noFill/>
-        </p:spPr>
-        <p:txBody>
-          <a:bodyPr wrap="square" anchor="ctr"/>
-          <a:lstStyle/>
-          <a:p>
-            <a:pPr algn="l" eaLnBrk="0">
-              <a:lnSpc>
-                <a:spcPct val="110000"/>
-              </a:lnSpc>
-            </a:pPr>
-            <a:r>
-              <a:rPr sz="1400" b="0">
-                <a:solidFill>
-                  <a:srgbClr val="1F2A3A"/>
-                </a:solidFill>
-                <a:latin typeface="맑은 고딕"/>
-                <a:ea typeface="맑은 고딕"/>
-                <a:cs typeface="맑은 고딕"/>
-              </a:rPr>
-              <a:t>표준 DMN 모델을 실행하는 엔진</a:t>
-            </a:r>
-          </a:p>
-        </p:txBody>
-      </p:sp>
-      <p:sp>
-        <p:nvSpPr>
-          <p:cNvPr id="25" name="TextBox 24"/>
-          <p:cNvSpPr txBox="1"/>
-          <p:nvPr/>
-        </p:nvSpPr>
-        <p:spPr>
-          <a:xfrm>
-            <a:off x="9448495" y="4625035"/>
-            <a:ext cx="2103120" cy="865022"/>
-          </a:xfrm>
-          <a:prstGeom prst="rect">
-            <a:avLst/>
-          </a:prstGeom>
-          <a:noFill/>
-        </p:spPr>
-        <p:txBody>
-          <a:bodyPr wrap="square" anchor="ctr"/>
-          <a:lstStyle/>
-          <a:p>
-            <a:pPr algn="l" eaLnBrk="0">
-              <a:lnSpc>
-                <a:spcPct val="110000"/>
-              </a:lnSpc>
-            </a:pPr>
-            <a:r>
-              <a:rPr sz="1250" b="1">
-                <a:solidFill>
-                  <a:srgbClr val="1A6FC4"/>
-                </a:solidFill>
-                <a:latin typeface="맑은 고딕"/>
-                <a:ea typeface="맑은 고딕"/>
-                <a:cs typeface="맑은 고딕"/>
-              </a:rPr>
-              <a:t>그래프의 규칙을</a:t>
-            </a:r>
-          </a:p>
-          <a:p>
-            <a:pPr algn="l" eaLnBrk="0">
-              <a:lnSpc>
-                <a:spcPct val="110000"/>
-              </a:lnSpc>
-            </a:pPr>
-            <a:r>
-              <a:rPr sz="1250" b="1">
-                <a:solidFill>
-                  <a:srgbClr val="1A6FC4"/>
-                </a:solidFill>
-                <a:latin typeface="맑은 고딕"/>
-                <a:ea typeface="맑은 고딕"/>
-                <a:cs typeface="맑은 고딕"/>
-              </a:rPr>
-              <a:t>평가 함수가 읽는다</a:t>
-            </a:r>
-          </a:p>
-        </p:txBody>
-      </p:sp>
-      <p:sp>
-        <p:nvSpPr>
-          <p:cNvPr id="26" name="Rounded Rectangle 25"/>
-          <p:cNvSpPr/>
-          <p:nvPr/>
-        </p:nvSpPr>
-        <p:spPr>
-          <a:xfrm>
-            <a:off x="548640" y="5522061"/>
-            <a:ext cx="11094415" cy="801014"/>
-          </a:xfrm>
-          <a:prstGeom prst="roundRect">
-            <a:avLst>
-              <a:gd name="adj" fmla="val 8000"/>
-            </a:avLst>
-          </a:prstGeom>
-          <a:solidFill>
-            <a:srgbClr val="F3F6F9"/>
-          </a:solidFill>
-          <a:ln>
-            <a:noFill/>
-          </a:ln>
-        </p:spPr>
-        <p:txBody>
-          <a:bodyPr rtlCol="0" anchor="ctr"/>
-          <a:lstStyle/>
-          <a:p>
-            <a:pPr algn="ctr"/>
-          </a:p>
-        </p:txBody>
-      </p:sp>
-      <p:sp>
-        <p:nvSpPr>
-          <p:cNvPr id="27" name="TextBox 26"/>
-          <p:cNvSpPr txBox="1"/>
-          <p:nvPr/>
-        </p:nvSpPr>
-        <p:spPr>
-          <a:xfrm>
-            <a:off x="685800" y="5490057"/>
-            <a:ext cx="2514600" cy="865022"/>
-          </a:xfrm>
-          <a:prstGeom prst="rect">
-            <a:avLst/>
-          </a:prstGeom>
-          <a:noFill/>
-        </p:spPr>
-        <p:txBody>
-          <a:bodyPr wrap="square" anchor="ctr"/>
-          <a:lstStyle/>
-          <a:p>
-            <a:pPr algn="l" eaLnBrk="0">
-              <a:lnSpc>
-                <a:spcPct val="110000"/>
-              </a:lnSpc>
-            </a:pPr>
-            <a:r>
-              <a:rPr sz="1600" b="1">
-                <a:solidFill>
-                  <a:srgbClr val="13294B"/>
-                </a:solidFill>
-                <a:latin typeface="맑은 고딕"/>
-                <a:ea typeface="맑은 고딕"/>
-                <a:cs typeface="맑은 고딕"/>
-              </a:rPr>
-              <a:t>선언과 평가의 일치</a:t>
-            </a:r>
-          </a:p>
-        </p:txBody>
-      </p:sp>
-      <p:sp>
-        <p:nvSpPr>
-          <p:cNvPr id="28" name="TextBox 27"/>
-          <p:cNvSpPr txBox="1"/>
-          <p:nvPr/>
-        </p:nvSpPr>
-        <p:spPr>
-          <a:xfrm>
-            <a:off x="3200400" y="5490057"/>
-            <a:ext cx="6156655" cy="865022"/>
-          </a:xfrm>
-          <a:prstGeom prst="rect">
-            <a:avLst/>
-          </a:prstGeom>
-          <a:noFill/>
-        </p:spPr>
-        <p:txBody>
-          <a:bodyPr wrap="square" anchor="ctr"/>
-          <a:lstStyle/>
-          <a:p>
-            <a:pPr algn="l" eaLnBrk="0">
-              <a:lnSpc>
-                <a:spcPct val="110000"/>
-              </a:lnSpc>
-            </a:pPr>
-            <a:r>
-              <a:rPr sz="1400" b="0">
-                <a:solidFill>
-                  <a:srgbClr val="1F2A3A"/>
-                </a:solidFill>
-                <a:latin typeface="맑은 고딕"/>
-                <a:ea typeface="맑은 고딕"/>
-                <a:cs typeface="맑은 고딕"/>
-              </a:rPr>
-              <a:t>정의한 정책에 따라 결과를 해석한다</a:t>
-            </a:r>
-          </a:p>
-        </p:txBody>
-      </p:sp>
-      <p:sp>
-        <p:nvSpPr>
-          <p:cNvPr id="29" name="TextBox 28"/>
-          <p:cNvSpPr txBox="1"/>
-          <p:nvPr/>
-        </p:nvSpPr>
-        <p:spPr>
-          <a:xfrm>
-            <a:off x="9448495" y="5490057"/>
-            <a:ext cx="2103120" cy="865022"/>
+            <a:off x="9448495" y="4649723"/>
+            <a:ext cx="2103120" cy="914400"/>
           </a:xfrm>
           <a:prstGeom prst="rect">
             <a:avLst/>
@@ -32494,7 +32435,7 @@
       </p:sp>
       <p:pic>
         <p:nvPicPr>
-          <p:cNvPr id="6" name="삽화:결정표_그래프.svg" descr="illust_3873825685148864893_1792037122.png"/>
+          <p:cNvPr id="6" name="삽화:결정표_그래프.svg" descr="illust_483748366752311879_1792130363.png"/>
           <p:cNvPicPr>
             <a:picLocks noChangeAspect="1"/>
           </p:cNvPicPr>
@@ -35915,7 +35856,7 @@
                 <a:ea typeface="맑은 고딕"/>
                 <a:cs typeface="맑은 고딕"/>
               </a:rPr>
-              <a:t>지체상금은 만원/월 · DOWN(작을수록 좋다)</a:t>
+              <a:t>비용 지표는 DOWN(작을수록 좋다)</a:t>
             </a:r>
           </a:p>
         </p:txBody>
@@ -36247,7 +36188,7 @@
                 <a:ea typeface="맑은 고딕"/>
                 <a:cs typeface="맑은 고딕"/>
               </a:rPr>
-              <a:t>thresholdWarn = 5 ℃</a:t>
+              <a:t>경고 기준 5 ℃</a:t>
             </a:r>
           </a:p>
           <a:p>
@@ -36265,7 +36206,7 @@
                 <a:ea typeface="맑은 고딕"/>
                 <a:cs typeface="맑은 고딕"/>
               </a:rPr>
-              <a:t>thresholdCrit = 0 ℃</a:t>
+              <a:t>위험 기준 0 ℃</a:t>
             </a:r>
           </a:p>
         </p:txBody>
@@ -36432,42 +36373,6 @@
                 <a:cs typeface="맑은 고딕"/>
               </a:rPr>
               <a:t>실시간 · 생산팀</a:t>
-            </a:r>
-          </a:p>
-          <a:p>
-            <a:pPr algn="l" eaLnBrk="0">
-              <a:lnSpc>
-                <a:spcPct val="110000"/>
-              </a:lnSpc>
-            </a:pPr>
-            <a:r>
-              <a:rPr sz="1400" b="0">
-                <a:solidFill>
-                  <a:srgbClr val="1F2A3A"/>
-                </a:solidFill>
-                <a:latin typeface="맑은 고딕"/>
-                <a:ea typeface="맑은 고딕"/>
-                <a:cs typeface="맑은 고딕"/>
-              </a:rPr>
-              <a:t>납기 준수율: 주 · 영업팀</a:t>
-            </a:r>
-          </a:p>
-          <a:p>
-            <a:pPr algn="l" eaLnBrk="0">
-              <a:lnSpc>
-                <a:spcPct val="110000"/>
-              </a:lnSpc>
-            </a:pPr>
-            <a:r>
-              <a:rPr sz="1400" b="0">
-                <a:solidFill>
-                  <a:srgbClr val="1F2A3A"/>
-                </a:solidFill>
-                <a:latin typeface="맑은 고딕"/>
-                <a:ea typeface="맑은 고딕"/>
-                <a:cs typeface="맑은 고딕"/>
-              </a:rPr>
-              <a:t>설비 가동률: 일 · 생산팀</a:t>
             </a:r>
           </a:p>
         </p:txBody>
@@ -40001,7 +39906,7 @@
       </p:sp>
       <p:pic>
         <p:nvPicPr>
-          <p:cNvPr id="6" name="삽화:전략맵_그래프.svg" descr="illust_6240599731728851956_1792037122.png"/>
+          <p:cNvPr id="6" name="삽화:전략맵_그래프.svg" descr="illust_3833463228735345362_1792130363.png"/>
           <p:cNvPicPr>
             <a:picLocks noChangeAspect="1"/>
           </p:cNvPicPr>
@@ -40701,7 +40606,7 @@
       </p:sp>
       <p:pic>
         <p:nvPicPr>
-          <p:cNvPr id="6" name="삽화:선행후행_경로.svg" descr="illust_5405931167734474174_1792037122.png"/>
+          <p:cNvPr id="6" name="삽화:선행후행_경로.svg" descr="illust_6090344275260746589_1792130363.png"/>
           <p:cNvPicPr>
             <a:picLocks noChangeAspect="1"/>
           </p:cNvPicPr>
@@ -41401,7 +41306,7 @@
       </p:sp>
       <p:pic>
         <p:nvPicPr>
-          <p:cNvPr id="6" name="삽화:조건부영향.svg" descr="illust_6397420479421010800_1792037122.png"/>
+          <p:cNvPr id="6" name="삽화:조건부영향.svg" descr="illust_7709964049333854485_1792130363.png"/>
           <p:cNvPicPr>
             <a:picLocks noChangeAspect="1"/>
           </p:cNvPicPr>
@@ -43430,7 +43335,7 @@
       </p:sp>
       <p:pic>
         <p:nvPicPr>
-          <p:cNvPr id="6" name="삽화:성과경로_6.svg" descr="illust_6207606794825715006_1792037122.png"/>
+          <p:cNvPr id="6" name="삽화:성과경로_6.svg" descr="illust_8123717820899305621_1792130363.png"/>
           <p:cNvPicPr>
             <a:picLocks noChangeAspect="1"/>
           </p:cNvPicPr>
@@ -45386,7 +45291,7 @@
                 <a:ea typeface="맑은 고딕"/>
                 <a:cs typeface="맑은 고딕"/>
               </a:rPr>
-              <a:t>쿨러 사건 네 후보의 예측 유온과 순위</a:t>
+              <a:t>쿨러 사건 네 후보의 예측 유온과 판단 순위</a:t>
             </a:r>
           </a:p>
         </p:txBody>
@@ -50790,7 +50695,7 @@
       </p:sp>
       <p:pic>
         <p:nvPicPr>
-          <p:cNvPr id="6" name="삽화:가정분석_3.svg" descr="illust_137817303407899810_1792037122.png"/>
+          <p:cNvPr id="6" name="삽화:가정분석_3.svg" descr="illust_5286382754831598262_1792130363.png"/>
           <p:cNvPicPr>
             <a:picLocks noChangeAspect="1"/>
           </p:cNvPicPr>
@@ -50996,7 +50901,7 @@
                 <a:ea typeface="맑은 고딕"/>
                 <a:cs typeface="맑은 고딕"/>
               </a:rPr>
-              <a:t>납기 · 위약금 · 전력 단가 · 감점 기준</a:t>
+              <a:t>납기 · 위약금 · 감점 기준 · 관점 중요도</a:t>
             </a:r>
           </a:p>
         </p:txBody>
@@ -53839,7 +53744,7 @@
                 <a:ea typeface="맑은 고딕"/>
                 <a:cs typeface="맑은 고딕"/>
               </a:rPr>
-              <a:t>모드 · 설비 상태 · 예비 펌프 · 팬 연속 시간 중 하나를 바꾼다</a:t>
+              <a:t>운전 모드 · 설비 상태 · 팬 연속 시간 중 하나를 바꾼다</a:t>
             </a:r>
           </a:p>
         </p:txBody>
@@ -54373,7 +54278,7 @@
                 <a:ea typeface="맑은 고딕"/>
                 <a:cs typeface="맑은 고딕"/>
               </a:rPr>
-              <a:t>완성본의 계산과 결과를 대조한다</a:t>
+              <a:t>시험값은 사본에만: 설비 명령 · 원본은 그대로</a:t>
             </a:r>
           </a:p>
         </p:txBody>
@@ -55122,6 +55027,24 @@
               <a:t>기존 식별자와 고장 유형을 재사용한다</a:t>
             </a:r>
           </a:p>
+          <a:p>
+            <a:pPr algn="l" eaLnBrk="0">
+              <a:lnSpc>
+                <a:spcPct val="110000"/>
+              </a:lnSpc>
+            </a:pPr>
+            <a:r>
+              <a:rPr sz="1400" b="0">
+                <a:solidFill>
+                  <a:srgbClr val="1F2A3A"/>
+                </a:solidFill>
+                <a:latin typeface="맑은 고딕"/>
+                <a:ea typeface="맑은 고딕"/>
+                <a:cs typeface="맑은 고딕"/>
+              </a:rPr>
+              <a:t>원문 자동 추출은 만들지 않는다</a:t>
+            </a:r>
+          </a:p>
         </p:txBody>
       </p:sp>
       <p:sp>
@@ -59329,7 +59252,7 @@
         <p:spPr>
           <a:xfrm>
             <a:off x="3200400" y="1961387"/>
-            <a:ext cx="6248095" cy="347472"/>
+            <a:ext cx="8442655" cy="347472"/>
           </a:xfrm>
           <a:prstGeom prst="rect">
             <a:avLst/>
@@ -59354,45 +59277,6 @@
                 <a:ea typeface="맑은 고딕"/>
                 <a:cs typeface="맑은 고딕"/>
               </a:rPr>
-              <a:t>구별할 개념</a:t>
-            </a:r>
-          </a:p>
-        </p:txBody>
-      </p:sp>
-      <p:sp>
-        <p:nvSpPr>
-          <p:cNvPr id="9" name="TextBox 8"/>
-          <p:cNvSpPr txBox="1"/>
-          <p:nvPr/>
-        </p:nvSpPr>
-        <p:spPr>
-          <a:xfrm>
-            <a:off x="9448495" y="1961387"/>
-            <a:ext cx="2194560" cy="347472"/>
-          </a:xfrm>
-          <a:prstGeom prst="rect">
-            <a:avLst/>
-          </a:prstGeom>
-          <a:noFill/>
-        </p:spPr>
-        <p:txBody>
-          <a:bodyPr wrap="square" anchor="ctr"/>
-          <a:lstStyle/>
-          <a:p>
-            <a:pPr algn="l" eaLnBrk="0">
-              <a:lnSpc>
-                <a:spcPct val="110000"/>
-              </a:lnSpc>
-            </a:pPr>
-            <a:r>
-              <a:rPr sz="1300" b="1">
-                <a:solidFill>
-                  <a:srgbClr val="FFFFFF"/>
-                </a:solidFill>
-                <a:latin typeface="맑은 고딕"/>
-                <a:ea typeface="맑은 고딕"/>
-                <a:cs typeface="맑은 고딕"/>
-              </a:rPr>
               <a:t>찾을 근거</a:t>
             </a:r>
           </a:p>
@@ -59400,7 +59284,7 @@
       </p:sp>
       <p:sp>
         <p:nvSpPr>
-          <p:cNvPr id="10" name="Rounded Rectangle 9"/>
+          <p:cNvPr id="9" name="Rounded Rectangle 8"/>
           <p:cNvSpPr/>
           <p:nvPr/>
         </p:nvSpPr>
@@ -59431,7 +59315,7 @@
       </p:sp>
       <p:sp>
         <p:nvSpPr>
-          <p:cNvPr id="11" name="TextBox 10"/>
+          <p:cNvPr id="10" name="TextBox 9"/>
           <p:cNvSpPr txBox="1"/>
           <p:nvPr/>
         </p:nvSpPr>
@@ -59470,14 +59354,14 @@
       </p:sp>
       <p:sp>
         <p:nvSpPr>
-          <p:cNvPr id="12" name="TextBox 11"/>
+          <p:cNvPr id="11" name="TextBox 10"/>
           <p:cNvSpPr txBox="1"/>
           <p:nvPr/>
         </p:nvSpPr>
         <p:spPr>
           <a:xfrm>
             <a:off x="3200400" y="2363723"/>
-            <a:ext cx="6156655" cy="914400"/>
+            <a:ext cx="8351215" cy="914400"/>
           </a:xfrm>
           <a:prstGeom prst="rect">
             <a:avLst/>
@@ -59502,71 +59386,14 @@
                 <a:ea typeface="맑은 고딕"/>
                 <a:cs typeface="맑은 고딕"/>
               </a:rPr>
-              <a:t>SOP · DMN · BSC · What-if 중 선택</a:t>
-            </a:r>
-          </a:p>
-        </p:txBody>
-      </p:sp>
-      <p:sp>
-        <p:nvSpPr>
-          <p:cNvPr id="13" name="TextBox 12"/>
-          <p:cNvSpPr txBox="1"/>
-          <p:nvPr/>
-        </p:nvSpPr>
-        <p:spPr>
-          <a:xfrm>
-            <a:off x="9448495" y="2363723"/>
-            <a:ext cx="2103120" cy="914400"/>
-          </a:xfrm>
-          <a:prstGeom prst="rect">
-            <a:avLst/>
-          </a:prstGeom>
-          <a:noFill/>
-        </p:spPr>
-        <p:txBody>
-          <a:bodyPr wrap="square" anchor="ctr"/>
-          <a:lstStyle/>
-          <a:p>
-            <a:pPr algn="l" eaLnBrk="0">
-              <a:lnSpc>
-                <a:spcPct val="110000"/>
-              </a:lnSpc>
-            </a:pPr>
-            <a:r>
-              <a:rPr sz="1250" b="1">
-                <a:solidFill>
-                  <a:srgbClr val="556175"/>
-                </a:solidFill>
-                <a:latin typeface="맑은 고딕"/>
-                <a:ea typeface="맑은 고딕"/>
-                <a:cs typeface="맑은 고딕"/>
-              </a:rPr>
-              <a:t>재가동 뒤 확인할</a:t>
-            </a:r>
-          </a:p>
-          <a:p>
-            <a:pPr algn="l" eaLnBrk="0">
-              <a:lnSpc>
-                <a:spcPct val="110000"/>
-              </a:lnSpc>
-            </a:pPr>
-            <a:r>
-              <a:rPr sz="1250" b="1">
-                <a:solidFill>
-                  <a:srgbClr val="556175"/>
-                </a:solidFill>
-                <a:latin typeface="맑은 고딕"/>
-                <a:ea typeface="맑은 고딕"/>
-                <a:cs typeface="맑은 고딕"/>
-              </a:rPr>
-              <a:t>매뉴얼의 완료 기준</a:t>
-            </a:r>
-          </a:p>
-        </p:txBody>
-      </p:sp>
-      <p:sp>
-        <p:nvSpPr>
-          <p:cNvPr id="14" name="Rounded Rectangle 13"/>
+              <a:t>재가동 뒤 확인할 매뉴얼의 완료 기준</a:t>
+            </a:r>
+          </a:p>
+        </p:txBody>
+      </p:sp>
+      <p:sp>
+        <p:nvSpPr>
+          <p:cNvPr id="12" name="Rounded Rectangle 11"/>
           <p:cNvSpPr/>
           <p:nvPr/>
         </p:nvSpPr>
@@ -59597,7 +59424,7 @@
       </p:sp>
       <p:sp>
         <p:nvSpPr>
-          <p:cNvPr id="15" name="TextBox 14"/>
+          <p:cNvPr id="13" name="TextBox 12"/>
           <p:cNvSpPr txBox="1"/>
           <p:nvPr/>
         </p:nvSpPr>
@@ -59636,14 +59463,14 @@
       </p:sp>
       <p:sp>
         <p:nvSpPr>
-          <p:cNvPr id="16" name="TextBox 15"/>
+          <p:cNvPr id="14" name="TextBox 13"/>
           <p:cNvSpPr txBox="1"/>
           <p:nvPr/>
         </p:nvSpPr>
         <p:spPr>
           <a:xfrm>
             <a:off x="3200400" y="3278123"/>
-            <a:ext cx="6156655" cy="914400"/>
+            <a:ext cx="8351215" cy="914400"/>
           </a:xfrm>
           <a:prstGeom prst="rect">
             <a:avLst/>
@@ -59668,71 +59495,14 @@
                 <a:ea typeface="맑은 고딕"/>
                 <a:cs typeface="맑은 고딕"/>
               </a:rPr>
-              <a:t>SOP · DMN · BSC · What-if 중 선택</a:t>
-            </a:r>
-          </a:p>
-        </p:txBody>
-      </p:sp>
-      <p:sp>
-        <p:nvSpPr>
-          <p:cNvPr id="17" name="TextBox 16"/>
-          <p:cNvSpPr txBox="1"/>
-          <p:nvPr/>
-        </p:nvSpPr>
-        <p:spPr>
-          <a:xfrm>
-            <a:off x="9448495" y="3278123"/>
-            <a:ext cx="2103120" cy="914400"/>
-          </a:xfrm>
-          <a:prstGeom prst="rect">
-            <a:avLst/>
-          </a:prstGeom>
-          <a:noFill/>
-        </p:spPr>
-        <p:txBody>
-          <a:bodyPr wrap="square" anchor="ctr"/>
-          <a:lstStyle/>
-          <a:p>
-            <a:pPr algn="l" eaLnBrk="0">
-              <a:lnSpc>
-                <a:spcPct val="110000"/>
-              </a:lnSpc>
-            </a:pPr>
-            <a:r>
-              <a:rPr sz="1250" b="1">
-                <a:solidFill>
-                  <a:srgbClr val="556175"/>
-                </a:solidFill>
-                <a:latin typeface="맑은 고딕"/>
-                <a:ea typeface="맑은 고딕"/>
-                <a:cs typeface="맑은 고딕"/>
-              </a:rPr>
-              <a:t>현재 운전 모드와</a:t>
-            </a:r>
-          </a:p>
-          <a:p>
-            <a:pPr algn="l" eaLnBrk="0">
-              <a:lnSpc>
-                <a:spcPct val="110000"/>
-              </a:lnSpc>
-            </a:pPr>
-            <a:r>
-              <a:rPr sz="1250" b="1">
-                <a:solidFill>
-                  <a:srgbClr val="556175"/>
-                </a:solidFill>
-                <a:latin typeface="맑은 고딕"/>
-                <a:ea typeface="맑은 고딕"/>
-                <a:cs typeface="맑은 고딕"/>
-              </a:rPr>
-              <a:t>원격 조치 제외 조건</a:t>
-            </a:r>
-          </a:p>
-        </p:txBody>
-      </p:sp>
-      <p:sp>
-        <p:nvSpPr>
-          <p:cNvPr id="18" name="Rounded Rectangle 17"/>
+              <a:t>현재 운전 모드와 원격 조치 제외 조건</a:t>
+            </a:r>
+          </a:p>
+        </p:txBody>
+      </p:sp>
+      <p:sp>
+        <p:nvSpPr>
+          <p:cNvPr id="15" name="Rounded Rectangle 14"/>
           <p:cNvSpPr/>
           <p:nvPr/>
         </p:nvSpPr>
@@ -59763,7 +59533,7 @@
       </p:sp>
       <p:sp>
         <p:nvSpPr>
-          <p:cNvPr id="19" name="TextBox 18"/>
+          <p:cNvPr id="16" name="TextBox 15"/>
           <p:cNvSpPr txBox="1"/>
           <p:nvPr/>
         </p:nvSpPr>
@@ -59802,14 +59572,14 @@
       </p:sp>
       <p:sp>
         <p:nvSpPr>
-          <p:cNvPr id="20" name="TextBox 19"/>
+          <p:cNvPr id="17" name="TextBox 16"/>
           <p:cNvSpPr txBox="1"/>
           <p:nvPr/>
         </p:nvSpPr>
         <p:spPr>
           <a:xfrm>
             <a:off x="3200400" y="4192523"/>
-            <a:ext cx="6156655" cy="914400"/>
+            <a:ext cx="8351215" cy="914400"/>
           </a:xfrm>
           <a:prstGeom prst="rect">
             <a:avLst/>
@@ -59834,71 +59604,14 @@
                 <a:ea typeface="맑은 고딕"/>
                 <a:cs typeface="맑은 고딕"/>
               </a:rPr>
-              <a:t>SOP · DMN · BSC · What-if 중 선택</a:t>
-            </a:r>
-          </a:p>
-        </p:txBody>
-      </p:sp>
-      <p:sp>
-        <p:nvSpPr>
-          <p:cNvPr id="21" name="TextBox 20"/>
-          <p:cNvSpPr txBox="1"/>
-          <p:nvPr/>
-        </p:nvSpPr>
-        <p:spPr>
-          <a:xfrm>
-            <a:off x="9448495" y="4192523"/>
-            <a:ext cx="2103120" cy="914400"/>
-          </a:xfrm>
-          <a:prstGeom prst="rect">
-            <a:avLst/>
-          </a:prstGeom>
-          <a:noFill/>
-        </p:spPr>
-        <p:txBody>
-          <a:bodyPr wrap="square" anchor="ctr"/>
-          <a:lstStyle/>
-          <a:p>
-            <a:pPr algn="l" eaLnBrk="0">
-              <a:lnSpc>
-                <a:spcPct val="110000"/>
-              </a:lnSpc>
-            </a:pPr>
-            <a:r>
-              <a:rPr sz="1250" b="1">
-                <a:solidFill>
-                  <a:srgbClr val="556175"/>
-                </a:solidFill>
-                <a:latin typeface="맑은 고딕"/>
-                <a:ea typeface="맑은 고딕"/>
-                <a:cs typeface="맑은 고딕"/>
-              </a:rPr>
-              <a:t>성과 목표와 지표</a:t>
-            </a:r>
-          </a:p>
-          <a:p>
-            <a:pPr algn="l" eaLnBrk="0">
-              <a:lnSpc>
-                <a:spcPct val="110000"/>
-              </a:lnSpc>
-            </a:pPr>
-            <a:r>
-              <a:rPr sz="1250" b="1">
-                <a:solidFill>
-                  <a:srgbClr val="556175"/>
-                </a:solidFill>
-                <a:latin typeface="맑은 고딕"/>
-                <a:ea typeface="맑은 고딕"/>
-                <a:cs typeface="맑은 고딕"/>
-              </a:rPr>
-              <a:t>조치의 득실 경로</a:t>
-            </a:r>
-          </a:p>
-        </p:txBody>
-      </p:sp>
-      <p:sp>
-        <p:nvSpPr>
-          <p:cNvPr id="22" name="Rounded Rectangle 21"/>
+              <a:t>성과 목표와 지표, 조치의 득실 경로</a:t>
+            </a:r>
+          </a:p>
+        </p:txBody>
+      </p:sp>
+      <p:sp>
+        <p:nvSpPr>
+          <p:cNvPr id="18" name="Rounded Rectangle 17"/>
           <p:cNvSpPr/>
           <p:nvPr/>
         </p:nvSpPr>
@@ -59929,7 +59642,7 @@
       </p:sp>
       <p:sp>
         <p:nvSpPr>
-          <p:cNvPr id="23" name="TextBox 22"/>
+          <p:cNvPr id="19" name="TextBox 18"/>
           <p:cNvSpPr txBox="1"/>
           <p:nvPr/>
         </p:nvSpPr>
@@ -59968,14 +59681,14 @@
       </p:sp>
       <p:sp>
         <p:nvSpPr>
-          <p:cNvPr id="24" name="TextBox 23"/>
+          <p:cNvPr id="20" name="TextBox 19"/>
           <p:cNvSpPr txBox="1"/>
           <p:nvPr/>
         </p:nvSpPr>
         <p:spPr>
           <a:xfrm>
             <a:off x="3200400" y="5106923"/>
-            <a:ext cx="6156655" cy="914400"/>
+            <a:ext cx="8351215" cy="914400"/>
           </a:xfrm>
           <a:prstGeom prst="rect">
             <a:avLst/>
@@ -60000,64 +59713,7 @@
                 <a:ea typeface="맑은 고딕"/>
                 <a:cs typeface="맑은 고딕"/>
               </a:rPr>
-              <a:t>SOP · DMN · BSC · What-if 중 선택</a:t>
-            </a:r>
-          </a:p>
-        </p:txBody>
-      </p:sp>
-      <p:sp>
-        <p:nvSpPr>
-          <p:cNvPr id="25" name="TextBox 24"/>
-          <p:cNvSpPr txBox="1"/>
-          <p:nvPr/>
-        </p:nvSpPr>
-        <p:spPr>
-          <a:xfrm>
-            <a:off x="9448495" y="5106923"/>
-            <a:ext cx="2103120" cy="914400"/>
-          </a:xfrm>
-          <a:prstGeom prst="rect">
-            <a:avLst/>
-          </a:prstGeom>
-          <a:noFill/>
-        </p:spPr>
-        <p:txBody>
-          <a:bodyPr wrap="square" anchor="ctr"/>
-          <a:lstStyle/>
-          <a:p>
-            <a:pPr algn="l" eaLnBrk="0">
-              <a:lnSpc>
-                <a:spcPct val="110000"/>
-              </a:lnSpc>
-            </a:pPr>
-            <a:r>
-              <a:rPr sz="1250" b="1">
-                <a:solidFill>
-                  <a:srgbClr val="1A6FC4"/>
-                </a:solidFill>
-                <a:latin typeface="맑은 고딕"/>
-                <a:ea typeface="맑은 고딕"/>
-                <a:cs typeface="맑은 고딕"/>
-              </a:rPr>
-              <a:t>고정한 기준 입력과</a:t>
-            </a:r>
-          </a:p>
-          <a:p>
-            <a:pPr algn="l" eaLnBrk="0">
-              <a:lnSpc>
-                <a:spcPct val="110000"/>
-              </a:lnSpc>
-            </a:pPr>
-            <a:r>
-              <a:rPr sz="1250" b="1">
-                <a:solidFill>
-                  <a:srgbClr val="1A6FC4"/>
-                </a:solidFill>
-                <a:latin typeface="맑은 고딕"/>
-                <a:ea typeface="맑은 고딕"/>
-                <a:cs typeface="맑은 고딕"/>
-              </a:rPr>
-              <a:t>바꿔 넣은 가정값</a:t>
+              <a:t>고정한 기준 입력과 바꿔 넣은 가정값</a:t>
             </a:r>
           </a:p>
         </p:txBody>
@@ -60535,7 +60191,7 @@
                 <a:ea typeface="맑은 고딕"/>
                 <a:cs typeface="맑은 고딕"/>
               </a:rPr>
-              <a:t>LOTO</a:t>
+              <a:t>DMN</a:t>
             </a:r>
           </a:p>
         </p:txBody>
@@ -60574,7 +60230,7 @@
                 <a:ea typeface="맑은 고딕"/>
                 <a:cs typeface="맑은 고딕"/>
               </a:rPr>
-              <a:t>Lockout/Tagout</a:t>
+              <a:t>Decision Model and Notation</a:t>
             </a:r>
           </a:p>
           <a:p>
@@ -60592,7 +60248,7 @@
                 <a:ea typeface="맑은 고딕"/>
                 <a:cs typeface="맑은 고딕"/>
               </a:rPr>
-              <a:t>정비 전에 에너지원을 차단해 잠그고 표시하는 안전 절차</a:t>
+              <a:t>업무의 의사결정을 표와 모델로 정의하는 표준</a:t>
             </a:r>
           </a:p>
         </p:txBody>
@@ -60662,7 +60318,7 @@
                 <a:ea typeface="맑은 고딕"/>
                 <a:cs typeface="맑은 고딕"/>
               </a:rPr>
-              <a:t>DMN</a:t>
+              <a:t>결정표</a:t>
             </a:r>
           </a:p>
         </p:txBody>
@@ -60701,7 +60357,7 @@
                 <a:ea typeface="맑은 고딕"/>
                 <a:cs typeface="맑은 고딕"/>
               </a:rPr>
-              <a:t>Decision Model and Notation</a:t>
+              <a:t>Decision Table</a:t>
             </a:r>
           </a:p>
           <a:p>
@@ -60719,7 +60375,7 @@
                 <a:ea typeface="맑은 고딕"/>
                 <a:cs typeface="맑은 고딕"/>
               </a:rPr>
-              <a:t>업무의 의사결정을 표와 모델로 정의하는 표준</a:t>
+              <a:t>입력 조건의 조합마다 출력을 정한 표</a:t>
             </a:r>
           </a:p>
         </p:txBody>
@@ -60789,7 +60445,7 @@
                 <a:ea typeface="맑은 고딕"/>
                 <a:cs typeface="맑은 고딕"/>
               </a:rPr>
-              <a:t>OMG</a:t>
+              <a:t>임계값</a:t>
             </a:r>
           </a:p>
         </p:txBody>
@@ -60828,7 +60484,7 @@
                 <a:ea typeface="맑은 고딕"/>
                 <a:cs typeface="맑은 고딕"/>
               </a:rPr>
-              <a:t>Object Management Group</a:t>
+              <a:t>Threshold</a:t>
             </a:r>
           </a:p>
           <a:p>
@@ -60846,7 +60502,7 @@
                 <a:ea typeface="맑은 고딕"/>
                 <a:cs typeface="맑은 고딕"/>
               </a:rPr>
-              <a:t>DMN 같은 모델링 표준을 정하는 국제 표준 단체</a:t>
+              <a:t>조건의 판정이 갈리는 기준값</a:t>
             </a:r>
           </a:p>
         </p:txBody>
@@ -60916,7 +60572,7 @@
                 <a:ea typeface="맑은 고딕"/>
                 <a:cs typeface="맑은 고딕"/>
               </a:rPr>
-              <a:t>결정표</a:t>
+              <a:t>Hit Policy</a:t>
             </a:r>
           </a:p>
         </p:txBody>
@@ -60955,7 +60611,7 @@
                 <a:ea typeface="맑은 고딕"/>
                 <a:cs typeface="맑은 고딕"/>
               </a:rPr>
-              <a:t>Decision Table</a:t>
+              <a:t>Hit Policy</a:t>
             </a:r>
           </a:p>
           <a:p>
@@ -60973,7 +60629,7 @@
                 <a:ea typeface="맑은 고딕"/>
                 <a:cs typeface="맑은 고딕"/>
               </a:rPr>
-              <a:t>입력 조건의 조합마다 출력을 정한 표</a:t>
+              <a:t>여러 규칙이 함께 맞을 때 결과를 고르는 방식</a:t>
             </a:r>
           </a:p>
         </p:txBody>
@@ -61043,7 +60699,7 @@
                 <a:ea typeface="맑은 고딕"/>
                 <a:cs typeface="맑은 고딕"/>
               </a:rPr>
-              <a:t>Hit Policy</a:t>
+              <a:t>BSC</a:t>
             </a:r>
           </a:p>
         </p:txBody>
@@ -61082,7 +60738,7 @@
                 <a:ea typeface="맑은 고딕"/>
                 <a:cs typeface="맑은 고딕"/>
               </a:rPr>
-              <a:t>Hit Policy</a:t>
+              <a:t>Balanced Scorecard</a:t>
             </a:r>
           </a:p>
           <a:p>
@@ -61100,7 +60756,7 @@
                 <a:ea typeface="맑은 고딕"/>
                 <a:cs typeface="맑은 고딕"/>
               </a:rPr>
-              <a:t>여러 규칙이 함께 맞을 때 결과를 고르는 방식</a:t>
+              <a:t>재무 · 고객 · 내부 프로세스 · 학습과 성장의 네 관점으로 성과를 보는 경영 틀</a:t>
             </a:r>
           </a:p>
         </p:txBody>
@@ -61170,7 +60826,7 @@
                 <a:ea typeface="맑은 고딕"/>
                 <a:cs typeface="맑은 고딕"/>
               </a:rPr>
-              <a:t>BSC</a:t>
+              <a:t>KPI</a:t>
             </a:r>
           </a:p>
         </p:txBody>
@@ -61209,7 +60865,7 @@
                 <a:ea typeface="맑은 고딕"/>
                 <a:cs typeface="맑은 고딕"/>
               </a:rPr>
-              <a:t>Balanced Scorecard</a:t>
+              <a:t>Key Performance Indicator</a:t>
             </a:r>
           </a:p>
           <a:p>
@@ -61227,7 +60883,7 @@
                 <a:ea typeface="맑은 고딕"/>
                 <a:cs typeface="맑은 고딕"/>
               </a:rPr>
-              <a:t>재무 · 고객 · 내부 프로세스 · 학습과 성장의 네 관점으로 성과를 보는 경영 틀</a:t>
+              <a:t>목표를 얼마나 이뤘는지 재는 핵심 성과 지표</a:t>
             </a:r>
           </a:p>
         </p:txBody>
@@ -61297,7 +60953,7 @@
                 <a:ea typeface="맑은 고딕"/>
                 <a:cs typeface="맑은 고딕"/>
               </a:rPr>
-              <a:t>KPI</a:t>
+              <a:t>전략맵</a:t>
             </a:r>
           </a:p>
         </p:txBody>
@@ -61336,7 +60992,7 @@
                 <a:ea typeface="맑은 고딕"/>
                 <a:cs typeface="맑은 고딕"/>
               </a:rPr>
-              <a:t>Key Performance Indicator</a:t>
+              <a:t>Strategy Map</a:t>
             </a:r>
           </a:p>
           <a:p>
@@ -61354,7 +61010,7 @@
                 <a:ea typeface="맑은 고딕"/>
                 <a:cs typeface="맑은 고딕"/>
               </a:rPr>
-              <a:t>목표를 얼마나 이뤘는지 재는 핵심 성과 지표</a:t>
+              <a:t>전략 목표 사이의 인과를 화살표로 이은 그림</a:t>
             </a:r>
           </a:p>
         </p:txBody>
@@ -64035,7 +63691,7 @@
                 <a:ea typeface="맑은 고딕"/>
                 <a:cs typeface="맑은 고딕"/>
               </a:rPr>
-              <a:t>부하를 낮춰 생산이 줄어 납기 · 성과 지표에서 잃은 것이 예측에서 얻은 것보다 컸기 때문이다</a:t>
+              <a:t>부하를 낮춰 생산이 줄어 납기에서 잃은 것이 예측에서 얻은 것보다 컸기 때문이다</a:t>
             </a:r>
           </a:p>
         </p:txBody>
@@ -64760,7 +64416,7 @@
                 <a:ea typeface="맑은 고딕"/>
                 <a:cs typeface="맑은 고딕"/>
               </a:rPr>
-              <a:t>네 후보 모두 규칙을 통과했다. 순위는 예측에서 얻은 것과 납기 · 성과 지표에서 잃은 것을 견준 결과이다.</a:t>
+              <a:t>네 후보 모두 규칙을 통과했다. 순위는 예측에서 얻은 것과 납기에서 잃은 것을 견준 결과이다.</a:t>
             </a:r>
           </a:p>
         </p:txBody>
